--- a/Новостной портал.pptx
+++ b/Новостной портал.pptx
@@ -8,12 +8,17 @@
     <p:sldId id="256" r:id="rId2"/>
     <p:sldId id="266" r:id="rId3"/>
     <p:sldId id="267" r:id="rId4"/>
-    <p:sldId id="264" r:id="rId5"/>
-    <p:sldId id="265" r:id="rId6"/>
-    <p:sldId id="262" r:id="rId7"/>
-    <p:sldId id="257" r:id="rId8"/>
-    <p:sldId id="258" r:id="rId9"/>
-    <p:sldId id="259" r:id="rId10"/>
+    <p:sldId id="268" r:id="rId5"/>
+    <p:sldId id="269" r:id="rId6"/>
+    <p:sldId id="270" r:id="rId7"/>
+    <p:sldId id="264" r:id="rId8"/>
+    <p:sldId id="271" r:id="rId9"/>
+    <p:sldId id="272" r:id="rId10"/>
+    <p:sldId id="265" r:id="rId11"/>
+    <p:sldId id="262" r:id="rId12"/>
+    <p:sldId id="257" r:id="rId13"/>
+    <p:sldId id="258" r:id="rId14"/>
+    <p:sldId id="259" r:id="rId15"/>
   </p:sldIdLst>
   <p:sldSz cx="9144000" cy="6858000" type="screen4x3"/>
   <p:notesSz cx="6858000" cy="9144000"/>
@@ -322,7 +327,7 @@
           <a:p>
             <a:fld id="{0272CB1F-7F4B-480E-AFAD-C1D399D39E5F}" type="datetimeFigureOut">
               <a:rPr lang="ru-RU" smtClean="0"/>
-              <a:t>29.03.2026</a:t>
+              <a:t>13.06.2026</a:t>
             </a:fld>
             <a:endParaRPr lang="ru-RU"/>
           </a:p>
@@ -516,7 +521,7 @@
           <a:p>
             <a:fld id="{0272CB1F-7F4B-480E-AFAD-C1D399D39E5F}" type="datetimeFigureOut">
               <a:rPr lang="ru-RU" smtClean="0"/>
-              <a:t>29.03.2026</a:t>
+              <a:t>13.06.2026</a:t>
             </a:fld>
             <a:endParaRPr lang="ru-RU"/>
           </a:p>
@@ -704,7 +709,7 @@
           <a:p>
             <a:fld id="{0272CB1F-7F4B-480E-AFAD-C1D399D39E5F}" type="datetimeFigureOut">
               <a:rPr lang="ru-RU" smtClean="0"/>
-              <a:t>29.03.2026</a:t>
+              <a:t>13.06.2026</a:t>
             </a:fld>
             <a:endParaRPr lang="ru-RU"/>
           </a:p>
@@ -933,7 +938,7 @@
           <a:p>
             <a:fld id="{0272CB1F-7F4B-480E-AFAD-C1D399D39E5F}" type="datetimeFigureOut">
               <a:rPr lang="ru-RU" smtClean="0"/>
-              <a:t>29.03.2026</a:t>
+              <a:t>13.06.2026</a:t>
             </a:fld>
             <a:endParaRPr lang="ru-RU"/>
           </a:p>
@@ -1214,7 +1219,7 @@
           <a:p>
             <a:fld id="{0272CB1F-7F4B-480E-AFAD-C1D399D39E5F}" type="datetimeFigureOut">
               <a:rPr lang="ru-RU" smtClean="0"/>
-              <a:t>29.03.2026</a:t>
+              <a:t>13.06.2026</a:t>
             </a:fld>
             <a:endParaRPr lang="ru-RU"/>
           </a:p>
@@ -1502,7 +1507,7 @@
           <a:p>
             <a:fld id="{0272CB1F-7F4B-480E-AFAD-C1D399D39E5F}" type="datetimeFigureOut">
               <a:rPr lang="ru-RU" smtClean="0"/>
-              <a:t>29.03.2026</a:t>
+              <a:t>13.06.2026</a:t>
             </a:fld>
             <a:endParaRPr lang="ru-RU"/>
           </a:p>
@@ -2056,7 +2061,7 @@
           <a:p>
             <a:fld id="{0272CB1F-7F4B-480E-AFAD-C1D399D39E5F}" type="datetimeFigureOut">
               <a:rPr lang="ru-RU" smtClean="0"/>
-              <a:t>29.03.2026</a:t>
+              <a:t>13.06.2026</a:t>
             </a:fld>
             <a:endParaRPr lang="ru-RU"/>
           </a:p>
@@ -2187,7 +2192,7 @@
           <a:p>
             <a:fld id="{0272CB1F-7F4B-480E-AFAD-C1D399D39E5F}" type="datetimeFigureOut">
               <a:rPr lang="ru-RU" smtClean="0"/>
-              <a:t>29.03.2026</a:t>
+              <a:t>13.06.2026</a:t>
             </a:fld>
             <a:endParaRPr lang="ru-RU"/>
           </a:p>
@@ -2337,7 +2342,7 @@
           <a:p>
             <a:fld id="{0272CB1F-7F4B-480E-AFAD-C1D399D39E5F}" type="datetimeFigureOut">
               <a:rPr lang="ru-RU" smtClean="0"/>
-              <a:t>29.03.2026</a:t>
+              <a:t>13.06.2026</a:t>
             </a:fld>
             <a:endParaRPr lang="ru-RU"/>
           </a:p>
@@ -2658,7 +2663,7 @@
           <a:p>
             <a:fld id="{0272CB1F-7F4B-480E-AFAD-C1D399D39E5F}" type="datetimeFigureOut">
               <a:rPr lang="ru-RU" smtClean="0"/>
-              <a:t>29.03.2026</a:t>
+              <a:t>13.06.2026</a:t>
             </a:fld>
             <a:endParaRPr lang="ru-RU"/>
           </a:p>
@@ -2955,7 +2960,7 @@
           <a:p>
             <a:fld id="{0272CB1F-7F4B-480E-AFAD-C1D399D39E5F}" type="datetimeFigureOut">
               <a:rPr lang="ru-RU" smtClean="0"/>
-              <a:t>29.03.2026</a:t>
+              <a:t>13.06.2026</a:t>
             </a:fld>
             <a:endParaRPr lang="ru-RU"/>
           </a:p>
@@ -3200,7 +3205,7 @@
           <a:p>
             <a:fld id="{0272CB1F-7F4B-480E-AFAD-C1D399D39E5F}" type="datetimeFigureOut">
               <a:rPr lang="ru-RU" smtClean="0"/>
-              <a:t>29.03.2026</a:t>
+              <a:t>13.06.2026</a:t>
             </a:fld>
             <a:endParaRPr lang="ru-RU"/>
           </a:p>
@@ -3708,7 +3713,11 @@
             <a:pPr lvl="0"/>
             <a:r>
               <a:rPr lang="ru-RU" b="1" dirty="0"/>
-              <a:t>Блог/новостной портал с </a:t>
+              <a:t>Блог/новостной портал </a:t>
+            </a:r>
+            <a:r>
+              <a:rPr lang="ru-RU" b="1" dirty="0" smtClean="0"/>
+              <a:t>АСУТП с </a:t>
             </a:r>
             <a:r>
               <a:rPr lang="ru-RU" b="1" dirty="0" smtClean="0"/>
@@ -3742,10 +3751,1128 @@
           </a:p>
         </p:txBody>
       </p:sp>
+      <p:sp>
+        <p:nvSpPr>
+          <p:cNvPr id="4" name="Прямоугольник 3"/>
+          <p:cNvSpPr/>
+          <p:nvPr/>
+        </p:nvSpPr>
+        <p:spPr>
+          <a:xfrm>
+            <a:off x="2286000" y="4797152"/>
+            <a:ext cx="4572000" cy="369332"/>
+          </a:xfrm>
+          <a:prstGeom prst="rect">
+            <a:avLst/>
+          </a:prstGeom>
+        </p:spPr>
+        <p:txBody>
+          <a:bodyPr>
+            <a:spAutoFit/>
+          </a:bodyPr>
+          <a:lstStyle/>
+          <a:p>
+            <a:r>
+              <a:rPr lang="ru-RU" b="1" dirty="0" smtClean="0"/>
+              <a:t>Имя</a:t>
+            </a:r>
+            <a:r>
+              <a:rPr lang="en-US" b="1" dirty="0" smtClean="0"/>
+              <a:t>: </a:t>
+            </a:r>
+            <a:r>
+              <a:rPr lang="ru-RU" b="1" dirty="0" smtClean="0"/>
+              <a:t>Сергей</a:t>
+            </a:r>
+            <a:endParaRPr lang="ru-RU" dirty="0"/>
+          </a:p>
+        </p:txBody>
+      </p:sp>
     </p:spTree>
     <p:extLst>
       <p:ext uri="{BB962C8B-B14F-4D97-AF65-F5344CB8AC3E}">
         <p14:creationId xmlns:p14="http://schemas.microsoft.com/office/powerpoint/2010/main" val="67372640"/>
+      </p:ext>
+    </p:extLst>
+  </p:cSld>
+  <p:clrMapOvr>
+    <a:masterClrMapping/>
+  </p:clrMapOvr>
+  <p:timing>
+    <p:tnLst>
+      <p:par>
+        <p:cTn id="1" dur="indefinite" restart="never" nodeType="tmRoot"/>
+      </p:par>
+    </p:tnLst>
+  </p:timing>
+</p:sld>
+</file>
+
+<file path=ppt/slides/slide10.xml><?xml version="1.0" encoding="utf-8"?>
+<p:sld xmlns:a="http://schemas.openxmlformats.org/drawingml/2006/main" xmlns:r="http://schemas.openxmlformats.org/officeDocument/2006/relationships" xmlns:p="http://schemas.openxmlformats.org/presentationml/2006/main">
+  <p:cSld>
+    <p:spTree>
+      <p:nvGrpSpPr>
+        <p:cNvPr id="1" name=""/>
+        <p:cNvGrpSpPr/>
+        <p:nvPr/>
+      </p:nvGrpSpPr>
+      <p:grpSpPr>
+        <a:xfrm>
+          <a:off x="0" y="0"/>
+          <a:ext cx="0" cy="0"/>
+          <a:chOff x="0" y="0"/>
+          <a:chExt cx="0" cy="0"/>
+        </a:xfrm>
+      </p:grpSpPr>
+      <p:sp>
+        <p:nvSpPr>
+          <p:cNvPr id="2" name="Заголовок 1"/>
+          <p:cNvSpPr>
+            <a:spLocks noGrp="1"/>
+          </p:cNvSpPr>
+          <p:nvPr>
+            <p:ph type="title"/>
+          </p:nvPr>
+        </p:nvSpPr>
+        <p:spPr>
+          <a:xfrm>
+            <a:off x="539552" y="260648"/>
+            <a:ext cx="8229600" cy="703840"/>
+          </a:xfrm>
+        </p:spPr>
+        <p:txBody>
+          <a:bodyPr>
+            <a:normAutofit fontScale="90000"/>
+          </a:bodyPr>
+          <a:lstStyle/>
+          <a:p>
+            <a:r>
+              <a:rPr lang="ru-RU" b="1" u="sng" dirty="0"/>
+              <a:t>Инструкция по запуску</a:t>
+            </a:r>
+            <a:endParaRPr lang="ru-RU" dirty="0"/>
+          </a:p>
+        </p:txBody>
+      </p:sp>
+      <p:sp>
+        <p:nvSpPr>
+          <p:cNvPr id="3" name="Объект 2"/>
+          <p:cNvSpPr>
+            <a:spLocks noGrp="1"/>
+          </p:cNvSpPr>
+          <p:nvPr>
+            <p:ph idx="1"/>
+          </p:nvPr>
+        </p:nvSpPr>
+        <p:spPr>
+          <a:xfrm>
+            <a:off x="467544" y="1052736"/>
+            <a:ext cx="8229600" cy="5040560"/>
+          </a:xfrm>
+        </p:spPr>
+        <p:txBody>
+          <a:bodyPr>
+            <a:noAutofit/>
+          </a:bodyPr>
+          <a:lstStyle/>
+          <a:p>
+            <a:pPr marL="0" indent="0">
+              <a:buNone/>
+            </a:pPr>
+            <a:endParaRPr lang="ru-RU" sz="900" u="sng" dirty="0"/>
+          </a:p>
+          <a:p>
+            <a:pPr marL="0" indent="0">
+              <a:buNone/>
+            </a:pPr>
+            <a:r>
+              <a:rPr lang="ru-RU" sz="1000" dirty="0"/>
+              <a:t>Устанавливаем библиотеку </a:t>
+            </a:r>
+            <a:r>
+              <a:rPr lang="ru-RU" sz="1000" b="1" dirty="0" err="1"/>
+              <a:t>pip</a:t>
+            </a:r>
+            <a:r>
+              <a:rPr lang="ru-RU" sz="1000" b="1" dirty="0"/>
+              <a:t> </a:t>
+            </a:r>
+            <a:r>
+              <a:rPr lang="ru-RU" sz="1000" b="1" dirty="0" err="1"/>
+              <a:t>install</a:t>
+            </a:r>
+            <a:r>
+              <a:rPr lang="ru-RU" sz="1000" b="1" dirty="0"/>
+              <a:t> </a:t>
+            </a:r>
+            <a:r>
+              <a:rPr lang="ru-RU" sz="1000" b="1" dirty="0" err="1"/>
+              <a:t>Pillow</a:t>
+            </a:r>
+            <a:endParaRPr lang="ru-RU" sz="1000" b="1" dirty="0"/>
+          </a:p>
+          <a:p>
+            <a:endParaRPr lang="ru-RU" sz="1000" dirty="0"/>
+          </a:p>
+          <a:p>
+            <a:pPr marL="0" indent="0">
+              <a:buNone/>
+            </a:pPr>
+            <a:r>
+              <a:rPr lang="ru-RU" sz="1000" u="sng" dirty="0" err="1" smtClean="0"/>
+              <a:t>Pillow</a:t>
+            </a:r>
+            <a:r>
+              <a:rPr lang="ru-RU" sz="1000" u="sng" dirty="0" smtClean="0"/>
+              <a:t> </a:t>
+            </a:r>
+            <a:r>
+              <a:rPr lang="ru-RU" sz="1000" u="sng" dirty="0"/>
+              <a:t>играет  </a:t>
+            </a:r>
+            <a:r>
+              <a:rPr lang="ru-RU" sz="1000" u="sng" dirty="0" smtClean="0"/>
+              <a:t>роль в  </a:t>
+            </a:r>
+            <a:r>
+              <a:rPr lang="ru-RU" sz="1000" u="sng" dirty="0"/>
+              <a:t>коде:</a:t>
+            </a:r>
+          </a:p>
+          <a:p>
+            <a:pPr marL="0" indent="0">
+              <a:buNone/>
+            </a:pPr>
+            <a:r>
+              <a:rPr lang="ru-RU" sz="1000" dirty="0"/>
+              <a:t>1. </a:t>
+            </a:r>
+            <a:r>
+              <a:rPr lang="ru-RU" sz="1000" dirty="0" err="1"/>
+              <a:t>Валидация</a:t>
+            </a:r>
+            <a:r>
+              <a:rPr lang="ru-RU" sz="1000" dirty="0"/>
+              <a:t> данных (Проверка)</a:t>
+            </a:r>
+          </a:p>
+          <a:p>
+            <a:pPr marL="0" indent="0">
+              <a:buNone/>
+            </a:pPr>
+            <a:r>
+              <a:rPr lang="ru-RU" sz="1000" dirty="0" smtClean="0"/>
+              <a:t>Библиотека </a:t>
+            </a:r>
+            <a:r>
+              <a:rPr lang="ru-RU" sz="1000" dirty="0"/>
+              <a:t>проверяет:</a:t>
+            </a:r>
+          </a:p>
+          <a:p>
+            <a:pPr marL="0" indent="0">
+              <a:buNone/>
+            </a:pPr>
+            <a:r>
+              <a:rPr lang="ru-RU" sz="1000" dirty="0"/>
+              <a:t>Является ли загруженный файл настоящим изображением, а не текстовым файлом с расширением .</a:t>
+            </a:r>
+            <a:r>
+              <a:rPr lang="ru-RU" sz="1000" dirty="0" err="1"/>
+              <a:t>jpg</a:t>
+            </a:r>
+            <a:r>
+              <a:rPr lang="ru-RU" sz="1000" dirty="0"/>
+              <a:t>.</a:t>
+            </a:r>
+          </a:p>
+          <a:p>
+            <a:pPr marL="0" indent="0">
+              <a:buNone/>
+            </a:pPr>
+            <a:r>
+              <a:rPr lang="ru-RU" sz="1000" dirty="0"/>
+              <a:t>Не поврежден ли файл.</a:t>
+            </a:r>
+          </a:p>
+          <a:p>
+            <a:pPr marL="0" indent="0">
+              <a:buNone/>
+            </a:pPr>
+            <a:r>
+              <a:rPr lang="ru-RU" sz="1000" dirty="0"/>
+              <a:t>Каковы его размеры (ширина и высота).</a:t>
+            </a:r>
+          </a:p>
+          <a:p>
+            <a:pPr marL="0" indent="0">
+              <a:buNone/>
+            </a:pPr>
+            <a:r>
+              <a:rPr lang="ru-RU" sz="1000" dirty="0"/>
+              <a:t>2. Чтение метаданных</a:t>
+            </a:r>
+          </a:p>
+          <a:p>
+            <a:pPr marL="0" indent="0">
+              <a:buNone/>
+            </a:pPr>
+            <a:r>
+              <a:rPr lang="ru-RU" sz="1000" dirty="0" err="1"/>
+              <a:t>Pillow</a:t>
+            </a:r>
+            <a:r>
+              <a:rPr lang="ru-RU" sz="1000" dirty="0"/>
+              <a:t> позволяет </a:t>
+            </a:r>
+            <a:r>
+              <a:rPr lang="ru-RU" sz="1000" dirty="0" err="1"/>
+              <a:t>Django</a:t>
+            </a:r>
+            <a:r>
+              <a:rPr lang="ru-RU" sz="1000" dirty="0"/>
+              <a:t> извлекать информацию о картинке. Например, если вы захотите выводить на сайте разрешение фото или дату съемки из EXIF-данных, </a:t>
+            </a:r>
+            <a:r>
+              <a:rPr lang="ru-RU" sz="1000" dirty="0" err="1"/>
+              <a:t>Pillow</a:t>
+            </a:r>
+            <a:r>
+              <a:rPr lang="ru-RU" sz="1000" dirty="0"/>
+              <a:t> сделает это за вас</a:t>
+            </a:r>
+            <a:r>
+              <a:rPr lang="ru-RU" sz="1000" dirty="0" smtClean="0"/>
+              <a:t>.</a:t>
+            </a:r>
+          </a:p>
+          <a:p>
+            <a:pPr marL="0" indent="0">
+              <a:buNone/>
+            </a:pPr>
+            <a:r>
+              <a:rPr lang="ru-RU" sz="1000" b="1" dirty="0"/>
+              <a:t>Запуск:</a:t>
+            </a:r>
+            <a:endParaRPr lang="ru-RU" sz="1000" dirty="0"/>
+          </a:p>
+          <a:p>
+            <a:pPr marL="0" indent="0">
+              <a:buNone/>
+            </a:pPr>
+            <a:r>
+              <a:rPr lang="ru-RU" sz="1000" b="1" dirty="0" err="1"/>
+              <a:t>python</a:t>
+            </a:r>
+            <a:r>
+              <a:rPr lang="ru-RU" sz="1000" b="1" dirty="0"/>
+              <a:t> manage.py </a:t>
+            </a:r>
+            <a:r>
+              <a:rPr lang="ru-RU" sz="1000" b="1" dirty="0" err="1"/>
+              <a:t>makemigrations</a:t>
+            </a:r>
+            <a:endParaRPr lang="ru-RU" sz="1000" b="1" dirty="0"/>
+          </a:p>
+          <a:p>
+            <a:pPr marL="0" indent="0">
+              <a:buNone/>
+            </a:pPr>
+            <a:r>
+              <a:rPr lang="ru-RU" sz="1000" b="1" dirty="0" err="1"/>
+              <a:t>python</a:t>
+            </a:r>
+            <a:r>
+              <a:rPr lang="ru-RU" sz="1000" b="1" dirty="0"/>
+              <a:t> manage.py </a:t>
+            </a:r>
+            <a:r>
+              <a:rPr lang="ru-RU" sz="1000" b="1" dirty="0" err="1"/>
+              <a:t>migrate</a:t>
+            </a:r>
+            <a:endParaRPr lang="ru-RU" sz="1000" b="1" dirty="0"/>
+          </a:p>
+          <a:p>
+            <a:pPr marL="0" indent="0">
+              <a:buNone/>
+            </a:pPr>
+            <a:endParaRPr lang="ru-RU" sz="1000" dirty="0"/>
+          </a:p>
+          <a:p>
+            <a:endParaRPr lang="ru-RU" sz="1000" dirty="0"/>
+          </a:p>
+          <a:p>
+            <a:pPr marL="0" indent="0">
+              <a:buNone/>
+            </a:pPr>
+            <a:r>
+              <a:rPr lang="ru-RU" sz="1000" u="sng" dirty="0" smtClean="0"/>
+              <a:t>Роль </a:t>
+            </a:r>
+            <a:r>
+              <a:rPr lang="ru-RU" sz="1000" u="sng" dirty="0" err="1"/>
+              <a:t>makemigrations</a:t>
+            </a:r>
+            <a:r>
+              <a:rPr lang="ru-RU" sz="1000" u="sng" dirty="0"/>
+              <a:t> и  </a:t>
+            </a:r>
+            <a:r>
+              <a:rPr lang="ru-RU" sz="1000" u="sng" dirty="0" err="1"/>
+              <a:t>migrate</a:t>
+            </a:r>
+            <a:r>
+              <a:rPr lang="ru-RU" sz="1000" u="sng" dirty="0"/>
+              <a:t> </a:t>
+            </a:r>
+            <a:r>
+              <a:rPr lang="ru-RU" sz="1000" dirty="0"/>
+              <a:t>— синхронизировать то, что мы написали в коде (models.py), с тем, что реально хранится в файле базы данных (db.sqlite3).</a:t>
+            </a:r>
+          </a:p>
+          <a:p>
+            <a:pPr marL="0" indent="0">
+              <a:buNone/>
+            </a:pPr>
+            <a:r>
+              <a:rPr lang="ru-RU" sz="1000" dirty="0"/>
+              <a:t>1. </a:t>
+            </a:r>
+            <a:r>
+              <a:rPr lang="ru-RU" sz="1000" dirty="0" err="1"/>
+              <a:t>python</a:t>
+            </a:r>
+            <a:r>
+              <a:rPr lang="ru-RU" sz="1000" dirty="0"/>
+              <a:t> manage.py </a:t>
+            </a:r>
+            <a:r>
+              <a:rPr lang="ru-RU" sz="1000" dirty="0" err="1"/>
+              <a:t>makemigrations</a:t>
+            </a:r>
+            <a:endParaRPr lang="ru-RU" sz="1000" dirty="0"/>
+          </a:p>
+          <a:p>
+            <a:pPr marL="0" indent="0">
+              <a:buNone/>
+            </a:pPr>
+            <a:r>
+              <a:rPr lang="ru-RU" sz="1000" dirty="0"/>
+              <a:t>Роль: Создание «инструкции» по обновлению.</a:t>
+            </a:r>
+          </a:p>
+          <a:p>
+            <a:pPr marL="0" indent="0">
+              <a:buNone/>
+            </a:pPr>
+            <a:r>
+              <a:rPr lang="ru-RU" sz="1000" dirty="0"/>
+              <a:t>Что делает: </a:t>
+            </a:r>
+            <a:r>
+              <a:rPr lang="ru-RU" sz="1000" dirty="0" err="1"/>
+              <a:t>Django</a:t>
+            </a:r>
+            <a:r>
+              <a:rPr lang="ru-RU" sz="1000" dirty="0"/>
+              <a:t> сканирует ваши модели и ищет изменения (например, вы добавили поле </a:t>
+            </a:r>
+            <a:r>
+              <a:rPr lang="ru-RU" sz="1000" dirty="0" err="1"/>
+              <a:t>image</a:t>
+            </a:r>
+            <a:r>
+              <a:rPr lang="ru-RU" sz="1000" dirty="0"/>
+              <a:t> или изменили </a:t>
+            </a:r>
+            <a:r>
+              <a:rPr lang="ru-RU" sz="1000" dirty="0" err="1"/>
+              <a:t>max_length</a:t>
+            </a:r>
+            <a:r>
+              <a:rPr lang="ru-RU" sz="1000" dirty="0"/>
+              <a:t>).</a:t>
+            </a:r>
+          </a:p>
+          <a:p>
+            <a:pPr marL="0" indent="0">
+              <a:buNone/>
+            </a:pPr>
+            <a:r>
+              <a:rPr lang="ru-RU" sz="1000" dirty="0"/>
+              <a:t>Результат: В папке </a:t>
+            </a:r>
+            <a:r>
+              <a:rPr lang="ru-RU" sz="1000" dirty="0" err="1"/>
+              <a:t>migrations</a:t>
+            </a:r>
+            <a:r>
+              <a:rPr lang="ru-RU" sz="1000" dirty="0"/>
+              <a:t> внутри вашего приложения появляется новый файл (например, 0002_article_image.py).</a:t>
+            </a:r>
+          </a:p>
+          <a:p>
+            <a:pPr marL="0" indent="0">
+              <a:buNone/>
+            </a:pPr>
+            <a:r>
+              <a:rPr lang="ru-RU" sz="1000" dirty="0"/>
+              <a:t>Простыми словами: Это как чертеж или список покупок, который говорит базе: «Скоро нам нужно будет добавить новый столбец». На этом этапе в самой базе еще ничего не меняется.</a:t>
+            </a:r>
+          </a:p>
+          <a:p>
+            <a:pPr marL="0" indent="0">
+              <a:buNone/>
+            </a:pPr>
+            <a:r>
+              <a:rPr lang="ru-RU" sz="1000" dirty="0"/>
+              <a:t>2. </a:t>
+            </a:r>
+            <a:r>
+              <a:rPr lang="ru-RU" sz="1000" dirty="0" err="1"/>
+              <a:t>python</a:t>
+            </a:r>
+            <a:r>
+              <a:rPr lang="ru-RU" sz="1000" dirty="0"/>
+              <a:t> manage.py </a:t>
+            </a:r>
+            <a:r>
+              <a:rPr lang="ru-RU" sz="1000" dirty="0" err="1"/>
+              <a:t>migrate</a:t>
+            </a:r>
+            <a:endParaRPr lang="ru-RU" sz="1000" dirty="0"/>
+          </a:p>
+          <a:p>
+            <a:pPr marL="0" indent="0">
+              <a:buNone/>
+            </a:pPr>
+            <a:r>
+              <a:rPr lang="ru-RU" sz="1000" dirty="0"/>
+              <a:t>Роль: Выполнение «инструкции».</a:t>
+            </a:r>
+          </a:p>
+          <a:p>
+            <a:pPr marL="0" indent="0">
+              <a:buNone/>
+            </a:pPr>
+            <a:r>
+              <a:rPr lang="ru-RU" sz="1000" dirty="0"/>
+              <a:t>Что делает: </a:t>
+            </a:r>
+            <a:r>
+              <a:rPr lang="ru-RU" sz="1000" dirty="0" err="1"/>
+              <a:t>Django</a:t>
+            </a:r>
+            <a:r>
+              <a:rPr lang="ru-RU" sz="1000" dirty="0"/>
+              <a:t> берет файлы из папки </a:t>
+            </a:r>
+            <a:r>
+              <a:rPr lang="ru-RU" sz="1000" dirty="0" err="1"/>
+              <a:t>migrations</a:t>
+            </a:r>
+            <a:r>
+              <a:rPr lang="ru-RU" sz="1000" dirty="0"/>
+              <a:t>, которые еще не были применены, и превращает их в реальные SQL-запросы к базе данных.</a:t>
+            </a:r>
+          </a:p>
+          <a:p>
+            <a:pPr marL="0" indent="0">
+              <a:buNone/>
+            </a:pPr>
+            <a:r>
+              <a:rPr lang="ru-RU" sz="1000" dirty="0"/>
+              <a:t>Результат: В таблице </a:t>
+            </a:r>
+            <a:r>
+              <a:rPr lang="ru-RU" sz="1000" dirty="0" err="1"/>
+              <a:t>articles_article</a:t>
+            </a:r>
+            <a:r>
+              <a:rPr lang="ru-RU" sz="1000" dirty="0"/>
+              <a:t> физически появляется колонка </a:t>
+            </a:r>
+            <a:r>
+              <a:rPr lang="ru-RU" sz="1000" dirty="0" err="1"/>
+              <a:t>image</a:t>
+            </a:r>
+            <a:r>
+              <a:rPr lang="ru-RU" sz="1000" dirty="0"/>
+              <a:t>. </a:t>
+            </a:r>
+            <a:endParaRPr lang="ru-RU" sz="1000" dirty="0" smtClean="0"/>
+          </a:p>
+          <a:p>
+            <a:pPr marL="0" indent="0">
+              <a:buNone/>
+            </a:pPr>
+            <a:r>
+              <a:rPr lang="ru-RU" sz="1000" dirty="0" smtClean="0"/>
+              <a:t>Простыми </a:t>
+            </a:r>
+            <a:r>
+              <a:rPr lang="ru-RU" sz="1000" dirty="0"/>
+              <a:t>словами: Это строитель, который берет чертеж из первого шага и реально перестраивает стену (базу данных</a:t>
+            </a:r>
+            <a:r>
+              <a:rPr lang="ru-RU" sz="1000" dirty="0" smtClean="0"/>
+              <a:t>).</a:t>
+            </a:r>
+          </a:p>
+          <a:p>
+            <a:pPr marL="0" indent="0">
+              <a:buNone/>
+            </a:pPr>
+            <a:r>
+              <a:rPr lang="ru-RU" sz="1000" b="1" dirty="0" smtClean="0"/>
+              <a:t>Запуск: </a:t>
+            </a:r>
+            <a:r>
+              <a:rPr lang="ru-RU" sz="1000" b="1" dirty="0" err="1" smtClean="0"/>
+              <a:t>python</a:t>
+            </a:r>
+            <a:r>
+              <a:rPr lang="ru-RU" sz="1000" b="1" dirty="0" smtClean="0"/>
+              <a:t> manage.py </a:t>
+            </a:r>
+            <a:r>
+              <a:rPr lang="ru-RU" sz="1000" b="1" dirty="0" err="1" smtClean="0"/>
+              <a:t>runserver</a:t>
+            </a:r>
+            <a:endParaRPr lang="ru-RU" sz="1000" b="1" dirty="0" smtClean="0"/>
+          </a:p>
+          <a:p>
+            <a:endParaRPr lang="ru-RU" sz="1000" dirty="0"/>
+          </a:p>
+          <a:p>
+            <a:pPr marL="0" indent="0">
+              <a:buNone/>
+            </a:pPr>
+            <a:r>
+              <a:rPr lang="ru-RU" sz="1000" dirty="0"/>
+              <a:t>Регистрироваться можно прямо с сайта "</a:t>
+            </a:r>
+            <a:r>
+              <a:rPr lang="ru-RU" sz="1000" dirty="0" err="1"/>
+              <a:t>article</a:t>
+            </a:r>
+            <a:r>
+              <a:rPr lang="ru-RU" sz="1000" dirty="0"/>
+              <a:t>", не через  /</a:t>
+            </a:r>
+            <a:r>
+              <a:rPr lang="ru-RU" sz="1000" dirty="0" err="1"/>
+              <a:t>admin</a:t>
+            </a:r>
+            <a:r>
+              <a:rPr lang="ru-RU" sz="1000" dirty="0"/>
+              <a:t>.</a:t>
+            </a:r>
+          </a:p>
+          <a:p>
+            <a:pPr marL="0" indent="0">
+              <a:buNone/>
+            </a:pPr>
+            <a:r>
+              <a:rPr lang="ru-RU" sz="1000" dirty="0"/>
+              <a:t>Статьи добавляются через /</a:t>
+            </a:r>
+            <a:r>
+              <a:rPr lang="ru-RU" sz="1000" dirty="0" err="1"/>
+              <a:t>admin</a:t>
+            </a:r>
+            <a:r>
+              <a:rPr lang="ru-RU" sz="1000" dirty="0"/>
+              <a:t>.</a:t>
+            </a:r>
+          </a:p>
+        </p:txBody>
+      </p:sp>
+    </p:spTree>
+    <p:extLst>
+      <p:ext uri="{BB962C8B-B14F-4D97-AF65-F5344CB8AC3E}">
+        <p14:creationId xmlns:p14="http://schemas.microsoft.com/office/powerpoint/2010/main" val="1355040326"/>
+      </p:ext>
+    </p:extLst>
+  </p:cSld>
+  <p:clrMapOvr>
+    <a:masterClrMapping/>
+  </p:clrMapOvr>
+  <p:timing>
+    <p:tnLst>
+      <p:par>
+        <p:cTn id="1" dur="indefinite" restart="never" nodeType="tmRoot"/>
+      </p:par>
+    </p:tnLst>
+  </p:timing>
+</p:sld>
+</file>
+
+<file path=ppt/slides/slide11.xml><?xml version="1.0" encoding="utf-8"?>
+<p:sld xmlns:a="http://schemas.openxmlformats.org/drawingml/2006/main" xmlns:r="http://schemas.openxmlformats.org/officeDocument/2006/relationships" xmlns:p="http://schemas.openxmlformats.org/presentationml/2006/main">
+  <p:cSld>
+    <p:spTree>
+      <p:nvGrpSpPr>
+        <p:cNvPr id="1" name=""/>
+        <p:cNvGrpSpPr/>
+        <p:nvPr/>
+      </p:nvGrpSpPr>
+      <p:grpSpPr>
+        <a:xfrm>
+          <a:off x="0" y="0"/>
+          <a:ext cx="0" cy="0"/>
+          <a:chOff x="0" y="0"/>
+          <a:chExt cx="0" cy="0"/>
+        </a:xfrm>
+      </p:grpSpPr>
+      <p:sp>
+        <p:nvSpPr>
+          <p:cNvPr id="2" name="Заголовок 1"/>
+          <p:cNvSpPr>
+            <a:spLocks noGrp="1"/>
+          </p:cNvSpPr>
+          <p:nvPr>
+            <p:ph type="title"/>
+          </p:nvPr>
+        </p:nvSpPr>
+        <p:spPr/>
+        <p:txBody>
+          <a:bodyPr/>
+          <a:lstStyle/>
+          <a:p>
+            <a:r>
+              <a:rPr lang="ru-RU" dirty="0" smtClean="0"/>
+              <a:t>Бизнес задача</a:t>
+            </a:r>
+            <a:endParaRPr lang="ru-RU" dirty="0"/>
+          </a:p>
+        </p:txBody>
+      </p:sp>
+      <p:sp>
+        <p:nvSpPr>
+          <p:cNvPr id="3" name="Объект 2"/>
+          <p:cNvSpPr>
+            <a:spLocks noGrp="1"/>
+          </p:cNvSpPr>
+          <p:nvPr>
+            <p:ph idx="1"/>
+          </p:nvPr>
+        </p:nvSpPr>
+        <p:spPr/>
+        <p:txBody>
+          <a:bodyPr>
+            <a:normAutofit fontScale="85000" lnSpcReduction="20000"/>
+          </a:bodyPr>
+          <a:lstStyle/>
+          <a:p>
+            <a:pPr marL="0" indent="0">
+              <a:buNone/>
+            </a:pPr>
+            <a:endParaRPr lang="ru-RU" dirty="0"/>
+          </a:p>
+          <a:p>
+            <a:pPr marL="0" indent="0">
+              <a:buNone/>
+            </a:pPr>
+            <a:r>
+              <a:rPr lang="ru-RU" dirty="0" smtClean="0"/>
+              <a:t>    </a:t>
+            </a:r>
+            <a:r>
+              <a:rPr lang="ru-RU" i="1" u="sng" dirty="0" smtClean="0"/>
+              <a:t>Программа </a:t>
+            </a:r>
+            <a:r>
+              <a:rPr lang="ru-RU" i="1" u="sng" dirty="0"/>
+              <a:t>автоматизирует процесс публикации и распространения контента. Она позволяет компании или сообществу:</a:t>
+            </a:r>
+          </a:p>
+          <a:p>
+            <a:r>
+              <a:rPr lang="ru-RU" dirty="0"/>
+              <a:t>Централизованно информировать аудиторию (новости, статьи, анонсы).</a:t>
+            </a:r>
+          </a:p>
+          <a:p>
+            <a:r>
+              <a:rPr lang="ru-RU" dirty="0"/>
+              <a:t>Повышать вовлеченность через систему комментариев и тегов.</a:t>
+            </a:r>
+          </a:p>
+          <a:p>
+            <a:r>
+              <a:rPr lang="ru-RU" dirty="0"/>
+              <a:t>Персонализировать опыт пользователя (возможность сохранять статьи в «Избранное»).</a:t>
+            </a:r>
+          </a:p>
+          <a:p>
+            <a:r>
+              <a:rPr lang="ru-RU" dirty="0"/>
+              <a:t>Разграничивать права: только доверенные лица (админы) создают контент, а пользователи его потребляют и обсуждают.</a:t>
+            </a:r>
+          </a:p>
+        </p:txBody>
+      </p:sp>
+    </p:spTree>
+    <p:extLst>
+      <p:ext uri="{BB962C8B-B14F-4D97-AF65-F5344CB8AC3E}">
+        <p14:creationId xmlns:p14="http://schemas.microsoft.com/office/powerpoint/2010/main" val="2130190252"/>
+      </p:ext>
+    </p:extLst>
+  </p:cSld>
+  <p:clrMapOvr>
+    <a:masterClrMapping/>
+  </p:clrMapOvr>
+  <p:timing>
+    <p:tnLst>
+      <p:par>
+        <p:cTn id="1" dur="indefinite" restart="never" nodeType="tmRoot"/>
+      </p:par>
+    </p:tnLst>
+  </p:timing>
+</p:sld>
+</file>
+
+<file path=ppt/slides/slide12.xml><?xml version="1.0" encoding="utf-8"?>
+<p:sld xmlns:a="http://schemas.openxmlformats.org/drawingml/2006/main" xmlns:r="http://schemas.openxmlformats.org/officeDocument/2006/relationships" xmlns:p="http://schemas.openxmlformats.org/presentationml/2006/main">
+  <p:cSld>
+    <p:spTree>
+      <p:nvGrpSpPr>
+        <p:cNvPr id="1" name=""/>
+        <p:cNvGrpSpPr/>
+        <p:nvPr/>
+      </p:nvGrpSpPr>
+      <p:grpSpPr>
+        <a:xfrm>
+          <a:off x="0" y="0"/>
+          <a:ext cx="0" cy="0"/>
+          <a:chOff x="0" y="0"/>
+          <a:chExt cx="0" cy="0"/>
+        </a:xfrm>
+      </p:grpSpPr>
+      <p:sp>
+        <p:nvSpPr>
+          <p:cNvPr id="2" name="Заголовок 1"/>
+          <p:cNvSpPr>
+            <a:spLocks noGrp="1"/>
+          </p:cNvSpPr>
+          <p:nvPr>
+            <p:ph type="title"/>
+          </p:nvPr>
+        </p:nvSpPr>
+        <p:spPr/>
+        <p:txBody>
+          <a:bodyPr/>
+          <a:lstStyle/>
+          <a:p>
+            <a:endParaRPr lang="ru-RU"/>
+          </a:p>
+        </p:txBody>
+      </p:sp>
+      <p:sp>
+        <p:nvSpPr>
+          <p:cNvPr id="3" name="Объект 2"/>
+          <p:cNvSpPr>
+            <a:spLocks noGrp="1"/>
+          </p:cNvSpPr>
+          <p:nvPr>
+            <p:ph idx="1"/>
+          </p:nvPr>
+        </p:nvSpPr>
+        <p:spPr/>
+        <p:txBody>
+          <a:bodyPr/>
+          <a:lstStyle/>
+          <a:p>
+            <a:endParaRPr lang="ru-RU"/>
+          </a:p>
+        </p:txBody>
+      </p:sp>
+      <p:pic>
+        <p:nvPicPr>
+          <p:cNvPr id="1026" name="Picture 2" descr="E:\TOP\Pandas\mini-проект\Демонстрация\вход.png"/>
+          <p:cNvPicPr>
+            <a:picLocks noChangeAspect="1" noChangeArrowheads="1"/>
+          </p:cNvPicPr>
+          <p:nvPr/>
+        </p:nvPicPr>
+        <p:blipFill>
+          <a:blip r:embed="rId2">
+            <a:extLst>
+              <a:ext uri="{28A0092B-C50C-407E-A947-70E740481C1C}">
+                <a14:useLocalDpi xmlns:a14="http://schemas.microsoft.com/office/drawing/2010/main" val="0"/>
+              </a:ext>
+            </a:extLst>
+          </a:blip>
+          <a:srcRect/>
+          <a:stretch>
+            <a:fillRect/>
+          </a:stretch>
+        </p:blipFill>
+        <p:spPr bwMode="auto">
+          <a:xfrm>
+            <a:off x="782638" y="1811338"/>
+            <a:ext cx="7029722" cy="2584450"/>
+          </a:xfrm>
+          <a:prstGeom prst="rect">
+            <a:avLst/>
+          </a:prstGeom>
+          <a:noFill/>
+          <a:extLst>
+            <a:ext uri="{909E8E84-426E-40DD-AFC4-6F175D3DCCD1}">
+              <a14:hiddenFill xmlns:a14="http://schemas.microsoft.com/office/drawing/2010/main">
+                <a:solidFill>
+                  <a:srgbClr val="FFFFFF"/>
+                </a:solidFill>
+              </a14:hiddenFill>
+            </a:ext>
+          </a:extLst>
+        </p:spPr>
+      </p:pic>
+    </p:spTree>
+    <p:extLst>
+      <p:ext uri="{BB962C8B-B14F-4D97-AF65-F5344CB8AC3E}">
+        <p14:creationId xmlns:p14="http://schemas.microsoft.com/office/powerpoint/2010/main" val="1603485448"/>
+      </p:ext>
+    </p:extLst>
+  </p:cSld>
+  <p:clrMapOvr>
+    <a:masterClrMapping/>
+  </p:clrMapOvr>
+  <p:timing>
+    <p:tnLst>
+      <p:par>
+        <p:cTn id="1" dur="indefinite" restart="never" nodeType="tmRoot"/>
+      </p:par>
+    </p:tnLst>
+  </p:timing>
+</p:sld>
+</file>
+
+<file path=ppt/slides/slide13.xml><?xml version="1.0" encoding="utf-8"?>
+<p:sld xmlns:a="http://schemas.openxmlformats.org/drawingml/2006/main" xmlns:r="http://schemas.openxmlformats.org/officeDocument/2006/relationships" xmlns:p="http://schemas.openxmlformats.org/presentationml/2006/main">
+  <p:cSld>
+    <p:spTree>
+      <p:nvGrpSpPr>
+        <p:cNvPr id="1" name=""/>
+        <p:cNvGrpSpPr/>
+        <p:nvPr/>
+      </p:nvGrpSpPr>
+      <p:grpSpPr>
+        <a:xfrm>
+          <a:off x="0" y="0"/>
+          <a:ext cx="0" cy="0"/>
+          <a:chOff x="0" y="0"/>
+          <a:chExt cx="0" cy="0"/>
+        </a:xfrm>
+      </p:grpSpPr>
+      <p:sp>
+        <p:nvSpPr>
+          <p:cNvPr id="2" name="Заголовок 1"/>
+          <p:cNvSpPr>
+            <a:spLocks noGrp="1"/>
+          </p:cNvSpPr>
+          <p:nvPr>
+            <p:ph type="title"/>
+          </p:nvPr>
+        </p:nvSpPr>
+        <p:spPr/>
+        <p:txBody>
+          <a:bodyPr/>
+          <a:lstStyle/>
+          <a:p>
+            <a:endParaRPr lang="ru-RU"/>
+          </a:p>
+        </p:txBody>
+      </p:sp>
+      <p:sp>
+        <p:nvSpPr>
+          <p:cNvPr id="3" name="Объект 2"/>
+          <p:cNvSpPr>
+            <a:spLocks noGrp="1"/>
+          </p:cNvSpPr>
+          <p:nvPr>
+            <p:ph idx="1"/>
+          </p:nvPr>
+        </p:nvSpPr>
+        <p:spPr/>
+        <p:txBody>
+          <a:bodyPr/>
+          <a:lstStyle/>
+          <a:p>
+            <a:endParaRPr lang="ru-RU"/>
+          </a:p>
+        </p:txBody>
+      </p:sp>
+      <p:pic>
+        <p:nvPicPr>
+          <p:cNvPr id="2050" name="Picture 2" descr="E:\TOP\Pandas\mini-проект\Демонстрация\Добавление коментариев.png"/>
+          <p:cNvPicPr>
+            <a:picLocks noChangeAspect="1" noChangeArrowheads="1"/>
+          </p:cNvPicPr>
+          <p:nvPr/>
+        </p:nvPicPr>
+        <p:blipFill>
+          <a:blip r:embed="rId2">
+            <a:extLst>
+              <a:ext uri="{28A0092B-C50C-407E-A947-70E740481C1C}">
+                <a14:useLocalDpi xmlns:a14="http://schemas.microsoft.com/office/drawing/2010/main" val="0"/>
+              </a:ext>
+            </a:extLst>
+          </a:blip>
+          <a:srcRect/>
+          <a:stretch>
+            <a:fillRect/>
+          </a:stretch>
+        </p:blipFill>
+        <p:spPr bwMode="auto">
+          <a:xfrm>
+            <a:off x="683568" y="1772816"/>
+            <a:ext cx="7992888" cy="4022421"/>
+          </a:xfrm>
+          <a:prstGeom prst="rect">
+            <a:avLst/>
+          </a:prstGeom>
+          <a:noFill/>
+          <a:extLst>
+            <a:ext uri="{909E8E84-426E-40DD-AFC4-6F175D3DCCD1}">
+              <a14:hiddenFill xmlns:a14="http://schemas.microsoft.com/office/drawing/2010/main">
+                <a:solidFill>
+                  <a:srgbClr val="FFFFFF"/>
+                </a:solidFill>
+              </a14:hiddenFill>
+            </a:ext>
+          </a:extLst>
+        </p:spPr>
+      </p:pic>
+    </p:spTree>
+    <p:extLst>
+      <p:ext uri="{BB962C8B-B14F-4D97-AF65-F5344CB8AC3E}">
+        <p14:creationId xmlns:p14="http://schemas.microsoft.com/office/powerpoint/2010/main" val="2856079694"/>
+      </p:ext>
+    </p:extLst>
+  </p:cSld>
+  <p:clrMapOvr>
+    <a:masterClrMapping/>
+  </p:clrMapOvr>
+  <p:timing>
+    <p:tnLst>
+      <p:par>
+        <p:cTn id="1" dur="indefinite" restart="never" nodeType="tmRoot"/>
+      </p:par>
+    </p:tnLst>
+  </p:timing>
+</p:sld>
+</file>
+
+<file path=ppt/slides/slide14.xml><?xml version="1.0" encoding="utf-8"?>
+<p:sld xmlns:a="http://schemas.openxmlformats.org/drawingml/2006/main" xmlns:r="http://schemas.openxmlformats.org/officeDocument/2006/relationships" xmlns:p="http://schemas.openxmlformats.org/presentationml/2006/main">
+  <p:cSld>
+    <p:spTree>
+      <p:nvGrpSpPr>
+        <p:cNvPr id="1" name=""/>
+        <p:cNvGrpSpPr/>
+        <p:nvPr/>
+      </p:nvGrpSpPr>
+      <p:grpSpPr>
+        <a:xfrm>
+          <a:off x="0" y="0"/>
+          <a:ext cx="0" cy="0"/>
+          <a:chOff x="0" y="0"/>
+          <a:chExt cx="0" cy="0"/>
+        </a:xfrm>
+      </p:grpSpPr>
+      <p:sp>
+        <p:nvSpPr>
+          <p:cNvPr id="2" name="Заголовок 1"/>
+          <p:cNvSpPr>
+            <a:spLocks noGrp="1"/>
+          </p:cNvSpPr>
+          <p:nvPr>
+            <p:ph type="title"/>
+          </p:nvPr>
+        </p:nvSpPr>
+        <p:spPr/>
+        <p:txBody>
+          <a:bodyPr/>
+          <a:lstStyle/>
+          <a:p>
+            <a:r>
+              <a:rPr lang="ru-RU" dirty="0" smtClean="0"/>
+              <a:t>Регистрация</a:t>
+            </a:r>
+            <a:endParaRPr lang="ru-RU" dirty="0"/>
+          </a:p>
+        </p:txBody>
+      </p:sp>
+      <p:sp>
+        <p:nvSpPr>
+          <p:cNvPr id="3" name="Объект 2"/>
+          <p:cNvSpPr>
+            <a:spLocks noGrp="1"/>
+          </p:cNvSpPr>
+          <p:nvPr>
+            <p:ph idx="1"/>
+          </p:nvPr>
+        </p:nvSpPr>
+        <p:spPr/>
+        <p:txBody>
+          <a:bodyPr/>
+          <a:lstStyle/>
+          <a:p>
+            <a:endParaRPr lang="ru-RU" dirty="0" smtClean="0"/>
+          </a:p>
+          <a:p>
+            <a:endParaRPr lang="ru-RU" dirty="0"/>
+          </a:p>
+        </p:txBody>
+      </p:sp>
+      <p:pic>
+        <p:nvPicPr>
+          <p:cNvPr id="3074" name="Picture 2" descr="E:\TOP\Pandas\mini-проект\Демонстрация\регистрация.png"/>
+          <p:cNvPicPr>
+            <a:picLocks noChangeAspect="1" noChangeArrowheads="1"/>
+          </p:cNvPicPr>
+          <p:nvPr/>
+        </p:nvPicPr>
+        <p:blipFill>
+          <a:blip r:embed="rId2">
+            <a:extLst>
+              <a:ext uri="{28A0092B-C50C-407E-A947-70E740481C1C}">
+                <a14:useLocalDpi xmlns:a14="http://schemas.microsoft.com/office/drawing/2010/main" val="0"/>
+              </a:ext>
+            </a:extLst>
+          </a:blip>
+          <a:srcRect/>
+          <a:stretch>
+            <a:fillRect/>
+          </a:stretch>
+        </p:blipFill>
+        <p:spPr bwMode="auto">
+          <a:xfrm>
+            <a:off x="723900" y="1628799"/>
+            <a:ext cx="6800428" cy="4140175"/>
+          </a:xfrm>
+          <a:prstGeom prst="rect">
+            <a:avLst/>
+          </a:prstGeom>
+          <a:noFill/>
+          <a:extLst>
+            <a:ext uri="{909E8E84-426E-40DD-AFC4-6F175D3DCCD1}">
+              <a14:hiddenFill xmlns:a14="http://schemas.microsoft.com/office/drawing/2010/main">
+                <a:solidFill>
+                  <a:srgbClr val="FFFFFF"/>
+                </a:solidFill>
+              </a14:hiddenFill>
+            </a:ext>
+          </a:extLst>
+        </p:spPr>
+      </p:pic>
+    </p:spTree>
+    <p:extLst>
+      <p:ext uri="{BB962C8B-B14F-4D97-AF65-F5344CB8AC3E}">
+        <p14:creationId xmlns:p14="http://schemas.microsoft.com/office/powerpoint/2010/main" val="3555227253"/>
       </p:ext>
     </p:extLst>
   </p:cSld>
@@ -3819,7 +4946,7 @@
       </p:sp>
       <p:pic>
         <p:nvPicPr>
-          <p:cNvPr id="2050" name="Picture 2"/>
+          <p:cNvPr id="1027" name="Picture 3"/>
           <p:cNvPicPr>
             <a:picLocks noChangeAspect="1" noChangeArrowheads="1"/>
           </p:cNvPicPr>
@@ -3840,8 +4967,8 @@
         </p:blipFill>
         <p:spPr bwMode="auto">
           <a:xfrm>
-            <a:off x="539552" y="476672"/>
-            <a:ext cx="8157914" cy="5904632"/>
+            <a:off x="467544" y="332656"/>
+            <a:ext cx="8208912" cy="6120680"/>
           </a:xfrm>
           <a:prstGeom prst="rect">
             <a:avLst/>
@@ -3972,7 +5099,23 @@
             </a:r>
             <a:r>
               <a:rPr lang="ru-RU" dirty="0"/>
-              <a:t>проект представляет собой функциональный веб-сервис для публикации контента и социального взаимодействия, построенный на базе </a:t>
+              <a:t>проект представляет собой функциональный веб-сервис </a:t>
+            </a:r>
+            <a:r>
+              <a:rPr lang="ru-RU" dirty="0" smtClean="0"/>
+              <a:t>новостей АСУТП для </a:t>
+            </a:r>
+            <a:r>
+              <a:rPr lang="ru-RU" dirty="0"/>
+              <a:t>публикации </a:t>
+            </a:r>
+            <a:r>
+              <a:rPr lang="ru-RU" dirty="0" smtClean="0"/>
+              <a:t>инженерами АСУТП контента </a:t>
+            </a:r>
+            <a:r>
+              <a:rPr lang="ru-RU" dirty="0"/>
+              <a:t>и социального взаимодействия, построенный на базе </a:t>
             </a:r>
             <a:r>
               <a:rPr lang="ru-RU" dirty="0" err="1"/>
@@ -4048,25 +5191,12 @@
           <a:lstStyle/>
           <a:p>
             <a:r>
-              <a:rPr lang="ru-RU" dirty="0"/>
-              <a:t>Б</a:t>
-            </a:r>
-            <a:r>
-              <a:rPr lang="ru-RU" dirty="0" smtClean="0"/>
-              <a:t>иблиотеки </a:t>
-            </a:r>
-            <a:r>
-              <a:rPr lang="ru-RU" dirty="0"/>
-              <a:t>или компоненты </a:t>
-            </a:r>
-            <a:r>
-              <a:rPr lang="ru-RU" dirty="0" err="1"/>
-              <a:t>Django</a:t>
-            </a:r>
-            <a:r>
-              <a:rPr lang="ru-RU" dirty="0"/>
-              <a:t> использовались и зачем</a:t>
-            </a:r>
+              <a:rPr lang="ru-RU" b="1" dirty="0">
+                <a:effectLst/>
+              </a:rPr>
+              <a:t>Постановка задачи / Проблематика </a:t>
+            </a:r>
+            <a:endParaRPr lang="ru-RU" dirty="0"/>
           </a:p>
         </p:txBody>
       </p:sp>
@@ -4087,530 +5217,365 @@
           </a:bodyPr>
           <a:lstStyle/>
           <a:p>
-            <a:pPr marL="0" indent="0">
-              <a:buNone/>
-            </a:pPr>
-            <a:r>
-              <a:rPr lang="ru-RU" sz="4400" b="1" u="sng" dirty="0" smtClean="0"/>
-              <a:t>Встроенные компоненты </a:t>
-            </a:r>
-            <a:r>
-              <a:rPr lang="ru-RU" sz="4400" b="1" u="sng" dirty="0" err="1" smtClean="0"/>
-              <a:t>Django</a:t>
-            </a:r>
-            <a:r>
-              <a:rPr lang="ru-RU" sz="4400" b="1" u="sng" dirty="0" smtClean="0"/>
-              <a:t> (</a:t>
-            </a:r>
-            <a:r>
-              <a:rPr lang="ru-RU" sz="4400" b="1" u="sng" dirty="0" err="1" smtClean="0"/>
-              <a:t>Core</a:t>
-            </a:r>
-            <a:r>
-              <a:rPr lang="ru-RU" sz="4400" b="1" u="sng" dirty="0" smtClean="0"/>
-              <a:t>)</a:t>
-            </a:r>
-          </a:p>
-          <a:p>
-            <a:endParaRPr lang="ru-RU" sz="4400" b="1" u="sng" dirty="0" smtClean="0"/>
-          </a:p>
-          <a:p>
-            <a:pPr marL="0" indent="0">
-              <a:buNone/>
-            </a:pPr>
-            <a:r>
-              <a:rPr lang="ru-RU" sz="4400" b="1" dirty="0" err="1" smtClean="0"/>
-              <a:t>Django</a:t>
-            </a:r>
-            <a:r>
-              <a:rPr lang="ru-RU" sz="4400" b="1" dirty="0" smtClean="0"/>
+            <a:r>
+              <a:rPr lang="ru-RU" dirty="0"/>
+              <a:t>Основная задача форума — создать пространство, где инженеры, программисты, технические писатели и другие специалисты по АСУТП (автоматизированным системам управления технологическими процессами) могут:</a:t>
+            </a:r>
+          </a:p>
+          <a:p>
+            <a:r>
+              <a:rPr lang="ru-RU" b="1" dirty="0"/>
+              <a:t>Обсуждать сложные технические вопросы.</a:t>
+            </a:r>
+            <a:r>
+              <a:rPr lang="ru-RU" dirty="0"/>
+              <a:t> Участники делятся опытом, разбирают ошибки и ищут решения проблем, связанных с программируемыми логическими контроллерами (ПЛК), SCADA-системами, сетевым оборудованием (например, </a:t>
+            </a:r>
+            <a:r>
+              <a:rPr lang="ru-RU" dirty="0" err="1"/>
+              <a:t>Profibus</a:t>
+            </a:r>
+            <a:r>
+              <a:rPr lang="ru-RU" dirty="0"/>
+              <a:t>, </a:t>
+            </a:r>
+            <a:r>
+              <a:rPr lang="ru-RU" dirty="0" err="1"/>
+              <a:t>Modbus</a:t>
+            </a:r>
+            <a:r>
+              <a:rPr lang="ru-RU" dirty="0"/>
+              <a:t>), языками программирования для ПЛК и их интеграцией с человеко-машинными интерфейсами (HMI). </a:t>
+            </a:r>
+            <a:r>
+              <a:rPr lang="ru-RU" dirty="0">
+                <a:hlinkClick r:id="rId2"/>
+              </a:rPr>
+              <a:t>asutpforum.ru</a:t>
+            </a:r>
+            <a:r>
+              <a:rPr lang="ru-RU" dirty="0">
+                <a:hlinkClick r:id="rId3"/>
+              </a:rPr>
+              <a:t>yapl.ru</a:t>
+            </a:r>
+            <a:r>
+              <a:rPr lang="ru-RU" dirty="0">
+                <a:hlinkClick r:id="rId4"/>
+              </a:rPr>
+              <a:t>asutpforum.ru</a:t>
+            </a:r>
+            <a:endParaRPr lang="ru-RU" dirty="0"/>
+          </a:p>
+          <a:p>
+            <a:r>
+              <a:rPr lang="ru-RU" b="1" dirty="0"/>
+              <a:t>Сравнивать подходы и решения.</a:t>
+            </a:r>
+            <a:r>
+              <a:rPr lang="ru-RU" dirty="0"/>
+              <a:t> Можно узнать, как коллеги решают схожие задачи с оборудованием разных производителей (</a:t>
+            </a:r>
+            <a:r>
+              <a:rPr lang="ru-RU" dirty="0" err="1"/>
+              <a:t>Siemens</a:t>
+            </a:r>
+            <a:r>
+              <a:rPr lang="ru-RU" dirty="0"/>
+              <a:t>, </a:t>
+            </a:r>
+            <a:r>
+              <a:rPr lang="ru-RU" dirty="0" err="1"/>
+              <a:t>Schneider</a:t>
+            </a:r>
+            <a:r>
+              <a:rPr lang="ru-RU" dirty="0"/>
               <a:t> </a:t>
             </a:r>
             <a:r>
-              <a:rPr lang="ru-RU" sz="4400" b="1" dirty="0" err="1" smtClean="0"/>
-              <a:t>Auth</a:t>
-            </a:r>
-            <a:r>
-              <a:rPr lang="ru-RU" sz="4400" b="1" dirty="0" smtClean="0"/>
-              <a:t> (</a:t>
-            </a:r>
-            <a:r>
-              <a:rPr lang="ru-RU" sz="4400" b="1" dirty="0" err="1" smtClean="0"/>
-              <a:t>django.contrib.auth</a:t>
-            </a:r>
-            <a:r>
-              <a:rPr lang="ru-RU" sz="4400" b="1" dirty="0" smtClean="0"/>
-              <a:t>):</a:t>
-            </a:r>
-          </a:p>
-          <a:p>
-            <a:pPr marL="0" indent="0">
-              <a:buNone/>
-            </a:pPr>
-            <a:r>
-              <a:rPr lang="ru-RU" sz="4400" b="1" dirty="0" smtClean="0"/>
-              <a:t>Зачем</a:t>
-            </a:r>
-            <a:r>
-              <a:rPr lang="ru-RU" sz="4400" dirty="0" smtClean="0"/>
-              <a:t>: Управление пользователями, сессиями, хеширование паролей и проверка прав доступа (например, разделение на обычных читателей и авторов).</a:t>
-            </a:r>
-          </a:p>
-          <a:p>
-            <a:pPr marL="0" indent="0">
-              <a:buNone/>
-            </a:pPr>
-            <a:r>
-              <a:rPr lang="ru-RU" sz="4400" b="1" dirty="0" err="1" smtClean="0"/>
-              <a:t>Django</a:t>
-            </a:r>
-            <a:r>
-              <a:rPr lang="ru-RU" sz="4400" b="1" dirty="0" smtClean="0"/>
-              <a:t> </a:t>
-            </a:r>
-            <a:r>
-              <a:rPr lang="ru-RU" sz="4400" b="1" dirty="0" err="1" smtClean="0"/>
-              <a:t>Admin</a:t>
-            </a:r>
-            <a:r>
-              <a:rPr lang="ru-RU" sz="4400" b="1" dirty="0" smtClean="0"/>
-              <a:t> (</a:t>
-            </a:r>
-            <a:r>
-              <a:rPr lang="ru-RU" sz="4400" b="1" dirty="0" err="1" smtClean="0"/>
-              <a:t>django.contrib.admin</a:t>
-            </a:r>
-            <a:r>
-              <a:rPr lang="ru-RU" sz="4400" b="1" dirty="0" smtClean="0"/>
-              <a:t>):</a:t>
-            </a:r>
-          </a:p>
-          <a:p>
-            <a:pPr marL="0" indent="0">
-              <a:buNone/>
-            </a:pPr>
-            <a:r>
-              <a:rPr lang="ru-RU" sz="4400" b="1" dirty="0" smtClean="0"/>
-              <a:t>Зачем</a:t>
-            </a:r>
-            <a:r>
-              <a:rPr lang="ru-RU" sz="4400" dirty="0" smtClean="0"/>
-              <a:t>: Готовая панель управления для авторов и редакторов. Позволяет быстро добавлять, редактировать и удалять статьи без написания дополнительного кода.</a:t>
-            </a:r>
-          </a:p>
-          <a:p>
-            <a:endParaRPr lang="ru-RU" sz="4400" dirty="0"/>
-          </a:p>
-          <a:p>
-            <a:pPr marL="0" indent="0">
-              <a:buNone/>
-            </a:pPr>
-            <a:r>
-              <a:rPr lang="ru-RU" sz="4400" b="1" dirty="0" err="1"/>
-              <a:t>Django</a:t>
-            </a:r>
-            <a:r>
-              <a:rPr lang="ru-RU" sz="4400" b="1" dirty="0"/>
-              <a:t> ORM</a:t>
-            </a:r>
-            <a:r>
-              <a:rPr lang="ru-RU" sz="4400" dirty="0"/>
-              <a:t> — это «переводчик» между миром </a:t>
-            </a:r>
-            <a:r>
-              <a:rPr lang="ru-RU" sz="4400" dirty="0" err="1"/>
-              <a:t>Python</a:t>
-            </a:r>
-            <a:r>
-              <a:rPr lang="ru-RU" sz="4400" dirty="0"/>
-              <a:t> (объектами) и миром баз данных (таблицами SQL). Благодаря ему вам не нужно писать сложные SQL-запросы вручную</a:t>
-            </a:r>
-            <a:r>
-              <a:rPr lang="ru-RU" sz="4400" dirty="0" smtClean="0"/>
-              <a:t>.</a:t>
-            </a:r>
-          </a:p>
-          <a:p>
-            <a:pPr marL="0" indent="0">
-              <a:buNone/>
-            </a:pPr>
-            <a:r>
-              <a:rPr lang="ru-RU" sz="4400" b="1" dirty="0"/>
-              <a:t>Зачем</a:t>
-            </a:r>
-            <a:r>
-              <a:rPr lang="ru-RU" sz="4400" dirty="0"/>
-              <a:t>: Взаимодействие с базой данных (</a:t>
-            </a:r>
-            <a:r>
-              <a:rPr lang="ru-RU" sz="4400" dirty="0" err="1"/>
-              <a:t>SQLite</a:t>
-            </a:r>
-            <a:r>
-              <a:rPr lang="ru-RU" sz="4400" dirty="0"/>
-              <a:t>/</a:t>
-            </a:r>
-            <a:r>
-              <a:rPr lang="ru-RU" sz="4400" dirty="0" err="1"/>
-              <a:t>PostgreSQL</a:t>
-            </a:r>
-            <a:r>
-              <a:rPr lang="ru-RU" sz="4400" dirty="0"/>
-              <a:t>) на языке </a:t>
-            </a:r>
-            <a:r>
-              <a:rPr lang="ru-RU" sz="4400" dirty="0" err="1"/>
-              <a:t>Python</a:t>
-            </a:r>
-            <a:r>
-              <a:rPr lang="ru-RU" sz="4400" dirty="0"/>
-              <a:t>. Используется для сложных запросов фильтрации и сортировки статей.</a:t>
-            </a:r>
-          </a:p>
-          <a:p>
-            <a:pPr marL="338138" indent="0">
-              <a:buNone/>
-            </a:pPr>
-            <a:endParaRPr lang="ru-RU" sz="4400" dirty="0"/>
-          </a:p>
-          <a:p>
-            <a:pPr marL="625475">
-              <a:buNone/>
-            </a:pPr>
-            <a:r>
-              <a:rPr lang="ru-RU" sz="4400" b="1" dirty="0" smtClean="0"/>
-              <a:t>1</a:t>
-            </a:r>
-            <a:r>
-              <a:rPr lang="ru-RU" sz="4400" b="1" dirty="0"/>
-              <a:t>. Модели вместо таблиц</a:t>
-            </a:r>
-          </a:p>
-          <a:p>
-            <a:pPr marL="625475">
-              <a:buNone/>
-            </a:pPr>
-            <a:r>
-              <a:rPr lang="ru-RU" sz="4400" dirty="0" smtClean="0"/>
-              <a:t>     Вместо </a:t>
-            </a:r>
-            <a:r>
-              <a:rPr lang="ru-RU" sz="4400" dirty="0"/>
-              <a:t>того чтобы создавать таблицы в базе через консоль, </a:t>
-            </a:r>
-            <a:r>
-              <a:rPr lang="ru-RU" sz="4400" dirty="0" smtClean="0"/>
-              <a:t>мы описываем </a:t>
-            </a:r>
-            <a:r>
-              <a:rPr lang="ru-RU" sz="4400" dirty="0"/>
-              <a:t>их в models.py.</a:t>
-            </a:r>
-          </a:p>
-          <a:p>
-            <a:pPr marL="625475">
-              <a:buNone/>
-            </a:pPr>
-            <a:r>
-              <a:rPr lang="ru-RU" sz="4400" b="1" dirty="0" smtClean="0"/>
-              <a:t>     Пример</a:t>
-            </a:r>
-            <a:r>
-              <a:rPr lang="ru-RU" sz="4400" b="1" dirty="0"/>
+              <a:rPr lang="ru-RU" dirty="0" err="1"/>
+              <a:t>Electric</a:t>
+            </a:r>
+            <a:r>
+              <a:rPr lang="ru-RU" dirty="0"/>
+              <a:t>, ОВЕН и др.). </a:t>
+            </a:r>
+            <a:r>
+              <a:rPr lang="ru-RU" dirty="0">
+                <a:hlinkClick r:id="rId3"/>
+              </a:rPr>
+              <a:t>yapl.ru</a:t>
+            </a:r>
+            <a:endParaRPr lang="ru-RU" dirty="0"/>
+          </a:p>
+          <a:p>
+            <a:r>
+              <a:rPr lang="ru-RU" b="1" dirty="0"/>
+              <a:t>Находить готовые решения и FAQ.</a:t>
+            </a:r>
+            <a:r>
+              <a:rPr lang="ru-RU" dirty="0"/>
+              <a:t> На форуме есть разделы с часто задаваемыми вопросами (FAQ), которые помогают быстро получить ответ на типовые технические проблемы. </a:t>
+            </a:r>
+            <a:r>
+              <a:rPr lang="ru-RU" dirty="0">
+                <a:hlinkClick r:id="rId2"/>
+              </a:rPr>
+              <a:t>asutpforum.ru</a:t>
+            </a:r>
+            <a:endParaRPr lang="ru-RU" dirty="0"/>
+          </a:p>
+          <a:p>
+            <a:r>
+              <a:rPr lang="ru-RU" b="1" dirty="0"/>
+              <a:t>Поддерживать профессиональное сообщество.</a:t>
+            </a:r>
+            <a:r>
+              <a:rPr lang="ru-RU" dirty="0"/>
+              <a:t> Форум объединяет специалистов, позволяя им оставаться в курсе отраслевых трендов и оперативно обмениваться знаниями. </a:t>
+            </a:r>
+            <a:r>
+              <a:rPr lang="ru-RU" dirty="0">
+                <a:hlinkClick r:id="rId3"/>
+              </a:rPr>
+              <a:t>yapl.ru</a:t>
+            </a:r>
+            <a:endParaRPr lang="ru-RU" dirty="0"/>
+          </a:p>
+          <a:p>
+            <a:r>
+              <a:rPr lang="ru-RU" dirty="0"/>
+              <a:t>Таким образом, площадка помогает преодолеть разобщённость: вместо того чтобы искать разрозненную информацию по разным источникам, участники могут оперативно получить помощь от коллег. Это особенно важно в такой технически сложной и динамичной сфере, как промышленная автоматизация.</a:t>
+            </a:r>
+          </a:p>
+          <a:p>
+            <a:r>
+              <a:rPr lang="ru-RU" dirty="0"/>
+              <a:t/>
+            </a:r>
+            <a:br>
+              <a:rPr lang="ru-RU" dirty="0"/>
+            </a:br>
+            <a:r>
+              <a:rPr lang="ru-RU" dirty="0"/>
+              <a:t> </a:t>
+            </a:r>
+            <a:r>
+              <a:rPr lang="ru-RU" dirty="0" smtClean="0"/>
+              <a:t>    Это</a:t>
+            </a:r>
+            <a:r>
+              <a:rPr lang="ru-RU" dirty="0"/>
+              <a:t> форум для специалистов в области АСУ ТП (автоматизированных систем управления технологическими процессами), электротехники и промышленной автоматизации.</a:t>
+            </a:r>
+          </a:p>
+          <a:p>
+            <a:pPr marL="536575" indent="-536575"/>
+            <a:r>
+              <a:rPr lang="ru-RU" b="1" dirty="0"/>
+              <a:t>Какие проблемы помогает </a:t>
+            </a:r>
+            <a:r>
+              <a:rPr lang="ru-RU" b="1" dirty="0" smtClean="0"/>
+              <a:t>решить</a:t>
+            </a:r>
+            <a:r>
+              <a:rPr lang="en-US" b="1" dirty="0" smtClean="0"/>
               <a:t>:</a:t>
             </a:r>
-            <a:r>
-              <a:rPr lang="ru-RU" sz="4400" dirty="0"/>
+            <a:endParaRPr lang="ru-RU" b="1" dirty="0"/>
+          </a:p>
+          <a:p>
+            <a:r>
+              <a:rPr lang="ru-RU" dirty="0"/>
+              <a:t>Форум закрывает сразу несколько задач:</a:t>
+            </a:r>
+          </a:p>
+          <a:p>
+            <a:r>
+              <a:rPr lang="en-US" b="1" dirty="0" smtClean="0"/>
+              <a:t>     </a:t>
+            </a:r>
+            <a:r>
+              <a:rPr lang="ru-RU" b="1" dirty="0" smtClean="0"/>
+              <a:t>Поиск</a:t>
+            </a:r>
+            <a:r>
+              <a:rPr lang="ru-RU" b="1" dirty="0"/>
+              <a:t> решений технических проблем.</a:t>
+            </a:r>
+            <a:r>
+              <a:rPr lang="ru-RU" dirty="0"/>
+              <a:t> На форуме разбирают сбои и нюансы работы оборудования и ПО — например, проблемы с SCADA-системами, ПЛК (программируемыми логическими контроллерами), интерфейсами и протоколами связи.</a:t>
+            </a:r>
+          </a:p>
+          <a:p>
+            <a:r>
+              <a:rPr lang="en-US" b="1" dirty="0" smtClean="0"/>
+              <a:t>           </a:t>
+            </a:r>
+            <a:r>
+              <a:rPr lang="ru-RU" b="1" dirty="0" smtClean="0"/>
+              <a:t>Обмен</a:t>
+            </a:r>
+            <a:r>
+              <a:rPr lang="ru-RU" b="1" dirty="0"/>
+              <a:t> опытом по оборудованию и софту.</a:t>
+            </a:r>
+            <a:r>
+              <a:rPr lang="ru-RU" dirty="0"/>
+              <a:t> Обсуждают решения на базе </a:t>
+            </a:r>
+            <a:r>
+              <a:rPr lang="ru-RU" dirty="0" err="1"/>
+              <a:t>Siemens</a:t>
+            </a:r>
+            <a:r>
+              <a:rPr lang="ru-RU" dirty="0"/>
+              <a:t>, </a:t>
+            </a:r>
+            <a:r>
+              <a:rPr lang="ru-RU" dirty="0" err="1"/>
+              <a:t>Beckhoff</a:t>
+            </a:r>
+            <a:r>
+              <a:rPr lang="ru-RU" dirty="0"/>
+              <a:t>, ОВЕН, </a:t>
+            </a:r>
+            <a:r>
+              <a:rPr lang="ru-RU" dirty="0" err="1"/>
+              <a:t>DeltaV</a:t>
+            </a:r>
+            <a:r>
+              <a:rPr lang="ru-RU" dirty="0"/>
+              <a:t>, </a:t>
+            </a:r>
+            <a:r>
+              <a:rPr lang="ru-RU" dirty="0" err="1"/>
+              <a:t>Mitsubishi</a:t>
+            </a:r>
+            <a:r>
+              <a:rPr lang="ru-RU" dirty="0"/>
+              <a:t> и др., а также работу в средах типа TIA </a:t>
+            </a:r>
+            <a:r>
+              <a:rPr lang="ru-RU" dirty="0" err="1"/>
+              <a:t>Portal</a:t>
+            </a:r>
+            <a:r>
+              <a:rPr lang="ru-RU" dirty="0"/>
+              <a:t>, EPLAN и т. п.</a:t>
+            </a:r>
+          </a:p>
+          <a:p>
+            <a:r>
+              <a:rPr lang="ru-RU" b="1" dirty="0"/>
+              <a:t>Консультации по проектированию и наладке.</a:t>
+            </a:r>
+            <a:r>
+              <a:rPr lang="ru-RU" dirty="0"/>
+              <a:t> Участники помогают с выбором компонентов, </a:t>
+            </a:r>
+            <a:r>
+              <a:rPr lang="ru-RU" dirty="0" err="1"/>
+              <a:t>схемотехникой</a:t>
+            </a:r>
+            <a:r>
+              <a:rPr lang="ru-RU" dirty="0"/>
+              <a:t>, настройкой алгоритмов управления, вопросами КИП (контрольно-измерительных приборов).</a:t>
+            </a:r>
+          </a:p>
+          <a:p>
+            <a:r>
+              <a:rPr lang="ru-RU" b="1" dirty="0"/>
+              <a:t>Разбор нормативных и проектных вопросов.</a:t>
+            </a:r>
+            <a:r>
+              <a:rPr lang="ru-RU" dirty="0"/>
               <a:t> </a:t>
             </a:r>
             <a:r>
-              <a:rPr lang="ru-RU" sz="4400" dirty="0" smtClean="0"/>
-              <a:t>класс</a:t>
-            </a:r>
-            <a:r>
-              <a:rPr lang="ru-RU" sz="4400" dirty="0"/>
-              <a:t> </a:t>
-            </a:r>
-            <a:r>
-              <a:rPr lang="ru-RU" sz="4400" dirty="0" err="1"/>
-              <a:t>Article</a:t>
-            </a:r>
-            <a:r>
-              <a:rPr lang="ru-RU" sz="4400" dirty="0"/>
-              <a:t> — это будущая таблица в БД. Каждое поле (</a:t>
-            </a:r>
-            <a:r>
-              <a:rPr lang="ru-RU" sz="4400" dirty="0" err="1"/>
-              <a:t>title</a:t>
-            </a:r>
-            <a:r>
-              <a:rPr lang="ru-RU" sz="4400" dirty="0"/>
-              <a:t>, </a:t>
-            </a:r>
-            <a:r>
-              <a:rPr lang="ru-RU" sz="4400" dirty="0" err="1"/>
-              <a:t>content</a:t>
-            </a:r>
-            <a:r>
-              <a:rPr lang="ru-RU" sz="4400" dirty="0"/>
-              <a:t>) — это колонка в этой таблице</a:t>
-            </a:r>
-            <a:r>
-              <a:rPr lang="ru-RU" sz="4400" dirty="0" smtClean="0"/>
-              <a:t>.</a:t>
-            </a:r>
-          </a:p>
-          <a:p>
-            <a:pPr marL="625475">
-              <a:buNone/>
-            </a:pPr>
-            <a:endParaRPr lang="ru-RU" sz="4400" dirty="0"/>
-          </a:p>
-          <a:p>
-            <a:pPr marL="625475">
-              <a:buNone/>
-            </a:pPr>
-            <a:r>
-              <a:rPr lang="ru-RU" sz="4400" b="1" dirty="0" smtClean="0"/>
-              <a:t>2</a:t>
-            </a:r>
-            <a:r>
-              <a:rPr lang="ru-RU" sz="4400" b="1" dirty="0"/>
-              <a:t>. </a:t>
-            </a:r>
-            <a:r>
-              <a:rPr lang="ru-RU" sz="4400" b="1" dirty="0" err="1"/>
-              <a:t>Python</a:t>
-            </a:r>
-            <a:r>
-              <a:rPr lang="ru-RU" sz="4400" b="1" dirty="0"/>
-              <a:t>-синтаксис вместо SQL</a:t>
-            </a:r>
-          </a:p>
-          <a:p>
-            <a:pPr marL="625475">
-              <a:buNone/>
-            </a:pPr>
-            <a:r>
-              <a:rPr lang="ru-RU" sz="4400" dirty="0" smtClean="0"/>
-              <a:t>    ORM </a:t>
-            </a:r>
-            <a:r>
-              <a:rPr lang="ru-RU" sz="4400" dirty="0"/>
-              <a:t>позволяет манипулировать данными с помощью обычных методов </a:t>
-            </a:r>
-            <a:r>
-              <a:rPr lang="ru-RU" sz="4400" dirty="0" err="1"/>
-              <a:t>Python</a:t>
-            </a:r>
-            <a:r>
-              <a:rPr lang="ru-RU" sz="4400" dirty="0" smtClean="0"/>
-              <a:t>.</a:t>
-            </a:r>
-          </a:p>
-          <a:p>
-            <a:pPr marL="625475">
-              <a:buNone/>
-            </a:pPr>
-            <a:endParaRPr lang="ru-RU" sz="4400" dirty="0"/>
-          </a:p>
-          <a:p>
-            <a:pPr marL="625475">
-              <a:buNone/>
-            </a:pPr>
-            <a:r>
-              <a:rPr lang="ru-RU" sz="4400" b="1" dirty="0" smtClean="0"/>
-              <a:t>3</a:t>
-            </a:r>
-            <a:r>
-              <a:rPr lang="ru-RU" sz="4400" b="1" dirty="0"/>
-              <a:t>. Работа со связями (</a:t>
-            </a:r>
-            <a:r>
-              <a:rPr lang="ru-RU" sz="4400" b="1" dirty="0" err="1"/>
-              <a:t>Relationships</a:t>
-            </a:r>
-            <a:r>
-              <a:rPr lang="ru-RU" sz="4400" b="1" dirty="0"/>
-              <a:t>)</a:t>
-            </a:r>
-          </a:p>
-          <a:p>
-            <a:pPr marL="625475">
-              <a:buNone/>
-            </a:pPr>
-            <a:r>
-              <a:rPr lang="ru-RU" sz="4400" dirty="0" smtClean="0"/>
-              <a:t>    Это </a:t>
-            </a:r>
-            <a:r>
-              <a:rPr lang="ru-RU" sz="4400" dirty="0"/>
-              <a:t>самая мощная часть ORM. Она связывает разные таблицы между собой:</a:t>
-            </a:r>
-          </a:p>
-          <a:p>
-            <a:pPr marL="625475">
-              <a:buNone/>
-            </a:pPr>
-            <a:r>
-              <a:rPr lang="ru-RU" sz="4400" b="1" dirty="0" smtClean="0"/>
+              <a:rPr lang="ru-RU" dirty="0" smtClean="0"/>
+              <a:t>  </a:t>
+            </a:r>
+            <a:r>
+              <a:rPr lang="ru-RU" dirty="0"/>
+              <a:t>Цели и задачи проекта: Формулировка целей и конкретных задач, которые были поставлены перед началом работы.</a:t>
+            </a:r>
+          </a:p>
+          <a:p>
+            <a:endParaRPr lang="ru-RU" b="1" dirty="0"/>
+          </a:p>
+          <a:p>
+            <a:r>
+              <a:rPr lang="en-US" dirty="0" smtClean="0"/>
+              <a:t>     </a:t>
+            </a:r>
+            <a:r>
+              <a:rPr lang="ru-RU" dirty="0" smtClean="0"/>
+              <a:t>Создание Новостного портала АСУТП </a:t>
+            </a:r>
+            <a:r>
+              <a:rPr lang="ru-RU" dirty="0"/>
+              <a:t>было направлено на решение ряда задач, связанных с потребностями профессионального сообщества в области АСУ ТП (автоматизированных систем управления технологическими процессами) и промышленной автоматизации</a:t>
+            </a:r>
+            <a:r>
+              <a:rPr lang="ru-RU" dirty="0" smtClean="0"/>
+              <a:t>. Что крайне не обходимо в последнее время в связи с санкциями в области АСУТП, которые были запущенны западными странами против России. Многие ведущие мировые бренды такие как </a:t>
+            </a:r>
+            <a:r>
+              <a:rPr lang="en-US" dirty="0" smtClean="0"/>
+              <a:t>Siemens, Yokogawa, Honeywell </a:t>
+            </a:r>
+            <a:r>
+              <a:rPr lang="ru-RU" dirty="0" smtClean="0"/>
+              <a:t>и другие ушли с Российского рынка, прекратили техническую поддержку хотя оборудование этих брендов продолжает функционировать в Российской промышленности.</a:t>
+            </a:r>
+            <a:endParaRPr lang="ru-RU" dirty="0"/>
+          </a:p>
+          <a:p>
+            <a:r>
+              <a:rPr lang="en-US" b="1" dirty="0" smtClean="0"/>
               <a:t>    </a:t>
             </a:r>
             <a:r>
-              <a:rPr lang="ru-RU" sz="4400" b="1" dirty="0" err="1" smtClean="0"/>
-              <a:t>ForeignKey</a:t>
-            </a:r>
-            <a:r>
-              <a:rPr lang="ru-RU" sz="4400" dirty="0"/>
-              <a:t>: Связывает статью с автором (</a:t>
-            </a:r>
-            <a:r>
-              <a:rPr lang="ru-RU" sz="4400" dirty="0" err="1"/>
-              <a:t>User</a:t>
-            </a:r>
-            <a:r>
-              <a:rPr lang="ru-RU" sz="4400" dirty="0"/>
-              <a:t>). Вы можете легко получить автора статьи: </a:t>
-            </a:r>
-            <a:r>
-              <a:rPr lang="ru-RU" sz="4400" dirty="0" err="1"/>
-              <a:t>article.author.username</a:t>
-            </a:r>
-            <a:r>
-              <a:rPr lang="ru-RU" sz="4400" dirty="0"/>
-              <a:t>.</a:t>
-            </a:r>
-          </a:p>
-          <a:p>
-            <a:pPr marL="625475">
-              <a:buNone/>
-            </a:pPr>
-            <a:r>
-              <a:rPr lang="ru-RU" sz="4400" b="1" dirty="0" smtClean="0"/>
-              <a:t>    </a:t>
-            </a:r>
-            <a:r>
-              <a:rPr lang="ru-RU" sz="4400" b="1" dirty="0" err="1" smtClean="0"/>
-              <a:t>ManyToManyField</a:t>
-            </a:r>
-            <a:r>
-              <a:rPr lang="ru-RU" sz="4400" dirty="0"/>
-              <a:t>: Связывает статью с тегами. Одна статья может иметь много тегов, и один тег может быть у </a:t>
-            </a:r>
-            <a:r>
-              <a:rPr lang="ru-RU" sz="4400" dirty="0" smtClean="0"/>
-              <a:t>многих статей</a:t>
-            </a:r>
-            <a:r>
-              <a:rPr lang="ru-RU" sz="4400" dirty="0"/>
-              <a:t>.</a:t>
-            </a:r>
-          </a:p>
-          <a:p>
-            <a:pPr marL="625475"/>
-            <a:endParaRPr lang="ru-RU" sz="4400" dirty="0"/>
-          </a:p>
-          <a:p>
-            <a:pPr marL="625475">
-              <a:buNone/>
-            </a:pPr>
-            <a:r>
-              <a:rPr lang="ru-RU" sz="4400" b="1" dirty="0"/>
-              <a:t>4. Миграции: Контроль версий </a:t>
-            </a:r>
-            <a:r>
-              <a:rPr lang="ru-RU" sz="4400" b="1" dirty="0" smtClean="0"/>
-              <a:t>базы</a:t>
-            </a:r>
-          </a:p>
-          <a:p>
-            <a:pPr marL="625475">
-              <a:buNone/>
-            </a:pPr>
-            <a:endParaRPr lang="ru-RU" sz="4400" b="1" dirty="0"/>
-          </a:p>
-          <a:p>
-            <a:pPr marL="625475">
-              <a:buNone/>
-            </a:pPr>
-            <a:r>
-              <a:rPr lang="ru-RU" sz="4400" b="1" dirty="0" smtClean="0"/>
-              <a:t>5</a:t>
-            </a:r>
-            <a:r>
-              <a:rPr lang="ru-RU" sz="4400" b="1" dirty="0"/>
-              <a:t>. Безопасность</a:t>
-            </a:r>
-          </a:p>
-          <a:p>
-            <a:pPr marL="625475">
-              <a:buNone/>
-            </a:pPr>
-            <a:r>
-              <a:rPr lang="ru-RU" sz="4400" dirty="0" err="1"/>
-              <a:t>Django</a:t>
-            </a:r>
-            <a:r>
-              <a:rPr lang="ru-RU" sz="4400" dirty="0"/>
-              <a:t> ORM автоматически защищает ваш сайт от </a:t>
-            </a:r>
-            <a:r>
-              <a:rPr lang="ru-RU" sz="4400" b="1" dirty="0"/>
-              <a:t>SQL-инъекций</a:t>
-            </a:r>
-            <a:r>
-              <a:rPr lang="ru-RU" sz="4400" dirty="0"/>
-              <a:t> (популярный вид хакерских атак), потому что она сама правильно «экранирует» все данные, которые пользователи вводят в строку поиска.</a:t>
-            </a:r>
-          </a:p>
-          <a:p>
-            <a:pPr marL="625475"/>
-            <a:endParaRPr lang="ru-RU" sz="4400" dirty="0" smtClean="0"/>
-          </a:p>
-          <a:p>
-            <a:pPr marL="0" indent="0">
-              <a:buNone/>
-            </a:pPr>
-            <a:r>
-              <a:rPr lang="ru-RU" sz="4400" b="1" dirty="0" err="1" smtClean="0"/>
-              <a:t>Pagination</a:t>
-            </a:r>
-            <a:r>
-              <a:rPr lang="ru-RU" sz="4400" b="1" dirty="0" smtClean="0"/>
-              <a:t> (</a:t>
-            </a:r>
-            <a:r>
-              <a:rPr lang="ru-RU" sz="4400" b="1" dirty="0" err="1" smtClean="0"/>
-              <a:t>django.core.paginator</a:t>
-            </a:r>
-            <a:r>
-              <a:rPr lang="ru-RU" sz="4400" b="1" dirty="0" smtClean="0"/>
-              <a:t>):</a:t>
-            </a:r>
-          </a:p>
-          <a:p>
-            <a:pPr marL="0" indent="0">
-              <a:buNone/>
-            </a:pPr>
-            <a:r>
-              <a:rPr lang="ru-RU" sz="4400" b="1" dirty="0" smtClean="0"/>
-              <a:t>Зачем</a:t>
-            </a:r>
-            <a:r>
-              <a:rPr lang="ru-RU" sz="4400" dirty="0" smtClean="0"/>
-              <a:t>: Разделение длинного списка новостей на страницы </a:t>
-            </a:r>
-            <a:r>
-              <a:rPr lang="ru-RU" sz="4400" dirty="0" smtClean="0"/>
-              <a:t>, что бы</a:t>
-            </a:r>
-            <a:r>
-              <a:rPr lang="ru-RU" sz="4400" dirty="0" smtClean="0"/>
-              <a:t> сайт </a:t>
-            </a:r>
-            <a:r>
-              <a:rPr lang="ru-RU" sz="4400" dirty="0" smtClean="0"/>
-              <a:t>не «тормозил» при наличии сотен статей.</a:t>
+              <a:rPr lang="ru-RU" b="1" dirty="0" smtClean="0"/>
+              <a:t>Возможные </a:t>
+            </a:r>
+            <a:r>
+              <a:rPr lang="ru-RU" b="1" dirty="0"/>
+              <a:t>цели проекта:</a:t>
+            </a:r>
+            <a:endParaRPr lang="ru-RU" dirty="0"/>
+          </a:p>
+          <a:p>
+            <a:r>
+              <a:rPr lang="ru-RU" dirty="0"/>
+              <a:t>Создание площадки для общения и обмена опытом между специалистами в сфере АСУ ТП, электротехники и промышленной автоматизации.</a:t>
+            </a:r>
+          </a:p>
+          <a:p>
+            <a:r>
+              <a:rPr lang="ru-RU" dirty="0"/>
+              <a:t>Содействие в решении технических проблем и поиске решений в области автоматизации производства.</a:t>
+            </a:r>
+          </a:p>
+          <a:p>
+            <a:r>
+              <a:rPr lang="ru-RU" dirty="0"/>
+              <a:t>Формирование базы знаний по различным аспектам проектирования, наладки, эксплуатации и модернизации систем управления.</a:t>
+            </a:r>
+          </a:p>
+          <a:p>
+            <a:r>
+              <a:rPr lang="ru-RU" dirty="0"/>
+              <a:t>Поддержка профессионального развития инженеров, студентов и начинающих специалистов через обсуждение практических кейсов и доступ к экспертному мнению.</a:t>
+            </a:r>
+          </a:p>
+          <a:p>
+            <a:r>
+              <a:rPr lang="ru-RU" dirty="0"/>
+              <a:t>Создание сообщества, где участники могут обсуждать актуальные вопросы, включая нормативные требования, стандарты, безопасность систем и новые технологии.</a:t>
             </a:r>
           </a:p>
           <a:p>
@@ -4621,7 +5586,7 @@
     </p:spTree>
     <p:extLst>
       <p:ext uri="{BB962C8B-B14F-4D97-AF65-F5344CB8AC3E}">
-        <p14:creationId xmlns:p14="http://schemas.microsoft.com/office/powerpoint/2010/main" val="2216550114"/>
+        <p14:creationId xmlns:p14="http://schemas.microsoft.com/office/powerpoint/2010/main" val="3252941751"/>
       </p:ext>
     </p:extLst>
   </p:cSld>
@@ -4665,12 +5630,7 @@
             <p:ph type="title"/>
           </p:nvPr>
         </p:nvSpPr>
-        <p:spPr>
-          <a:xfrm>
-            <a:off x="539552" y="260648"/>
-            <a:ext cx="8229600" cy="703840"/>
-          </a:xfrm>
-        </p:spPr>
+        <p:spPr/>
         <p:txBody>
           <a:bodyPr>
             <a:normAutofit fontScale="90000"/>
@@ -4678,551 +5638,85 @@
           <a:lstStyle/>
           <a:p>
             <a:r>
-              <a:rPr lang="ru-RU" b="1" u="sng" dirty="0"/>
-              <a:t>Инструкция по запуску</a:t>
+              <a:rPr lang="ru-RU" b="1" dirty="0">
+                <a:effectLst/>
+              </a:rPr>
+              <a:t>Постановка задачи / Проблематика </a:t>
             </a:r>
             <a:endParaRPr lang="ru-RU" dirty="0"/>
           </a:p>
         </p:txBody>
       </p:sp>
-      <p:sp>
-        <p:nvSpPr>
-          <p:cNvPr id="3" name="Объект 2"/>
-          <p:cNvSpPr>
-            <a:spLocks noGrp="1"/>
-          </p:cNvSpPr>
+      <p:pic>
+        <p:nvPicPr>
+          <p:cNvPr id="3074" name="Picture 2"/>
+          <p:cNvPicPr>
+            <a:picLocks noGrp="1" noChangeAspect="1" noChangeArrowheads="1"/>
+          </p:cNvPicPr>
           <p:nvPr>
             <p:ph idx="1"/>
           </p:nvPr>
-        </p:nvSpPr>
-        <p:spPr>
+        </p:nvPicPr>
+        <p:blipFill>
+          <a:blip r:embed="rId2">
+            <a:extLst>
+              <a:ext uri="{28A0092B-C50C-407E-A947-70E740481C1C}">
+                <a14:useLocalDpi xmlns:a14="http://schemas.microsoft.com/office/drawing/2010/main" val="0"/>
+              </a:ext>
+            </a:extLst>
+          </a:blip>
+          <a:srcRect/>
+          <a:stretch>
+            <a:fillRect/>
+          </a:stretch>
+        </p:blipFill>
+        <p:spPr bwMode="auto">
           <a:xfrm>
-            <a:off x="467544" y="1052736"/>
-            <a:ext cx="8229600" cy="5040560"/>
+            <a:off x="1331641" y="1484784"/>
+            <a:ext cx="5904656" cy="5112568"/>
           </a:xfrm>
+          <a:prstGeom prst="rect">
+            <a:avLst/>
+          </a:prstGeom>
+          <a:noFill/>
+          <a:ln>
+            <a:noFill/>
+          </a:ln>
+          <a:effectLst/>
+          <a:extLst>
+            <a:ext uri="{909E8E84-426E-40DD-AFC4-6F175D3DCCD1}">
+              <a14:hiddenFill xmlns:a14="http://schemas.microsoft.com/office/drawing/2010/main">
+                <a:solidFill>
+                  <a:schemeClr val="accent1"/>
+                </a:solidFill>
+              </a14:hiddenFill>
+            </a:ext>
+            <a:ext uri="{91240B29-F687-4F45-9708-019B960494DF}">
+              <a14:hiddenLine xmlns:a14="http://schemas.microsoft.com/office/drawing/2010/main" w="9525">
+                <a:solidFill>
+                  <a:schemeClr val="tx1"/>
+                </a:solidFill>
+                <a:miter lim="800000"/>
+                <a:headEnd/>
+                <a:tailEnd/>
+              </a14:hiddenLine>
+            </a:ext>
+            <a:ext uri="{AF507438-7753-43E0-B8FC-AC1667EBCBE1}">
+              <a14:hiddenEffects xmlns:a14="http://schemas.microsoft.com/office/drawing/2010/main">
+                <a:effectLst>
+                  <a:outerShdw dist="35921" dir="2700000" algn="ctr" rotWithShape="0">
+                    <a:schemeClr val="bg2"/>
+                  </a:outerShdw>
+                </a:effectLst>
+              </a14:hiddenEffects>
+            </a:ext>
+          </a:extLst>
         </p:spPr>
-        <p:txBody>
-          <a:bodyPr>
-            <a:noAutofit/>
-          </a:bodyPr>
-          <a:lstStyle/>
-          <a:p>
-            <a:pPr marL="0" indent="0">
-              <a:buNone/>
-            </a:pPr>
-            <a:endParaRPr lang="ru-RU" sz="900" u="sng" dirty="0"/>
-          </a:p>
-          <a:p>
-            <a:pPr marL="0" indent="0">
-              <a:buNone/>
-            </a:pPr>
-            <a:r>
-              <a:rPr lang="ru-RU" sz="1000" dirty="0"/>
-              <a:t>Устанавливаем библиотеку </a:t>
-            </a:r>
-            <a:r>
-              <a:rPr lang="ru-RU" sz="1000" b="1" dirty="0" err="1"/>
-              <a:t>pip</a:t>
-            </a:r>
-            <a:r>
-              <a:rPr lang="ru-RU" sz="1000" b="1" dirty="0"/>
-              <a:t> </a:t>
-            </a:r>
-            <a:r>
-              <a:rPr lang="ru-RU" sz="1000" b="1" dirty="0" err="1"/>
-              <a:t>install</a:t>
-            </a:r>
-            <a:r>
-              <a:rPr lang="ru-RU" sz="1000" b="1" dirty="0"/>
-              <a:t> </a:t>
-            </a:r>
-            <a:r>
-              <a:rPr lang="ru-RU" sz="1000" b="1" dirty="0" err="1"/>
-              <a:t>Pillow</a:t>
-            </a:r>
-            <a:endParaRPr lang="ru-RU" sz="1000" b="1" dirty="0"/>
-          </a:p>
-          <a:p>
-            <a:endParaRPr lang="ru-RU" sz="1000" dirty="0"/>
-          </a:p>
-          <a:p>
-            <a:pPr marL="0" indent="0">
-              <a:buNone/>
-            </a:pPr>
-            <a:r>
-              <a:rPr lang="ru-RU" sz="1000" u="sng" dirty="0" err="1" smtClean="0"/>
-              <a:t>Pillow</a:t>
-            </a:r>
-            <a:r>
-              <a:rPr lang="ru-RU" sz="1000" u="sng" dirty="0" smtClean="0"/>
-              <a:t> </a:t>
-            </a:r>
-            <a:r>
-              <a:rPr lang="ru-RU" sz="1000" u="sng" dirty="0"/>
-              <a:t>играет  </a:t>
-            </a:r>
-            <a:r>
-              <a:rPr lang="ru-RU" sz="1000" u="sng" dirty="0" smtClean="0"/>
-              <a:t>роль в  </a:t>
-            </a:r>
-            <a:r>
-              <a:rPr lang="ru-RU" sz="1000" u="sng" dirty="0"/>
-              <a:t>коде:</a:t>
-            </a:r>
-          </a:p>
-          <a:p>
-            <a:pPr marL="0" indent="0">
-              <a:buNone/>
-            </a:pPr>
-            <a:r>
-              <a:rPr lang="ru-RU" sz="1000" dirty="0"/>
-              <a:t>1. </a:t>
-            </a:r>
-            <a:r>
-              <a:rPr lang="ru-RU" sz="1000" dirty="0" err="1"/>
-              <a:t>Валидация</a:t>
-            </a:r>
-            <a:r>
-              <a:rPr lang="ru-RU" sz="1000" dirty="0"/>
-              <a:t> данных (Проверка)</a:t>
-            </a:r>
-          </a:p>
-          <a:p>
-            <a:pPr marL="0" indent="0">
-              <a:buNone/>
-            </a:pPr>
-            <a:r>
-              <a:rPr lang="ru-RU" sz="1000" dirty="0" smtClean="0"/>
-              <a:t>Библиотека </a:t>
-            </a:r>
-            <a:r>
-              <a:rPr lang="ru-RU" sz="1000" dirty="0"/>
-              <a:t>проверяет:</a:t>
-            </a:r>
-          </a:p>
-          <a:p>
-            <a:pPr marL="0" indent="0">
-              <a:buNone/>
-            </a:pPr>
-            <a:r>
-              <a:rPr lang="ru-RU" sz="1000" dirty="0"/>
-              <a:t>Является ли загруженный файл настоящим изображением, а не текстовым файлом с расширением .</a:t>
-            </a:r>
-            <a:r>
-              <a:rPr lang="ru-RU" sz="1000" dirty="0" err="1"/>
-              <a:t>jpg</a:t>
-            </a:r>
-            <a:r>
-              <a:rPr lang="ru-RU" sz="1000" dirty="0"/>
-              <a:t>.</a:t>
-            </a:r>
-          </a:p>
-          <a:p>
-            <a:pPr marL="0" indent="0">
-              <a:buNone/>
-            </a:pPr>
-            <a:r>
-              <a:rPr lang="ru-RU" sz="1000" dirty="0"/>
-              <a:t>Не поврежден ли файл.</a:t>
-            </a:r>
-          </a:p>
-          <a:p>
-            <a:pPr marL="0" indent="0">
-              <a:buNone/>
-            </a:pPr>
-            <a:r>
-              <a:rPr lang="ru-RU" sz="1000" dirty="0"/>
-              <a:t>Каковы его размеры (ширина и высота).</a:t>
-            </a:r>
-          </a:p>
-          <a:p>
-            <a:pPr marL="0" indent="0">
-              <a:buNone/>
-            </a:pPr>
-            <a:r>
-              <a:rPr lang="ru-RU" sz="1000" dirty="0"/>
-              <a:t>2. Чтение метаданных</a:t>
-            </a:r>
-          </a:p>
-          <a:p>
-            <a:pPr marL="0" indent="0">
-              <a:buNone/>
-            </a:pPr>
-            <a:r>
-              <a:rPr lang="ru-RU" sz="1000" dirty="0" err="1"/>
-              <a:t>Pillow</a:t>
-            </a:r>
-            <a:r>
-              <a:rPr lang="ru-RU" sz="1000" dirty="0"/>
-              <a:t> позволяет </a:t>
-            </a:r>
-            <a:r>
-              <a:rPr lang="ru-RU" sz="1000" dirty="0" err="1"/>
-              <a:t>Django</a:t>
-            </a:r>
-            <a:r>
-              <a:rPr lang="ru-RU" sz="1000" dirty="0"/>
-              <a:t> извлекать информацию о картинке. Например, если вы захотите выводить на сайте разрешение фото или дату съемки из EXIF-данных, </a:t>
-            </a:r>
-            <a:r>
-              <a:rPr lang="ru-RU" sz="1000" dirty="0" err="1"/>
-              <a:t>Pillow</a:t>
-            </a:r>
-            <a:r>
-              <a:rPr lang="ru-RU" sz="1000" dirty="0"/>
-              <a:t> сделает это за вас</a:t>
-            </a:r>
-            <a:r>
-              <a:rPr lang="ru-RU" sz="1000" dirty="0" smtClean="0"/>
-              <a:t>.</a:t>
-            </a:r>
-          </a:p>
-          <a:p>
-            <a:pPr marL="0" indent="0">
-              <a:buNone/>
-            </a:pPr>
-            <a:r>
-              <a:rPr lang="ru-RU" sz="1000" b="1" dirty="0"/>
-              <a:t>Запуск:</a:t>
-            </a:r>
-            <a:endParaRPr lang="ru-RU" sz="1000" dirty="0"/>
-          </a:p>
-          <a:p>
-            <a:pPr marL="0" indent="0">
-              <a:buNone/>
-            </a:pPr>
-            <a:r>
-              <a:rPr lang="ru-RU" sz="1000" b="1" dirty="0" err="1"/>
-              <a:t>python</a:t>
-            </a:r>
-            <a:r>
-              <a:rPr lang="ru-RU" sz="1000" b="1" dirty="0"/>
-              <a:t> manage.py </a:t>
-            </a:r>
-            <a:r>
-              <a:rPr lang="ru-RU" sz="1000" b="1" dirty="0" err="1"/>
-              <a:t>makemigrations</a:t>
-            </a:r>
-            <a:endParaRPr lang="ru-RU" sz="1000" b="1" dirty="0"/>
-          </a:p>
-          <a:p>
-            <a:pPr marL="0" indent="0">
-              <a:buNone/>
-            </a:pPr>
-            <a:r>
-              <a:rPr lang="ru-RU" sz="1000" b="1" dirty="0" err="1"/>
-              <a:t>python</a:t>
-            </a:r>
-            <a:r>
-              <a:rPr lang="ru-RU" sz="1000" b="1" dirty="0"/>
-              <a:t> manage.py </a:t>
-            </a:r>
-            <a:r>
-              <a:rPr lang="ru-RU" sz="1000" b="1" dirty="0" err="1"/>
-              <a:t>migrate</a:t>
-            </a:r>
-            <a:endParaRPr lang="ru-RU" sz="1000" b="1" dirty="0"/>
-          </a:p>
-          <a:p>
-            <a:pPr marL="0" indent="0">
-              <a:buNone/>
-            </a:pPr>
-            <a:endParaRPr lang="ru-RU" sz="1000" dirty="0"/>
-          </a:p>
-          <a:p>
-            <a:endParaRPr lang="ru-RU" sz="1000" dirty="0"/>
-          </a:p>
-          <a:p>
-            <a:pPr marL="0" indent="0">
-              <a:buNone/>
-            </a:pPr>
-            <a:r>
-              <a:rPr lang="ru-RU" sz="1000" u="sng" dirty="0" smtClean="0"/>
-              <a:t>Роль </a:t>
-            </a:r>
-            <a:r>
-              <a:rPr lang="ru-RU" sz="1000" u="sng" dirty="0" err="1"/>
-              <a:t>makemigrations</a:t>
-            </a:r>
-            <a:r>
-              <a:rPr lang="ru-RU" sz="1000" u="sng" dirty="0"/>
-              <a:t> и  </a:t>
-            </a:r>
-            <a:r>
-              <a:rPr lang="ru-RU" sz="1000" u="sng" dirty="0" err="1"/>
-              <a:t>migrate</a:t>
-            </a:r>
-            <a:r>
-              <a:rPr lang="ru-RU" sz="1000" u="sng" dirty="0"/>
-              <a:t> </a:t>
-            </a:r>
-            <a:r>
-              <a:rPr lang="ru-RU" sz="1000" dirty="0"/>
-              <a:t>— синхронизировать то, что мы написали в коде (models.py), с тем, что реально хранится в файле базы данных (db.sqlite3).</a:t>
-            </a:r>
-          </a:p>
-          <a:p>
-            <a:pPr marL="0" indent="0">
-              <a:buNone/>
-            </a:pPr>
-            <a:r>
-              <a:rPr lang="ru-RU" sz="1000" dirty="0"/>
-              <a:t>1. </a:t>
-            </a:r>
-            <a:r>
-              <a:rPr lang="ru-RU" sz="1000" dirty="0" err="1"/>
-              <a:t>python</a:t>
-            </a:r>
-            <a:r>
-              <a:rPr lang="ru-RU" sz="1000" dirty="0"/>
-              <a:t> manage.py </a:t>
-            </a:r>
-            <a:r>
-              <a:rPr lang="ru-RU" sz="1000" dirty="0" err="1"/>
-              <a:t>makemigrations</a:t>
-            </a:r>
-            <a:endParaRPr lang="ru-RU" sz="1000" dirty="0"/>
-          </a:p>
-          <a:p>
-            <a:pPr marL="0" indent="0">
-              <a:buNone/>
-            </a:pPr>
-            <a:r>
-              <a:rPr lang="ru-RU" sz="1000" dirty="0"/>
-              <a:t>Роль: Создание «инструкции» по обновлению.</a:t>
-            </a:r>
-          </a:p>
-          <a:p>
-            <a:pPr marL="0" indent="0">
-              <a:buNone/>
-            </a:pPr>
-            <a:r>
-              <a:rPr lang="ru-RU" sz="1000" dirty="0"/>
-              <a:t>Что делает: </a:t>
-            </a:r>
-            <a:r>
-              <a:rPr lang="ru-RU" sz="1000" dirty="0" err="1"/>
-              <a:t>Django</a:t>
-            </a:r>
-            <a:r>
-              <a:rPr lang="ru-RU" sz="1000" dirty="0"/>
-              <a:t> сканирует ваши модели и ищет изменения (например, вы добавили поле </a:t>
-            </a:r>
-            <a:r>
-              <a:rPr lang="ru-RU" sz="1000" dirty="0" err="1"/>
-              <a:t>image</a:t>
-            </a:r>
-            <a:r>
-              <a:rPr lang="ru-RU" sz="1000" dirty="0"/>
-              <a:t> или изменили </a:t>
-            </a:r>
-            <a:r>
-              <a:rPr lang="ru-RU" sz="1000" dirty="0" err="1"/>
-              <a:t>max_length</a:t>
-            </a:r>
-            <a:r>
-              <a:rPr lang="ru-RU" sz="1000" dirty="0"/>
-              <a:t>).</a:t>
-            </a:r>
-          </a:p>
-          <a:p>
-            <a:pPr marL="0" indent="0">
-              <a:buNone/>
-            </a:pPr>
-            <a:r>
-              <a:rPr lang="ru-RU" sz="1000" dirty="0"/>
-              <a:t>Результат: В папке </a:t>
-            </a:r>
-            <a:r>
-              <a:rPr lang="ru-RU" sz="1000" dirty="0" err="1"/>
-              <a:t>migrations</a:t>
-            </a:r>
-            <a:r>
-              <a:rPr lang="ru-RU" sz="1000" dirty="0"/>
-              <a:t> внутри вашего приложения появляется новый файл (например, 0002_article_image.py).</a:t>
-            </a:r>
-          </a:p>
-          <a:p>
-            <a:pPr marL="0" indent="0">
-              <a:buNone/>
-            </a:pPr>
-            <a:r>
-              <a:rPr lang="ru-RU" sz="1000" dirty="0"/>
-              <a:t>Простыми словами: Это как чертеж или список покупок, который говорит базе: «Скоро нам нужно будет добавить новый столбец». На этом этапе в самой базе еще ничего не меняется.</a:t>
-            </a:r>
-          </a:p>
-          <a:p>
-            <a:pPr marL="0" indent="0">
-              <a:buNone/>
-            </a:pPr>
-            <a:r>
-              <a:rPr lang="ru-RU" sz="1000" dirty="0"/>
-              <a:t>2. </a:t>
-            </a:r>
-            <a:r>
-              <a:rPr lang="ru-RU" sz="1000" dirty="0" err="1"/>
-              <a:t>python</a:t>
-            </a:r>
-            <a:r>
-              <a:rPr lang="ru-RU" sz="1000" dirty="0"/>
-              <a:t> manage.py </a:t>
-            </a:r>
-            <a:r>
-              <a:rPr lang="ru-RU" sz="1000" dirty="0" err="1"/>
-              <a:t>migrate</a:t>
-            </a:r>
-            <a:endParaRPr lang="ru-RU" sz="1000" dirty="0"/>
-          </a:p>
-          <a:p>
-            <a:pPr marL="0" indent="0">
-              <a:buNone/>
-            </a:pPr>
-            <a:r>
-              <a:rPr lang="ru-RU" sz="1000" dirty="0"/>
-              <a:t>Роль: Выполнение «инструкции».</a:t>
-            </a:r>
-          </a:p>
-          <a:p>
-            <a:pPr marL="0" indent="0">
-              <a:buNone/>
-            </a:pPr>
-            <a:r>
-              <a:rPr lang="ru-RU" sz="1000" dirty="0"/>
-              <a:t>Что делает: </a:t>
-            </a:r>
-            <a:r>
-              <a:rPr lang="ru-RU" sz="1000" dirty="0" err="1"/>
-              <a:t>Django</a:t>
-            </a:r>
-            <a:r>
-              <a:rPr lang="ru-RU" sz="1000" dirty="0"/>
-              <a:t> берет файлы из папки </a:t>
-            </a:r>
-            <a:r>
-              <a:rPr lang="ru-RU" sz="1000" dirty="0" err="1"/>
-              <a:t>migrations</a:t>
-            </a:r>
-            <a:r>
-              <a:rPr lang="ru-RU" sz="1000" dirty="0"/>
-              <a:t>, которые еще не были применены, и превращает их в реальные SQL-запросы к базе данных.</a:t>
-            </a:r>
-          </a:p>
-          <a:p>
-            <a:pPr marL="0" indent="0">
-              <a:buNone/>
-            </a:pPr>
-            <a:r>
-              <a:rPr lang="ru-RU" sz="1000" dirty="0"/>
-              <a:t>Результат: В таблице </a:t>
-            </a:r>
-            <a:r>
-              <a:rPr lang="ru-RU" sz="1000" dirty="0" err="1"/>
-              <a:t>articles_article</a:t>
-            </a:r>
-            <a:r>
-              <a:rPr lang="ru-RU" sz="1000" dirty="0"/>
-              <a:t> физически появляется колонка </a:t>
-            </a:r>
-            <a:r>
-              <a:rPr lang="ru-RU" sz="1000" dirty="0" err="1"/>
-              <a:t>image</a:t>
-            </a:r>
-            <a:r>
-              <a:rPr lang="ru-RU" sz="1000" dirty="0"/>
-              <a:t>. </a:t>
-            </a:r>
-            <a:endParaRPr lang="ru-RU" sz="1000" dirty="0" smtClean="0"/>
-          </a:p>
-          <a:p>
-            <a:pPr marL="0" indent="0">
-              <a:buNone/>
-            </a:pPr>
-            <a:r>
-              <a:rPr lang="ru-RU" sz="1000" dirty="0" smtClean="0"/>
-              <a:t>Простыми </a:t>
-            </a:r>
-            <a:r>
-              <a:rPr lang="ru-RU" sz="1000" dirty="0"/>
-              <a:t>словами: Это строитель, который берет чертеж из первого шага и реально перестраивает стену (базу данных</a:t>
-            </a:r>
-            <a:r>
-              <a:rPr lang="ru-RU" sz="1000" dirty="0" smtClean="0"/>
-              <a:t>).</a:t>
-            </a:r>
-          </a:p>
-          <a:p>
-            <a:pPr marL="0" indent="0">
-              <a:buNone/>
-            </a:pPr>
-            <a:r>
-              <a:rPr lang="ru-RU" sz="1000" b="1" dirty="0" smtClean="0"/>
-              <a:t>Запуск: </a:t>
-            </a:r>
-            <a:r>
-              <a:rPr lang="ru-RU" sz="1000" b="1" dirty="0" err="1" smtClean="0"/>
-              <a:t>python</a:t>
-            </a:r>
-            <a:r>
-              <a:rPr lang="ru-RU" sz="1000" b="1" dirty="0" smtClean="0"/>
-              <a:t> manage.py </a:t>
-            </a:r>
-            <a:r>
-              <a:rPr lang="ru-RU" sz="1000" b="1" dirty="0" err="1" smtClean="0"/>
-              <a:t>runserver</a:t>
-            </a:r>
-            <a:endParaRPr lang="ru-RU" sz="1000" b="1" dirty="0" smtClean="0"/>
-          </a:p>
-          <a:p>
-            <a:endParaRPr lang="ru-RU" sz="1000" dirty="0"/>
-          </a:p>
-          <a:p>
-            <a:pPr marL="0" indent="0">
-              <a:buNone/>
-            </a:pPr>
-            <a:r>
-              <a:rPr lang="ru-RU" sz="1000" dirty="0"/>
-              <a:t>Регистрироваться можно прямо с сайта "</a:t>
-            </a:r>
-            <a:r>
-              <a:rPr lang="ru-RU" sz="1000" dirty="0" err="1"/>
-              <a:t>article</a:t>
-            </a:r>
-            <a:r>
-              <a:rPr lang="ru-RU" sz="1000" dirty="0"/>
-              <a:t>", не через  /</a:t>
-            </a:r>
-            <a:r>
-              <a:rPr lang="ru-RU" sz="1000" dirty="0" err="1"/>
-              <a:t>admin</a:t>
-            </a:r>
-            <a:r>
-              <a:rPr lang="ru-RU" sz="1000" dirty="0"/>
-              <a:t>.</a:t>
-            </a:r>
-          </a:p>
-          <a:p>
-            <a:pPr marL="0" indent="0">
-              <a:buNone/>
-            </a:pPr>
-            <a:r>
-              <a:rPr lang="ru-RU" sz="1000" dirty="0"/>
-              <a:t>Статьи добавляются через /</a:t>
-            </a:r>
-            <a:r>
-              <a:rPr lang="ru-RU" sz="1000" dirty="0" err="1"/>
-              <a:t>admin</a:t>
-            </a:r>
-            <a:r>
-              <a:rPr lang="ru-RU" sz="1000" dirty="0"/>
-              <a:t>.</a:t>
-            </a:r>
-          </a:p>
-        </p:txBody>
-      </p:sp>
+      </p:pic>
     </p:spTree>
     <p:extLst>
       <p:ext uri="{BB962C8B-B14F-4D97-AF65-F5344CB8AC3E}">
-        <p14:creationId xmlns:p14="http://schemas.microsoft.com/office/powerpoint/2010/main" val="1355040326"/>
+        <p14:creationId xmlns:p14="http://schemas.microsoft.com/office/powerpoint/2010/main" val="3597867858"/>
       </p:ext>
     </p:extLst>
   </p:cSld>
@@ -5268,86 +5762,233 @@
         </p:nvSpPr>
         <p:spPr/>
         <p:txBody>
-          <a:bodyPr/>
-          <a:lstStyle/>
-          <a:p>
-            <a:r>
-              <a:rPr lang="ru-RU" dirty="0" smtClean="0"/>
-              <a:t>Бизнес задача</a:t>
-            </a:r>
-            <a:endParaRPr lang="ru-RU" dirty="0"/>
-          </a:p>
-        </p:txBody>
-      </p:sp>
-      <p:sp>
-        <p:nvSpPr>
-          <p:cNvPr id="3" name="Объект 2"/>
-          <p:cNvSpPr>
-            <a:spLocks noGrp="1"/>
-          </p:cNvSpPr>
-          <p:nvPr>
-            <p:ph idx="1"/>
-          </p:nvPr>
-        </p:nvSpPr>
-        <p:spPr/>
-        <p:txBody>
           <a:bodyPr>
-            <a:normAutofit fontScale="85000" lnSpcReduction="20000"/>
+            <a:normAutofit fontScale="90000"/>
           </a:bodyPr>
           <a:lstStyle/>
           <a:p>
-            <a:pPr marL="0" indent="0">
-              <a:buNone/>
-            </a:pPr>
+            <a:r>
+              <a:rPr lang="ru-RU" b="1" dirty="0">
+                <a:effectLst/>
+              </a:rPr>
+              <a:t>Анализ предметной области / Аналоги </a:t>
+            </a:r>
             <a:endParaRPr lang="ru-RU" dirty="0"/>
           </a:p>
-          <a:p>
-            <a:pPr marL="0" indent="0">
-              <a:buNone/>
-            </a:pPr>
-            <a:r>
-              <a:rPr lang="ru-RU" dirty="0" smtClean="0"/>
-              <a:t>    </a:t>
-            </a:r>
-            <a:r>
-              <a:rPr lang="ru-RU" i="1" u="sng" dirty="0" smtClean="0"/>
-              <a:t>Программа </a:t>
-            </a:r>
-            <a:r>
-              <a:rPr lang="ru-RU" i="1" u="sng" dirty="0"/>
-              <a:t>автоматизирует процесс публикации и распространения контента. Она позволяет компании или сообществу:</a:t>
-            </a:r>
-          </a:p>
-          <a:p>
-            <a:r>
-              <a:rPr lang="ru-RU" dirty="0"/>
-              <a:t>Централизованно информировать аудиторию (новости, статьи, анонсы).</a:t>
-            </a:r>
-          </a:p>
-          <a:p>
-            <a:r>
-              <a:rPr lang="ru-RU" dirty="0"/>
-              <a:t>Повышать вовлеченность через систему комментариев и тегов.</a:t>
-            </a:r>
-          </a:p>
-          <a:p>
-            <a:r>
-              <a:rPr lang="ru-RU" dirty="0"/>
-              <a:t>Персонализировать опыт пользователя (возможность сохранять статьи в «Избранное»).</a:t>
-            </a:r>
-          </a:p>
-          <a:p>
-            <a:r>
-              <a:rPr lang="ru-RU" dirty="0"/>
-              <a:t>Разграничивать права: только доверенные лица (админы) создают контент, а пользователи его потребляют и обсуждают.</a:t>
-            </a:r>
+        </p:txBody>
+      </p:sp>
+      <p:pic>
+        <p:nvPicPr>
+          <p:cNvPr id="4099" name="Picture 3"/>
+          <p:cNvPicPr>
+            <a:picLocks noChangeAspect="1" noChangeArrowheads="1"/>
+          </p:cNvPicPr>
+          <p:nvPr/>
+        </p:nvPicPr>
+        <p:blipFill>
+          <a:blip r:embed="rId2">
+            <a:extLst>
+              <a:ext uri="{28A0092B-C50C-407E-A947-70E740481C1C}">
+                <a14:useLocalDpi xmlns:a14="http://schemas.microsoft.com/office/drawing/2010/main" val="0"/>
+              </a:ext>
+            </a:extLst>
+          </a:blip>
+          <a:srcRect/>
+          <a:stretch>
+            <a:fillRect/>
+          </a:stretch>
+        </p:blipFill>
+        <p:spPr bwMode="auto">
+          <a:xfrm>
+            <a:off x="395537" y="2837880"/>
+            <a:ext cx="8280919" cy="3308796"/>
+          </a:xfrm>
+          <a:prstGeom prst="rect">
+            <a:avLst/>
+          </a:prstGeom>
+          <a:noFill/>
+          <a:ln>
+            <a:noFill/>
+          </a:ln>
+          <a:effectLst/>
+          <a:extLst>
+            <a:ext uri="{909E8E84-426E-40DD-AFC4-6F175D3DCCD1}">
+              <a14:hiddenFill xmlns:a14="http://schemas.microsoft.com/office/drawing/2010/main">
+                <a:solidFill>
+                  <a:schemeClr val="accent1"/>
+                </a:solidFill>
+              </a14:hiddenFill>
+            </a:ext>
+            <a:ext uri="{91240B29-F687-4F45-9708-019B960494DF}">
+              <a14:hiddenLine xmlns:a14="http://schemas.microsoft.com/office/drawing/2010/main" w="9525">
+                <a:solidFill>
+                  <a:schemeClr val="tx1"/>
+                </a:solidFill>
+                <a:miter lim="800000"/>
+                <a:headEnd/>
+                <a:tailEnd/>
+              </a14:hiddenLine>
+            </a:ext>
+            <a:ext uri="{AF507438-7753-43E0-B8FC-AC1667EBCBE1}">
+              <a14:hiddenEffects xmlns:a14="http://schemas.microsoft.com/office/drawing/2010/main">
+                <a:effectLst>
+                  <a:outerShdw dist="35921" dir="2700000" algn="ctr" rotWithShape="0">
+                    <a:schemeClr val="bg2"/>
+                  </a:outerShdw>
+                </a:effectLst>
+              </a14:hiddenEffects>
+            </a:ext>
+          </a:extLst>
+        </p:spPr>
+      </p:pic>
+      <p:pic>
+        <p:nvPicPr>
+          <p:cNvPr id="4101" name="Picture 5"/>
+          <p:cNvPicPr>
+            <a:picLocks noGrp="1" noChangeAspect="1" noChangeArrowheads="1"/>
+          </p:cNvPicPr>
+          <p:nvPr>
+            <p:ph idx="1"/>
+          </p:nvPr>
+        </p:nvPicPr>
+        <p:blipFill>
+          <a:blip r:embed="rId3">
+            <a:extLst>
+              <a:ext uri="{28A0092B-C50C-407E-A947-70E740481C1C}">
+                <a14:useLocalDpi xmlns:a14="http://schemas.microsoft.com/office/drawing/2010/main" val="0"/>
+              </a:ext>
+            </a:extLst>
+          </a:blip>
+          <a:srcRect/>
+          <a:stretch>
+            <a:fillRect/>
+          </a:stretch>
+        </p:blipFill>
+        <p:spPr bwMode="auto">
+          <a:xfrm>
+            <a:off x="395537" y="2066066"/>
+            <a:ext cx="8229600" cy="750854"/>
+          </a:xfrm>
+          <a:prstGeom prst="rect">
+            <a:avLst/>
+          </a:prstGeom>
+          <a:noFill/>
+          <a:ln>
+            <a:noFill/>
+          </a:ln>
+          <a:effectLst/>
+          <a:extLst>
+            <a:ext uri="{909E8E84-426E-40DD-AFC4-6F175D3DCCD1}">
+              <a14:hiddenFill xmlns:a14="http://schemas.microsoft.com/office/drawing/2010/main">
+                <a:solidFill>
+                  <a:schemeClr val="accent1"/>
+                </a:solidFill>
+              </a14:hiddenFill>
+            </a:ext>
+            <a:ext uri="{91240B29-F687-4F45-9708-019B960494DF}">
+              <a14:hiddenLine xmlns:a14="http://schemas.microsoft.com/office/drawing/2010/main" w="9525">
+                <a:solidFill>
+                  <a:schemeClr val="tx1"/>
+                </a:solidFill>
+                <a:miter lim="800000"/>
+                <a:headEnd/>
+                <a:tailEnd/>
+              </a14:hiddenLine>
+            </a:ext>
+            <a:ext uri="{AF507438-7753-43E0-B8FC-AC1667EBCBE1}">
+              <a14:hiddenEffects xmlns:a14="http://schemas.microsoft.com/office/drawing/2010/main">
+                <a:effectLst>
+                  <a:outerShdw dist="35921" dir="2700000" algn="ctr" rotWithShape="0">
+                    <a:schemeClr val="bg2"/>
+                  </a:outerShdw>
+                </a:effectLst>
+              </a14:hiddenEffects>
+            </a:ext>
+          </a:extLst>
+        </p:spPr>
+      </p:pic>
+      <p:sp>
+        <p:nvSpPr>
+          <p:cNvPr id="13" name="Заголовок 1"/>
+          <p:cNvSpPr txBox="1">
+            <a:spLocks/>
+          </p:cNvSpPr>
+          <p:nvPr/>
+        </p:nvSpPr>
+        <p:spPr>
+          <a:xfrm>
+            <a:off x="395537" y="1340768"/>
+            <a:ext cx="7632847" cy="779668"/>
+          </a:xfrm>
+          <a:prstGeom prst="rect">
+            <a:avLst/>
+          </a:prstGeom>
+        </p:spPr>
+        <p:txBody>
+          <a:bodyPr rIns="91440" anchor="b">
+            <a:normAutofit fontScale="97500"/>
+            <a:scene3d>
+              <a:camera prst="orthographicFront"/>
+              <a:lightRig rig="soft" dir="t">
+                <a:rot lat="0" lon="0" rev="2400000"/>
+              </a:lightRig>
+            </a:scene3d>
+            <a:sp3d>
+              <a:bevelT w="19050" h="12700"/>
+            </a:sp3d>
+          </a:bodyPr>
+          <a:lstStyle>
+            <a:lvl1pPr marL="54864" algn="r" rtl="0" eaLnBrk="1" latinLnBrk="0" hangingPunct="1">
+              <a:spcBef>
+                <a:spcPct val="0"/>
+              </a:spcBef>
+              <a:buNone/>
+              <a:defRPr kumimoji="0" sz="4600" kern="1200">
+                <a:solidFill>
+                  <a:schemeClr val="tx2">
+                    <a:tint val="100000"/>
+                    <a:shade val="90000"/>
+                    <a:satMod val="250000"/>
+                    <a:alpha val="100000"/>
+                  </a:schemeClr>
+                </a:solidFill>
+                <a:effectLst>
+                  <a:outerShdw blurRad="38100" dist="25500" dir="5400000" algn="tl" rotWithShape="0">
+                    <a:srgbClr val="000000">
+                      <a:satMod val="180000"/>
+                      <a:alpha val="75000"/>
+                    </a:srgbClr>
+                  </a:outerShdw>
+                </a:effectLst>
+                <a:latin typeface="+mj-lt"/>
+                <a:ea typeface="+mj-ea"/>
+                <a:cs typeface="+mj-cs"/>
+              </a:defRPr>
+            </a:lvl1pPr>
+            <a:extLst/>
+          </a:lstStyle>
+          <a:p>
+            <a:pPr algn="ctr"/>
+            <a:r>
+              <a:rPr lang="ru-RU" sz="2000" b="1" dirty="0" smtClean="0">
+                <a:effectLst/>
+              </a:rPr>
+              <a:t>За образец был взят существующий Форум АСУТП </a:t>
+            </a:r>
+            <a:r>
+              <a:rPr lang="en-US" sz="2000" b="1" dirty="0">
+                <a:effectLst/>
+              </a:rPr>
+              <a:t>https://asutpforum.ru/</a:t>
+            </a:r>
+            <a:endParaRPr lang="ru-RU" sz="2000" dirty="0"/>
           </a:p>
         </p:txBody>
       </p:sp>
     </p:spTree>
     <p:extLst>
       <p:ext uri="{BB962C8B-B14F-4D97-AF65-F5344CB8AC3E}">
-        <p14:creationId xmlns:p14="http://schemas.microsoft.com/office/powerpoint/2010/main" val="2130190252"/>
+        <p14:creationId xmlns:p14="http://schemas.microsoft.com/office/powerpoint/2010/main" val="824541824"/>
       </p:ext>
     </p:extLst>
   </p:cSld>
@@ -5393,10 +6034,31 @@
         </p:nvSpPr>
         <p:spPr/>
         <p:txBody>
-          <a:bodyPr/>
+          <a:bodyPr>
+            <a:normAutofit fontScale="90000"/>
+          </a:bodyPr>
           <a:lstStyle/>
           <a:p>
-            <a:endParaRPr lang="ru-RU"/>
+            <a:r>
+              <a:rPr lang="ru-RU" dirty="0"/>
+              <a:t>Б</a:t>
+            </a:r>
+            <a:r>
+              <a:rPr lang="ru-RU" dirty="0" smtClean="0"/>
+              <a:t>иблиотеки </a:t>
+            </a:r>
+            <a:r>
+              <a:rPr lang="ru-RU" dirty="0"/>
+              <a:t>или компоненты </a:t>
+            </a:r>
+            <a:r>
+              <a:rPr lang="ru-RU" dirty="0" err="1"/>
+              <a:t>Django</a:t>
+            </a:r>
+            <a:r>
+              <a:rPr lang="ru-RU" dirty="0"/>
+              <a:t> использовались и зачем</a:t>
+            </a:r>
           </a:p>
         </p:txBody>
       </p:sp>
@@ -5412,58 +6074,534 @@
         </p:nvSpPr>
         <p:spPr/>
         <p:txBody>
-          <a:bodyPr/>
+          <a:bodyPr>
+            <a:normAutofit fontScale="25000" lnSpcReduction="20000"/>
+          </a:bodyPr>
           <a:lstStyle/>
           <a:p>
-            <a:endParaRPr lang="ru-RU"/>
-          </a:p>
-        </p:txBody>
-      </p:sp>
-      <p:pic>
-        <p:nvPicPr>
-          <p:cNvPr id="1026" name="Picture 2" descr="E:\TOP\Pandas\mini-проект\Демонстрация\вход.png"/>
-          <p:cNvPicPr>
-            <a:picLocks noChangeAspect="1" noChangeArrowheads="1"/>
-          </p:cNvPicPr>
-          <p:nvPr/>
-        </p:nvPicPr>
-        <p:blipFill>
-          <a:blip r:embed="rId2">
-            <a:extLst>
-              <a:ext uri="{28A0092B-C50C-407E-A947-70E740481C1C}">
-                <a14:useLocalDpi xmlns:a14="http://schemas.microsoft.com/office/drawing/2010/main" val="0"/>
-              </a:ext>
-            </a:extLst>
-          </a:blip>
-          <a:srcRect/>
-          <a:stretch>
-            <a:fillRect/>
-          </a:stretch>
-        </p:blipFill>
-        <p:spPr bwMode="auto">
-          <a:xfrm>
-            <a:off x="782638" y="1811338"/>
-            <a:ext cx="7029722" cy="2584450"/>
-          </a:xfrm>
-          <a:prstGeom prst="rect">
-            <a:avLst/>
-          </a:prstGeom>
-          <a:noFill/>
-          <a:extLst>
-            <a:ext uri="{909E8E84-426E-40DD-AFC4-6F175D3DCCD1}">
-              <a14:hiddenFill xmlns:a14="http://schemas.microsoft.com/office/drawing/2010/main">
-                <a:solidFill>
-                  <a:srgbClr val="FFFFFF"/>
-                </a:solidFill>
-              </a14:hiddenFill>
-            </a:ext>
-          </a:extLst>
-        </p:spPr>
-      </p:pic>
+            <a:pPr marL="0" indent="0">
+              <a:buNone/>
+            </a:pPr>
+            <a:r>
+              <a:rPr lang="ru-RU" sz="4400" b="1" u="sng" dirty="0" smtClean="0"/>
+              <a:t>Встроенные компоненты </a:t>
+            </a:r>
+            <a:r>
+              <a:rPr lang="ru-RU" sz="4400" b="1" u="sng" dirty="0" err="1" smtClean="0"/>
+              <a:t>Django</a:t>
+            </a:r>
+            <a:r>
+              <a:rPr lang="ru-RU" sz="4400" b="1" u="sng" dirty="0" smtClean="0"/>
+              <a:t> (</a:t>
+            </a:r>
+            <a:r>
+              <a:rPr lang="ru-RU" sz="4400" b="1" u="sng" dirty="0" err="1" smtClean="0"/>
+              <a:t>Core</a:t>
+            </a:r>
+            <a:r>
+              <a:rPr lang="ru-RU" sz="4400" b="1" u="sng" dirty="0" smtClean="0"/>
+              <a:t>)</a:t>
+            </a:r>
+          </a:p>
+          <a:p>
+            <a:endParaRPr lang="ru-RU" sz="4400" b="1" u="sng" dirty="0" smtClean="0"/>
+          </a:p>
+          <a:p>
+            <a:pPr marL="0" indent="0">
+              <a:buNone/>
+            </a:pPr>
+            <a:r>
+              <a:rPr lang="ru-RU" sz="4400" b="1" dirty="0" err="1" smtClean="0"/>
+              <a:t>Django</a:t>
+            </a:r>
+            <a:r>
+              <a:rPr lang="ru-RU" sz="4400" b="1" dirty="0" smtClean="0"/>
+              <a:t> </a:t>
+            </a:r>
+            <a:r>
+              <a:rPr lang="ru-RU" sz="4400" b="1" dirty="0" err="1" smtClean="0"/>
+              <a:t>Auth</a:t>
+            </a:r>
+            <a:r>
+              <a:rPr lang="ru-RU" sz="4400" b="1" dirty="0" smtClean="0"/>
+              <a:t> (</a:t>
+            </a:r>
+            <a:r>
+              <a:rPr lang="ru-RU" sz="4400" b="1" dirty="0" err="1" smtClean="0"/>
+              <a:t>django.contrib.auth</a:t>
+            </a:r>
+            <a:r>
+              <a:rPr lang="ru-RU" sz="4400" b="1" dirty="0" smtClean="0"/>
+              <a:t>):</a:t>
+            </a:r>
+          </a:p>
+          <a:p>
+            <a:pPr marL="0" indent="0">
+              <a:buNone/>
+            </a:pPr>
+            <a:r>
+              <a:rPr lang="ru-RU" sz="4400" b="1" dirty="0" smtClean="0"/>
+              <a:t>Зачем</a:t>
+            </a:r>
+            <a:r>
+              <a:rPr lang="ru-RU" sz="4400" dirty="0" smtClean="0"/>
+              <a:t>: Управление пользователями, сессиями, хеширование паролей и проверка прав доступа (например, разделение на обычных читателей и авторов).</a:t>
+            </a:r>
+          </a:p>
+          <a:p>
+            <a:pPr marL="0" indent="0">
+              <a:buNone/>
+            </a:pPr>
+            <a:r>
+              <a:rPr lang="ru-RU" sz="4400" b="1" dirty="0" err="1" smtClean="0"/>
+              <a:t>Django</a:t>
+            </a:r>
+            <a:r>
+              <a:rPr lang="ru-RU" sz="4400" b="1" dirty="0" smtClean="0"/>
+              <a:t> </a:t>
+            </a:r>
+            <a:r>
+              <a:rPr lang="ru-RU" sz="4400" b="1" dirty="0" err="1" smtClean="0"/>
+              <a:t>Admin</a:t>
+            </a:r>
+            <a:r>
+              <a:rPr lang="ru-RU" sz="4400" b="1" dirty="0" smtClean="0"/>
+              <a:t> (</a:t>
+            </a:r>
+            <a:r>
+              <a:rPr lang="ru-RU" sz="4400" b="1" dirty="0" err="1" smtClean="0"/>
+              <a:t>django.contrib.admin</a:t>
+            </a:r>
+            <a:r>
+              <a:rPr lang="ru-RU" sz="4400" b="1" dirty="0" smtClean="0"/>
+              <a:t>):</a:t>
+            </a:r>
+          </a:p>
+          <a:p>
+            <a:pPr marL="0" indent="0">
+              <a:buNone/>
+            </a:pPr>
+            <a:r>
+              <a:rPr lang="ru-RU" sz="4400" b="1" dirty="0" smtClean="0"/>
+              <a:t>Зачем</a:t>
+            </a:r>
+            <a:r>
+              <a:rPr lang="ru-RU" sz="4400" dirty="0" smtClean="0"/>
+              <a:t>: Готовая панель управления для авторов и редакторов. Позволяет быстро добавлять, редактировать и удалять статьи без написания дополнительного кода.</a:t>
+            </a:r>
+          </a:p>
+          <a:p>
+            <a:endParaRPr lang="ru-RU" sz="4400" dirty="0"/>
+          </a:p>
+          <a:p>
+            <a:pPr marL="0" indent="0">
+              <a:buNone/>
+            </a:pPr>
+            <a:r>
+              <a:rPr lang="ru-RU" sz="4400" b="1" dirty="0" err="1"/>
+              <a:t>Django</a:t>
+            </a:r>
+            <a:r>
+              <a:rPr lang="ru-RU" sz="4400" b="1" dirty="0"/>
+              <a:t> ORM</a:t>
+            </a:r>
+            <a:r>
+              <a:rPr lang="ru-RU" sz="4400" dirty="0"/>
+              <a:t> — это «переводчик» между миром </a:t>
+            </a:r>
+            <a:r>
+              <a:rPr lang="ru-RU" sz="4400" dirty="0" err="1"/>
+              <a:t>Python</a:t>
+            </a:r>
+            <a:r>
+              <a:rPr lang="ru-RU" sz="4400" dirty="0"/>
+              <a:t> (объектами) и миром баз данных (таблицами SQL). Благодаря ему вам не нужно писать сложные SQL-запросы вручную</a:t>
+            </a:r>
+            <a:r>
+              <a:rPr lang="ru-RU" sz="4400" dirty="0" smtClean="0"/>
+              <a:t>.</a:t>
+            </a:r>
+          </a:p>
+          <a:p>
+            <a:pPr marL="0" indent="0">
+              <a:buNone/>
+            </a:pPr>
+            <a:r>
+              <a:rPr lang="ru-RU" sz="4400" b="1" dirty="0"/>
+              <a:t>Зачем</a:t>
+            </a:r>
+            <a:r>
+              <a:rPr lang="ru-RU" sz="4400" dirty="0"/>
+              <a:t>: Взаимодействие с базой данных (</a:t>
+            </a:r>
+            <a:r>
+              <a:rPr lang="ru-RU" sz="4400" dirty="0" err="1"/>
+              <a:t>SQLite</a:t>
+            </a:r>
+            <a:r>
+              <a:rPr lang="ru-RU" sz="4400" dirty="0"/>
+              <a:t>/</a:t>
+            </a:r>
+            <a:r>
+              <a:rPr lang="ru-RU" sz="4400" dirty="0" err="1"/>
+              <a:t>PostgreSQL</a:t>
+            </a:r>
+            <a:r>
+              <a:rPr lang="ru-RU" sz="4400" dirty="0"/>
+              <a:t>) на языке </a:t>
+            </a:r>
+            <a:r>
+              <a:rPr lang="ru-RU" sz="4400" dirty="0" err="1"/>
+              <a:t>Python</a:t>
+            </a:r>
+            <a:r>
+              <a:rPr lang="ru-RU" sz="4400" dirty="0"/>
+              <a:t>. Используется для сложных запросов фильтрации и сортировки статей.</a:t>
+            </a:r>
+          </a:p>
+          <a:p>
+            <a:pPr marL="338138" indent="0">
+              <a:buNone/>
+            </a:pPr>
+            <a:endParaRPr lang="ru-RU" sz="4400" dirty="0"/>
+          </a:p>
+          <a:p>
+            <a:pPr marL="625475">
+              <a:buNone/>
+            </a:pPr>
+            <a:r>
+              <a:rPr lang="ru-RU" sz="4400" b="1" dirty="0" smtClean="0"/>
+              <a:t>1</a:t>
+            </a:r>
+            <a:r>
+              <a:rPr lang="ru-RU" sz="4400" b="1" dirty="0"/>
+              <a:t>. Модели вместо таблиц</a:t>
+            </a:r>
+          </a:p>
+          <a:p>
+            <a:pPr marL="625475">
+              <a:buNone/>
+            </a:pPr>
+            <a:r>
+              <a:rPr lang="ru-RU" sz="4400" dirty="0" smtClean="0"/>
+              <a:t>     Вместо </a:t>
+            </a:r>
+            <a:r>
+              <a:rPr lang="ru-RU" sz="4400" dirty="0"/>
+              <a:t>того чтобы создавать таблицы в базе через консоль, </a:t>
+            </a:r>
+            <a:r>
+              <a:rPr lang="ru-RU" sz="4400" dirty="0" smtClean="0"/>
+              <a:t>мы описываем </a:t>
+            </a:r>
+            <a:r>
+              <a:rPr lang="ru-RU" sz="4400" dirty="0"/>
+              <a:t>их в models.py.</a:t>
+            </a:r>
+          </a:p>
+          <a:p>
+            <a:pPr marL="625475">
+              <a:buNone/>
+            </a:pPr>
+            <a:r>
+              <a:rPr lang="ru-RU" sz="4400" b="1" dirty="0" smtClean="0"/>
+              <a:t>     Пример</a:t>
+            </a:r>
+            <a:r>
+              <a:rPr lang="ru-RU" sz="4400" b="1" dirty="0"/>
+              <a:t>:</a:t>
+            </a:r>
+            <a:r>
+              <a:rPr lang="ru-RU" sz="4400" dirty="0"/>
+              <a:t> </a:t>
+            </a:r>
+            <a:r>
+              <a:rPr lang="ru-RU" sz="4400" dirty="0" smtClean="0"/>
+              <a:t>класс</a:t>
+            </a:r>
+            <a:r>
+              <a:rPr lang="ru-RU" sz="4400" dirty="0"/>
+              <a:t> </a:t>
+            </a:r>
+            <a:r>
+              <a:rPr lang="ru-RU" sz="4400" dirty="0" err="1"/>
+              <a:t>Article</a:t>
+            </a:r>
+            <a:r>
+              <a:rPr lang="ru-RU" sz="4400" dirty="0"/>
+              <a:t> — это будущая таблица в БД. Каждое поле (</a:t>
+            </a:r>
+            <a:r>
+              <a:rPr lang="ru-RU" sz="4400" dirty="0" err="1"/>
+              <a:t>title</a:t>
+            </a:r>
+            <a:r>
+              <a:rPr lang="ru-RU" sz="4400" dirty="0"/>
+              <a:t>, </a:t>
+            </a:r>
+            <a:r>
+              <a:rPr lang="ru-RU" sz="4400" dirty="0" err="1"/>
+              <a:t>content</a:t>
+            </a:r>
+            <a:r>
+              <a:rPr lang="ru-RU" sz="4400" dirty="0"/>
+              <a:t>) — это колонка в этой таблице</a:t>
+            </a:r>
+            <a:r>
+              <a:rPr lang="ru-RU" sz="4400" dirty="0" smtClean="0"/>
+              <a:t>.</a:t>
+            </a:r>
+          </a:p>
+          <a:p>
+            <a:pPr marL="625475">
+              <a:buNone/>
+            </a:pPr>
+            <a:endParaRPr lang="ru-RU" sz="4400" dirty="0"/>
+          </a:p>
+          <a:p>
+            <a:pPr marL="625475">
+              <a:buNone/>
+            </a:pPr>
+            <a:r>
+              <a:rPr lang="ru-RU" sz="4400" b="1" dirty="0" smtClean="0"/>
+              <a:t>2</a:t>
+            </a:r>
+            <a:r>
+              <a:rPr lang="ru-RU" sz="4400" b="1" dirty="0"/>
+              <a:t>. </a:t>
+            </a:r>
+            <a:r>
+              <a:rPr lang="ru-RU" sz="4400" b="1" dirty="0" err="1"/>
+              <a:t>Python</a:t>
+            </a:r>
+            <a:r>
+              <a:rPr lang="ru-RU" sz="4400" b="1" dirty="0"/>
+              <a:t>-синтаксис вместо SQL</a:t>
+            </a:r>
+          </a:p>
+          <a:p>
+            <a:pPr marL="625475">
+              <a:buNone/>
+            </a:pPr>
+            <a:r>
+              <a:rPr lang="ru-RU" sz="4400" dirty="0" smtClean="0"/>
+              <a:t>    ORM </a:t>
+            </a:r>
+            <a:r>
+              <a:rPr lang="ru-RU" sz="4400" dirty="0"/>
+              <a:t>позволяет манипулировать данными с помощью обычных методов </a:t>
+            </a:r>
+            <a:r>
+              <a:rPr lang="ru-RU" sz="4400" dirty="0" err="1"/>
+              <a:t>Python</a:t>
+            </a:r>
+            <a:r>
+              <a:rPr lang="ru-RU" sz="4400" dirty="0" smtClean="0"/>
+              <a:t>.</a:t>
+            </a:r>
+          </a:p>
+          <a:p>
+            <a:pPr marL="625475">
+              <a:buNone/>
+            </a:pPr>
+            <a:endParaRPr lang="ru-RU" sz="4400" dirty="0"/>
+          </a:p>
+          <a:p>
+            <a:pPr marL="625475">
+              <a:buNone/>
+            </a:pPr>
+            <a:r>
+              <a:rPr lang="ru-RU" sz="4400" b="1" dirty="0" smtClean="0"/>
+              <a:t>3</a:t>
+            </a:r>
+            <a:r>
+              <a:rPr lang="ru-RU" sz="4400" b="1" dirty="0"/>
+              <a:t>. Работа со связями (</a:t>
+            </a:r>
+            <a:r>
+              <a:rPr lang="ru-RU" sz="4400" b="1" dirty="0" err="1"/>
+              <a:t>Relationships</a:t>
+            </a:r>
+            <a:r>
+              <a:rPr lang="ru-RU" sz="4400" b="1" dirty="0"/>
+              <a:t>)</a:t>
+            </a:r>
+          </a:p>
+          <a:p>
+            <a:pPr marL="625475">
+              <a:buNone/>
+            </a:pPr>
+            <a:r>
+              <a:rPr lang="ru-RU" sz="4400" dirty="0" smtClean="0"/>
+              <a:t>    Это </a:t>
+            </a:r>
+            <a:r>
+              <a:rPr lang="ru-RU" sz="4400" dirty="0"/>
+              <a:t>самая мощная часть ORM. Она связывает разные таблицы между собой:</a:t>
+            </a:r>
+          </a:p>
+          <a:p>
+            <a:pPr marL="625475">
+              <a:buNone/>
+            </a:pPr>
+            <a:r>
+              <a:rPr lang="ru-RU" sz="4400" b="1" dirty="0" smtClean="0"/>
+              <a:t>    </a:t>
+            </a:r>
+            <a:r>
+              <a:rPr lang="ru-RU" sz="4400" b="1" dirty="0" err="1" smtClean="0"/>
+              <a:t>ForeignKey</a:t>
+            </a:r>
+            <a:r>
+              <a:rPr lang="ru-RU" sz="4400" dirty="0"/>
+              <a:t>: Связывает статью с автором (</a:t>
+            </a:r>
+            <a:r>
+              <a:rPr lang="ru-RU" sz="4400" dirty="0" err="1"/>
+              <a:t>User</a:t>
+            </a:r>
+            <a:r>
+              <a:rPr lang="ru-RU" sz="4400" dirty="0"/>
+              <a:t>). Вы можете легко получить автора статьи: </a:t>
+            </a:r>
+            <a:r>
+              <a:rPr lang="ru-RU" sz="4400" dirty="0" err="1"/>
+              <a:t>article.author.username</a:t>
+            </a:r>
+            <a:r>
+              <a:rPr lang="ru-RU" sz="4400" dirty="0"/>
+              <a:t>.</a:t>
+            </a:r>
+          </a:p>
+          <a:p>
+            <a:pPr marL="625475">
+              <a:buNone/>
+            </a:pPr>
+            <a:r>
+              <a:rPr lang="ru-RU" sz="4400" b="1" dirty="0" smtClean="0"/>
+              <a:t>    </a:t>
+            </a:r>
+            <a:r>
+              <a:rPr lang="ru-RU" sz="4400" b="1" dirty="0" err="1" smtClean="0"/>
+              <a:t>ManyToManyField</a:t>
+            </a:r>
+            <a:r>
+              <a:rPr lang="ru-RU" sz="4400" dirty="0"/>
+              <a:t>: Связывает статью с тегами. Одна статья может иметь много тегов, и один тег может быть у </a:t>
+            </a:r>
+            <a:r>
+              <a:rPr lang="ru-RU" sz="4400" dirty="0" smtClean="0"/>
+              <a:t>многих статей</a:t>
+            </a:r>
+            <a:r>
+              <a:rPr lang="ru-RU" sz="4400" dirty="0"/>
+              <a:t>.</a:t>
+            </a:r>
+          </a:p>
+          <a:p>
+            <a:pPr marL="625475"/>
+            <a:endParaRPr lang="ru-RU" sz="4400" dirty="0"/>
+          </a:p>
+          <a:p>
+            <a:pPr marL="625475">
+              <a:buNone/>
+            </a:pPr>
+            <a:r>
+              <a:rPr lang="ru-RU" sz="4400" b="1" dirty="0"/>
+              <a:t>4. Миграции: Контроль версий </a:t>
+            </a:r>
+            <a:r>
+              <a:rPr lang="ru-RU" sz="4400" b="1" dirty="0" smtClean="0"/>
+              <a:t>базы</a:t>
+            </a:r>
+          </a:p>
+          <a:p>
+            <a:pPr marL="625475">
+              <a:buNone/>
+            </a:pPr>
+            <a:endParaRPr lang="ru-RU" sz="4400" b="1" dirty="0"/>
+          </a:p>
+          <a:p>
+            <a:pPr marL="625475">
+              <a:buNone/>
+            </a:pPr>
+            <a:r>
+              <a:rPr lang="ru-RU" sz="4400" b="1" dirty="0" smtClean="0"/>
+              <a:t>5</a:t>
+            </a:r>
+            <a:r>
+              <a:rPr lang="ru-RU" sz="4400" b="1" dirty="0"/>
+              <a:t>. Безопасность</a:t>
+            </a:r>
+          </a:p>
+          <a:p>
+            <a:pPr marL="625475">
+              <a:buNone/>
+            </a:pPr>
+            <a:r>
+              <a:rPr lang="ru-RU" sz="4400" dirty="0" err="1"/>
+              <a:t>Django</a:t>
+            </a:r>
+            <a:r>
+              <a:rPr lang="ru-RU" sz="4400" dirty="0"/>
+              <a:t> ORM автоматически защищает ваш сайт от </a:t>
+            </a:r>
+            <a:r>
+              <a:rPr lang="ru-RU" sz="4400" b="1" dirty="0"/>
+              <a:t>SQL-инъекций</a:t>
+            </a:r>
+            <a:r>
+              <a:rPr lang="ru-RU" sz="4400" dirty="0"/>
+              <a:t> (популярный вид хакерских атак), потому что она сама правильно «экранирует» все данные, которые пользователи вводят в строку поиска.</a:t>
+            </a:r>
+          </a:p>
+          <a:p>
+            <a:pPr marL="625475"/>
+            <a:endParaRPr lang="ru-RU" sz="4400" dirty="0" smtClean="0"/>
+          </a:p>
+          <a:p>
+            <a:pPr marL="0" indent="0">
+              <a:buNone/>
+            </a:pPr>
+            <a:r>
+              <a:rPr lang="ru-RU" sz="4400" b="1" dirty="0" err="1" smtClean="0"/>
+              <a:t>Pagination</a:t>
+            </a:r>
+            <a:r>
+              <a:rPr lang="ru-RU" sz="4400" b="1" dirty="0" smtClean="0"/>
+              <a:t> (</a:t>
+            </a:r>
+            <a:r>
+              <a:rPr lang="ru-RU" sz="4400" b="1" dirty="0" err="1" smtClean="0"/>
+              <a:t>django.core.paginator</a:t>
+            </a:r>
+            <a:r>
+              <a:rPr lang="ru-RU" sz="4400" b="1" dirty="0" smtClean="0"/>
+              <a:t>):</a:t>
+            </a:r>
+          </a:p>
+          <a:p>
+            <a:pPr marL="0" indent="0">
+              <a:buNone/>
+            </a:pPr>
+            <a:r>
+              <a:rPr lang="ru-RU" sz="4400" b="1" dirty="0" smtClean="0"/>
+              <a:t>Зачем</a:t>
+            </a:r>
+            <a:r>
+              <a:rPr lang="ru-RU" sz="4400" dirty="0" smtClean="0"/>
+              <a:t>: Разделение длинного списка новостей на страницы , что бы сайт не «тормозил» при наличии сотен статей.</a:t>
+            </a:r>
+          </a:p>
+          <a:p>
+            <a:endParaRPr lang="ru-RU" dirty="0"/>
+          </a:p>
+        </p:txBody>
+      </p:sp>
     </p:spTree>
     <p:extLst>
       <p:ext uri="{BB962C8B-B14F-4D97-AF65-F5344CB8AC3E}">
-        <p14:creationId xmlns:p14="http://schemas.microsoft.com/office/powerpoint/2010/main" val="1603485448"/>
+        <p14:creationId xmlns:p14="http://schemas.microsoft.com/office/powerpoint/2010/main" val="2216550114"/>
       </p:ext>
     </p:extLst>
   </p:cSld>
@@ -5507,37 +6645,197 @@
             <p:ph type="title"/>
           </p:nvPr>
         </p:nvSpPr>
+        <p:spPr>
+          <a:xfrm>
+            <a:off x="457200" y="253536"/>
+            <a:ext cx="8229600" cy="871208"/>
+          </a:xfrm>
+        </p:spPr>
+        <p:txBody>
+          <a:bodyPr>
+            <a:normAutofit/>
+          </a:bodyPr>
+          <a:lstStyle/>
+          <a:p>
+            <a:r>
+              <a:rPr lang="ru-RU" sz="4000" b="1" dirty="0">
+                <a:effectLst/>
+              </a:rPr>
+              <a:t>Тестирование / </a:t>
+            </a:r>
+            <a:r>
+              <a:rPr lang="ru-RU" sz="4000" b="1" dirty="0" err="1">
+                <a:effectLst/>
+              </a:rPr>
+              <a:t>Валидация</a:t>
+            </a:r>
+            <a:r>
+              <a:rPr lang="ru-RU" sz="4000" b="1" dirty="0">
+                <a:effectLst/>
+              </a:rPr>
+              <a:t> </a:t>
+            </a:r>
+            <a:endParaRPr lang="ru-RU" sz="4000" dirty="0"/>
+          </a:p>
+        </p:txBody>
+      </p:sp>
+      <p:sp>
+        <p:nvSpPr>
+          <p:cNvPr id="3" name="Объект 2"/>
+          <p:cNvSpPr>
+            <a:spLocks noGrp="1"/>
+          </p:cNvSpPr>
+          <p:nvPr>
+            <p:ph idx="1"/>
+          </p:nvPr>
+        </p:nvSpPr>
         <p:spPr/>
         <p:txBody>
-          <a:bodyPr/>
+          <a:bodyPr>
+            <a:normAutofit/>
+          </a:bodyPr>
           <a:lstStyle/>
           <a:p>
-            <a:endParaRPr lang="ru-RU"/>
-          </a:p>
-        </p:txBody>
-      </p:sp>
-      <p:sp>
-        <p:nvSpPr>
-          <p:cNvPr id="3" name="Объект 2"/>
-          <p:cNvSpPr>
-            <a:spLocks noGrp="1"/>
-          </p:cNvSpPr>
-          <p:nvPr>
-            <p:ph idx="1"/>
-          </p:nvPr>
-        </p:nvSpPr>
-        <p:spPr/>
-        <p:txBody>
-          <a:bodyPr/>
-          <a:lstStyle/>
-          <a:p>
-            <a:endParaRPr lang="ru-RU"/>
+            <a:r>
+              <a:rPr lang="ru-RU" sz="1050" b="1" dirty="0"/>
+              <a:t>1. Тест </a:t>
+            </a:r>
+            <a:r>
+              <a:rPr lang="ru-RU" sz="1050" b="1" dirty="0" err="1"/>
+              <a:t>test_page_with_items</a:t>
+            </a:r>
+            <a:r>
+              <a:rPr lang="ru-RU" sz="1050" b="1" dirty="0"/>
+              <a:t> (Проверка с созданными статьями)</a:t>
+            </a:r>
+          </a:p>
+          <a:p>
+            <a:r>
+              <a:rPr lang="ru-RU" sz="1050" b="1" dirty="0"/>
+              <a:t>Что делает:</a:t>
+            </a:r>
+            <a:r>
+              <a:rPr lang="ru-RU" sz="1050" dirty="0"/>
+              <a:t> Мы принудительно создаем одну статью (</a:t>
+            </a:r>
+            <a:r>
+              <a:rPr lang="ru-RU" sz="1050" dirty="0" err="1"/>
+              <a:t>Article.objects.create</a:t>
+            </a:r>
+            <a:r>
+              <a:rPr lang="ru-RU" sz="1050" dirty="0"/>
+              <a:t>) прямо в тестовой (временной) базе данных.</a:t>
+            </a:r>
+          </a:p>
+          <a:p>
+            <a:r>
+              <a:rPr lang="ru-RU" sz="1050" b="1" dirty="0"/>
+              <a:t>В чём заключается проверка:</a:t>
+            </a:r>
+            <a:r>
+              <a:rPr lang="ru-RU" sz="1050" dirty="0"/>
+              <a:t> Мы отправляем виртуальный запрос на страницу и проверяем, что </a:t>
+            </a:r>
+            <a:r>
+              <a:rPr lang="ru-RU" sz="1050" dirty="0" err="1"/>
+              <a:t>Django</a:t>
+            </a:r>
+            <a:r>
+              <a:rPr lang="ru-RU" sz="1050" dirty="0"/>
+              <a:t> успешно взял эту статью из базы, передал в шаблон и </a:t>
+            </a:r>
+            <a:r>
+              <a:rPr lang="ru-RU" sz="1050" dirty="0" err="1"/>
+              <a:t>отрендерил</a:t>
+            </a:r>
+            <a:r>
+              <a:rPr lang="ru-RU" sz="1050" dirty="0"/>
+              <a:t> её HTML-код. Тест ищет на странице класс </a:t>
+            </a:r>
+            <a:r>
+              <a:rPr lang="ru-RU" sz="1050" dirty="0" err="1"/>
+              <a:t>article-card</a:t>
+            </a:r>
+            <a:r>
+              <a:rPr lang="ru-RU" sz="1050" dirty="0"/>
+              <a:t> и текст «Уникальный заголовок АСУТП».</a:t>
+            </a:r>
+          </a:p>
+          <a:p>
+            <a:r>
+              <a:rPr lang="ru-RU" sz="1050" b="1" dirty="0"/>
+              <a:t>Зачем это нужно:</a:t>
+            </a:r>
+            <a:r>
+              <a:rPr lang="ru-RU" sz="1050" dirty="0"/>
+              <a:t> Это гарантирует, что если в реальной базе будут статьи, сайт не выдаст ошибку и карточки новостей отобразятся корректно.</a:t>
+            </a:r>
+          </a:p>
+          <a:p>
+            <a:r>
+              <a:rPr lang="ru-RU" sz="1050" b="1" dirty="0"/>
+              <a:t>2. Тест </a:t>
+            </a:r>
+            <a:r>
+              <a:rPr lang="ru-RU" sz="1050" b="1" dirty="0" err="1"/>
+              <a:t>test_page_empty_list</a:t>
+            </a:r>
+            <a:r>
+              <a:rPr lang="ru-RU" sz="1050" b="1" dirty="0"/>
+              <a:t> (Проверка без статей)</a:t>
+            </a:r>
+          </a:p>
+          <a:p>
+            <a:r>
+              <a:rPr lang="ru-RU" sz="1050" b="1" dirty="0"/>
+              <a:t>Что делает:</a:t>
+            </a:r>
+            <a:r>
+              <a:rPr lang="ru-RU" sz="1050" dirty="0"/>
+              <a:t> Мы запускаем тест, оставляя тестовую базу данных абсолютно пустой.</a:t>
+            </a:r>
+          </a:p>
+          <a:p>
+            <a:r>
+              <a:rPr lang="ru-RU" sz="1050" b="1" dirty="0"/>
+              <a:t>В чём заключается проверка:</a:t>
+            </a:r>
+            <a:r>
+              <a:rPr lang="ru-RU" sz="1050" dirty="0"/>
+              <a:t> Мы проверяем, что страница открывается без ошибок (код 200 OK), но на ней </a:t>
+            </a:r>
+            <a:r>
+              <a:rPr lang="ru-RU" sz="1050" b="1" dirty="0"/>
+              <a:t>нет</a:t>
+            </a:r>
+            <a:r>
+              <a:rPr lang="ru-RU" sz="1050" dirty="0"/>
+              <a:t> ни одной карточки статьи (тест проверяет, что класс </a:t>
+            </a:r>
+            <a:r>
+              <a:rPr lang="ru-RU" sz="1050" dirty="0" err="1"/>
+              <a:t>article-card</a:t>
+            </a:r>
+            <a:r>
+              <a:rPr lang="ru-RU" sz="1050" dirty="0"/>
+              <a:t> отсутствует в HTML-коде страницы).</a:t>
+            </a:r>
+          </a:p>
+          <a:p>
+            <a:r>
+              <a:rPr lang="ru-RU" sz="1050" b="1" dirty="0"/>
+              <a:t>Зачем это нужно:</a:t>
+            </a:r>
+            <a:r>
+              <a:rPr lang="ru-RU" sz="1050" dirty="0"/>
+              <a:t> Это гарантирует, что когда сайт только запущен или пользователь удалил все статьи, страница не «сломается», на ней не появятся пустые контуры блоков, а боковая панель и поиск продолжат работать.</a:t>
+            </a:r>
           </a:p>
         </p:txBody>
       </p:sp>
       <p:pic>
         <p:nvPicPr>
-          <p:cNvPr id="2050" name="Picture 2" descr="E:\TOP\Pandas\mini-проект\Демонстрация\Добавление коментариев.png"/>
+          <p:cNvPr id="6" name="Picture 2"/>
           <p:cNvPicPr>
             <a:picLocks noChangeAspect="1" noChangeArrowheads="1"/>
           </p:cNvPicPr>
@@ -5558,20 +6856,43 @@
         </p:blipFill>
         <p:spPr bwMode="auto">
           <a:xfrm>
-            <a:off x="683568" y="1772816"/>
-            <a:ext cx="7992888" cy="4022421"/>
+            <a:off x="2267744" y="3861049"/>
+            <a:ext cx="4608512" cy="2721418"/>
           </a:xfrm>
           <a:prstGeom prst="rect">
             <a:avLst/>
           </a:prstGeom>
           <a:noFill/>
+          <a:ln>
+            <a:noFill/>
+          </a:ln>
+          <a:effectLst/>
           <a:extLst>
             <a:ext uri="{909E8E84-426E-40DD-AFC4-6F175D3DCCD1}">
               <a14:hiddenFill xmlns:a14="http://schemas.microsoft.com/office/drawing/2010/main">
                 <a:solidFill>
-                  <a:srgbClr val="FFFFFF"/>
+                  <a:schemeClr val="accent1"/>
                 </a:solidFill>
               </a14:hiddenFill>
+            </a:ext>
+            <a:ext uri="{91240B29-F687-4F45-9708-019B960494DF}">
+              <a14:hiddenLine xmlns:a14="http://schemas.microsoft.com/office/drawing/2010/main" w="9525">
+                <a:solidFill>
+                  <a:schemeClr val="tx1"/>
+                </a:solidFill>
+                <a:miter lim="800000"/>
+                <a:headEnd/>
+                <a:tailEnd/>
+              </a14:hiddenLine>
+            </a:ext>
+            <a:ext uri="{AF507438-7753-43E0-B8FC-AC1667EBCBE1}">
+              <a14:hiddenEffects xmlns:a14="http://schemas.microsoft.com/office/drawing/2010/main">
+                <a:effectLst>
+                  <a:outerShdw dist="35921" dir="2700000" algn="ctr" rotWithShape="0">
+                    <a:schemeClr val="bg2"/>
+                  </a:outerShdw>
+                </a:effectLst>
+              </a14:hiddenEffects>
             </a:ext>
           </a:extLst>
         </p:spPr>
@@ -5579,7 +6900,7 @@
     </p:spTree>
     <p:extLst>
       <p:ext uri="{BB962C8B-B14F-4D97-AF65-F5344CB8AC3E}">
-        <p14:creationId xmlns:p14="http://schemas.microsoft.com/office/powerpoint/2010/main" val="2856079694"/>
+        <p14:creationId xmlns:p14="http://schemas.microsoft.com/office/powerpoint/2010/main" val="3823710361"/>
       </p:ext>
     </p:extLst>
   </p:cSld>
@@ -5623,35 +6944,79 @@
             <p:ph type="title"/>
           </p:nvPr>
         </p:nvSpPr>
-        <p:spPr/>
-        <p:txBody>
-          <a:bodyPr/>
+        <p:spPr>
+          <a:xfrm>
+            <a:off x="457200" y="253536"/>
+            <a:ext cx="8229600" cy="871208"/>
+          </a:xfrm>
+        </p:spPr>
+        <p:txBody>
+          <a:bodyPr>
+            <a:normAutofit/>
+          </a:bodyPr>
           <a:lstStyle/>
           <a:p>
+            <a:pPr algn="ctr"/>
+            <a:r>
+              <a:rPr lang="ru-RU" sz="2400" b="1" dirty="0"/>
+              <a:t>Какая польза от этих тестов в будущем?</a:t>
+            </a:r>
+            <a:endParaRPr lang="ru-RU" sz="2400" b="1" dirty="0"/>
+          </a:p>
+        </p:txBody>
+      </p:sp>
+      <p:sp>
+        <p:nvSpPr>
+          <p:cNvPr id="4" name="Объект 3"/>
+          <p:cNvSpPr>
+            <a:spLocks noGrp="1"/>
+          </p:cNvSpPr>
+          <p:nvPr>
+            <p:ph idx="1"/>
+          </p:nvPr>
+        </p:nvSpPr>
+        <p:spPr>
+          <a:xfrm>
+            <a:off x="457200" y="1646237"/>
+            <a:ext cx="8229600" cy="846659"/>
+          </a:xfrm>
+        </p:spPr>
+        <p:txBody>
+          <a:bodyPr>
+            <a:normAutofit fontScale="40000" lnSpcReduction="20000"/>
+          </a:bodyPr>
+          <a:lstStyle/>
+          <a:p>
             <a:r>
               <a:rPr lang="ru-RU" dirty="0" smtClean="0"/>
-              <a:t>Регистрация</a:t>
-            </a:r>
-            <a:endParaRPr lang="ru-RU" dirty="0"/>
-          </a:p>
-        </p:txBody>
-      </p:sp>
-      <p:sp>
-        <p:nvSpPr>
-          <p:cNvPr id="3" name="Объект 2"/>
-          <p:cNvSpPr>
-            <a:spLocks noGrp="1"/>
-          </p:cNvSpPr>
-          <p:nvPr>
-            <p:ph idx="1"/>
-          </p:nvPr>
-        </p:nvSpPr>
-        <p:spPr/>
-        <p:txBody>
-          <a:bodyPr/>
-          <a:lstStyle/>
-          <a:p>
-            <a:endParaRPr lang="ru-RU" dirty="0" smtClean="0"/>
+              <a:t>Тесты </a:t>
+            </a:r>
+            <a:r>
+              <a:rPr lang="ru-RU" dirty="0"/>
+              <a:t>выполняют роль «сигнализации». Если вы или другой программист случайно измените код в views.py или опечатаетесь в </a:t>
+            </a:r>
+            <a:r>
+              <a:rPr lang="ru-RU" dirty="0" smtClean="0"/>
+              <a:t>шаблоне, </a:t>
+            </a:r>
+            <a:r>
+              <a:rPr lang="ru-RU" dirty="0"/>
+              <a:t>страница перестанет работать.</a:t>
+            </a:r>
+          </a:p>
+          <a:p>
+            <a:r>
+              <a:rPr lang="ru-RU" dirty="0"/>
+              <a:t>Вам не нужно будет заходить в браузер и кликать по страницам вручную — достаточно запустить </a:t>
+            </a:r>
+            <a:r>
+              <a:rPr lang="ru-RU" dirty="0" err="1"/>
+              <a:t>pytest</a:t>
+            </a:r>
+            <a:r>
+              <a:rPr lang="ru-RU" dirty="0"/>
+              <a:t>, и он за 1 секунду покажет, где именно сломалась логика отображения статей.</a:t>
+            </a:r>
           </a:p>
           <a:p>
             <a:endParaRPr lang="ru-RU" dirty="0"/>
@@ -5660,7 +7025,7 @@
       </p:sp>
       <p:pic>
         <p:nvPicPr>
-          <p:cNvPr id="3074" name="Picture 2" descr="E:\TOP\Pandas\mini-проект\Демонстрация\регистрация.png"/>
+          <p:cNvPr id="6146" name="Picture 2"/>
           <p:cNvPicPr>
             <a:picLocks noChangeAspect="1" noChangeArrowheads="1"/>
           </p:cNvPicPr>
@@ -5681,20 +7046,43 @@
         </p:blipFill>
         <p:spPr bwMode="auto">
           <a:xfrm>
-            <a:off x="723900" y="1628799"/>
-            <a:ext cx="6800428" cy="4140175"/>
+            <a:off x="323528" y="2550542"/>
+            <a:ext cx="8452262" cy="1454522"/>
           </a:xfrm>
           <a:prstGeom prst="rect">
             <a:avLst/>
           </a:prstGeom>
           <a:noFill/>
+          <a:ln>
+            <a:noFill/>
+          </a:ln>
+          <a:effectLst/>
           <a:extLst>
             <a:ext uri="{909E8E84-426E-40DD-AFC4-6F175D3DCCD1}">
               <a14:hiddenFill xmlns:a14="http://schemas.microsoft.com/office/drawing/2010/main">
                 <a:solidFill>
-                  <a:srgbClr val="FFFFFF"/>
+                  <a:schemeClr val="accent1"/>
                 </a:solidFill>
               </a14:hiddenFill>
+            </a:ext>
+            <a:ext uri="{91240B29-F687-4F45-9708-019B960494DF}">
+              <a14:hiddenLine xmlns:a14="http://schemas.microsoft.com/office/drawing/2010/main" w="9525">
+                <a:solidFill>
+                  <a:schemeClr val="tx1"/>
+                </a:solidFill>
+                <a:miter lim="800000"/>
+                <a:headEnd/>
+                <a:tailEnd/>
+              </a14:hiddenLine>
+            </a:ext>
+            <a:ext uri="{AF507438-7753-43E0-B8FC-AC1667EBCBE1}">
+              <a14:hiddenEffects xmlns:a14="http://schemas.microsoft.com/office/drawing/2010/main">
+                <a:effectLst>
+                  <a:outerShdw dist="35921" dir="2700000" algn="ctr" rotWithShape="0">
+                    <a:schemeClr val="bg2"/>
+                  </a:outerShdw>
+                </a:effectLst>
+              </a14:hiddenEffects>
             </a:ext>
           </a:extLst>
         </p:spPr>
@@ -5702,7 +7090,7 @@
     </p:spTree>
     <p:extLst>
       <p:ext uri="{BB962C8B-B14F-4D97-AF65-F5344CB8AC3E}">
-        <p14:creationId xmlns:p14="http://schemas.microsoft.com/office/powerpoint/2010/main" val="3555227253"/>
+        <p14:creationId xmlns:p14="http://schemas.microsoft.com/office/powerpoint/2010/main" val="1005744134"/>
       </p:ext>
     </p:extLst>
   </p:cSld>

--- a/Новостной портал.pptx
+++ b/Новостной портал.pptx
@@ -4383,9 +4383,51 @@
               <a:t>admin</a:t>
             </a:r>
             <a:r>
+              <a:rPr lang="ru-RU" sz="1000" dirty="0" smtClean="0"/>
+              <a:t>.</a:t>
+            </a:r>
+          </a:p>
+          <a:p>
+            <a:r>
               <a:rPr lang="ru-RU" sz="1000" dirty="0"/>
-              <a:t>.</a:t>
-            </a:r>
+              <a:t>Запуск тестов</a:t>
+            </a:r>
+            <a:r>
+              <a:rPr lang="en-US" sz="1000" dirty="0"/>
+              <a:t>: python -m </a:t>
+            </a:r>
+            <a:r>
+              <a:rPr lang="en-US" sz="1000" dirty="0" err="1"/>
+              <a:t>pytest</a:t>
+            </a:r>
+            <a:r>
+              <a:rPr lang="en-US" sz="1000" dirty="0"/>
+              <a:t> --ds=</a:t>
+            </a:r>
+            <a:r>
+              <a:rPr lang="en-US" sz="1000" dirty="0" err="1"/>
+              <a:t>myproject.settings</a:t>
+            </a:r>
+            <a:r>
+              <a:rPr lang="en-US" sz="1000" dirty="0"/>
+              <a:t> -v</a:t>
+            </a:r>
+            <a:endParaRPr lang="ru-RU" sz="1000" dirty="0"/>
+          </a:p>
+          <a:p>
+            <a:endParaRPr lang="ru-RU" sz="1000" dirty="0"/>
+          </a:p>
+          <a:p>
+            <a:pPr marL="0" indent="0">
+              <a:buNone/>
+            </a:pPr>
+            <a:endParaRPr lang="ru-RU" sz="1000" dirty="0" smtClean="0"/>
+          </a:p>
+          <a:p>
+            <a:pPr marL="0" indent="0">
+              <a:buNone/>
+            </a:pPr>
+            <a:endParaRPr lang="ru-RU" sz="1000" dirty="0"/>
           </a:p>
         </p:txBody>
       </p:sp>
@@ -6698,15 +6740,15 @@
           <a:p>
             <a:r>
               <a:rPr lang="ru-RU" sz="1050" b="1" dirty="0"/>
-              <a:t>1. Тест </a:t>
+              <a:t>1. Тест поиска (</a:t>
             </a:r>
             <a:r>
               <a:rPr lang="ru-RU" sz="1050" b="1" dirty="0" err="1"/>
-              <a:t>test_page_with_items</a:t>
+              <a:t>test_search_form</a:t>
             </a:r>
             <a:r>
               <a:rPr lang="ru-RU" sz="1050" b="1" dirty="0"/>
-              <a:t> (Проверка с созданными статьями)</a:t>
+              <a:t>)</a:t>
             </a:r>
           </a:p>
           <a:p>
@@ -6716,41 +6758,131 @@
             </a:r>
             <a:r>
               <a:rPr lang="ru-RU" sz="1050" dirty="0"/>
-              <a:t> Мы принудительно создаем одну статью (</a:t>
+              <a:t> Создает во временной базе данных две статьи (одну про АСУТП, другую про </a:t>
             </a:r>
             <a:r>
               <a:rPr lang="ru-RU" sz="1050" dirty="0" err="1"/>
-              <a:t>Article.objects.create</a:t>
+              <a:t>Python</a:t>
             </a:r>
             <a:r>
               <a:rPr lang="ru-RU" sz="1050" dirty="0"/>
-              <a:t>) прямо в тестовой (временной) базе данных.</a:t>
+              <a:t>), имитирует ввод слова «АСУТП» в строку поиска и проверяет, что на странице осталась только нужная статья.</a:t>
             </a:r>
           </a:p>
           <a:p>
             <a:r>
               <a:rPr lang="ru-RU" sz="1050" b="1" dirty="0"/>
-              <a:t>В чём заключается проверка:</a:t>
+              <a:t>Какую пользу приносит:</a:t>
             </a:r>
             <a:r>
               <a:rPr lang="ru-RU" sz="1050" dirty="0"/>
-              <a:t> Мы отправляем виртуальный запрос на страницу и проверяем, что </a:t>
+              <a:t> Защищает от поломки систему фильтрации данных. Если вы случайно измените логику фильтрации в файле views.py (например, опечатаетесь в строке </a:t>
             </a:r>
             <a:r>
               <a:rPr lang="ru-RU" sz="1050" dirty="0" err="1"/>
-              <a:t>Django</a:t>
+              <a:t>Article.objects.filter</a:t>
             </a:r>
             <a:r>
               <a:rPr lang="ru-RU" sz="1050" dirty="0"/>
-              <a:t> успешно взял эту статью из базы, передал в шаблон и </a:t>
+              <a:t>(</a:t>
             </a:r>
             <a:r>
               <a:rPr lang="ru-RU" sz="1050" dirty="0" err="1"/>
-              <a:t>отрендерил</a:t>
+              <a:t>title</a:t>
             </a:r>
             <a:r>
               <a:rPr lang="ru-RU" sz="1050" dirty="0"/>
-              <a:t> её HTML-код. Тест ищет на странице класс </a:t>
+              <a:t>__</a:t>
+            </a:r>
+            <a:r>
+              <a:rPr lang="ru-RU" sz="1050" dirty="0" err="1"/>
+              <a:t>icontains</a:t>
+            </a:r>
+            <a:r>
+              <a:rPr lang="ru-RU" sz="1050" dirty="0"/>
+              <a:t>=</a:t>
+            </a:r>
+            <a:r>
+              <a:rPr lang="ru-RU" sz="1050" dirty="0" err="1"/>
+              <a:t>query</a:t>
+            </a:r>
+            <a:r>
+              <a:rPr lang="ru-RU" sz="1050" dirty="0"/>
+              <a:t>)), тест тут же упадет. Вы сразу узнаете, что поиск сломан, еще до того, как выложите сайт на сервер.</a:t>
+            </a:r>
+          </a:p>
+          <a:p>
+            <a:r>
+              <a:rPr lang="ru-RU" sz="1050" b="1" dirty="0"/>
+              <a:t>2. Тест сортировки (</a:t>
+            </a:r>
+            <a:r>
+              <a:rPr lang="ru-RU" sz="1050" b="1" dirty="0" err="1"/>
+              <a:t>test_sorting_by_date</a:t>
+            </a:r>
+            <a:r>
+              <a:rPr lang="ru-RU" sz="1050" b="1" dirty="0"/>
+              <a:t>)</a:t>
+            </a:r>
+          </a:p>
+          <a:p>
+            <a:r>
+              <a:rPr lang="ru-RU" sz="1050" b="1" dirty="0"/>
+              <a:t>Что делает:</a:t>
+            </a:r>
+            <a:r>
+              <a:rPr lang="ru-RU" sz="1050" dirty="0"/>
+              <a:t> Создает старую статью (5 дней назад) и свежую статью (сегодня), запрашивает страницу с параметром ?</a:t>
+            </a:r>
+            <a:r>
+              <a:rPr lang="ru-RU" sz="1050" dirty="0" err="1"/>
+              <a:t>sort</a:t>
+            </a:r>
+            <a:r>
+              <a:rPr lang="ru-RU" sz="1050" dirty="0"/>
+              <a:t>=</a:t>
+            </a:r>
+            <a:r>
+              <a:rPr lang="ru-RU" sz="1050" dirty="0" err="1"/>
+              <a:t>date</a:t>
+            </a:r>
+            <a:r>
+              <a:rPr lang="ru-RU" sz="1050" dirty="0"/>
+              <a:t> и проверяет по HTML-коду, что свежая статья отобразилась выше старой.</a:t>
+            </a:r>
+          </a:p>
+          <a:p>
+            <a:r>
+              <a:rPr lang="ru-RU" sz="1050" b="1" dirty="0"/>
+              <a:t>Какую пользу приносит:</a:t>
+            </a:r>
+            <a:r>
+              <a:rPr lang="ru-RU" sz="1050" dirty="0"/>
+              <a:t> Гарантирует правильный порядок подачи информации. Пользователи ожидают видеть актуальные новости первыми. Если из-за изменений в коде или базе данных сортировка перевернется или сломается, тест покажет это, сохранив удобство интерфейса для ваших читателей.</a:t>
+            </a:r>
+          </a:p>
+          <a:p>
+            <a:r>
+              <a:rPr lang="ru-RU" sz="1050" b="1" dirty="0"/>
+              <a:t>3. Тест пустого списка (</a:t>
+            </a:r>
+            <a:r>
+              <a:rPr lang="ru-RU" sz="1050" b="1" dirty="0" err="1"/>
+              <a:t>test_page_empty_list</a:t>
+            </a:r>
+            <a:r>
+              <a:rPr lang="ru-RU" sz="1050" b="1" dirty="0"/>
+              <a:t>)</a:t>
+            </a:r>
+          </a:p>
+          <a:p>
+            <a:r>
+              <a:rPr lang="ru-RU" sz="1050" b="1" dirty="0"/>
+              <a:t>Что делает:</a:t>
+            </a:r>
+            <a:r>
+              <a:rPr lang="ru-RU" sz="1050" dirty="0"/>
+              <a:t> Запрашивает главную страницу, когда в базе данных нет вообще ни одной статьи, и проверяет, что страница успешно открылась (код 200), а блоки карточек статей (</a:t>
             </a:r>
             <a:r>
               <a:rPr lang="ru-RU" sz="1050" dirty="0" err="1"/>
@@ -6758,31 +6890,39 @@
             </a:r>
             <a:r>
               <a:rPr lang="ru-RU" sz="1050" dirty="0"/>
-              <a:t> и текст «Уникальный заголовок АСУТП».</a:t>
+              <a:t>) отсутствуют.</a:t>
             </a:r>
           </a:p>
           <a:p>
             <a:r>
               <a:rPr lang="ru-RU" sz="1050" b="1" dirty="0"/>
-              <a:t>Зачем это нужно:</a:t>
+              <a:t>Какую пользу приносит:</a:t>
             </a:r>
             <a:r>
               <a:rPr lang="ru-RU" sz="1050" dirty="0"/>
-              <a:t> Это гарантирует, что если в реальной базе будут статьи, сайт не выдаст ошибку и карточки новостей отобразятся корректно.</a:t>
+              <a:t> Страхует сайт от «падения» при запуске. Когда проект только разворачивается на новом сервере или когда все статьи удалены, сайт не должен выдавать «Ошибку 500» из-за того, что цикл {% </a:t>
+            </a:r>
+            <a:r>
+              <a:rPr lang="ru-RU" sz="1050" dirty="0" err="1"/>
+              <a:t>for</a:t>
+            </a:r>
+            <a:r>
+              <a:rPr lang="ru-RU" sz="1050" dirty="0"/>
+              <a:t> %} пытается обработать пустоту. Тест гарантирует, что пустая страница останется аккуратной, сохранит боковую панель, шапку и подвал.</a:t>
             </a:r>
           </a:p>
           <a:p>
             <a:r>
               <a:rPr lang="ru-RU" sz="1050" b="1" dirty="0"/>
-              <a:t>2. Тест </a:t>
+              <a:t>4. Тест отображения закладок (</a:t>
             </a:r>
             <a:r>
               <a:rPr lang="ru-RU" sz="1050" b="1" dirty="0" err="1"/>
-              <a:t>test_page_empty_list</a:t>
+              <a:t>test_favorites_icons</a:t>
             </a:r>
             <a:r>
               <a:rPr lang="ru-RU" sz="1050" b="1" dirty="0"/>
-              <a:t> (Проверка без статей)</a:t>
+              <a:t>...)</a:t>
             </a:r>
           </a:p>
           <a:p>
@@ -6792,50 +6932,223 @@
             </a:r>
             <a:r>
               <a:rPr lang="ru-RU" sz="1050" dirty="0"/>
-              <a:t> Мы запускаем тест, оставляя тестовую базу данных абсолютно пустой.</a:t>
+              <a:t> Проверяет страницу дважды. Сначала как анонимный гость (убеждается, что иконки закладок скрыты). Затем имитирует авторизацию пользователя и проверяет, что в HTML-коде карточки появилась иконка пустой закладки (</a:t>
+            </a:r>
+            <a:r>
+              <a:rPr lang="ru-RU" sz="1050" dirty="0" err="1"/>
+              <a:t>bi-bookmark</a:t>
+            </a:r>
+            <a:r>
+              <a:rPr lang="ru-RU" sz="1050" dirty="0"/>
+              <a:t>).</a:t>
             </a:r>
           </a:p>
           <a:p>
             <a:r>
               <a:rPr lang="ru-RU" sz="1050" b="1" dirty="0"/>
-              <a:t>В чём заключается проверка:</a:t>
+              <a:t>Какую пользу приносит:</a:t>
             </a:r>
             <a:r>
               <a:rPr lang="ru-RU" sz="1050" dirty="0"/>
-              <a:t> Мы проверяем, что страница открывается без ошибок (код 200 OK), но на ней </a:t>
-            </a:r>
-            <a:r>
-              <a:rPr lang="ru-RU" sz="1050" b="1" dirty="0"/>
-              <a:t>нет</a:t>
-            </a:r>
-            <a:r>
-              <a:rPr lang="ru-RU" sz="1050" dirty="0"/>
-              <a:t> ни одной карточки статьи (тест проверяет, что класс </a:t>
-            </a:r>
-            <a:r>
-              <a:rPr lang="ru-RU" sz="1050" dirty="0" err="1"/>
-              <a:t>article-card</a:t>
-            </a:r>
-            <a:r>
-              <a:rPr lang="ru-RU" sz="1050" dirty="0"/>
-              <a:t> отсутствует в HTML-коде страницы).</a:t>
-            </a:r>
-          </a:p>
-          <a:p>
-            <a:r>
-              <a:rPr lang="ru-RU" sz="1050" b="1" dirty="0"/>
-              <a:t>Зачем это нужно:</a:t>
-            </a:r>
-            <a:r>
-              <a:rPr lang="ru-RU" sz="1050" dirty="0"/>
-              <a:t> Это гарантирует, что когда сайт только запущен или пользователь удалил все статьи, страница не «сломается», на ней не появятся пустые контуры блоков, а боковая панель и поиск продолжат работать.</a:t>
-            </a:r>
+              <a:t> Защищает приватность и безопасность интерфейса. Если анонимный пользователь увидит кнопки избранного, нажатие на них вызовет ошибку, так как у анонима нет личного кабинета. Тест строго следит за тем, чтобы интерфейс подстраивался под статус пользователя и не показывал гостям лишние или нерабочие элементы управления.</a:t>
+            </a:r>
+          </a:p>
+          <a:p>
+            <a:r>
+              <a:rPr lang="ru-RU" sz="1050" dirty="0" smtClean="0"/>
+              <a:t>.</a:t>
+            </a:r>
+            <a:endParaRPr lang="ru-RU" sz="1050" dirty="0"/>
+          </a:p>
+        </p:txBody>
+      </p:sp>
+    </p:spTree>
+    <p:extLst>
+      <p:ext uri="{BB962C8B-B14F-4D97-AF65-F5344CB8AC3E}">
+        <p14:creationId xmlns:p14="http://schemas.microsoft.com/office/powerpoint/2010/main" val="3823710361"/>
+      </p:ext>
+    </p:extLst>
+  </p:cSld>
+  <p:clrMapOvr>
+    <a:masterClrMapping/>
+  </p:clrMapOvr>
+  <p:timing>
+    <p:tnLst>
+      <p:par>
+        <p:cTn id="1" dur="indefinite" restart="never" nodeType="tmRoot"/>
+      </p:par>
+    </p:tnLst>
+  </p:timing>
+</p:sld>
+</file>
+
+<file path=ppt/slides/slide9.xml><?xml version="1.0" encoding="utf-8"?>
+<p:sld xmlns:a="http://schemas.openxmlformats.org/drawingml/2006/main" xmlns:r="http://schemas.openxmlformats.org/officeDocument/2006/relationships" xmlns:p="http://schemas.openxmlformats.org/presentationml/2006/main">
+  <p:cSld>
+    <p:spTree>
+      <p:nvGrpSpPr>
+        <p:cNvPr id="1" name=""/>
+        <p:cNvGrpSpPr/>
+        <p:nvPr/>
+      </p:nvGrpSpPr>
+      <p:grpSpPr>
+        <a:xfrm>
+          <a:off x="0" y="0"/>
+          <a:ext cx="0" cy="0"/>
+          <a:chOff x="0" y="0"/>
+          <a:chExt cx="0" cy="0"/>
+        </a:xfrm>
+      </p:grpSpPr>
+      <p:sp>
+        <p:nvSpPr>
+          <p:cNvPr id="2" name="Заголовок 1"/>
+          <p:cNvSpPr>
+            <a:spLocks noGrp="1"/>
+          </p:cNvSpPr>
+          <p:nvPr>
+            <p:ph type="title"/>
+          </p:nvPr>
+        </p:nvSpPr>
+        <p:spPr>
+          <a:xfrm>
+            <a:off x="457200" y="253536"/>
+            <a:ext cx="8229600" cy="871208"/>
+          </a:xfrm>
+        </p:spPr>
+        <p:txBody>
+          <a:bodyPr>
+            <a:normAutofit/>
+          </a:bodyPr>
+          <a:lstStyle/>
+          <a:p>
+            <a:pPr algn="ctr"/>
+            <a:r>
+              <a:rPr lang="ru-RU" sz="2400" b="1" dirty="0"/>
+              <a:t>Какая польза от этих тестов в будущем?</a:t>
+            </a:r>
+            <a:endParaRPr lang="ru-RU" sz="2400" b="1" dirty="0"/>
+          </a:p>
+        </p:txBody>
+      </p:sp>
+      <p:sp>
+        <p:nvSpPr>
+          <p:cNvPr id="4" name="Объект 3"/>
+          <p:cNvSpPr>
+            <a:spLocks noGrp="1"/>
+          </p:cNvSpPr>
+          <p:nvPr>
+            <p:ph idx="1"/>
+          </p:nvPr>
+        </p:nvSpPr>
+        <p:spPr>
+          <a:xfrm>
+            <a:off x="457200" y="1484785"/>
+            <a:ext cx="8229600" cy="864095"/>
+          </a:xfrm>
+        </p:spPr>
+        <p:txBody>
+          <a:bodyPr>
+            <a:normAutofit fontScale="25000" lnSpcReduction="20000"/>
+          </a:bodyPr>
+          <a:lstStyle/>
+          <a:p>
+            <a:r>
+              <a:rPr lang="ru-RU" b="1" dirty="0"/>
+              <a:t>Какую пользу приносит:</a:t>
+            </a:r>
+            <a:r>
+              <a:rPr lang="ru-RU" dirty="0"/>
+              <a:t> Защищает приватность и безопасность интерфейса. Если анонимный пользователь увидит кнопки избранного, нажатие на них вызовет ошибку, так как у анонима нет личного кабинета. Тест строго следит за тем, чтобы интерфейс подстраивался под статус пользователя и не показывал гостям лишние или нерабочие элементы управления</a:t>
+            </a:r>
+            <a:r>
+              <a:rPr lang="ru-RU" dirty="0" smtClean="0"/>
+              <a:t>.</a:t>
+            </a:r>
+          </a:p>
+          <a:p>
+            <a:r>
+              <a:rPr lang="ru-RU" b="1" dirty="0"/>
+              <a:t>Защита от «эффекта домино»:</a:t>
+            </a:r>
+            <a:r>
+              <a:rPr lang="ru-RU" dirty="0"/>
+              <a:t> Часто, исправляя код в одном месте (например, в моделях данных), программисты случайно ломают другое место (отображение страниц). Тесты мгновенно это </a:t>
+            </a:r>
+            <a:r>
+              <a:rPr lang="ru-RU" dirty="0" err="1"/>
+              <a:t>подсвечивают.</a:t>
+            </a:r>
+            <a:r>
+              <a:rPr lang="ru-RU" b="1" dirty="0" err="1"/>
+              <a:t>Смелость</a:t>
+            </a:r>
+            <a:r>
+              <a:rPr lang="ru-RU" b="1" dirty="0"/>
+              <a:t> при </a:t>
+            </a:r>
+            <a:r>
+              <a:rPr lang="ru-RU" b="1" dirty="0" err="1"/>
+              <a:t>рефакторинге</a:t>
+            </a:r>
+            <a:r>
+              <a:rPr lang="ru-RU" b="1" dirty="0"/>
+              <a:t>:</a:t>
+            </a:r>
+            <a:r>
+              <a:rPr lang="ru-RU" dirty="0"/>
+              <a:t> Вы можете полностью переписать код в views.py, сделать его быстрее и чище, а затем запустить </a:t>
+            </a:r>
+            <a:r>
+              <a:rPr lang="ru-RU" dirty="0" err="1"/>
+              <a:t>pytest</a:t>
+            </a:r>
+            <a:r>
+              <a:rPr lang="ru-RU" dirty="0"/>
+              <a:t>. Если загорелось зелёным — вы обновили код и ничего не </a:t>
+            </a:r>
+            <a:r>
+              <a:rPr lang="ru-RU" dirty="0" err="1"/>
+              <a:t>сломали.</a:t>
+            </a:r>
+            <a:r>
+              <a:rPr lang="ru-RU" b="1" dirty="0" err="1"/>
+              <a:t>Экономия</a:t>
+            </a:r>
+            <a:r>
+              <a:rPr lang="ru-RU" b="1" dirty="0"/>
+              <a:t> времени:</a:t>
+            </a:r>
+            <a:r>
+              <a:rPr lang="ru-RU" dirty="0"/>
+              <a:t> Ручная проверка этих 4 сценариев в браузере занимает около 2–3 минут (открыть, войти, ввести поиск, проверить, выйти). </a:t>
+            </a:r>
+            <a:r>
+              <a:rPr lang="ru-RU" dirty="0" err="1"/>
+              <a:t>pytest</a:t>
+            </a:r>
+            <a:r>
+              <a:rPr lang="ru-RU" dirty="0"/>
+              <a:t> сделал это за </a:t>
+            </a:r>
+            <a:r>
+              <a:rPr lang="ru-RU" b="1" dirty="0"/>
+              <a:t>2.44 секунды</a:t>
+            </a:r>
+            <a:r>
+              <a:rPr lang="ru-RU" dirty="0"/>
+              <a:t>. При росте проекта эта экономия превращается в часы</a:t>
+            </a:r>
+            <a:r>
+              <a:rPr lang="ru-RU" dirty="0" smtClean="0"/>
+              <a:t>.</a:t>
+            </a:r>
+            <a:endParaRPr lang="ru-RU" dirty="0"/>
           </a:p>
         </p:txBody>
       </p:sp>
       <p:pic>
         <p:nvPicPr>
-          <p:cNvPr id="6" name="Picture 2"/>
+          <p:cNvPr id="8" name="Picture 2"/>
           <p:cNvPicPr>
             <a:picLocks noChangeAspect="1" noChangeArrowheads="1"/>
           </p:cNvPicPr>
@@ -6856,8 +7169,8 @@
         </p:blipFill>
         <p:spPr bwMode="auto">
           <a:xfrm>
-            <a:off x="2267744" y="3861049"/>
-            <a:ext cx="4608512" cy="2721418"/>
+            <a:off x="2502950" y="4293096"/>
+            <a:ext cx="4032448" cy="2381241"/>
           </a:xfrm>
           <a:prstGeom prst="rect">
             <a:avLst/>
@@ -6897,142 +7210,16 @@
           </a:extLst>
         </p:spPr>
       </p:pic>
-    </p:spTree>
-    <p:extLst>
-      <p:ext uri="{BB962C8B-B14F-4D97-AF65-F5344CB8AC3E}">
-        <p14:creationId xmlns:p14="http://schemas.microsoft.com/office/powerpoint/2010/main" val="3823710361"/>
-      </p:ext>
-    </p:extLst>
-  </p:cSld>
-  <p:clrMapOvr>
-    <a:masterClrMapping/>
-  </p:clrMapOvr>
-  <p:timing>
-    <p:tnLst>
-      <p:par>
-        <p:cTn id="1" dur="indefinite" restart="never" nodeType="tmRoot"/>
-      </p:par>
-    </p:tnLst>
-  </p:timing>
-</p:sld>
-</file>
-
-<file path=ppt/slides/slide9.xml><?xml version="1.0" encoding="utf-8"?>
-<p:sld xmlns:a="http://schemas.openxmlformats.org/drawingml/2006/main" xmlns:r="http://schemas.openxmlformats.org/officeDocument/2006/relationships" xmlns:p="http://schemas.openxmlformats.org/presentationml/2006/main">
-  <p:cSld>
-    <p:spTree>
-      <p:nvGrpSpPr>
-        <p:cNvPr id="1" name=""/>
-        <p:cNvGrpSpPr/>
-        <p:nvPr/>
-      </p:nvGrpSpPr>
-      <p:grpSpPr>
-        <a:xfrm>
-          <a:off x="0" y="0"/>
-          <a:ext cx="0" cy="0"/>
-          <a:chOff x="0" y="0"/>
-          <a:chExt cx="0" cy="0"/>
-        </a:xfrm>
-      </p:grpSpPr>
-      <p:sp>
-        <p:nvSpPr>
-          <p:cNvPr id="2" name="Заголовок 1"/>
-          <p:cNvSpPr>
-            <a:spLocks noGrp="1"/>
-          </p:cNvSpPr>
-          <p:nvPr>
-            <p:ph type="title"/>
-          </p:nvPr>
-        </p:nvSpPr>
-        <p:spPr>
-          <a:xfrm>
-            <a:off x="457200" y="253536"/>
-            <a:ext cx="8229600" cy="871208"/>
-          </a:xfrm>
-        </p:spPr>
-        <p:txBody>
-          <a:bodyPr>
-            <a:normAutofit/>
-          </a:bodyPr>
-          <a:lstStyle/>
-          <a:p>
-            <a:pPr algn="ctr"/>
-            <a:r>
-              <a:rPr lang="ru-RU" sz="2400" b="1" dirty="0"/>
-              <a:t>Какая польза от этих тестов в будущем?</a:t>
-            </a:r>
-            <a:endParaRPr lang="ru-RU" sz="2400" b="1" dirty="0"/>
-          </a:p>
-        </p:txBody>
-      </p:sp>
-      <p:sp>
-        <p:nvSpPr>
-          <p:cNvPr id="4" name="Объект 3"/>
-          <p:cNvSpPr>
-            <a:spLocks noGrp="1"/>
-          </p:cNvSpPr>
-          <p:nvPr>
-            <p:ph idx="1"/>
-          </p:nvPr>
-        </p:nvSpPr>
-        <p:spPr>
-          <a:xfrm>
-            <a:off x="457200" y="1646237"/>
-            <a:ext cx="8229600" cy="846659"/>
-          </a:xfrm>
-        </p:spPr>
-        <p:txBody>
-          <a:bodyPr>
-            <a:normAutofit fontScale="40000" lnSpcReduction="20000"/>
-          </a:bodyPr>
-          <a:lstStyle/>
-          <a:p>
-            <a:r>
-              <a:rPr lang="ru-RU" dirty="0" smtClean="0"/>
-              <a:t>Тесты </a:t>
-            </a:r>
-            <a:r>
-              <a:rPr lang="ru-RU" dirty="0"/>
-              <a:t>выполняют роль «сигнализации». Если вы или другой программист случайно измените код в views.py или опечатаетесь в </a:t>
-            </a:r>
-            <a:r>
-              <a:rPr lang="ru-RU" dirty="0" smtClean="0"/>
-              <a:t>шаблоне, </a:t>
-            </a:r>
-            <a:r>
-              <a:rPr lang="ru-RU" dirty="0"/>
-              <a:t>страница перестанет работать.</a:t>
-            </a:r>
-          </a:p>
-          <a:p>
-            <a:r>
-              <a:rPr lang="ru-RU" dirty="0"/>
-              <a:t>Вам не нужно будет заходить в браузер и кликать по страницам вручную — достаточно запустить </a:t>
-            </a:r>
-            <a:r>
-              <a:rPr lang="ru-RU" dirty="0" err="1"/>
-              <a:t>pytest</a:t>
-            </a:r>
-            <a:r>
-              <a:rPr lang="ru-RU" dirty="0"/>
-              <a:t>, и он за 1 секунду покажет, где именно сломалась логика отображения статей.</a:t>
-            </a:r>
-          </a:p>
-          <a:p>
-            <a:endParaRPr lang="ru-RU" dirty="0"/>
-          </a:p>
-        </p:txBody>
-      </p:sp>
       <p:pic>
         <p:nvPicPr>
-          <p:cNvPr id="6146" name="Picture 2"/>
+          <p:cNvPr id="6148" name="Picture 4"/>
           <p:cNvPicPr>
             <a:picLocks noChangeAspect="1" noChangeArrowheads="1"/>
           </p:cNvPicPr>
           <p:nvPr/>
         </p:nvPicPr>
         <p:blipFill>
-          <a:blip r:embed="rId2">
+          <a:blip r:embed="rId3">
             <a:extLst>
               <a:ext uri="{28A0092B-C50C-407E-A947-70E740481C1C}">
                 <a14:useLocalDpi xmlns:a14="http://schemas.microsoft.com/office/drawing/2010/main" val="0"/>
@@ -7046,8 +7233,8 @@
         </p:blipFill>
         <p:spPr bwMode="auto">
           <a:xfrm>
-            <a:off x="323528" y="2550542"/>
-            <a:ext cx="8452262" cy="1454522"/>
+            <a:off x="437029" y="2554089"/>
+            <a:ext cx="8164290" cy="1704330"/>
           </a:xfrm>
           <a:prstGeom prst="rect">
             <a:avLst/>

--- a/Новостной портал.pptx
+++ b/Новостной портал.pptx
@@ -4749,7 +4749,7 @@
       </p:sp>
       <p:pic>
         <p:nvPicPr>
-          <p:cNvPr id="2050" name="Picture 2" descr="E:\TOP\Pandas\mini-проект\Демонстрация\Добавление коментариев.png"/>
+          <p:cNvPr id="5" name="Picture 2"/>
           <p:cNvPicPr>
             <a:picLocks noChangeAspect="1" noChangeArrowheads="1"/>
           </p:cNvPicPr>
@@ -4770,20 +4770,43 @@
         </p:blipFill>
         <p:spPr bwMode="auto">
           <a:xfrm>
-            <a:off x="683568" y="1772816"/>
-            <a:ext cx="7992888" cy="4022421"/>
+            <a:off x="328912" y="1799578"/>
+            <a:ext cx="8491559" cy="4482358"/>
           </a:xfrm>
           <a:prstGeom prst="rect">
             <a:avLst/>
           </a:prstGeom>
           <a:noFill/>
+          <a:ln>
+            <a:noFill/>
+          </a:ln>
+          <a:effectLst/>
           <a:extLst>
             <a:ext uri="{909E8E84-426E-40DD-AFC4-6F175D3DCCD1}">
               <a14:hiddenFill xmlns:a14="http://schemas.microsoft.com/office/drawing/2010/main">
                 <a:solidFill>
-                  <a:srgbClr val="FFFFFF"/>
+                  <a:schemeClr val="accent1"/>
                 </a:solidFill>
               </a14:hiddenFill>
+            </a:ext>
+            <a:ext uri="{91240B29-F687-4F45-9708-019B960494DF}">
+              <a14:hiddenLine xmlns:a14="http://schemas.microsoft.com/office/drawing/2010/main" w="9525">
+                <a:solidFill>
+                  <a:schemeClr val="tx1"/>
+                </a:solidFill>
+                <a:miter lim="800000"/>
+                <a:headEnd/>
+                <a:tailEnd/>
+              </a14:hiddenLine>
+            </a:ext>
+            <a:ext uri="{AF507438-7753-43E0-B8FC-AC1667EBCBE1}">
+              <a14:hiddenEffects xmlns:a14="http://schemas.microsoft.com/office/drawing/2010/main">
+                <a:effectLst>
+                  <a:outerShdw dist="35921" dir="2700000" algn="ctr" rotWithShape="0">
+                    <a:schemeClr val="bg2"/>
+                  </a:outerShdw>
+                </a:effectLst>
+              </a14:hiddenEffects>
             </a:ext>
           </a:extLst>
         </p:spPr>
@@ -4872,7 +4895,7 @@
       </p:sp>
       <p:pic>
         <p:nvPicPr>
-          <p:cNvPr id="3074" name="Picture 2" descr="E:\TOP\Pandas\mini-проект\Демонстрация\регистрация.png"/>
+          <p:cNvPr id="7171" name="Picture 3"/>
           <p:cNvPicPr>
             <a:picLocks noChangeAspect="1" noChangeArrowheads="1"/>
           </p:cNvPicPr>
@@ -4893,20 +4916,43 @@
         </p:blipFill>
         <p:spPr bwMode="auto">
           <a:xfrm>
-            <a:off x="723900" y="1628799"/>
-            <a:ext cx="6800428" cy="4140175"/>
+            <a:off x="251520" y="2204864"/>
+            <a:ext cx="8341337" cy="3775125"/>
           </a:xfrm>
           <a:prstGeom prst="rect">
             <a:avLst/>
           </a:prstGeom>
           <a:noFill/>
+          <a:ln>
+            <a:noFill/>
+          </a:ln>
+          <a:effectLst/>
           <a:extLst>
             <a:ext uri="{909E8E84-426E-40DD-AFC4-6F175D3DCCD1}">
               <a14:hiddenFill xmlns:a14="http://schemas.microsoft.com/office/drawing/2010/main">
                 <a:solidFill>
-                  <a:srgbClr val="FFFFFF"/>
+                  <a:schemeClr val="accent1"/>
                 </a:solidFill>
               </a14:hiddenFill>
+            </a:ext>
+            <a:ext uri="{91240B29-F687-4F45-9708-019B960494DF}">
+              <a14:hiddenLine xmlns:a14="http://schemas.microsoft.com/office/drawing/2010/main" w="9525">
+                <a:solidFill>
+                  <a:schemeClr val="tx1"/>
+                </a:solidFill>
+                <a:miter lim="800000"/>
+                <a:headEnd/>
+                <a:tailEnd/>
+              </a14:hiddenLine>
+            </a:ext>
+            <a:ext uri="{AF507438-7753-43E0-B8FC-AC1667EBCBE1}">
+              <a14:hiddenEffects xmlns:a14="http://schemas.microsoft.com/office/drawing/2010/main">
+                <a:effectLst>
+                  <a:outerShdw dist="35921" dir="2700000" algn="ctr" rotWithShape="0">
+                    <a:schemeClr val="bg2"/>
+                  </a:outerShdw>
+                </a:effectLst>
+              </a14:hiddenEffects>
             </a:ext>
           </a:extLst>
         </p:spPr>

--- a/Новостной портал.pptx
+++ b/Новостной портал.pptx
@@ -12,13 +12,15 @@
     <p:sldId id="269" r:id="rId6"/>
     <p:sldId id="270" r:id="rId7"/>
     <p:sldId id="264" r:id="rId8"/>
-    <p:sldId id="271" r:id="rId9"/>
-    <p:sldId id="272" r:id="rId10"/>
-    <p:sldId id="265" r:id="rId11"/>
-    <p:sldId id="262" r:id="rId12"/>
-    <p:sldId id="257" r:id="rId13"/>
-    <p:sldId id="258" r:id="rId14"/>
-    <p:sldId id="259" r:id="rId15"/>
+    <p:sldId id="273" r:id="rId9"/>
+    <p:sldId id="274" r:id="rId10"/>
+    <p:sldId id="271" r:id="rId11"/>
+    <p:sldId id="272" r:id="rId12"/>
+    <p:sldId id="265" r:id="rId13"/>
+    <p:sldId id="262" r:id="rId14"/>
+    <p:sldId id="257" r:id="rId15"/>
+    <p:sldId id="258" r:id="rId16"/>
+    <p:sldId id="259" r:id="rId17"/>
   </p:sldIdLst>
   <p:sldSz cx="9144000" cy="6858000" type="screen4x3"/>
   <p:notesSz cx="6858000" cy="9144000"/>
@@ -327,7 +329,7 @@
           <a:p>
             <a:fld id="{0272CB1F-7F4B-480E-AFAD-C1D399D39E5F}" type="datetimeFigureOut">
               <a:rPr lang="ru-RU" smtClean="0"/>
-              <a:t>13.06.2026</a:t>
+              <a:t>05.07.2026</a:t>
             </a:fld>
             <a:endParaRPr lang="ru-RU"/>
           </a:p>
@@ -521,7 +523,7 @@
           <a:p>
             <a:fld id="{0272CB1F-7F4B-480E-AFAD-C1D399D39E5F}" type="datetimeFigureOut">
               <a:rPr lang="ru-RU" smtClean="0"/>
-              <a:t>13.06.2026</a:t>
+              <a:t>05.07.2026</a:t>
             </a:fld>
             <a:endParaRPr lang="ru-RU"/>
           </a:p>
@@ -709,7 +711,7 @@
           <a:p>
             <a:fld id="{0272CB1F-7F4B-480E-AFAD-C1D399D39E5F}" type="datetimeFigureOut">
               <a:rPr lang="ru-RU" smtClean="0"/>
-              <a:t>13.06.2026</a:t>
+              <a:t>05.07.2026</a:t>
             </a:fld>
             <a:endParaRPr lang="ru-RU"/>
           </a:p>
@@ -938,7 +940,7 @@
           <a:p>
             <a:fld id="{0272CB1F-7F4B-480E-AFAD-C1D399D39E5F}" type="datetimeFigureOut">
               <a:rPr lang="ru-RU" smtClean="0"/>
-              <a:t>13.06.2026</a:t>
+              <a:t>05.07.2026</a:t>
             </a:fld>
             <a:endParaRPr lang="ru-RU"/>
           </a:p>
@@ -1219,7 +1221,7 @@
           <a:p>
             <a:fld id="{0272CB1F-7F4B-480E-AFAD-C1D399D39E5F}" type="datetimeFigureOut">
               <a:rPr lang="ru-RU" smtClean="0"/>
-              <a:t>13.06.2026</a:t>
+              <a:t>05.07.2026</a:t>
             </a:fld>
             <a:endParaRPr lang="ru-RU"/>
           </a:p>
@@ -1507,7 +1509,7 @@
           <a:p>
             <a:fld id="{0272CB1F-7F4B-480E-AFAD-C1D399D39E5F}" type="datetimeFigureOut">
               <a:rPr lang="ru-RU" smtClean="0"/>
-              <a:t>13.06.2026</a:t>
+              <a:t>05.07.2026</a:t>
             </a:fld>
             <a:endParaRPr lang="ru-RU"/>
           </a:p>
@@ -2061,7 +2063,7 @@
           <a:p>
             <a:fld id="{0272CB1F-7F4B-480E-AFAD-C1D399D39E5F}" type="datetimeFigureOut">
               <a:rPr lang="ru-RU" smtClean="0"/>
-              <a:t>13.06.2026</a:t>
+              <a:t>05.07.2026</a:t>
             </a:fld>
             <a:endParaRPr lang="ru-RU"/>
           </a:p>
@@ -2192,7 +2194,7 @@
           <a:p>
             <a:fld id="{0272CB1F-7F4B-480E-AFAD-C1D399D39E5F}" type="datetimeFigureOut">
               <a:rPr lang="ru-RU" smtClean="0"/>
-              <a:t>13.06.2026</a:t>
+              <a:t>05.07.2026</a:t>
             </a:fld>
             <a:endParaRPr lang="ru-RU"/>
           </a:p>
@@ -2342,7 +2344,7 @@
           <a:p>
             <a:fld id="{0272CB1F-7F4B-480E-AFAD-C1D399D39E5F}" type="datetimeFigureOut">
               <a:rPr lang="ru-RU" smtClean="0"/>
-              <a:t>13.06.2026</a:t>
+              <a:t>05.07.2026</a:t>
             </a:fld>
             <a:endParaRPr lang="ru-RU"/>
           </a:p>
@@ -2663,7 +2665,7 @@
           <a:p>
             <a:fld id="{0272CB1F-7F4B-480E-AFAD-C1D399D39E5F}" type="datetimeFigureOut">
               <a:rPr lang="ru-RU" smtClean="0"/>
-              <a:t>13.06.2026</a:t>
+              <a:t>05.07.2026</a:t>
             </a:fld>
             <a:endParaRPr lang="ru-RU"/>
           </a:p>
@@ -2960,7 +2962,7 @@
           <a:p>
             <a:fld id="{0272CB1F-7F4B-480E-AFAD-C1D399D39E5F}" type="datetimeFigureOut">
               <a:rPr lang="ru-RU" smtClean="0"/>
-              <a:t>13.06.2026</a:t>
+              <a:t>05.07.2026</a:t>
             </a:fld>
             <a:endParaRPr lang="ru-RU"/>
           </a:p>
@@ -3205,7 +3207,7 @@
           <a:p>
             <a:fld id="{0272CB1F-7F4B-480E-AFAD-C1D399D39E5F}" type="datetimeFigureOut">
               <a:rPr lang="ru-RU" smtClean="0"/>
-              <a:t>13.06.2026</a:t>
+              <a:t>05.07.2026</a:t>
             </a:fld>
             <a:endParaRPr lang="ru-RU"/>
           </a:p>
@@ -3717,11 +3719,7 @@
             </a:r>
             <a:r>
               <a:rPr lang="ru-RU" b="1" dirty="0" smtClean="0"/>
-              <a:t>АСУТП с </a:t>
-            </a:r>
-            <a:r>
-              <a:rPr lang="ru-RU" b="1" dirty="0" smtClean="0"/>
-              <a:t>авторизацией</a:t>
+              <a:t>АСУТП с авторизацией</a:t>
             </a:r>
             <a:endParaRPr lang="ru-RU" dirty="0"/>
           </a:p>
@@ -3760,7 +3758,7 @@
         <p:spPr>
           <a:xfrm>
             <a:off x="2286000" y="4797152"/>
-            <a:ext cx="4572000" cy="369332"/>
+            <a:ext cx="4572000" cy="646331"/>
           </a:xfrm>
           <a:prstGeom prst="rect">
             <a:avLst/>
@@ -3781,8 +3779,38 @@
               <a:t>: </a:t>
             </a:r>
             <a:r>
+              <a:rPr lang="ru-RU" b="1" dirty="0" err="1" smtClean="0"/>
+              <a:t>Чиганов</a:t>
+            </a:r>
+            <a:r>
               <a:rPr lang="ru-RU" b="1" dirty="0" smtClean="0"/>
-              <a:t>Сергей</a:t>
+              <a:t> Сергей</a:t>
+            </a:r>
+          </a:p>
+          <a:p>
+            <a:r>
+              <a:rPr lang="ru-RU" b="1" dirty="0" smtClean="0"/>
+              <a:t>Студент курса</a:t>
+            </a:r>
+            <a:r>
+              <a:rPr lang="en-US" b="1" dirty="0" smtClean="0"/>
+              <a:t>: </a:t>
+            </a:r>
+            <a:r>
+              <a:rPr lang="ru-RU" dirty="0" smtClean="0"/>
+              <a:t>Веб-разработка </a:t>
+            </a:r>
+            <a:r>
+              <a:rPr lang="ru-RU" dirty="0"/>
+              <a:t>на </a:t>
+            </a:r>
+            <a:r>
+              <a:rPr lang="en-US" dirty="0" smtClean="0"/>
+              <a:t>Python</a:t>
+            </a:r>
+            <a:r>
+              <a:rPr lang="en-US" b="1" dirty="0" smtClean="0"/>
+              <a:t> </a:t>
             </a:r>
             <a:endParaRPr lang="ru-RU" dirty="0"/>
           </a:p>
@@ -3837,21 +3865,35 @@
         </p:nvSpPr>
         <p:spPr>
           <a:xfrm>
-            <a:off x="539552" y="260648"/>
-            <a:ext cx="8229600" cy="703840"/>
+            <a:off x="457200" y="253536"/>
+            <a:ext cx="8229600" cy="871208"/>
           </a:xfrm>
         </p:spPr>
         <p:txBody>
           <a:bodyPr>
-            <a:normAutofit fontScale="90000"/>
+            <a:normAutofit/>
           </a:bodyPr>
           <a:lstStyle/>
           <a:p>
             <a:r>
-              <a:rPr lang="ru-RU" b="1" u="sng" dirty="0"/>
-              <a:t>Инструкция по запуску</a:t>
-            </a:r>
-            <a:endParaRPr lang="ru-RU" dirty="0"/>
+              <a:rPr lang="ru-RU" sz="4000" b="1" dirty="0">
+                <a:effectLst/>
+              </a:rPr>
+              <a:t>Тестирование / </a:t>
+            </a:r>
+            <a:r>
+              <a:rPr lang="ru-RU" sz="4000" b="1" dirty="0" err="1">
+                <a:effectLst/>
+              </a:rPr>
+              <a:t>Валидация</a:t>
+            </a:r>
+            <a:r>
+              <a:rPr lang="ru-RU" sz="4000" b="1" dirty="0">
+                <a:effectLst/>
+              </a:rPr>
+              <a:t> </a:t>
+            </a:r>
+            <a:endParaRPr lang="ru-RU" sz="4000" dirty="0"/>
           </a:p>
         </p:txBody>
       </p:sp>
@@ -3865,576 +3907,241 @@
             <p:ph idx="1"/>
           </p:nvPr>
         </p:nvSpPr>
-        <p:spPr>
-          <a:xfrm>
-            <a:off x="467544" y="1052736"/>
-            <a:ext cx="8229600" cy="5040560"/>
-          </a:xfrm>
-        </p:spPr>
+        <p:spPr/>
         <p:txBody>
           <a:bodyPr>
-            <a:noAutofit/>
+            <a:normAutofit/>
           </a:bodyPr>
           <a:lstStyle/>
           <a:p>
-            <a:pPr marL="0" indent="0">
-              <a:buNone/>
-            </a:pPr>
-            <a:endParaRPr lang="ru-RU" sz="900" u="sng" dirty="0"/>
-          </a:p>
-          <a:p>
-            <a:pPr marL="0" indent="0">
-              <a:buNone/>
-            </a:pPr>
-            <a:r>
-              <a:rPr lang="ru-RU" sz="1000" dirty="0"/>
-              <a:t>Устанавливаем библиотеку </a:t>
-            </a:r>
-            <a:r>
-              <a:rPr lang="ru-RU" sz="1000" b="1" dirty="0" err="1"/>
-              <a:t>pip</a:t>
-            </a:r>
-            <a:r>
-              <a:rPr lang="ru-RU" sz="1000" b="1" dirty="0"/>
-              <a:t> </a:t>
-            </a:r>
-            <a:r>
-              <a:rPr lang="ru-RU" sz="1000" b="1" dirty="0" err="1"/>
-              <a:t>install</a:t>
-            </a:r>
-            <a:r>
-              <a:rPr lang="ru-RU" sz="1000" b="1" dirty="0"/>
-              <a:t> </a:t>
-            </a:r>
-            <a:r>
-              <a:rPr lang="ru-RU" sz="1000" b="1" dirty="0" err="1"/>
-              <a:t>Pillow</a:t>
-            </a:r>
-            <a:endParaRPr lang="ru-RU" sz="1000" b="1" dirty="0"/>
-          </a:p>
-          <a:p>
-            <a:endParaRPr lang="ru-RU" sz="1000" dirty="0"/>
-          </a:p>
-          <a:p>
-            <a:pPr marL="0" indent="0">
-              <a:buNone/>
-            </a:pPr>
-            <a:r>
-              <a:rPr lang="ru-RU" sz="1000" u="sng" dirty="0" err="1" smtClean="0"/>
-              <a:t>Pillow</a:t>
-            </a:r>
-            <a:r>
-              <a:rPr lang="ru-RU" sz="1000" u="sng" dirty="0" smtClean="0"/>
-              <a:t> </a:t>
-            </a:r>
-            <a:r>
-              <a:rPr lang="ru-RU" sz="1000" u="sng" dirty="0"/>
-              <a:t>играет  </a:t>
-            </a:r>
-            <a:r>
-              <a:rPr lang="ru-RU" sz="1000" u="sng" dirty="0" smtClean="0"/>
-              <a:t>роль в  </a:t>
-            </a:r>
-            <a:r>
-              <a:rPr lang="ru-RU" sz="1000" u="sng" dirty="0"/>
-              <a:t>коде:</a:t>
-            </a:r>
-          </a:p>
-          <a:p>
-            <a:pPr marL="0" indent="0">
-              <a:buNone/>
-            </a:pPr>
-            <a:r>
-              <a:rPr lang="ru-RU" sz="1000" dirty="0"/>
-              <a:t>1. </a:t>
-            </a:r>
-            <a:r>
-              <a:rPr lang="ru-RU" sz="1000" dirty="0" err="1"/>
-              <a:t>Валидация</a:t>
-            </a:r>
-            <a:r>
-              <a:rPr lang="ru-RU" sz="1000" dirty="0"/>
-              <a:t> данных (Проверка)</a:t>
-            </a:r>
-          </a:p>
-          <a:p>
-            <a:pPr marL="0" indent="0">
-              <a:buNone/>
-            </a:pPr>
-            <a:r>
-              <a:rPr lang="ru-RU" sz="1000" dirty="0" smtClean="0"/>
-              <a:t>Библиотека </a:t>
-            </a:r>
-            <a:r>
-              <a:rPr lang="ru-RU" sz="1000" dirty="0"/>
-              <a:t>проверяет:</a:t>
-            </a:r>
-          </a:p>
-          <a:p>
-            <a:pPr marL="0" indent="0">
-              <a:buNone/>
-            </a:pPr>
-            <a:r>
-              <a:rPr lang="ru-RU" sz="1000" dirty="0"/>
-              <a:t>Является ли загруженный файл настоящим изображением, а не текстовым файлом с расширением .</a:t>
-            </a:r>
-            <a:r>
-              <a:rPr lang="ru-RU" sz="1000" dirty="0" err="1"/>
-              <a:t>jpg</a:t>
-            </a:r>
-            <a:r>
-              <a:rPr lang="ru-RU" sz="1000" dirty="0"/>
+            <a:r>
+              <a:rPr lang="ru-RU" sz="1050" b="1" dirty="0"/>
+              <a:t>1. Тест поиска (</a:t>
+            </a:r>
+            <a:r>
+              <a:rPr lang="ru-RU" sz="1050" b="1" dirty="0" err="1"/>
+              <a:t>test_search_form</a:t>
+            </a:r>
+            <a:r>
+              <a:rPr lang="ru-RU" sz="1050" b="1" dirty="0"/>
+              <a:t>)</a:t>
+            </a:r>
+          </a:p>
+          <a:p>
+            <a:r>
+              <a:rPr lang="ru-RU" sz="1050" b="1" dirty="0"/>
+              <a:t>Что делает:</a:t>
+            </a:r>
+            <a:r>
+              <a:rPr lang="ru-RU" sz="1050" dirty="0"/>
+              <a:t> Создает во временной базе данных две статьи (одну про АСУТП, другую про </a:t>
+            </a:r>
+            <a:r>
+              <a:rPr lang="ru-RU" sz="1050" dirty="0" err="1"/>
+              <a:t>Python</a:t>
+            </a:r>
+            <a:r>
+              <a:rPr lang="ru-RU" sz="1050" dirty="0"/>
+              <a:t>), имитирует ввод слова «АСУТП» в строку поиска и проверяет, что на странице осталась только нужная статья.</a:t>
+            </a:r>
+          </a:p>
+          <a:p>
+            <a:r>
+              <a:rPr lang="ru-RU" sz="1050" b="1" dirty="0"/>
+              <a:t>Какую пользу приносит:</a:t>
+            </a:r>
+            <a:r>
+              <a:rPr lang="ru-RU" sz="1050" dirty="0"/>
+              <a:t> Защищает от поломки систему фильтрации данных. Если вы случайно измените логику фильтрации в файле views.py (например, опечатаетесь в строке </a:t>
+            </a:r>
+            <a:r>
+              <a:rPr lang="ru-RU" sz="1050" dirty="0" err="1"/>
+              <a:t>Article.objects.filter</a:t>
+            </a:r>
+            <a:r>
+              <a:rPr lang="ru-RU" sz="1050" dirty="0"/>
+              <a:t>(</a:t>
+            </a:r>
+            <a:r>
+              <a:rPr lang="ru-RU" sz="1050" dirty="0" err="1"/>
+              <a:t>title</a:t>
+            </a:r>
+            <a:r>
+              <a:rPr lang="ru-RU" sz="1050" dirty="0"/>
+              <a:t>__</a:t>
+            </a:r>
+            <a:r>
+              <a:rPr lang="ru-RU" sz="1050" dirty="0" err="1"/>
+              <a:t>icontains</a:t>
+            </a:r>
+            <a:r>
+              <a:rPr lang="ru-RU" sz="1050" dirty="0"/>
+              <a:t>=</a:t>
+            </a:r>
+            <a:r>
+              <a:rPr lang="ru-RU" sz="1050" dirty="0" err="1"/>
+              <a:t>query</a:t>
+            </a:r>
+            <a:r>
+              <a:rPr lang="ru-RU" sz="1050" dirty="0"/>
+              <a:t>)), тест тут же упадет. Вы сразу узнаете, что поиск сломан, еще до того, как выложите сайт на сервер.</a:t>
+            </a:r>
+          </a:p>
+          <a:p>
+            <a:r>
+              <a:rPr lang="ru-RU" sz="1050" b="1" dirty="0"/>
+              <a:t>2. Тест сортировки (</a:t>
+            </a:r>
+            <a:r>
+              <a:rPr lang="ru-RU" sz="1050" b="1" dirty="0" err="1"/>
+              <a:t>test_sorting_by_date</a:t>
+            </a:r>
+            <a:r>
+              <a:rPr lang="ru-RU" sz="1050" b="1" dirty="0"/>
+              <a:t>)</a:t>
+            </a:r>
+          </a:p>
+          <a:p>
+            <a:r>
+              <a:rPr lang="ru-RU" sz="1050" b="1" dirty="0"/>
+              <a:t>Что делает:</a:t>
+            </a:r>
+            <a:r>
+              <a:rPr lang="ru-RU" sz="1050" dirty="0"/>
+              <a:t> Создает старую статью (5 дней назад) и свежую статью (сегодня), запрашивает страницу с параметром ?</a:t>
+            </a:r>
+            <a:r>
+              <a:rPr lang="ru-RU" sz="1050" dirty="0" err="1"/>
+              <a:t>sort</a:t>
+            </a:r>
+            <a:r>
+              <a:rPr lang="ru-RU" sz="1050" dirty="0"/>
+              <a:t>=</a:t>
+            </a:r>
+            <a:r>
+              <a:rPr lang="ru-RU" sz="1050" dirty="0" err="1"/>
+              <a:t>date</a:t>
+            </a:r>
+            <a:r>
+              <a:rPr lang="ru-RU" sz="1050" dirty="0"/>
+              <a:t> и проверяет по HTML-коду, что свежая статья отобразилась выше старой.</a:t>
+            </a:r>
+          </a:p>
+          <a:p>
+            <a:r>
+              <a:rPr lang="ru-RU" sz="1050" b="1" dirty="0"/>
+              <a:t>Какую пользу приносит:</a:t>
+            </a:r>
+            <a:r>
+              <a:rPr lang="ru-RU" sz="1050" dirty="0"/>
+              <a:t> Гарантирует правильный порядок подачи информации. Пользователи ожидают видеть актуальные новости первыми. Если из-за изменений в коде или базе данных сортировка перевернется или сломается, тест покажет это, сохранив удобство интерфейса для ваших читателей.</a:t>
+            </a:r>
+          </a:p>
+          <a:p>
+            <a:r>
+              <a:rPr lang="ru-RU" sz="1050" b="1" dirty="0"/>
+              <a:t>3. Тест пустого списка (</a:t>
+            </a:r>
+            <a:r>
+              <a:rPr lang="ru-RU" sz="1050" b="1" dirty="0" err="1"/>
+              <a:t>test_page_empty_list</a:t>
+            </a:r>
+            <a:r>
+              <a:rPr lang="ru-RU" sz="1050" b="1" dirty="0"/>
+              <a:t>)</a:t>
+            </a:r>
+          </a:p>
+          <a:p>
+            <a:r>
+              <a:rPr lang="ru-RU" sz="1050" b="1" dirty="0"/>
+              <a:t>Что делает:</a:t>
+            </a:r>
+            <a:r>
+              <a:rPr lang="ru-RU" sz="1050" dirty="0"/>
+              <a:t> Запрашивает главную страницу, когда в базе данных нет вообще ни одной статьи, и проверяет, что страница успешно открылась (код 200), а блоки карточек статей (</a:t>
+            </a:r>
+            <a:r>
+              <a:rPr lang="ru-RU" sz="1050" dirty="0" err="1"/>
+              <a:t>article-card</a:t>
+            </a:r>
+            <a:r>
+              <a:rPr lang="ru-RU" sz="1050" dirty="0"/>
+              <a:t>) отсутствуют.</a:t>
+            </a:r>
+          </a:p>
+          <a:p>
+            <a:r>
+              <a:rPr lang="ru-RU" sz="1050" b="1" dirty="0"/>
+              <a:t>Какую пользу приносит:</a:t>
+            </a:r>
+            <a:r>
+              <a:rPr lang="ru-RU" sz="1050" dirty="0"/>
+              <a:t> Страхует сайт от «падения» при запуске. Когда проект только разворачивается на новом сервере или когда все статьи удалены, сайт не должен выдавать «Ошибку 500» из-за того, что цикл {% </a:t>
+            </a:r>
+            <a:r>
+              <a:rPr lang="ru-RU" sz="1050" dirty="0" err="1"/>
+              <a:t>for</a:t>
+            </a:r>
+            <a:r>
+              <a:rPr lang="ru-RU" sz="1050" dirty="0"/>
+              <a:t> %} пытается обработать пустоту. Тест гарантирует, что пустая страница останется аккуратной, сохранит боковую панель, шапку и подвал.</a:t>
+            </a:r>
+          </a:p>
+          <a:p>
+            <a:r>
+              <a:rPr lang="ru-RU" sz="1050" b="1" dirty="0"/>
+              <a:t>4. Тест отображения закладок (</a:t>
+            </a:r>
+            <a:r>
+              <a:rPr lang="ru-RU" sz="1050" b="1" dirty="0" err="1"/>
+              <a:t>test_favorites_icons</a:t>
+            </a:r>
+            <a:r>
+              <a:rPr lang="ru-RU" sz="1050" b="1" dirty="0"/>
+              <a:t>...)</a:t>
+            </a:r>
+          </a:p>
+          <a:p>
+            <a:r>
+              <a:rPr lang="ru-RU" sz="1050" b="1" dirty="0"/>
+              <a:t>Что делает:</a:t>
+            </a:r>
+            <a:r>
+              <a:rPr lang="ru-RU" sz="1050" dirty="0"/>
+              <a:t> Проверяет страницу дважды. Сначала как анонимный гость (убеждается, что иконки закладок скрыты). Затем имитирует авторизацию пользователя и проверяет, что в HTML-коде карточки появилась иконка пустой закладки (</a:t>
+            </a:r>
+            <a:r>
+              <a:rPr lang="ru-RU" sz="1050" dirty="0" err="1"/>
+              <a:t>bi-bookmark</a:t>
+            </a:r>
+            <a:r>
+              <a:rPr lang="ru-RU" sz="1050" dirty="0"/>
+              <a:t>).</a:t>
+            </a:r>
+          </a:p>
+          <a:p>
+            <a:r>
+              <a:rPr lang="ru-RU" sz="1050" b="1" dirty="0"/>
+              <a:t>Какую пользу приносит:</a:t>
+            </a:r>
+            <a:r>
+              <a:rPr lang="ru-RU" sz="1050" dirty="0"/>
+              <a:t> Защищает приватность и безопасность интерфейса. Если анонимный пользователь увидит кнопки избранного, нажатие на них вызовет ошибку, так как у анонима нет личного кабинета. Тест строго следит за тем, чтобы интерфейс подстраивался под статус пользователя и не показывал гостям лишние или нерабочие элементы управления.</a:t>
+            </a:r>
+          </a:p>
+          <a:p>
+            <a:r>
+              <a:rPr lang="ru-RU" sz="1050" dirty="0" smtClean="0"/>
               <a:t>.</a:t>
             </a:r>
-          </a:p>
-          <a:p>
-            <a:pPr marL="0" indent="0">
-              <a:buNone/>
-            </a:pPr>
-            <a:r>
-              <a:rPr lang="ru-RU" sz="1000" dirty="0"/>
-              <a:t>Не поврежден ли файл.</a:t>
-            </a:r>
-          </a:p>
-          <a:p>
-            <a:pPr marL="0" indent="0">
-              <a:buNone/>
-            </a:pPr>
-            <a:r>
-              <a:rPr lang="ru-RU" sz="1000" dirty="0"/>
-              <a:t>Каковы его размеры (ширина и высота).</a:t>
-            </a:r>
-          </a:p>
-          <a:p>
-            <a:pPr marL="0" indent="0">
-              <a:buNone/>
-            </a:pPr>
-            <a:r>
-              <a:rPr lang="ru-RU" sz="1000" dirty="0"/>
-              <a:t>2. Чтение метаданных</a:t>
-            </a:r>
-          </a:p>
-          <a:p>
-            <a:pPr marL="0" indent="0">
-              <a:buNone/>
-            </a:pPr>
-            <a:r>
-              <a:rPr lang="ru-RU" sz="1000" dirty="0" err="1"/>
-              <a:t>Pillow</a:t>
-            </a:r>
-            <a:r>
-              <a:rPr lang="ru-RU" sz="1000" dirty="0"/>
-              <a:t> позволяет </a:t>
-            </a:r>
-            <a:r>
-              <a:rPr lang="ru-RU" sz="1000" dirty="0" err="1"/>
-              <a:t>Django</a:t>
-            </a:r>
-            <a:r>
-              <a:rPr lang="ru-RU" sz="1000" dirty="0"/>
-              <a:t> извлекать информацию о картинке. Например, если вы захотите выводить на сайте разрешение фото или дату съемки из EXIF-данных, </a:t>
-            </a:r>
-            <a:r>
-              <a:rPr lang="ru-RU" sz="1000" dirty="0" err="1"/>
-              <a:t>Pillow</a:t>
-            </a:r>
-            <a:r>
-              <a:rPr lang="ru-RU" sz="1000" dirty="0"/>
-              <a:t> сделает это за вас</a:t>
-            </a:r>
-            <a:r>
-              <a:rPr lang="ru-RU" sz="1000" dirty="0" smtClean="0"/>
-              <a:t>.</a:t>
-            </a:r>
-          </a:p>
-          <a:p>
-            <a:pPr marL="0" indent="0">
-              <a:buNone/>
-            </a:pPr>
-            <a:r>
-              <a:rPr lang="ru-RU" sz="1000" b="1" dirty="0"/>
-              <a:t>Запуск:</a:t>
-            </a:r>
-            <a:endParaRPr lang="ru-RU" sz="1000" dirty="0"/>
-          </a:p>
-          <a:p>
-            <a:pPr marL="0" indent="0">
-              <a:buNone/>
-            </a:pPr>
-            <a:r>
-              <a:rPr lang="ru-RU" sz="1000" b="1" dirty="0" err="1"/>
-              <a:t>python</a:t>
-            </a:r>
-            <a:r>
-              <a:rPr lang="ru-RU" sz="1000" b="1" dirty="0"/>
-              <a:t> manage.py </a:t>
-            </a:r>
-            <a:r>
-              <a:rPr lang="ru-RU" sz="1000" b="1" dirty="0" err="1"/>
-              <a:t>makemigrations</a:t>
-            </a:r>
-            <a:endParaRPr lang="ru-RU" sz="1000" b="1" dirty="0"/>
-          </a:p>
-          <a:p>
-            <a:pPr marL="0" indent="0">
-              <a:buNone/>
-            </a:pPr>
-            <a:r>
-              <a:rPr lang="ru-RU" sz="1000" b="1" dirty="0" err="1"/>
-              <a:t>python</a:t>
-            </a:r>
-            <a:r>
-              <a:rPr lang="ru-RU" sz="1000" b="1" dirty="0"/>
-              <a:t> manage.py </a:t>
-            </a:r>
-            <a:r>
-              <a:rPr lang="ru-RU" sz="1000" b="1" dirty="0" err="1"/>
-              <a:t>migrate</a:t>
-            </a:r>
-            <a:endParaRPr lang="ru-RU" sz="1000" b="1" dirty="0"/>
-          </a:p>
-          <a:p>
-            <a:pPr marL="0" indent="0">
-              <a:buNone/>
-            </a:pPr>
-            <a:endParaRPr lang="ru-RU" sz="1000" dirty="0"/>
-          </a:p>
-          <a:p>
-            <a:endParaRPr lang="ru-RU" sz="1000" dirty="0"/>
-          </a:p>
-          <a:p>
-            <a:pPr marL="0" indent="0">
-              <a:buNone/>
-            </a:pPr>
-            <a:r>
-              <a:rPr lang="ru-RU" sz="1000" u="sng" dirty="0" smtClean="0"/>
-              <a:t>Роль </a:t>
-            </a:r>
-            <a:r>
-              <a:rPr lang="ru-RU" sz="1000" u="sng" dirty="0" err="1"/>
-              <a:t>makemigrations</a:t>
-            </a:r>
-            <a:r>
-              <a:rPr lang="ru-RU" sz="1000" u="sng" dirty="0"/>
-              <a:t> и  </a:t>
-            </a:r>
-            <a:r>
-              <a:rPr lang="ru-RU" sz="1000" u="sng" dirty="0" err="1"/>
-              <a:t>migrate</a:t>
-            </a:r>
-            <a:r>
-              <a:rPr lang="ru-RU" sz="1000" u="sng" dirty="0"/>
-              <a:t> </a:t>
-            </a:r>
-            <a:r>
-              <a:rPr lang="ru-RU" sz="1000" dirty="0"/>
-              <a:t>— синхронизировать то, что мы написали в коде (models.py), с тем, что реально хранится в файле базы данных (db.sqlite3).</a:t>
-            </a:r>
-          </a:p>
-          <a:p>
-            <a:pPr marL="0" indent="0">
-              <a:buNone/>
-            </a:pPr>
-            <a:r>
-              <a:rPr lang="ru-RU" sz="1000" dirty="0"/>
-              <a:t>1. </a:t>
-            </a:r>
-            <a:r>
-              <a:rPr lang="ru-RU" sz="1000" dirty="0" err="1"/>
-              <a:t>python</a:t>
-            </a:r>
-            <a:r>
-              <a:rPr lang="ru-RU" sz="1000" dirty="0"/>
-              <a:t> manage.py </a:t>
-            </a:r>
-            <a:r>
-              <a:rPr lang="ru-RU" sz="1000" dirty="0" err="1"/>
-              <a:t>makemigrations</a:t>
-            </a:r>
-            <a:endParaRPr lang="ru-RU" sz="1000" dirty="0"/>
-          </a:p>
-          <a:p>
-            <a:pPr marL="0" indent="0">
-              <a:buNone/>
-            </a:pPr>
-            <a:r>
-              <a:rPr lang="ru-RU" sz="1000" dirty="0"/>
-              <a:t>Роль: Создание «инструкции» по обновлению.</a:t>
-            </a:r>
-          </a:p>
-          <a:p>
-            <a:pPr marL="0" indent="0">
-              <a:buNone/>
-            </a:pPr>
-            <a:r>
-              <a:rPr lang="ru-RU" sz="1000" dirty="0"/>
-              <a:t>Что делает: </a:t>
-            </a:r>
-            <a:r>
-              <a:rPr lang="ru-RU" sz="1000" dirty="0" err="1"/>
-              <a:t>Django</a:t>
-            </a:r>
-            <a:r>
-              <a:rPr lang="ru-RU" sz="1000" dirty="0"/>
-              <a:t> сканирует ваши модели и ищет изменения (например, вы добавили поле </a:t>
-            </a:r>
-            <a:r>
-              <a:rPr lang="ru-RU" sz="1000" dirty="0" err="1"/>
-              <a:t>image</a:t>
-            </a:r>
-            <a:r>
-              <a:rPr lang="ru-RU" sz="1000" dirty="0"/>
-              <a:t> или изменили </a:t>
-            </a:r>
-            <a:r>
-              <a:rPr lang="ru-RU" sz="1000" dirty="0" err="1"/>
-              <a:t>max_length</a:t>
-            </a:r>
-            <a:r>
-              <a:rPr lang="ru-RU" sz="1000" dirty="0"/>
-              <a:t>).</a:t>
-            </a:r>
-          </a:p>
-          <a:p>
-            <a:pPr marL="0" indent="0">
-              <a:buNone/>
-            </a:pPr>
-            <a:r>
-              <a:rPr lang="ru-RU" sz="1000" dirty="0"/>
-              <a:t>Результат: В папке </a:t>
-            </a:r>
-            <a:r>
-              <a:rPr lang="ru-RU" sz="1000" dirty="0" err="1"/>
-              <a:t>migrations</a:t>
-            </a:r>
-            <a:r>
-              <a:rPr lang="ru-RU" sz="1000" dirty="0"/>
-              <a:t> внутри вашего приложения появляется новый файл (например, 0002_article_image.py).</a:t>
-            </a:r>
-          </a:p>
-          <a:p>
-            <a:pPr marL="0" indent="0">
-              <a:buNone/>
-            </a:pPr>
-            <a:r>
-              <a:rPr lang="ru-RU" sz="1000" dirty="0"/>
-              <a:t>Простыми словами: Это как чертеж или список покупок, который говорит базе: «Скоро нам нужно будет добавить новый столбец». На этом этапе в самой базе еще ничего не меняется.</a:t>
-            </a:r>
-          </a:p>
-          <a:p>
-            <a:pPr marL="0" indent="0">
-              <a:buNone/>
-            </a:pPr>
-            <a:r>
-              <a:rPr lang="ru-RU" sz="1000" dirty="0"/>
-              <a:t>2. </a:t>
-            </a:r>
-            <a:r>
-              <a:rPr lang="ru-RU" sz="1000" dirty="0" err="1"/>
-              <a:t>python</a:t>
-            </a:r>
-            <a:r>
-              <a:rPr lang="ru-RU" sz="1000" dirty="0"/>
-              <a:t> manage.py </a:t>
-            </a:r>
-            <a:r>
-              <a:rPr lang="ru-RU" sz="1000" dirty="0" err="1"/>
-              <a:t>migrate</a:t>
-            </a:r>
-            <a:endParaRPr lang="ru-RU" sz="1000" dirty="0"/>
-          </a:p>
-          <a:p>
-            <a:pPr marL="0" indent="0">
-              <a:buNone/>
-            </a:pPr>
-            <a:r>
-              <a:rPr lang="ru-RU" sz="1000" dirty="0"/>
-              <a:t>Роль: Выполнение «инструкции».</a:t>
-            </a:r>
-          </a:p>
-          <a:p>
-            <a:pPr marL="0" indent="0">
-              <a:buNone/>
-            </a:pPr>
-            <a:r>
-              <a:rPr lang="ru-RU" sz="1000" dirty="0"/>
-              <a:t>Что делает: </a:t>
-            </a:r>
-            <a:r>
-              <a:rPr lang="ru-RU" sz="1000" dirty="0" err="1"/>
-              <a:t>Django</a:t>
-            </a:r>
-            <a:r>
-              <a:rPr lang="ru-RU" sz="1000" dirty="0"/>
-              <a:t> берет файлы из папки </a:t>
-            </a:r>
-            <a:r>
-              <a:rPr lang="ru-RU" sz="1000" dirty="0" err="1"/>
-              <a:t>migrations</a:t>
-            </a:r>
-            <a:r>
-              <a:rPr lang="ru-RU" sz="1000" dirty="0"/>
-              <a:t>, которые еще не были применены, и превращает их в реальные SQL-запросы к базе данных.</a:t>
-            </a:r>
-          </a:p>
-          <a:p>
-            <a:pPr marL="0" indent="0">
-              <a:buNone/>
-            </a:pPr>
-            <a:r>
-              <a:rPr lang="ru-RU" sz="1000" dirty="0"/>
-              <a:t>Результат: В таблице </a:t>
-            </a:r>
-            <a:r>
-              <a:rPr lang="ru-RU" sz="1000" dirty="0" err="1"/>
-              <a:t>articles_article</a:t>
-            </a:r>
-            <a:r>
-              <a:rPr lang="ru-RU" sz="1000" dirty="0"/>
-              <a:t> физически появляется колонка </a:t>
-            </a:r>
-            <a:r>
-              <a:rPr lang="ru-RU" sz="1000" dirty="0" err="1"/>
-              <a:t>image</a:t>
-            </a:r>
-            <a:r>
-              <a:rPr lang="ru-RU" sz="1000" dirty="0"/>
-              <a:t>. </a:t>
-            </a:r>
-            <a:endParaRPr lang="ru-RU" sz="1000" dirty="0" smtClean="0"/>
-          </a:p>
-          <a:p>
-            <a:pPr marL="0" indent="0">
-              <a:buNone/>
-            </a:pPr>
-            <a:r>
-              <a:rPr lang="ru-RU" sz="1000" dirty="0" smtClean="0"/>
-              <a:t>Простыми </a:t>
-            </a:r>
-            <a:r>
-              <a:rPr lang="ru-RU" sz="1000" dirty="0"/>
-              <a:t>словами: Это строитель, который берет чертеж из первого шага и реально перестраивает стену (базу данных</a:t>
-            </a:r>
-            <a:r>
-              <a:rPr lang="ru-RU" sz="1000" dirty="0" smtClean="0"/>
-              <a:t>).</a:t>
-            </a:r>
-          </a:p>
-          <a:p>
-            <a:pPr marL="0" indent="0">
-              <a:buNone/>
-            </a:pPr>
-            <a:r>
-              <a:rPr lang="ru-RU" sz="1000" b="1" dirty="0" smtClean="0"/>
-              <a:t>Запуск: </a:t>
-            </a:r>
-            <a:r>
-              <a:rPr lang="ru-RU" sz="1000" b="1" dirty="0" err="1" smtClean="0"/>
-              <a:t>python</a:t>
-            </a:r>
-            <a:r>
-              <a:rPr lang="ru-RU" sz="1000" b="1" dirty="0" smtClean="0"/>
-              <a:t> manage.py </a:t>
-            </a:r>
-            <a:r>
-              <a:rPr lang="ru-RU" sz="1000" b="1" dirty="0" err="1" smtClean="0"/>
-              <a:t>runserver</a:t>
-            </a:r>
-            <a:endParaRPr lang="ru-RU" sz="1000" b="1" dirty="0" smtClean="0"/>
-          </a:p>
-          <a:p>
-            <a:endParaRPr lang="ru-RU" sz="1000" dirty="0"/>
-          </a:p>
-          <a:p>
-            <a:pPr marL="0" indent="0">
-              <a:buNone/>
-            </a:pPr>
-            <a:r>
-              <a:rPr lang="ru-RU" sz="1000" dirty="0"/>
-              <a:t>Регистрироваться можно прямо с сайта "</a:t>
-            </a:r>
-            <a:r>
-              <a:rPr lang="ru-RU" sz="1000" dirty="0" err="1"/>
-              <a:t>article</a:t>
-            </a:r>
-            <a:r>
-              <a:rPr lang="ru-RU" sz="1000" dirty="0"/>
-              <a:t>", не через  /</a:t>
-            </a:r>
-            <a:r>
-              <a:rPr lang="ru-RU" sz="1000" dirty="0" err="1"/>
-              <a:t>admin</a:t>
-            </a:r>
-            <a:r>
-              <a:rPr lang="ru-RU" sz="1000" dirty="0"/>
-              <a:t>.</a:t>
-            </a:r>
-          </a:p>
-          <a:p>
-            <a:pPr marL="0" indent="0">
-              <a:buNone/>
-            </a:pPr>
-            <a:r>
-              <a:rPr lang="ru-RU" sz="1000" dirty="0"/>
-              <a:t>Статьи добавляются через /</a:t>
-            </a:r>
-            <a:r>
-              <a:rPr lang="ru-RU" sz="1000" dirty="0" err="1"/>
-              <a:t>admin</a:t>
-            </a:r>
-            <a:r>
-              <a:rPr lang="ru-RU" sz="1000" dirty="0" smtClean="0"/>
-              <a:t>.</a:t>
-            </a:r>
-          </a:p>
-          <a:p>
-            <a:r>
-              <a:rPr lang="ru-RU" sz="1000" dirty="0"/>
-              <a:t>Запуск тестов</a:t>
-            </a:r>
-            <a:r>
-              <a:rPr lang="en-US" sz="1000" dirty="0"/>
-              <a:t>: python -m </a:t>
-            </a:r>
-            <a:r>
-              <a:rPr lang="en-US" sz="1000" dirty="0" err="1"/>
-              <a:t>pytest</a:t>
-            </a:r>
-            <a:r>
-              <a:rPr lang="en-US" sz="1000" dirty="0"/>
-              <a:t> --ds=</a:t>
-            </a:r>
-            <a:r>
-              <a:rPr lang="en-US" sz="1000" dirty="0" err="1"/>
-              <a:t>myproject.settings</a:t>
-            </a:r>
-            <a:r>
-              <a:rPr lang="en-US" sz="1000" dirty="0"/>
-              <a:t> -v</a:t>
-            </a:r>
-            <a:endParaRPr lang="ru-RU" sz="1000" dirty="0"/>
-          </a:p>
-          <a:p>
-            <a:endParaRPr lang="ru-RU" sz="1000" dirty="0"/>
-          </a:p>
-          <a:p>
-            <a:pPr marL="0" indent="0">
-              <a:buNone/>
-            </a:pPr>
-            <a:endParaRPr lang="ru-RU" sz="1000" dirty="0" smtClean="0"/>
-          </a:p>
-          <a:p>
-            <a:pPr marL="0" indent="0">
-              <a:buNone/>
-            </a:pPr>
-            <a:endParaRPr lang="ru-RU" sz="1000" dirty="0"/>
+            <a:endParaRPr lang="ru-RU" sz="1050" dirty="0"/>
           </a:p>
         </p:txBody>
       </p:sp>
     </p:spTree>
     <p:extLst>
       <p:ext uri="{BB962C8B-B14F-4D97-AF65-F5344CB8AC3E}">
-        <p14:creationId xmlns:p14="http://schemas.microsoft.com/office/powerpoint/2010/main" val="1355040326"/>
+        <p14:creationId xmlns:p14="http://schemas.microsoft.com/office/powerpoint/2010/main" val="3823710361"/>
       </p:ext>
     </p:extLst>
   </p:cSld>
@@ -4478,2261 +4185,6 @@
             <p:ph type="title"/>
           </p:nvPr>
         </p:nvSpPr>
-        <p:spPr/>
-        <p:txBody>
-          <a:bodyPr/>
-          <a:lstStyle/>
-          <a:p>
-            <a:r>
-              <a:rPr lang="ru-RU" dirty="0" smtClean="0"/>
-              <a:t>Бизнес задача</a:t>
-            </a:r>
-            <a:endParaRPr lang="ru-RU" dirty="0"/>
-          </a:p>
-        </p:txBody>
-      </p:sp>
-      <p:sp>
-        <p:nvSpPr>
-          <p:cNvPr id="3" name="Объект 2"/>
-          <p:cNvSpPr>
-            <a:spLocks noGrp="1"/>
-          </p:cNvSpPr>
-          <p:nvPr>
-            <p:ph idx="1"/>
-          </p:nvPr>
-        </p:nvSpPr>
-        <p:spPr/>
-        <p:txBody>
-          <a:bodyPr>
-            <a:normAutofit fontScale="85000" lnSpcReduction="20000"/>
-          </a:bodyPr>
-          <a:lstStyle/>
-          <a:p>
-            <a:pPr marL="0" indent="0">
-              <a:buNone/>
-            </a:pPr>
-            <a:endParaRPr lang="ru-RU" dirty="0"/>
-          </a:p>
-          <a:p>
-            <a:pPr marL="0" indent="0">
-              <a:buNone/>
-            </a:pPr>
-            <a:r>
-              <a:rPr lang="ru-RU" dirty="0" smtClean="0"/>
-              <a:t>    </a:t>
-            </a:r>
-            <a:r>
-              <a:rPr lang="ru-RU" i="1" u="sng" dirty="0" smtClean="0"/>
-              <a:t>Программа </a:t>
-            </a:r>
-            <a:r>
-              <a:rPr lang="ru-RU" i="1" u="sng" dirty="0"/>
-              <a:t>автоматизирует процесс публикации и распространения контента. Она позволяет компании или сообществу:</a:t>
-            </a:r>
-          </a:p>
-          <a:p>
-            <a:r>
-              <a:rPr lang="ru-RU" dirty="0"/>
-              <a:t>Централизованно информировать аудиторию (новости, статьи, анонсы).</a:t>
-            </a:r>
-          </a:p>
-          <a:p>
-            <a:r>
-              <a:rPr lang="ru-RU" dirty="0"/>
-              <a:t>Повышать вовлеченность через систему комментариев и тегов.</a:t>
-            </a:r>
-          </a:p>
-          <a:p>
-            <a:r>
-              <a:rPr lang="ru-RU" dirty="0"/>
-              <a:t>Персонализировать опыт пользователя (возможность сохранять статьи в «Избранное»).</a:t>
-            </a:r>
-          </a:p>
-          <a:p>
-            <a:r>
-              <a:rPr lang="ru-RU" dirty="0"/>
-              <a:t>Разграничивать права: только доверенные лица (админы) создают контент, а пользователи его потребляют и обсуждают.</a:t>
-            </a:r>
-          </a:p>
-        </p:txBody>
-      </p:sp>
-    </p:spTree>
-    <p:extLst>
-      <p:ext uri="{BB962C8B-B14F-4D97-AF65-F5344CB8AC3E}">
-        <p14:creationId xmlns:p14="http://schemas.microsoft.com/office/powerpoint/2010/main" val="2130190252"/>
-      </p:ext>
-    </p:extLst>
-  </p:cSld>
-  <p:clrMapOvr>
-    <a:masterClrMapping/>
-  </p:clrMapOvr>
-  <p:timing>
-    <p:tnLst>
-      <p:par>
-        <p:cTn id="1" dur="indefinite" restart="never" nodeType="tmRoot"/>
-      </p:par>
-    </p:tnLst>
-  </p:timing>
-</p:sld>
-</file>
-
-<file path=ppt/slides/slide12.xml><?xml version="1.0" encoding="utf-8"?>
-<p:sld xmlns:a="http://schemas.openxmlformats.org/drawingml/2006/main" xmlns:r="http://schemas.openxmlformats.org/officeDocument/2006/relationships" xmlns:p="http://schemas.openxmlformats.org/presentationml/2006/main">
-  <p:cSld>
-    <p:spTree>
-      <p:nvGrpSpPr>
-        <p:cNvPr id="1" name=""/>
-        <p:cNvGrpSpPr/>
-        <p:nvPr/>
-      </p:nvGrpSpPr>
-      <p:grpSpPr>
-        <a:xfrm>
-          <a:off x="0" y="0"/>
-          <a:ext cx="0" cy="0"/>
-          <a:chOff x="0" y="0"/>
-          <a:chExt cx="0" cy="0"/>
-        </a:xfrm>
-      </p:grpSpPr>
-      <p:sp>
-        <p:nvSpPr>
-          <p:cNvPr id="2" name="Заголовок 1"/>
-          <p:cNvSpPr>
-            <a:spLocks noGrp="1"/>
-          </p:cNvSpPr>
-          <p:nvPr>
-            <p:ph type="title"/>
-          </p:nvPr>
-        </p:nvSpPr>
-        <p:spPr/>
-        <p:txBody>
-          <a:bodyPr/>
-          <a:lstStyle/>
-          <a:p>
-            <a:endParaRPr lang="ru-RU"/>
-          </a:p>
-        </p:txBody>
-      </p:sp>
-      <p:sp>
-        <p:nvSpPr>
-          <p:cNvPr id="3" name="Объект 2"/>
-          <p:cNvSpPr>
-            <a:spLocks noGrp="1"/>
-          </p:cNvSpPr>
-          <p:nvPr>
-            <p:ph idx="1"/>
-          </p:nvPr>
-        </p:nvSpPr>
-        <p:spPr/>
-        <p:txBody>
-          <a:bodyPr/>
-          <a:lstStyle/>
-          <a:p>
-            <a:endParaRPr lang="ru-RU"/>
-          </a:p>
-        </p:txBody>
-      </p:sp>
-      <p:pic>
-        <p:nvPicPr>
-          <p:cNvPr id="1026" name="Picture 2" descr="E:\TOP\Pandas\mini-проект\Демонстрация\вход.png"/>
-          <p:cNvPicPr>
-            <a:picLocks noChangeAspect="1" noChangeArrowheads="1"/>
-          </p:cNvPicPr>
-          <p:nvPr/>
-        </p:nvPicPr>
-        <p:blipFill>
-          <a:blip r:embed="rId2">
-            <a:extLst>
-              <a:ext uri="{28A0092B-C50C-407E-A947-70E740481C1C}">
-                <a14:useLocalDpi xmlns:a14="http://schemas.microsoft.com/office/drawing/2010/main" val="0"/>
-              </a:ext>
-            </a:extLst>
-          </a:blip>
-          <a:srcRect/>
-          <a:stretch>
-            <a:fillRect/>
-          </a:stretch>
-        </p:blipFill>
-        <p:spPr bwMode="auto">
-          <a:xfrm>
-            <a:off x="782638" y="1811338"/>
-            <a:ext cx="7029722" cy="2584450"/>
-          </a:xfrm>
-          <a:prstGeom prst="rect">
-            <a:avLst/>
-          </a:prstGeom>
-          <a:noFill/>
-          <a:extLst>
-            <a:ext uri="{909E8E84-426E-40DD-AFC4-6F175D3DCCD1}">
-              <a14:hiddenFill xmlns:a14="http://schemas.microsoft.com/office/drawing/2010/main">
-                <a:solidFill>
-                  <a:srgbClr val="FFFFFF"/>
-                </a:solidFill>
-              </a14:hiddenFill>
-            </a:ext>
-          </a:extLst>
-        </p:spPr>
-      </p:pic>
-    </p:spTree>
-    <p:extLst>
-      <p:ext uri="{BB962C8B-B14F-4D97-AF65-F5344CB8AC3E}">
-        <p14:creationId xmlns:p14="http://schemas.microsoft.com/office/powerpoint/2010/main" val="1603485448"/>
-      </p:ext>
-    </p:extLst>
-  </p:cSld>
-  <p:clrMapOvr>
-    <a:masterClrMapping/>
-  </p:clrMapOvr>
-  <p:timing>
-    <p:tnLst>
-      <p:par>
-        <p:cTn id="1" dur="indefinite" restart="never" nodeType="tmRoot"/>
-      </p:par>
-    </p:tnLst>
-  </p:timing>
-</p:sld>
-</file>
-
-<file path=ppt/slides/slide13.xml><?xml version="1.0" encoding="utf-8"?>
-<p:sld xmlns:a="http://schemas.openxmlformats.org/drawingml/2006/main" xmlns:r="http://schemas.openxmlformats.org/officeDocument/2006/relationships" xmlns:p="http://schemas.openxmlformats.org/presentationml/2006/main">
-  <p:cSld>
-    <p:spTree>
-      <p:nvGrpSpPr>
-        <p:cNvPr id="1" name=""/>
-        <p:cNvGrpSpPr/>
-        <p:nvPr/>
-      </p:nvGrpSpPr>
-      <p:grpSpPr>
-        <a:xfrm>
-          <a:off x="0" y="0"/>
-          <a:ext cx="0" cy="0"/>
-          <a:chOff x="0" y="0"/>
-          <a:chExt cx="0" cy="0"/>
-        </a:xfrm>
-      </p:grpSpPr>
-      <p:sp>
-        <p:nvSpPr>
-          <p:cNvPr id="2" name="Заголовок 1"/>
-          <p:cNvSpPr>
-            <a:spLocks noGrp="1"/>
-          </p:cNvSpPr>
-          <p:nvPr>
-            <p:ph type="title"/>
-          </p:nvPr>
-        </p:nvSpPr>
-        <p:spPr/>
-        <p:txBody>
-          <a:bodyPr/>
-          <a:lstStyle/>
-          <a:p>
-            <a:endParaRPr lang="ru-RU"/>
-          </a:p>
-        </p:txBody>
-      </p:sp>
-      <p:sp>
-        <p:nvSpPr>
-          <p:cNvPr id="3" name="Объект 2"/>
-          <p:cNvSpPr>
-            <a:spLocks noGrp="1"/>
-          </p:cNvSpPr>
-          <p:nvPr>
-            <p:ph idx="1"/>
-          </p:nvPr>
-        </p:nvSpPr>
-        <p:spPr/>
-        <p:txBody>
-          <a:bodyPr/>
-          <a:lstStyle/>
-          <a:p>
-            <a:endParaRPr lang="ru-RU"/>
-          </a:p>
-        </p:txBody>
-      </p:sp>
-      <p:pic>
-        <p:nvPicPr>
-          <p:cNvPr id="5" name="Picture 2"/>
-          <p:cNvPicPr>
-            <a:picLocks noChangeAspect="1" noChangeArrowheads="1"/>
-          </p:cNvPicPr>
-          <p:nvPr/>
-        </p:nvPicPr>
-        <p:blipFill>
-          <a:blip r:embed="rId2">
-            <a:extLst>
-              <a:ext uri="{28A0092B-C50C-407E-A947-70E740481C1C}">
-                <a14:useLocalDpi xmlns:a14="http://schemas.microsoft.com/office/drawing/2010/main" val="0"/>
-              </a:ext>
-            </a:extLst>
-          </a:blip>
-          <a:srcRect/>
-          <a:stretch>
-            <a:fillRect/>
-          </a:stretch>
-        </p:blipFill>
-        <p:spPr bwMode="auto">
-          <a:xfrm>
-            <a:off x="328912" y="1799578"/>
-            <a:ext cx="8491559" cy="4482358"/>
-          </a:xfrm>
-          <a:prstGeom prst="rect">
-            <a:avLst/>
-          </a:prstGeom>
-          <a:noFill/>
-          <a:ln>
-            <a:noFill/>
-          </a:ln>
-          <a:effectLst/>
-          <a:extLst>
-            <a:ext uri="{909E8E84-426E-40DD-AFC4-6F175D3DCCD1}">
-              <a14:hiddenFill xmlns:a14="http://schemas.microsoft.com/office/drawing/2010/main">
-                <a:solidFill>
-                  <a:schemeClr val="accent1"/>
-                </a:solidFill>
-              </a14:hiddenFill>
-            </a:ext>
-            <a:ext uri="{91240B29-F687-4F45-9708-019B960494DF}">
-              <a14:hiddenLine xmlns:a14="http://schemas.microsoft.com/office/drawing/2010/main" w="9525">
-                <a:solidFill>
-                  <a:schemeClr val="tx1"/>
-                </a:solidFill>
-                <a:miter lim="800000"/>
-                <a:headEnd/>
-                <a:tailEnd/>
-              </a14:hiddenLine>
-            </a:ext>
-            <a:ext uri="{AF507438-7753-43E0-B8FC-AC1667EBCBE1}">
-              <a14:hiddenEffects xmlns:a14="http://schemas.microsoft.com/office/drawing/2010/main">
-                <a:effectLst>
-                  <a:outerShdw dist="35921" dir="2700000" algn="ctr" rotWithShape="0">
-                    <a:schemeClr val="bg2"/>
-                  </a:outerShdw>
-                </a:effectLst>
-              </a14:hiddenEffects>
-            </a:ext>
-          </a:extLst>
-        </p:spPr>
-      </p:pic>
-    </p:spTree>
-    <p:extLst>
-      <p:ext uri="{BB962C8B-B14F-4D97-AF65-F5344CB8AC3E}">
-        <p14:creationId xmlns:p14="http://schemas.microsoft.com/office/powerpoint/2010/main" val="2856079694"/>
-      </p:ext>
-    </p:extLst>
-  </p:cSld>
-  <p:clrMapOvr>
-    <a:masterClrMapping/>
-  </p:clrMapOvr>
-  <p:timing>
-    <p:tnLst>
-      <p:par>
-        <p:cTn id="1" dur="indefinite" restart="never" nodeType="tmRoot"/>
-      </p:par>
-    </p:tnLst>
-  </p:timing>
-</p:sld>
-</file>
-
-<file path=ppt/slides/slide14.xml><?xml version="1.0" encoding="utf-8"?>
-<p:sld xmlns:a="http://schemas.openxmlformats.org/drawingml/2006/main" xmlns:r="http://schemas.openxmlformats.org/officeDocument/2006/relationships" xmlns:p="http://schemas.openxmlformats.org/presentationml/2006/main">
-  <p:cSld>
-    <p:spTree>
-      <p:nvGrpSpPr>
-        <p:cNvPr id="1" name=""/>
-        <p:cNvGrpSpPr/>
-        <p:nvPr/>
-      </p:nvGrpSpPr>
-      <p:grpSpPr>
-        <a:xfrm>
-          <a:off x="0" y="0"/>
-          <a:ext cx="0" cy="0"/>
-          <a:chOff x="0" y="0"/>
-          <a:chExt cx="0" cy="0"/>
-        </a:xfrm>
-      </p:grpSpPr>
-      <p:sp>
-        <p:nvSpPr>
-          <p:cNvPr id="2" name="Заголовок 1"/>
-          <p:cNvSpPr>
-            <a:spLocks noGrp="1"/>
-          </p:cNvSpPr>
-          <p:nvPr>
-            <p:ph type="title"/>
-          </p:nvPr>
-        </p:nvSpPr>
-        <p:spPr/>
-        <p:txBody>
-          <a:bodyPr/>
-          <a:lstStyle/>
-          <a:p>
-            <a:r>
-              <a:rPr lang="ru-RU" dirty="0" smtClean="0"/>
-              <a:t>Регистрация</a:t>
-            </a:r>
-            <a:endParaRPr lang="ru-RU" dirty="0"/>
-          </a:p>
-        </p:txBody>
-      </p:sp>
-      <p:sp>
-        <p:nvSpPr>
-          <p:cNvPr id="3" name="Объект 2"/>
-          <p:cNvSpPr>
-            <a:spLocks noGrp="1"/>
-          </p:cNvSpPr>
-          <p:nvPr>
-            <p:ph idx="1"/>
-          </p:nvPr>
-        </p:nvSpPr>
-        <p:spPr/>
-        <p:txBody>
-          <a:bodyPr/>
-          <a:lstStyle/>
-          <a:p>
-            <a:endParaRPr lang="ru-RU" dirty="0" smtClean="0"/>
-          </a:p>
-          <a:p>
-            <a:endParaRPr lang="ru-RU" dirty="0"/>
-          </a:p>
-        </p:txBody>
-      </p:sp>
-      <p:pic>
-        <p:nvPicPr>
-          <p:cNvPr id="7171" name="Picture 3"/>
-          <p:cNvPicPr>
-            <a:picLocks noChangeAspect="1" noChangeArrowheads="1"/>
-          </p:cNvPicPr>
-          <p:nvPr/>
-        </p:nvPicPr>
-        <p:blipFill>
-          <a:blip r:embed="rId2">
-            <a:extLst>
-              <a:ext uri="{28A0092B-C50C-407E-A947-70E740481C1C}">
-                <a14:useLocalDpi xmlns:a14="http://schemas.microsoft.com/office/drawing/2010/main" val="0"/>
-              </a:ext>
-            </a:extLst>
-          </a:blip>
-          <a:srcRect/>
-          <a:stretch>
-            <a:fillRect/>
-          </a:stretch>
-        </p:blipFill>
-        <p:spPr bwMode="auto">
-          <a:xfrm>
-            <a:off x="251520" y="2204864"/>
-            <a:ext cx="8341337" cy="3775125"/>
-          </a:xfrm>
-          <a:prstGeom prst="rect">
-            <a:avLst/>
-          </a:prstGeom>
-          <a:noFill/>
-          <a:ln>
-            <a:noFill/>
-          </a:ln>
-          <a:effectLst/>
-          <a:extLst>
-            <a:ext uri="{909E8E84-426E-40DD-AFC4-6F175D3DCCD1}">
-              <a14:hiddenFill xmlns:a14="http://schemas.microsoft.com/office/drawing/2010/main">
-                <a:solidFill>
-                  <a:schemeClr val="accent1"/>
-                </a:solidFill>
-              </a14:hiddenFill>
-            </a:ext>
-            <a:ext uri="{91240B29-F687-4F45-9708-019B960494DF}">
-              <a14:hiddenLine xmlns:a14="http://schemas.microsoft.com/office/drawing/2010/main" w="9525">
-                <a:solidFill>
-                  <a:schemeClr val="tx1"/>
-                </a:solidFill>
-                <a:miter lim="800000"/>
-                <a:headEnd/>
-                <a:tailEnd/>
-              </a14:hiddenLine>
-            </a:ext>
-            <a:ext uri="{AF507438-7753-43E0-B8FC-AC1667EBCBE1}">
-              <a14:hiddenEffects xmlns:a14="http://schemas.microsoft.com/office/drawing/2010/main">
-                <a:effectLst>
-                  <a:outerShdw dist="35921" dir="2700000" algn="ctr" rotWithShape="0">
-                    <a:schemeClr val="bg2"/>
-                  </a:outerShdw>
-                </a:effectLst>
-              </a14:hiddenEffects>
-            </a:ext>
-          </a:extLst>
-        </p:spPr>
-      </p:pic>
-    </p:spTree>
-    <p:extLst>
-      <p:ext uri="{BB962C8B-B14F-4D97-AF65-F5344CB8AC3E}">
-        <p14:creationId xmlns:p14="http://schemas.microsoft.com/office/powerpoint/2010/main" val="3555227253"/>
-      </p:ext>
-    </p:extLst>
-  </p:cSld>
-  <p:clrMapOvr>
-    <a:masterClrMapping/>
-  </p:clrMapOvr>
-  <p:timing>
-    <p:tnLst>
-      <p:par>
-        <p:cTn id="1" dur="indefinite" restart="never" nodeType="tmRoot"/>
-      </p:par>
-    </p:tnLst>
-  </p:timing>
-</p:sld>
-</file>
-
-<file path=ppt/slides/slide2.xml><?xml version="1.0" encoding="utf-8"?>
-<p:sld xmlns:a="http://schemas.openxmlformats.org/drawingml/2006/main" xmlns:r="http://schemas.openxmlformats.org/officeDocument/2006/relationships" xmlns:p="http://schemas.openxmlformats.org/presentationml/2006/main">
-  <p:cSld>
-    <p:spTree>
-      <p:nvGrpSpPr>
-        <p:cNvPr id="1" name=""/>
-        <p:cNvGrpSpPr/>
-        <p:nvPr/>
-      </p:nvGrpSpPr>
-      <p:grpSpPr>
-        <a:xfrm>
-          <a:off x="0" y="0"/>
-          <a:ext cx="0" cy="0"/>
-          <a:chOff x="0" y="0"/>
-          <a:chExt cx="0" cy="0"/>
-        </a:xfrm>
-      </p:grpSpPr>
-      <p:sp>
-        <p:nvSpPr>
-          <p:cNvPr id="2" name="Заголовок 1"/>
-          <p:cNvSpPr>
-            <a:spLocks noGrp="1"/>
-          </p:cNvSpPr>
-          <p:nvPr>
-            <p:ph type="title"/>
-          </p:nvPr>
-        </p:nvSpPr>
-        <p:spPr/>
-        <p:txBody>
-          <a:bodyPr/>
-          <a:lstStyle/>
-          <a:p>
-            <a:endParaRPr lang="ru-RU"/>
-          </a:p>
-        </p:txBody>
-      </p:sp>
-      <p:sp>
-        <p:nvSpPr>
-          <p:cNvPr id="3" name="Объект 2"/>
-          <p:cNvSpPr>
-            <a:spLocks noGrp="1"/>
-          </p:cNvSpPr>
-          <p:nvPr>
-            <p:ph idx="1"/>
-          </p:nvPr>
-        </p:nvSpPr>
-        <p:spPr/>
-        <p:txBody>
-          <a:bodyPr/>
-          <a:lstStyle/>
-          <a:p>
-            <a:endParaRPr lang="ru-RU"/>
-          </a:p>
-        </p:txBody>
-      </p:sp>
-      <p:pic>
-        <p:nvPicPr>
-          <p:cNvPr id="1027" name="Picture 3"/>
-          <p:cNvPicPr>
-            <a:picLocks noChangeAspect="1" noChangeArrowheads="1"/>
-          </p:cNvPicPr>
-          <p:nvPr/>
-        </p:nvPicPr>
-        <p:blipFill>
-          <a:blip r:embed="rId2">
-            <a:extLst>
-              <a:ext uri="{28A0092B-C50C-407E-A947-70E740481C1C}">
-                <a14:useLocalDpi xmlns:a14="http://schemas.microsoft.com/office/drawing/2010/main" val="0"/>
-              </a:ext>
-            </a:extLst>
-          </a:blip>
-          <a:srcRect/>
-          <a:stretch>
-            <a:fillRect/>
-          </a:stretch>
-        </p:blipFill>
-        <p:spPr bwMode="auto">
-          <a:xfrm>
-            <a:off x="467544" y="332656"/>
-            <a:ext cx="8208912" cy="6120680"/>
-          </a:xfrm>
-          <a:prstGeom prst="rect">
-            <a:avLst/>
-          </a:prstGeom>
-          <a:noFill/>
-          <a:ln>
-            <a:noFill/>
-          </a:ln>
-          <a:effectLst/>
-          <a:extLst>
-            <a:ext uri="{909E8E84-426E-40DD-AFC4-6F175D3DCCD1}">
-              <a14:hiddenFill xmlns:a14="http://schemas.microsoft.com/office/drawing/2010/main">
-                <a:solidFill>
-                  <a:schemeClr val="accent1"/>
-                </a:solidFill>
-              </a14:hiddenFill>
-            </a:ext>
-            <a:ext uri="{91240B29-F687-4F45-9708-019B960494DF}">
-              <a14:hiddenLine xmlns:a14="http://schemas.microsoft.com/office/drawing/2010/main" w="9525">
-                <a:solidFill>
-                  <a:schemeClr val="tx1"/>
-                </a:solidFill>
-                <a:miter lim="800000"/>
-                <a:headEnd/>
-                <a:tailEnd/>
-              </a14:hiddenLine>
-            </a:ext>
-            <a:ext uri="{AF507438-7753-43E0-B8FC-AC1667EBCBE1}">
-              <a14:hiddenEffects xmlns:a14="http://schemas.microsoft.com/office/drawing/2010/main">
-                <a:effectLst>
-                  <a:outerShdw dist="35921" dir="2700000" algn="ctr" rotWithShape="0">
-                    <a:schemeClr val="bg2"/>
-                  </a:outerShdw>
-                </a:effectLst>
-              </a14:hiddenEffects>
-            </a:ext>
-          </a:extLst>
-        </p:spPr>
-      </p:pic>
-    </p:spTree>
-    <p:extLst>
-      <p:ext uri="{BB962C8B-B14F-4D97-AF65-F5344CB8AC3E}">
-        <p14:creationId xmlns:p14="http://schemas.microsoft.com/office/powerpoint/2010/main" val="3860294056"/>
-      </p:ext>
-    </p:extLst>
-  </p:cSld>
-  <p:clrMapOvr>
-    <a:masterClrMapping/>
-  </p:clrMapOvr>
-  <p:timing>
-    <p:tnLst>
-      <p:par>
-        <p:cTn id="1" dur="indefinite" restart="never" nodeType="tmRoot"/>
-      </p:par>
-    </p:tnLst>
-  </p:timing>
-</p:sld>
-</file>
-
-<file path=ppt/slides/slide3.xml><?xml version="1.0" encoding="utf-8"?>
-<p:sld xmlns:a="http://schemas.openxmlformats.org/drawingml/2006/main" xmlns:r="http://schemas.openxmlformats.org/officeDocument/2006/relationships" xmlns:p="http://schemas.openxmlformats.org/presentationml/2006/main">
-  <p:cSld>
-    <p:spTree>
-      <p:nvGrpSpPr>
-        <p:cNvPr id="1" name=""/>
-        <p:cNvGrpSpPr/>
-        <p:nvPr/>
-      </p:nvGrpSpPr>
-      <p:grpSpPr>
-        <a:xfrm>
-          <a:off x="0" y="0"/>
-          <a:ext cx="0" cy="0"/>
-          <a:chOff x="0" y="0"/>
-          <a:chExt cx="0" cy="0"/>
-        </a:xfrm>
-      </p:grpSpPr>
-      <p:sp>
-        <p:nvSpPr>
-          <p:cNvPr id="2" name="Заголовок 1"/>
-          <p:cNvSpPr>
-            <a:spLocks noGrp="1"/>
-          </p:cNvSpPr>
-          <p:nvPr>
-            <p:ph type="title"/>
-          </p:nvPr>
-        </p:nvSpPr>
-        <p:spPr/>
-        <p:txBody>
-          <a:bodyPr/>
-          <a:lstStyle/>
-          <a:p>
-            <a:r>
-              <a:rPr lang="ru-RU" dirty="0"/>
-              <a:t>О</a:t>
-            </a:r>
-            <a:r>
-              <a:rPr lang="ru-RU" dirty="0" smtClean="0"/>
-              <a:t>писание </a:t>
-            </a:r>
-            <a:r>
-              <a:rPr lang="ru-RU" dirty="0"/>
-              <a:t>проекта</a:t>
-            </a:r>
-          </a:p>
-        </p:txBody>
-      </p:sp>
-      <p:sp>
-        <p:nvSpPr>
-          <p:cNvPr id="3" name="Объект 2"/>
-          <p:cNvSpPr>
-            <a:spLocks noGrp="1"/>
-          </p:cNvSpPr>
-          <p:nvPr>
-            <p:ph idx="1"/>
-          </p:nvPr>
-        </p:nvSpPr>
-        <p:spPr/>
-        <p:txBody>
-          <a:bodyPr/>
-          <a:lstStyle/>
-          <a:p>
-            <a:pPr marL="0" indent="0">
-              <a:buNone/>
-            </a:pPr>
-            <a:r>
-              <a:rPr lang="ru-RU" dirty="0" smtClean="0"/>
-              <a:t>Этот </a:t>
-            </a:r>
-            <a:r>
-              <a:rPr lang="ru-RU" dirty="0"/>
-              <a:t>проект представляет собой функциональный веб-сервис </a:t>
-            </a:r>
-            <a:r>
-              <a:rPr lang="ru-RU" dirty="0" smtClean="0"/>
-              <a:t>новостей АСУТП для </a:t>
-            </a:r>
-            <a:r>
-              <a:rPr lang="ru-RU" dirty="0"/>
-              <a:t>публикации </a:t>
-            </a:r>
-            <a:r>
-              <a:rPr lang="ru-RU" dirty="0" smtClean="0"/>
-              <a:t>инженерами АСУТП контента </a:t>
-            </a:r>
-            <a:r>
-              <a:rPr lang="ru-RU" dirty="0"/>
-              <a:t>и социального взаимодействия, построенный на базе </a:t>
-            </a:r>
-            <a:r>
-              <a:rPr lang="ru-RU" dirty="0" err="1"/>
-              <a:t>фреймворка</a:t>
-            </a:r>
-            <a:r>
-              <a:rPr lang="ru-RU" dirty="0"/>
-              <a:t> </a:t>
-            </a:r>
-            <a:r>
-              <a:rPr lang="ru-RU" dirty="0" err="1"/>
-              <a:t>Django</a:t>
-            </a:r>
-            <a:endParaRPr lang="ru-RU" dirty="0"/>
-          </a:p>
-          <a:p>
-            <a:endParaRPr lang="ru-RU" dirty="0"/>
-          </a:p>
-        </p:txBody>
-      </p:sp>
-    </p:spTree>
-    <p:extLst>
-      <p:ext uri="{BB962C8B-B14F-4D97-AF65-F5344CB8AC3E}">
-        <p14:creationId xmlns:p14="http://schemas.microsoft.com/office/powerpoint/2010/main" val="1355846140"/>
-      </p:ext>
-    </p:extLst>
-  </p:cSld>
-  <p:clrMapOvr>
-    <a:masterClrMapping/>
-  </p:clrMapOvr>
-  <p:timing>
-    <p:tnLst>
-      <p:par>
-        <p:cTn id="1" dur="indefinite" restart="never" nodeType="tmRoot"/>
-      </p:par>
-    </p:tnLst>
-  </p:timing>
-</p:sld>
-</file>
-
-<file path=ppt/slides/slide4.xml><?xml version="1.0" encoding="utf-8"?>
-<p:sld xmlns:a="http://schemas.openxmlformats.org/drawingml/2006/main" xmlns:r="http://schemas.openxmlformats.org/officeDocument/2006/relationships" xmlns:p="http://schemas.openxmlformats.org/presentationml/2006/main">
-  <p:cSld>
-    <p:spTree>
-      <p:nvGrpSpPr>
-        <p:cNvPr id="1" name=""/>
-        <p:cNvGrpSpPr/>
-        <p:nvPr/>
-      </p:nvGrpSpPr>
-      <p:grpSpPr>
-        <a:xfrm>
-          <a:off x="0" y="0"/>
-          <a:ext cx="0" cy="0"/>
-          <a:chOff x="0" y="0"/>
-          <a:chExt cx="0" cy="0"/>
-        </a:xfrm>
-      </p:grpSpPr>
-      <p:sp>
-        <p:nvSpPr>
-          <p:cNvPr id="2" name="Заголовок 1"/>
-          <p:cNvSpPr>
-            <a:spLocks noGrp="1"/>
-          </p:cNvSpPr>
-          <p:nvPr>
-            <p:ph type="title"/>
-          </p:nvPr>
-        </p:nvSpPr>
-        <p:spPr/>
-        <p:txBody>
-          <a:bodyPr>
-            <a:normAutofit fontScale="90000"/>
-          </a:bodyPr>
-          <a:lstStyle/>
-          <a:p>
-            <a:r>
-              <a:rPr lang="ru-RU" b="1" dirty="0">
-                <a:effectLst/>
-              </a:rPr>
-              <a:t>Постановка задачи / Проблематика </a:t>
-            </a:r>
-            <a:endParaRPr lang="ru-RU" dirty="0"/>
-          </a:p>
-        </p:txBody>
-      </p:sp>
-      <p:sp>
-        <p:nvSpPr>
-          <p:cNvPr id="3" name="Объект 2"/>
-          <p:cNvSpPr>
-            <a:spLocks noGrp="1"/>
-          </p:cNvSpPr>
-          <p:nvPr>
-            <p:ph idx="1"/>
-          </p:nvPr>
-        </p:nvSpPr>
-        <p:spPr/>
-        <p:txBody>
-          <a:bodyPr>
-            <a:normAutofit fontScale="25000" lnSpcReduction="20000"/>
-          </a:bodyPr>
-          <a:lstStyle/>
-          <a:p>
-            <a:r>
-              <a:rPr lang="ru-RU" dirty="0"/>
-              <a:t>Основная задача форума — создать пространство, где инженеры, программисты, технические писатели и другие специалисты по АСУТП (автоматизированным системам управления технологическими процессами) могут:</a:t>
-            </a:r>
-          </a:p>
-          <a:p>
-            <a:r>
-              <a:rPr lang="ru-RU" b="1" dirty="0"/>
-              <a:t>Обсуждать сложные технические вопросы.</a:t>
-            </a:r>
-            <a:r>
-              <a:rPr lang="ru-RU" dirty="0"/>
-              <a:t> Участники делятся опытом, разбирают ошибки и ищут решения проблем, связанных с программируемыми логическими контроллерами (ПЛК), SCADA-системами, сетевым оборудованием (например, </a:t>
-            </a:r>
-            <a:r>
-              <a:rPr lang="ru-RU" dirty="0" err="1"/>
-              <a:t>Profibus</a:t>
-            </a:r>
-            <a:r>
-              <a:rPr lang="ru-RU" dirty="0"/>
-              <a:t>, </a:t>
-            </a:r>
-            <a:r>
-              <a:rPr lang="ru-RU" dirty="0" err="1"/>
-              <a:t>Modbus</a:t>
-            </a:r>
-            <a:r>
-              <a:rPr lang="ru-RU" dirty="0"/>
-              <a:t>), языками программирования для ПЛК и их интеграцией с человеко-машинными интерфейсами (HMI). </a:t>
-            </a:r>
-            <a:r>
-              <a:rPr lang="ru-RU" dirty="0">
-                <a:hlinkClick r:id="rId2"/>
-              </a:rPr>
-              <a:t>asutpforum.ru</a:t>
-            </a:r>
-            <a:r>
-              <a:rPr lang="ru-RU" dirty="0">
-                <a:hlinkClick r:id="rId3"/>
-              </a:rPr>
-              <a:t>yapl.ru</a:t>
-            </a:r>
-            <a:r>
-              <a:rPr lang="ru-RU" dirty="0">
-                <a:hlinkClick r:id="rId4"/>
-              </a:rPr>
-              <a:t>asutpforum.ru</a:t>
-            </a:r>
-            <a:endParaRPr lang="ru-RU" dirty="0"/>
-          </a:p>
-          <a:p>
-            <a:r>
-              <a:rPr lang="ru-RU" b="1" dirty="0"/>
-              <a:t>Сравнивать подходы и решения.</a:t>
-            </a:r>
-            <a:r>
-              <a:rPr lang="ru-RU" dirty="0"/>
-              <a:t> Можно узнать, как коллеги решают схожие задачи с оборудованием разных производителей (</a:t>
-            </a:r>
-            <a:r>
-              <a:rPr lang="ru-RU" dirty="0" err="1"/>
-              <a:t>Siemens</a:t>
-            </a:r>
-            <a:r>
-              <a:rPr lang="ru-RU" dirty="0"/>
-              <a:t>, </a:t>
-            </a:r>
-            <a:r>
-              <a:rPr lang="ru-RU" dirty="0" err="1"/>
-              <a:t>Schneider</a:t>
-            </a:r>
-            <a:r>
-              <a:rPr lang="ru-RU" dirty="0"/>
-              <a:t> </a:t>
-            </a:r>
-            <a:r>
-              <a:rPr lang="ru-RU" dirty="0" err="1"/>
-              <a:t>Electric</a:t>
-            </a:r>
-            <a:r>
-              <a:rPr lang="ru-RU" dirty="0"/>
-              <a:t>, ОВЕН и др.). </a:t>
-            </a:r>
-            <a:r>
-              <a:rPr lang="ru-RU" dirty="0">
-                <a:hlinkClick r:id="rId3"/>
-              </a:rPr>
-              <a:t>yapl.ru</a:t>
-            </a:r>
-            <a:endParaRPr lang="ru-RU" dirty="0"/>
-          </a:p>
-          <a:p>
-            <a:r>
-              <a:rPr lang="ru-RU" b="1" dirty="0"/>
-              <a:t>Находить готовые решения и FAQ.</a:t>
-            </a:r>
-            <a:r>
-              <a:rPr lang="ru-RU" dirty="0"/>
-              <a:t> На форуме есть разделы с часто задаваемыми вопросами (FAQ), которые помогают быстро получить ответ на типовые технические проблемы. </a:t>
-            </a:r>
-            <a:r>
-              <a:rPr lang="ru-RU" dirty="0">
-                <a:hlinkClick r:id="rId2"/>
-              </a:rPr>
-              <a:t>asutpforum.ru</a:t>
-            </a:r>
-            <a:endParaRPr lang="ru-RU" dirty="0"/>
-          </a:p>
-          <a:p>
-            <a:r>
-              <a:rPr lang="ru-RU" b="1" dirty="0"/>
-              <a:t>Поддерживать профессиональное сообщество.</a:t>
-            </a:r>
-            <a:r>
-              <a:rPr lang="ru-RU" dirty="0"/>
-              <a:t> Форум объединяет специалистов, позволяя им оставаться в курсе отраслевых трендов и оперативно обмениваться знаниями. </a:t>
-            </a:r>
-            <a:r>
-              <a:rPr lang="ru-RU" dirty="0">
-                <a:hlinkClick r:id="rId3"/>
-              </a:rPr>
-              <a:t>yapl.ru</a:t>
-            </a:r>
-            <a:endParaRPr lang="ru-RU" dirty="0"/>
-          </a:p>
-          <a:p>
-            <a:r>
-              <a:rPr lang="ru-RU" dirty="0"/>
-              <a:t>Таким образом, площадка помогает преодолеть разобщённость: вместо того чтобы искать разрозненную информацию по разным источникам, участники могут оперативно получить помощь от коллег. Это особенно важно в такой технически сложной и динамичной сфере, как промышленная автоматизация.</a:t>
-            </a:r>
-          </a:p>
-          <a:p>
-            <a:r>
-              <a:rPr lang="ru-RU" dirty="0"/>
-              <a:t/>
-            </a:r>
-            <a:br>
-              <a:rPr lang="ru-RU" dirty="0"/>
-            </a:br>
-            <a:r>
-              <a:rPr lang="ru-RU" dirty="0"/>
-              <a:t> </a:t>
-            </a:r>
-            <a:r>
-              <a:rPr lang="ru-RU" dirty="0" smtClean="0"/>
-              <a:t>    Это</a:t>
-            </a:r>
-            <a:r>
-              <a:rPr lang="ru-RU" dirty="0"/>
-              <a:t> форум для специалистов в области АСУ ТП (автоматизированных систем управления технологическими процессами), электротехники и промышленной автоматизации.</a:t>
-            </a:r>
-          </a:p>
-          <a:p>
-            <a:pPr marL="536575" indent="-536575"/>
-            <a:r>
-              <a:rPr lang="ru-RU" b="1" dirty="0"/>
-              <a:t>Какие проблемы помогает </a:t>
-            </a:r>
-            <a:r>
-              <a:rPr lang="ru-RU" b="1" dirty="0" smtClean="0"/>
-              <a:t>решить</a:t>
-            </a:r>
-            <a:r>
-              <a:rPr lang="en-US" b="1" dirty="0" smtClean="0"/>
-              <a:t>:</a:t>
-            </a:r>
-            <a:endParaRPr lang="ru-RU" b="1" dirty="0"/>
-          </a:p>
-          <a:p>
-            <a:r>
-              <a:rPr lang="ru-RU" dirty="0"/>
-              <a:t>Форум закрывает сразу несколько задач:</a:t>
-            </a:r>
-          </a:p>
-          <a:p>
-            <a:r>
-              <a:rPr lang="en-US" b="1" dirty="0" smtClean="0"/>
-              <a:t>     </a:t>
-            </a:r>
-            <a:r>
-              <a:rPr lang="ru-RU" b="1" dirty="0" smtClean="0"/>
-              <a:t>Поиск</a:t>
-            </a:r>
-            <a:r>
-              <a:rPr lang="ru-RU" b="1" dirty="0"/>
-              <a:t> решений технических проблем.</a:t>
-            </a:r>
-            <a:r>
-              <a:rPr lang="ru-RU" dirty="0"/>
-              <a:t> На форуме разбирают сбои и нюансы работы оборудования и ПО — например, проблемы с SCADA-системами, ПЛК (программируемыми логическими контроллерами), интерфейсами и протоколами связи.</a:t>
-            </a:r>
-          </a:p>
-          <a:p>
-            <a:r>
-              <a:rPr lang="en-US" b="1" dirty="0" smtClean="0"/>
-              <a:t>           </a:t>
-            </a:r>
-            <a:r>
-              <a:rPr lang="ru-RU" b="1" dirty="0" smtClean="0"/>
-              <a:t>Обмен</a:t>
-            </a:r>
-            <a:r>
-              <a:rPr lang="ru-RU" b="1" dirty="0"/>
-              <a:t> опытом по оборудованию и софту.</a:t>
-            </a:r>
-            <a:r>
-              <a:rPr lang="ru-RU" dirty="0"/>
-              <a:t> Обсуждают решения на базе </a:t>
-            </a:r>
-            <a:r>
-              <a:rPr lang="ru-RU" dirty="0" err="1"/>
-              <a:t>Siemens</a:t>
-            </a:r>
-            <a:r>
-              <a:rPr lang="ru-RU" dirty="0"/>
-              <a:t>, </a:t>
-            </a:r>
-            <a:r>
-              <a:rPr lang="ru-RU" dirty="0" err="1"/>
-              <a:t>Beckhoff</a:t>
-            </a:r>
-            <a:r>
-              <a:rPr lang="ru-RU" dirty="0"/>
-              <a:t>, ОВЕН, </a:t>
-            </a:r>
-            <a:r>
-              <a:rPr lang="ru-RU" dirty="0" err="1"/>
-              <a:t>DeltaV</a:t>
-            </a:r>
-            <a:r>
-              <a:rPr lang="ru-RU" dirty="0"/>
-              <a:t>, </a:t>
-            </a:r>
-            <a:r>
-              <a:rPr lang="ru-RU" dirty="0" err="1"/>
-              <a:t>Mitsubishi</a:t>
-            </a:r>
-            <a:r>
-              <a:rPr lang="ru-RU" dirty="0"/>
-              <a:t> и др., а также работу в средах типа TIA </a:t>
-            </a:r>
-            <a:r>
-              <a:rPr lang="ru-RU" dirty="0" err="1"/>
-              <a:t>Portal</a:t>
-            </a:r>
-            <a:r>
-              <a:rPr lang="ru-RU" dirty="0"/>
-              <a:t>, EPLAN и т. п.</a:t>
-            </a:r>
-          </a:p>
-          <a:p>
-            <a:r>
-              <a:rPr lang="ru-RU" b="1" dirty="0"/>
-              <a:t>Консультации по проектированию и наладке.</a:t>
-            </a:r>
-            <a:r>
-              <a:rPr lang="ru-RU" dirty="0"/>
-              <a:t> Участники помогают с выбором компонентов, </a:t>
-            </a:r>
-            <a:r>
-              <a:rPr lang="ru-RU" dirty="0" err="1"/>
-              <a:t>схемотехникой</a:t>
-            </a:r>
-            <a:r>
-              <a:rPr lang="ru-RU" dirty="0"/>
-              <a:t>, настройкой алгоритмов управления, вопросами КИП (контрольно-измерительных приборов).</a:t>
-            </a:r>
-          </a:p>
-          <a:p>
-            <a:r>
-              <a:rPr lang="ru-RU" b="1" dirty="0"/>
-              <a:t>Разбор нормативных и проектных вопросов.</a:t>
-            </a:r>
-            <a:r>
-              <a:rPr lang="ru-RU" dirty="0"/>
-              <a:t> </a:t>
-            </a:r>
-            <a:r>
-              <a:rPr lang="ru-RU" dirty="0" smtClean="0"/>
-              <a:t>  </a:t>
-            </a:r>
-            <a:r>
-              <a:rPr lang="ru-RU" dirty="0"/>
-              <a:t>Цели и задачи проекта: Формулировка целей и конкретных задач, которые были поставлены перед началом работы.</a:t>
-            </a:r>
-          </a:p>
-          <a:p>
-            <a:endParaRPr lang="ru-RU" b="1" dirty="0"/>
-          </a:p>
-          <a:p>
-            <a:r>
-              <a:rPr lang="en-US" dirty="0" smtClean="0"/>
-              <a:t>     </a:t>
-            </a:r>
-            <a:r>
-              <a:rPr lang="ru-RU" dirty="0" smtClean="0"/>
-              <a:t>Создание Новостного портала АСУТП </a:t>
-            </a:r>
-            <a:r>
-              <a:rPr lang="ru-RU" dirty="0"/>
-              <a:t>было направлено на решение ряда задач, связанных с потребностями профессионального сообщества в области АСУ ТП (автоматизированных систем управления технологическими процессами) и промышленной автоматизации</a:t>
-            </a:r>
-            <a:r>
-              <a:rPr lang="ru-RU" dirty="0" smtClean="0"/>
-              <a:t>. Что крайне не обходимо в последнее время в связи с санкциями в области АСУТП, которые были запущенны западными странами против России. Многие ведущие мировые бренды такие как </a:t>
-            </a:r>
-            <a:r>
-              <a:rPr lang="en-US" dirty="0" smtClean="0"/>
-              <a:t>Siemens, Yokogawa, Honeywell </a:t>
-            </a:r>
-            <a:r>
-              <a:rPr lang="ru-RU" dirty="0" smtClean="0"/>
-              <a:t>и другие ушли с Российского рынка, прекратили техническую поддержку хотя оборудование этих брендов продолжает функционировать в Российской промышленности.</a:t>
-            </a:r>
-            <a:endParaRPr lang="ru-RU" dirty="0"/>
-          </a:p>
-          <a:p>
-            <a:r>
-              <a:rPr lang="en-US" b="1" dirty="0" smtClean="0"/>
-              <a:t>    </a:t>
-            </a:r>
-            <a:r>
-              <a:rPr lang="ru-RU" b="1" dirty="0" smtClean="0"/>
-              <a:t>Возможные </a:t>
-            </a:r>
-            <a:r>
-              <a:rPr lang="ru-RU" b="1" dirty="0"/>
-              <a:t>цели проекта:</a:t>
-            </a:r>
-            <a:endParaRPr lang="ru-RU" dirty="0"/>
-          </a:p>
-          <a:p>
-            <a:r>
-              <a:rPr lang="ru-RU" dirty="0"/>
-              <a:t>Создание площадки для общения и обмена опытом между специалистами в сфере АСУ ТП, электротехники и промышленной автоматизации.</a:t>
-            </a:r>
-          </a:p>
-          <a:p>
-            <a:r>
-              <a:rPr lang="ru-RU" dirty="0"/>
-              <a:t>Содействие в решении технических проблем и поиске решений в области автоматизации производства.</a:t>
-            </a:r>
-          </a:p>
-          <a:p>
-            <a:r>
-              <a:rPr lang="ru-RU" dirty="0"/>
-              <a:t>Формирование базы знаний по различным аспектам проектирования, наладки, эксплуатации и модернизации систем управления.</a:t>
-            </a:r>
-          </a:p>
-          <a:p>
-            <a:r>
-              <a:rPr lang="ru-RU" dirty="0"/>
-              <a:t>Поддержка профессионального развития инженеров, студентов и начинающих специалистов через обсуждение практических кейсов и доступ к экспертному мнению.</a:t>
-            </a:r>
-          </a:p>
-          <a:p>
-            <a:r>
-              <a:rPr lang="ru-RU" dirty="0"/>
-              <a:t>Создание сообщества, где участники могут обсуждать актуальные вопросы, включая нормативные требования, стандарты, безопасность систем и новые технологии.</a:t>
-            </a:r>
-          </a:p>
-          <a:p>
-            <a:endParaRPr lang="ru-RU" dirty="0"/>
-          </a:p>
-        </p:txBody>
-      </p:sp>
-    </p:spTree>
-    <p:extLst>
-      <p:ext uri="{BB962C8B-B14F-4D97-AF65-F5344CB8AC3E}">
-        <p14:creationId xmlns:p14="http://schemas.microsoft.com/office/powerpoint/2010/main" val="3252941751"/>
-      </p:ext>
-    </p:extLst>
-  </p:cSld>
-  <p:clrMapOvr>
-    <a:masterClrMapping/>
-  </p:clrMapOvr>
-  <p:timing>
-    <p:tnLst>
-      <p:par>
-        <p:cTn id="1" dur="indefinite" restart="never" nodeType="tmRoot"/>
-      </p:par>
-    </p:tnLst>
-  </p:timing>
-</p:sld>
-</file>
-
-<file path=ppt/slides/slide5.xml><?xml version="1.0" encoding="utf-8"?>
-<p:sld xmlns:a="http://schemas.openxmlformats.org/drawingml/2006/main" xmlns:r="http://schemas.openxmlformats.org/officeDocument/2006/relationships" xmlns:p="http://schemas.openxmlformats.org/presentationml/2006/main">
-  <p:cSld>
-    <p:spTree>
-      <p:nvGrpSpPr>
-        <p:cNvPr id="1" name=""/>
-        <p:cNvGrpSpPr/>
-        <p:nvPr/>
-      </p:nvGrpSpPr>
-      <p:grpSpPr>
-        <a:xfrm>
-          <a:off x="0" y="0"/>
-          <a:ext cx="0" cy="0"/>
-          <a:chOff x="0" y="0"/>
-          <a:chExt cx="0" cy="0"/>
-        </a:xfrm>
-      </p:grpSpPr>
-      <p:sp>
-        <p:nvSpPr>
-          <p:cNvPr id="2" name="Заголовок 1"/>
-          <p:cNvSpPr>
-            <a:spLocks noGrp="1"/>
-          </p:cNvSpPr>
-          <p:nvPr>
-            <p:ph type="title"/>
-          </p:nvPr>
-        </p:nvSpPr>
-        <p:spPr/>
-        <p:txBody>
-          <a:bodyPr>
-            <a:normAutofit fontScale="90000"/>
-          </a:bodyPr>
-          <a:lstStyle/>
-          <a:p>
-            <a:r>
-              <a:rPr lang="ru-RU" b="1" dirty="0">
-                <a:effectLst/>
-              </a:rPr>
-              <a:t>Постановка задачи / Проблематика </a:t>
-            </a:r>
-            <a:endParaRPr lang="ru-RU" dirty="0"/>
-          </a:p>
-        </p:txBody>
-      </p:sp>
-      <p:pic>
-        <p:nvPicPr>
-          <p:cNvPr id="3074" name="Picture 2"/>
-          <p:cNvPicPr>
-            <a:picLocks noGrp="1" noChangeAspect="1" noChangeArrowheads="1"/>
-          </p:cNvPicPr>
-          <p:nvPr>
-            <p:ph idx="1"/>
-          </p:nvPr>
-        </p:nvPicPr>
-        <p:blipFill>
-          <a:blip r:embed="rId2">
-            <a:extLst>
-              <a:ext uri="{28A0092B-C50C-407E-A947-70E740481C1C}">
-                <a14:useLocalDpi xmlns:a14="http://schemas.microsoft.com/office/drawing/2010/main" val="0"/>
-              </a:ext>
-            </a:extLst>
-          </a:blip>
-          <a:srcRect/>
-          <a:stretch>
-            <a:fillRect/>
-          </a:stretch>
-        </p:blipFill>
-        <p:spPr bwMode="auto">
-          <a:xfrm>
-            <a:off x="1331641" y="1484784"/>
-            <a:ext cx="5904656" cy="5112568"/>
-          </a:xfrm>
-          <a:prstGeom prst="rect">
-            <a:avLst/>
-          </a:prstGeom>
-          <a:noFill/>
-          <a:ln>
-            <a:noFill/>
-          </a:ln>
-          <a:effectLst/>
-          <a:extLst>
-            <a:ext uri="{909E8E84-426E-40DD-AFC4-6F175D3DCCD1}">
-              <a14:hiddenFill xmlns:a14="http://schemas.microsoft.com/office/drawing/2010/main">
-                <a:solidFill>
-                  <a:schemeClr val="accent1"/>
-                </a:solidFill>
-              </a14:hiddenFill>
-            </a:ext>
-            <a:ext uri="{91240B29-F687-4F45-9708-019B960494DF}">
-              <a14:hiddenLine xmlns:a14="http://schemas.microsoft.com/office/drawing/2010/main" w="9525">
-                <a:solidFill>
-                  <a:schemeClr val="tx1"/>
-                </a:solidFill>
-                <a:miter lim="800000"/>
-                <a:headEnd/>
-                <a:tailEnd/>
-              </a14:hiddenLine>
-            </a:ext>
-            <a:ext uri="{AF507438-7753-43E0-B8FC-AC1667EBCBE1}">
-              <a14:hiddenEffects xmlns:a14="http://schemas.microsoft.com/office/drawing/2010/main">
-                <a:effectLst>
-                  <a:outerShdw dist="35921" dir="2700000" algn="ctr" rotWithShape="0">
-                    <a:schemeClr val="bg2"/>
-                  </a:outerShdw>
-                </a:effectLst>
-              </a14:hiddenEffects>
-            </a:ext>
-          </a:extLst>
-        </p:spPr>
-      </p:pic>
-    </p:spTree>
-    <p:extLst>
-      <p:ext uri="{BB962C8B-B14F-4D97-AF65-F5344CB8AC3E}">
-        <p14:creationId xmlns:p14="http://schemas.microsoft.com/office/powerpoint/2010/main" val="3597867858"/>
-      </p:ext>
-    </p:extLst>
-  </p:cSld>
-  <p:clrMapOvr>
-    <a:masterClrMapping/>
-  </p:clrMapOvr>
-  <p:timing>
-    <p:tnLst>
-      <p:par>
-        <p:cTn id="1" dur="indefinite" restart="never" nodeType="tmRoot"/>
-      </p:par>
-    </p:tnLst>
-  </p:timing>
-</p:sld>
-</file>
-
-<file path=ppt/slides/slide6.xml><?xml version="1.0" encoding="utf-8"?>
-<p:sld xmlns:a="http://schemas.openxmlformats.org/drawingml/2006/main" xmlns:r="http://schemas.openxmlformats.org/officeDocument/2006/relationships" xmlns:p="http://schemas.openxmlformats.org/presentationml/2006/main">
-  <p:cSld>
-    <p:spTree>
-      <p:nvGrpSpPr>
-        <p:cNvPr id="1" name=""/>
-        <p:cNvGrpSpPr/>
-        <p:nvPr/>
-      </p:nvGrpSpPr>
-      <p:grpSpPr>
-        <a:xfrm>
-          <a:off x="0" y="0"/>
-          <a:ext cx="0" cy="0"/>
-          <a:chOff x="0" y="0"/>
-          <a:chExt cx="0" cy="0"/>
-        </a:xfrm>
-      </p:grpSpPr>
-      <p:sp>
-        <p:nvSpPr>
-          <p:cNvPr id="2" name="Заголовок 1"/>
-          <p:cNvSpPr>
-            <a:spLocks noGrp="1"/>
-          </p:cNvSpPr>
-          <p:nvPr>
-            <p:ph type="title"/>
-          </p:nvPr>
-        </p:nvSpPr>
-        <p:spPr/>
-        <p:txBody>
-          <a:bodyPr>
-            <a:normAutofit fontScale="90000"/>
-          </a:bodyPr>
-          <a:lstStyle/>
-          <a:p>
-            <a:r>
-              <a:rPr lang="ru-RU" b="1" dirty="0">
-                <a:effectLst/>
-              </a:rPr>
-              <a:t>Анализ предметной области / Аналоги </a:t>
-            </a:r>
-            <a:endParaRPr lang="ru-RU" dirty="0"/>
-          </a:p>
-        </p:txBody>
-      </p:sp>
-      <p:pic>
-        <p:nvPicPr>
-          <p:cNvPr id="4099" name="Picture 3"/>
-          <p:cNvPicPr>
-            <a:picLocks noChangeAspect="1" noChangeArrowheads="1"/>
-          </p:cNvPicPr>
-          <p:nvPr/>
-        </p:nvPicPr>
-        <p:blipFill>
-          <a:blip r:embed="rId2">
-            <a:extLst>
-              <a:ext uri="{28A0092B-C50C-407E-A947-70E740481C1C}">
-                <a14:useLocalDpi xmlns:a14="http://schemas.microsoft.com/office/drawing/2010/main" val="0"/>
-              </a:ext>
-            </a:extLst>
-          </a:blip>
-          <a:srcRect/>
-          <a:stretch>
-            <a:fillRect/>
-          </a:stretch>
-        </p:blipFill>
-        <p:spPr bwMode="auto">
-          <a:xfrm>
-            <a:off x="395537" y="2837880"/>
-            <a:ext cx="8280919" cy="3308796"/>
-          </a:xfrm>
-          <a:prstGeom prst="rect">
-            <a:avLst/>
-          </a:prstGeom>
-          <a:noFill/>
-          <a:ln>
-            <a:noFill/>
-          </a:ln>
-          <a:effectLst/>
-          <a:extLst>
-            <a:ext uri="{909E8E84-426E-40DD-AFC4-6F175D3DCCD1}">
-              <a14:hiddenFill xmlns:a14="http://schemas.microsoft.com/office/drawing/2010/main">
-                <a:solidFill>
-                  <a:schemeClr val="accent1"/>
-                </a:solidFill>
-              </a14:hiddenFill>
-            </a:ext>
-            <a:ext uri="{91240B29-F687-4F45-9708-019B960494DF}">
-              <a14:hiddenLine xmlns:a14="http://schemas.microsoft.com/office/drawing/2010/main" w="9525">
-                <a:solidFill>
-                  <a:schemeClr val="tx1"/>
-                </a:solidFill>
-                <a:miter lim="800000"/>
-                <a:headEnd/>
-                <a:tailEnd/>
-              </a14:hiddenLine>
-            </a:ext>
-            <a:ext uri="{AF507438-7753-43E0-B8FC-AC1667EBCBE1}">
-              <a14:hiddenEffects xmlns:a14="http://schemas.microsoft.com/office/drawing/2010/main">
-                <a:effectLst>
-                  <a:outerShdw dist="35921" dir="2700000" algn="ctr" rotWithShape="0">
-                    <a:schemeClr val="bg2"/>
-                  </a:outerShdw>
-                </a:effectLst>
-              </a14:hiddenEffects>
-            </a:ext>
-          </a:extLst>
-        </p:spPr>
-      </p:pic>
-      <p:pic>
-        <p:nvPicPr>
-          <p:cNvPr id="4101" name="Picture 5"/>
-          <p:cNvPicPr>
-            <a:picLocks noGrp="1" noChangeAspect="1" noChangeArrowheads="1"/>
-          </p:cNvPicPr>
-          <p:nvPr>
-            <p:ph idx="1"/>
-          </p:nvPr>
-        </p:nvPicPr>
-        <p:blipFill>
-          <a:blip r:embed="rId3">
-            <a:extLst>
-              <a:ext uri="{28A0092B-C50C-407E-A947-70E740481C1C}">
-                <a14:useLocalDpi xmlns:a14="http://schemas.microsoft.com/office/drawing/2010/main" val="0"/>
-              </a:ext>
-            </a:extLst>
-          </a:blip>
-          <a:srcRect/>
-          <a:stretch>
-            <a:fillRect/>
-          </a:stretch>
-        </p:blipFill>
-        <p:spPr bwMode="auto">
-          <a:xfrm>
-            <a:off x="395537" y="2066066"/>
-            <a:ext cx="8229600" cy="750854"/>
-          </a:xfrm>
-          <a:prstGeom prst="rect">
-            <a:avLst/>
-          </a:prstGeom>
-          <a:noFill/>
-          <a:ln>
-            <a:noFill/>
-          </a:ln>
-          <a:effectLst/>
-          <a:extLst>
-            <a:ext uri="{909E8E84-426E-40DD-AFC4-6F175D3DCCD1}">
-              <a14:hiddenFill xmlns:a14="http://schemas.microsoft.com/office/drawing/2010/main">
-                <a:solidFill>
-                  <a:schemeClr val="accent1"/>
-                </a:solidFill>
-              </a14:hiddenFill>
-            </a:ext>
-            <a:ext uri="{91240B29-F687-4F45-9708-019B960494DF}">
-              <a14:hiddenLine xmlns:a14="http://schemas.microsoft.com/office/drawing/2010/main" w="9525">
-                <a:solidFill>
-                  <a:schemeClr val="tx1"/>
-                </a:solidFill>
-                <a:miter lim="800000"/>
-                <a:headEnd/>
-                <a:tailEnd/>
-              </a14:hiddenLine>
-            </a:ext>
-            <a:ext uri="{AF507438-7753-43E0-B8FC-AC1667EBCBE1}">
-              <a14:hiddenEffects xmlns:a14="http://schemas.microsoft.com/office/drawing/2010/main">
-                <a:effectLst>
-                  <a:outerShdw dist="35921" dir="2700000" algn="ctr" rotWithShape="0">
-                    <a:schemeClr val="bg2"/>
-                  </a:outerShdw>
-                </a:effectLst>
-              </a14:hiddenEffects>
-            </a:ext>
-          </a:extLst>
-        </p:spPr>
-      </p:pic>
-      <p:sp>
-        <p:nvSpPr>
-          <p:cNvPr id="13" name="Заголовок 1"/>
-          <p:cNvSpPr txBox="1">
-            <a:spLocks/>
-          </p:cNvSpPr>
-          <p:nvPr/>
-        </p:nvSpPr>
-        <p:spPr>
-          <a:xfrm>
-            <a:off x="395537" y="1340768"/>
-            <a:ext cx="7632847" cy="779668"/>
-          </a:xfrm>
-          <a:prstGeom prst="rect">
-            <a:avLst/>
-          </a:prstGeom>
-        </p:spPr>
-        <p:txBody>
-          <a:bodyPr rIns="91440" anchor="b">
-            <a:normAutofit fontScale="97500"/>
-            <a:scene3d>
-              <a:camera prst="orthographicFront"/>
-              <a:lightRig rig="soft" dir="t">
-                <a:rot lat="0" lon="0" rev="2400000"/>
-              </a:lightRig>
-            </a:scene3d>
-            <a:sp3d>
-              <a:bevelT w="19050" h="12700"/>
-            </a:sp3d>
-          </a:bodyPr>
-          <a:lstStyle>
-            <a:lvl1pPr marL="54864" algn="r" rtl="0" eaLnBrk="1" latinLnBrk="0" hangingPunct="1">
-              <a:spcBef>
-                <a:spcPct val="0"/>
-              </a:spcBef>
-              <a:buNone/>
-              <a:defRPr kumimoji="0" sz="4600" kern="1200">
-                <a:solidFill>
-                  <a:schemeClr val="tx2">
-                    <a:tint val="100000"/>
-                    <a:shade val="90000"/>
-                    <a:satMod val="250000"/>
-                    <a:alpha val="100000"/>
-                  </a:schemeClr>
-                </a:solidFill>
-                <a:effectLst>
-                  <a:outerShdw blurRad="38100" dist="25500" dir="5400000" algn="tl" rotWithShape="0">
-                    <a:srgbClr val="000000">
-                      <a:satMod val="180000"/>
-                      <a:alpha val="75000"/>
-                    </a:srgbClr>
-                  </a:outerShdw>
-                </a:effectLst>
-                <a:latin typeface="+mj-lt"/>
-                <a:ea typeface="+mj-ea"/>
-                <a:cs typeface="+mj-cs"/>
-              </a:defRPr>
-            </a:lvl1pPr>
-            <a:extLst/>
-          </a:lstStyle>
-          <a:p>
-            <a:pPr algn="ctr"/>
-            <a:r>
-              <a:rPr lang="ru-RU" sz="2000" b="1" dirty="0" smtClean="0">
-                <a:effectLst/>
-              </a:rPr>
-              <a:t>За образец был взят существующий Форум АСУТП </a:t>
-            </a:r>
-            <a:r>
-              <a:rPr lang="en-US" sz="2000" b="1" dirty="0">
-                <a:effectLst/>
-              </a:rPr>
-              <a:t>https://asutpforum.ru/</a:t>
-            </a:r>
-            <a:endParaRPr lang="ru-RU" sz="2000" dirty="0"/>
-          </a:p>
-        </p:txBody>
-      </p:sp>
-    </p:spTree>
-    <p:extLst>
-      <p:ext uri="{BB962C8B-B14F-4D97-AF65-F5344CB8AC3E}">
-        <p14:creationId xmlns:p14="http://schemas.microsoft.com/office/powerpoint/2010/main" val="824541824"/>
-      </p:ext>
-    </p:extLst>
-  </p:cSld>
-  <p:clrMapOvr>
-    <a:masterClrMapping/>
-  </p:clrMapOvr>
-  <p:timing>
-    <p:tnLst>
-      <p:par>
-        <p:cTn id="1" dur="indefinite" restart="never" nodeType="tmRoot"/>
-      </p:par>
-    </p:tnLst>
-  </p:timing>
-</p:sld>
-</file>
-
-<file path=ppt/slides/slide7.xml><?xml version="1.0" encoding="utf-8"?>
-<p:sld xmlns:a="http://schemas.openxmlformats.org/drawingml/2006/main" xmlns:r="http://schemas.openxmlformats.org/officeDocument/2006/relationships" xmlns:p="http://schemas.openxmlformats.org/presentationml/2006/main">
-  <p:cSld>
-    <p:spTree>
-      <p:nvGrpSpPr>
-        <p:cNvPr id="1" name=""/>
-        <p:cNvGrpSpPr/>
-        <p:nvPr/>
-      </p:nvGrpSpPr>
-      <p:grpSpPr>
-        <a:xfrm>
-          <a:off x="0" y="0"/>
-          <a:ext cx="0" cy="0"/>
-          <a:chOff x="0" y="0"/>
-          <a:chExt cx="0" cy="0"/>
-        </a:xfrm>
-      </p:grpSpPr>
-      <p:sp>
-        <p:nvSpPr>
-          <p:cNvPr id="2" name="Заголовок 1"/>
-          <p:cNvSpPr>
-            <a:spLocks noGrp="1"/>
-          </p:cNvSpPr>
-          <p:nvPr>
-            <p:ph type="title"/>
-          </p:nvPr>
-        </p:nvSpPr>
-        <p:spPr/>
-        <p:txBody>
-          <a:bodyPr>
-            <a:normAutofit fontScale="90000"/>
-          </a:bodyPr>
-          <a:lstStyle/>
-          <a:p>
-            <a:r>
-              <a:rPr lang="ru-RU" dirty="0"/>
-              <a:t>Б</a:t>
-            </a:r>
-            <a:r>
-              <a:rPr lang="ru-RU" dirty="0" smtClean="0"/>
-              <a:t>иблиотеки </a:t>
-            </a:r>
-            <a:r>
-              <a:rPr lang="ru-RU" dirty="0"/>
-              <a:t>или компоненты </a:t>
-            </a:r>
-            <a:r>
-              <a:rPr lang="ru-RU" dirty="0" err="1"/>
-              <a:t>Django</a:t>
-            </a:r>
-            <a:r>
-              <a:rPr lang="ru-RU" dirty="0"/>
-              <a:t> использовались и зачем</a:t>
-            </a:r>
-          </a:p>
-        </p:txBody>
-      </p:sp>
-      <p:sp>
-        <p:nvSpPr>
-          <p:cNvPr id="3" name="Объект 2"/>
-          <p:cNvSpPr>
-            <a:spLocks noGrp="1"/>
-          </p:cNvSpPr>
-          <p:nvPr>
-            <p:ph idx="1"/>
-          </p:nvPr>
-        </p:nvSpPr>
-        <p:spPr/>
-        <p:txBody>
-          <a:bodyPr>
-            <a:normAutofit fontScale="25000" lnSpcReduction="20000"/>
-          </a:bodyPr>
-          <a:lstStyle/>
-          <a:p>
-            <a:pPr marL="0" indent="0">
-              <a:buNone/>
-            </a:pPr>
-            <a:r>
-              <a:rPr lang="ru-RU" sz="4400" b="1" u="sng" dirty="0" smtClean="0"/>
-              <a:t>Встроенные компоненты </a:t>
-            </a:r>
-            <a:r>
-              <a:rPr lang="ru-RU" sz="4400" b="1" u="sng" dirty="0" err="1" smtClean="0"/>
-              <a:t>Django</a:t>
-            </a:r>
-            <a:r>
-              <a:rPr lang="ru-RU" sz="4400" b="1" u="sng" dirty="0" smtClean="0"/>
-              <a:t> (</a:t>
-            </a:r>
-            <a:r>
-              <a:rPr lang="ru-RU" sz="4400" b="1" u="sng" dirty="0" err="1" smtClean="0"/>
-              <a:t>Core</a:t>
-            </a:r>
-            <a:r>
-              <a:rPr lang="ru-RU" sz="4400" b="1" u="sng" dirty="0" smtClean="0"/>
-              <a:t>)</a:t>
-            </a:r>
-          </a:p>
-          <a:p>
-            <a:endParaRPr lang="ru-RU" sz="4400" b="1" u="sng" dirty="0" smtClean="0"/>
-          </a:p>
-          <a:p>
-            <a:pPr marL="0" indent="0">
-              <a:buNone/>
-            </a:pPr>
-            <a:r>
-              <a:rPr lang="ru-RU" sz="4400" b="1" dirty="0" err="1" smtClean="0"/>
-              <a:t>Django</a:t>
-            </a:r>
-            <a:r>
-              <a:rPr lang="ru-RU" sz="4400" b="1" dirty="0" smtClean="0"/>
-              <a:t> </a:t>
-            </a:r>
-            <a:r>
-              <a:rPr lang="ru-RU" sz="4400" b="1" dirty="0" err="1" smtClean="0"/>
-              <a:t>Auth</a:t>
-            </a:r>
-            <a:r>
-              <a:rPr lang="ru-RU" sz="4400" b="1" dirty="0" smtClean="0"/>
-              <a:t> (</a:t>
-            </a:r>
-            <a:r>
-              <a:rPr lang="ru-RU" sz="4400" b="1" dirty="0" err="1" smtClean="0"/>
-              <a:t>django.contrib.auth</a:t>
-            </a:r>
-            <a:r>
-              <a:rPr lang="ru-RU" sz="4400" b="1" dirty="0" smtClean="0"/>
-              <a:t>):</a:t>
-            </a:r>
-          </a:p>
-          <a:p>
-            <a:pPr marL="0" indent="0">
-              <a:buNone/>
-            </a:pPr>
-            <a:r>
-              <a:rPr lang="ru-RU" sz="4400" b="1" dirty="0" smtClean="0"/>
-              <a:t>Зачем</a:t>
-            </a:r>
-            <a:r>
-              <a:rPr lang="ru-RU" sz="4400" dirty="0" smtClean="0"/>
-              <a:t>: Управление пользователями, сессиями, хеширование паролей и проверка прав доступа (например, разделение на обычных читателей и авторов).</a:t>
-            </a:r>
-          </a:p>
-          <a:p>
-            <a:pPr marL="0" indent="0">
-              <a:buNone/>
-            </a:pPr>
-            <a:r>
-              <a:rPr lang="ru-RU" sz="4400" b="1" dirty="0" err="1" smtClean="0"/>
-              <a:t>Django</a:t>
-            </a:r>
-            <a:r>
-              <a:rPr lang="ru-RU" sz="4400" b="1" dirty="0" smtClean="0"/>
-              <a:t> </a:t>
-            </a:r>
-            <a:r>
-              <a:rPr lang="ru-RU" sz="4400" b="1" dirty="0" err="1" smtClean="0"/>
-              <a:t>Admin</a:t>
-            </a:r>
-            <a:r>
-              <a:rPr lang="ru-RU" sz="4400" b="1" dirty="0" smtClean="0"/>
-              <a:t> (</a:t>
-            </a:r>
-            <a:r>
-              <a:rPr lang="ru-RU" sz="4400" b="1" dirty="0" err="1" smtClean="0"/>
-              <a:t>django.contrib.admin</a:t>
-            </a:r>
-            <a:r>
-              <a:rPr lang="ru-RU" sz="4400" b="1" dirty="0" smtClean="0"/>
-              <a:t>):</a:t>
-            </a:r>
-          </a:p>
-          <a:p>
-            <a:pPr marL="0" indent="0">
-              <a:buNone/>
-            </a:pPr>
-            <a:r>
-              <a:rPr lang="ru-RU" sz="4400" b="1" dirty="0" smtClean="0"/>
-              <a:t>Зачем</a:t>
-            </a:r>
-            <a:r>
-              <a:rPr lang="ru-RU" sz="4400" dirty="0" smtClean="0"/>
-              <a:t>: Готовая панель управления для авторов и редакторов. Позволяет быстро добавлять, редактировать и удалять статьи без написания дополнительного кода.</a:t>
-            </a:r>
-          </a:p>
-          <a:p>
-            <a:endParaRPr lang="ru-RU" sz="4400" dirty="0"/>
-          </a:p>
-          <a:p>
-            <a:pPr marL="0" indent="0">
-              <a:buNone/>
-            </a:pPr>
-            <a:r>
-              <a:rPr lang="ru-RU" sz="4400" b="1" dirty="0" err="1"/>
-              <a:t>Django</a:t>
-            </a:r>
-            <a:r>
-              <a:rPr lang="ru-RU" sz="4400" b="1" dirty="0"/>
-              <a:t> ORM</a:t>
-            </a:r>
-            <a:r>
-              <a:rPr lang="ru-RU" sz="4400" dirty="0"/>
-              <a:t> — это «переводчик» между миром </a:t>
-            </a:r>
-            <a:r>
-              <a:rPr lang="ru-RU" sz="4400" dirty="0" err="1"/>
-              <a:t>Python</a:t>
-            </a:r>
-            <a:r>
-              <a:rPr lang="ru-RU" sz="4400" dirty="0"/>
-              <a:t> (объектами) и миром баз данных (таблицами SQL). Благодаря ему вам не нужно писать сложные SQL-запросы вручную</a:t>
-            </a:r>
-            <a:r>
-              <a:rPr lang="ru-RU" sz="4400" dirty="0" smtClean="0"/>
-              <a:t>.</a:t>
-            </a:r>
-          </a:p>
-          <a:p>
-            <a:pPr marL="0" indent="0">
-              <a:buNone/>
-            </a:pPr>
-            <a:r>
-              <a:rPr lang="ru-RU" sz="4400" b="1" dirty="0"/>
-              <a:t>Зачем</a:t>
-            </a:r>
-            <a:r>
-              <a:rPr lang="ru-RU" sz="4400" dirty="0"/>
-              <a:t>: Взаимодействие с базой данных (</a:t>
-            </a:r>
-            <a:r>
-              <a:rPr lang="ru-RU" sz="4400" dirty="0" err="1"/>
-              <a:t>SQLite</a:t>
-            </a:r>
-            <a:r>
-              <a:rPr lang="ru-RU" sz="4400" dirty="0"/>
-              <a:t>/</a:t>
-            </a:r>
-            <a:r>
-              <a:rPr lang="ru-RU" sz="4400" dirty="0" err="1"/>
-              <a:t>PostgreSQL</a:t>
-            </a:r>
-            <a:r>
-              <a:rPr lang="ru-RU" sz="4400" dirty="0"/>
-              <a:t>) на языке </a:t>
-            </a:r>
-            <a:r>
-              <a:rPr lang="ru-RU" sz="4400" dirty="0" err="1"/>
-              <a:t>Python</a:t>
-            </a:r>
-            <a:r>
-              <a:rPr lang="ru-RU" sz="4400" dirty="0"/>
-              <a:t>. Используется для сложных запросов фильтрации и сортировки статей.</a:t>
-            </a:r>
-          </a:p>
-          <a:p>
-            <a:pPr marL="338138" indent="0">
-              <a:buNone/>
-            </a:pPr>
-            <a:endParaRPr lang="ru-RU" sz="4400" dirty="0"/>
-          </a:p>
-          <a:p>
-            <a:pPr marL="625475">
-              <a:buNone/>
-            </a:pPr>
-            <a:r>
-              <a:rPr lang="ru-RU" sz="4400" b="1" dirty="0" smtClean="0"/>
-              <a:t>1</a:t>
-            </a:r>
-            <a:r>
-              <a:rPr lang="ru-RU" sz="4400" b="1" dirty="0"/>
-              <a:t>. Модели вместо таблиц</a:t>
-            </a:r>
-          </a:p>
-          <a:p>
-            <a:pPr marL="625475">
-              <a:buNone/>
-            </a:pPr>
-            <a:r>
-              <a:rPr lang="ru-RU" sz="4400" dirty="0" smtClean="0"/>
-              <a:t>     Вместо </a:t>
-            </a:r>
-            <a:r>
-              <a:rPr lang="ru-RU" sz="4400" dirty="0"/>
-              <a:t>того чтобы создавать таблицы в базе через консоль, </a:t>
-            </a:r>
-            <a:r>
-              <a:rPr lang="ru-RU" sz="4400" dirty="0" smtClean="0"/>
-              <a:t>мы описываем </a:t>
-            </a:r>
-            <a:r>
-              <a:rPr lang="ru-RU" sz="4400" dirty="0"/>
-              <a:t>их в models.py.</a:t>
-            </a:r>
-          </a:p>
-          <a:p>
-            <a:pPr marL="625475">
-              <a:buNone/>
-            </a:pPr>
-            <a:r>
-              <a:rPr lang="ru-RU" sz="4400" b="1" dirty="0" smtClean="0"/>
-              <a:t>     Пример</a:t>
-            </a:r>
-            <a:r>
-              <a:rPr lang="ru-RU" sz="4400" b="1" dirty="0"/>
-              <a:t>:</a:t>
-            </a:r>
-            <a:r>
-              <a:rPr lang="ru-RU" sz="4400" dirty="0"/>
-              <a:t> </a:t>
-            </a:r>
-            <a:r>
-              <a:rPr lang="ru-RU" sz="4400" dirty="0" smtClean="0"/>
-              <a:t>класс</a:t>
-            </a:r>
-            <a:r>
-              <a:rPr lang="ru-RU" sz="4400" dirty="0"/>
-              <a:t> </a:t>
-            </a:r>
-            <a:r>
-              <a:rPr lang="ru-RU" sz="4400" dirty="0" err="1"/>
-              <a:t>Article</a:t>
-            </a:r>
-            <a:r>
-              <a:rPr lang="ru-RU" sz="4400" dirty="0"/>
-              <a:t> — это будущая таблица в БД. Каждое поле (</a:t>
-            </a:r>
-            <a:r>
-              <a:rPr lang="ru-RU" sz="4400" dirty="0" err="1"/>
-              <a:t>title</a:t>
-            </a:r>
-            <a:r>
-              <a:rPr lang="ru-RU" sz="4400" dirty="0"/>
-              <a:t>, </a:t>
-            </a:r>
-            <a:r>
-              <a:rPr lang="ru-RU" sz="4400" dirty="0" err="1"/>
-              <a:t>content</a:t>
-            </a:r>
-            <a:r>
-              <a:rPr lang="ru-RU" sz="4400" dirty="0"/>
-              <a:t>) — это колонка в этой таблице</a:t>
-            </a:r>
-            <a:r>
-              <a:rPr lang="ru-RU" sz="4400" dirty="0" smtClean="0"/>
-              <a:t>.</a:t>
-            </a:r>
-          </a:p>
-          <a:p>
-            <a:pPr marL="625475">
-              <a:buNone/>
-            </a:pPr>
-            <a:endParaRPr lang="ru-RU" sz="4400" dirty="0"/>
-          </a:p>
-          <a:p>
-            <a:pPr marL="625475">
-              <a:buNone/>
-            </a:pPr>
-            <a:r>
-              <a:rPr lang="ru-RU" sz="4400" b="1" dirty="0" smtClean="0"/>
-              <a:t>2</a:t>
-            </a:r>
-            <a:r>
-              <a:rPr lang="ru-RU" sz="4400" b="1" dirty="0"/>
-              <a:t>. </a:t>
-            </a:r>
-            <a:r>
-              <a:rPr lang="ru-RU" sz="4400" b="1" dirty="0" err="1"/>
-              <a:t>Python</a:t>
-            </a:r>
-            <a:r>
-              <a:rPr lang="ru-RU" sz="4400" b="1" dirty="0"/>
-              <a:t>-синтаксис вместо SQL</a:t>
-            </a:r>
-          </a:p>
-          <a:p>
-            <a:pPr marL="625475">
-              <a:buNone/>
-            </a:pPr>
-            <a:r>
-              <a:rPr lang="ru-RU" sz="4400" dirty="0" smtClean="0"/>
-              <a:t>    ORM </a:t>
-            </a:r>
-            <a:r>
-              <a:rPr lang="ru-RU" sz="4400" dirty="0"/>
-              <a:t>позволяет манипулировать данными с помощью обычных методов </a:t>
-            </a:r>
-            <a:r>
-              <a:rPr lang="ru-RU" sz="4400" dirty="0" err="1"/>
-              <a:t>Python</a:t>
-            </a:r>
-            <a:r>
-              <a:rPr lang="ru-RU" sz="4400" dirty="0" smtClean="0"/>
-              <a:t>.</a:t>
-            </a:r>
-          </a:p>
-          <a:p>
-            <a:pPr marL="625475">
-              <a:buNone/>
-            </a:pPr>
-            <a:endParaRPr lang="ru-RU" sz="4400" dirty="0"/>
-          </a:p>
-          <a:p>
-            <a:pPr marL="625475">
-              <a:buNone/>
-            </a:pPr>
-            <a:r>
-              <a:rPr lang="ru-RU" sz="4400" b="1" dirty="0" smtClean="0"/>
-              <a:t>3</a:t>
-            </a:r>
-            <a:r>
-              <a:rPr lang="ru-RU" sz="4400" b="1" dirty="0"/>
-              <a:t>. Работа со связями (</a:t>
-            </a:r>
-            <a:r>
-              <a:rPr lang="ru-RU" sz="4400" b="1" dirty="0" err="1"/>
-              <a:t>Relationships</a:t>
-            </a:r>
-            <a:r>
-              <a:rPr lang="ru-RU" sz="4400" b="1" dirty="0"/>
-              <a:t>)</a:t>
-            </a:r>
-          </a:p>
-          <a:p>
-            <a:pPr marL="625475">
-              <a:buNone/>
-            </a:pPr>
-            <a:r>
-              <a:rPr lang="ru-RU" sz="4400" dirty="0" smtClean="0"/>
-              <a:t>    Это </a:t>
-            </a:r>
-            <a:r>
-              <a:rPr lang="ru-RU" sz="4400" dirty="0"/>
-              <a:t>самая мощная часть ORM. Она связывает разные таблицы между собой:</a:t>
-            </a:r>
-          </a:p>
-          <a:p>
-            <a:pPr marL="625475">
-              <a:buNone/>
-            </a:pPr>
-            <a:r>
-              <a:rPr lang="ru-RU" sz="4400" b="1" dirty="0" smtClean="0"/>
-              <a:t>    </a:t>
-            </a:r>
-            <a:r>
-              <a:rPr lang="ru-RU" sz="4400" b="1" dirty="0" err="1" smtClean="0"/>
-              <a:t>ForeignKey</a:t>
-            </a:r>
-            <a:r>
-              <a:rPr lang="ru-RU" sz="4400" dirty="0"/>
-              <a:t>: Связывает статью с автором (</a:t>
-            </a:r>
-            <a:r>
-              <a:rPr lang="ru-RU" sz="4400" dirty="0" err="1"/>
-              <a:t>User</a:t>
-            </a:r>
-            <a:r>
-              <a:rPr lang="ru-RU" sz="4400" dirty="0"/>
-              <a:t>). Вы можете легко получить автора статьи: </a:t>
-            </a:r>
-            <a:r>
-              <a:rPr lang="ru-RU" sz="4400" dirty="0" err="1"/>
-              <a:t>article.author.username</a:t>
-            </a:r>
-            <a:r>
-              <a:rPr lang="ru-RU" sz="4400" dirty="0"/>
-              <a:t>.</a:t>
-            </a:r>
-          </a:p>
-          <a:p>
-            <a:pPr marL="625475">
-              <a:buNone/>
-            </a:pPr>
-            <a:r>
-              <a:rPr lang="ru-RU" sz="4400" b="1" dirty="0" smtClean="0"/>
-              <a:t>    </a:t>
-            </a:r>
-            <a:r>
-              <a:rPr lang="ru-RU" sz="4400" b="1" dirty="0" err="1" smtClean="0"/>
-              <a:t>ManyToManyField</a:t>
-            </a:r>
-            <a:r>
-              <a:rPr lang="ru-RU" sz="4400" dirty="0"/>
-              <a:t>: Связывает статью с тегами. Одна статья может иметь много тегов, и один тег может быть у </a:t>
-            </a:r>
-            <a:r>
-              <a:rPr lang="ru-RU" sz="4400" dirty="0" smtClean="0"/>
-              <a:t>многих статей</a:t>
-            </a:r>
-            <a:r>
-              <a:rPr lang="ru-RU" sz="4400" dirty="0"/>
-              <a:t>.</a:t>
-            </a:r>
-          </a:p>
-          <a:p>
-            <a:pPr marL="625475"/>
-            <a:endParaRPr lang="ru-RU" sz="4400" dirty="0"/>
-          </a:p>
-          <a:p>
-            <a:pPr marL="625475">
-              <a:buNone/>
-            </a:pPr>
-            <a:r>
-              <a:rPr lang="ru-RU" sz="4400" b="1" dirty="0"/>
-              <a:t>4. Миграции: Контроль версий </a:t>
-            </a:r>
-            <a:r>
-              <a:rPr lang="ru-RU" sz="4400" b="1" dirty="0" smtClean="0"/>
-              <a:t>базы</a:t>
-            </a:r>
-          </a:p>
-          <a:p>
-            <a:pPr marL="625475">
-              <a:buNone/>
-            </a:pPr>
-            <a:endParaRPr lang="ru-RU" sz="4400" b="1" dirty="0"/>
-          </a:p>
-          <a:p>
-            <a:pPr marL="625475">
-              <a:buNone/>
-            </a:pPr>
-            <a:r>
-              <a:rPr lang="ru-RU" sz="4400" b="1" dirty="0" smtClean="0"/>
-              <a:t>5</a:t>
-            </a:r>
-            <a:r>
-              <a:rPr lang="ru-RU" sz="4400" b="1" dirty="0"/>
-              <a:t>. Безопасность</a:t>
-            </a:r>
-          </a:p>
-          <a:p>
-            <a:pPr marL="625475">
-              <a:buNone/>
-            </a:pPr>
-            <a:r>
-              <a:rPr lang="ru-RU" sz="4400" dirty="0" err="1"/>
-              <a:t>Django</a:t>
-            </a:r>
-            <a:r>
-              <a:rPr lang="ru-RU" sz="4400" dirty="0"/>
-              <a:t> ORM автоматически защищает ваш сайт от </a:t>
-            </a:r>
-            <a:r>
-              <a:rPr lang="ru-RU" sz="4400" b="1" dirty="0"/>
-              <a:t>SQL-инъекций</a:t>
-            </a:r>
-            <a:r>
-              <a:rPr lang="ru-RU" sz="4400" dirty="0"/>
-              <a:t> (популярный вид хакерских атак), потому что она сама правильно «экранирует» все данные, которые пользователи вводят в строку поиска.</a:t>
-            </a:r>
-          </a:p>
-          <a:p>
-            <a:pPr marL="625475"/>
-            <a:endParaRPr lang="ru-RU" sz="4400" dirty="0" smtClean="0"/>
-          </a:p>
-          <a:p>
-            <a:pPr marL="0" indent="0">
-              <a:buNone/>
-            </a:pPr>
-            <a:r>
-              <a:rPr lang="ru-RU" sz="4400" b="1" dirty="0" err="1" smtClean="0"/>
-              <a:t>Pagination</a:t>
-            </a:r>
-            <a:r>
-              <a:rPr lang="ru-RU" sz="4400" b="1" dirty="0" smtClean="0"/>
-              <a:t> (</a:t>
-            </a:r>
-            <a:r>
-              <a:rPr lang="ru-RU" sz="4400" b="1" dirty="0" err="1" smtClean="0"/>
-              <a:t>django.core.paginator</a:t>
-            </a:r>
-            <a:r>
-              <a:rPr lang="ru-RU" sz="4400" b="1" dirty="0" smtClean="0"/>
-              <a:t>):</a:t>
-            </a:r>
-          </a:p>
-          <a:p>
-            <a:pPr marL="0" indent="0">
-              <a:buNone/>
-            </a:pPr>
-            <a:r>
-              <a:rPr lang="ru-RU" sz="4400" b="1" dirty="0" smtClean="0"/>
-              <a:t>Зачем</a:t>
-            </a:r>
-            <a:r>
-              <a:rPr lang="ru-RU" sz="4400" dirty="0" smtClean="0"/>
-              <a:t>: Разделение длинного списка новостей на страницы , что бы сайт не «тормозил» при наличии сотен статей.</a:t>
-            </a:r>
-          </a:p>
-          <a:p>
-            <a:endParaRPr lang="ru-RU" dirty="0"/>
-          </a:p>
-        </p:txBody>
-      </p:sp>
-    </p:spTree>
-    <p:extLst>
-      <p:ext uri="{BB962C8B-B14F-4D97-AF65-F5344CB8AC3E}">
-        <p14:creationId xmlns:p14="http://schemas.microsoft.com/office/powerpoint/2010/main" val="2216550114"/>
-      </p:ext>
-    </p:extLst>
-  </p:cSld>
-  <p:clrMapOvr>
-    <a:masterClrMapping/>
-  </p:clrMapOvr>
-  <p:timing>
-    <p:tnLst>
-      <p:par>
-        <p:cTn id="1" dur="indefinite" restart="never" nodeType="tmRoot"/>
-      </p:par>
-    </p:tnLst>
-  </p:timing>
-</p:sld>
-</file>
-
-<file path=ppt/slides/slide8.xml><?xml version="1.0" encoding="utf-8"?>
-<p:sld xmlns:a="http://schemas.openxmlformats.org/drawingml/2006/main" xmlns:r="http://schemas.openxmlformats.org/officeDocument/2006/relationships" xmlns:p="http://schemas.openxmlformats.org/presentationml/2006/main">
-  <p:cSld>
-    <p:spTree>
-      <p:nvGrpSpPr>
-        <p:cNvPr id="1" name=""/>
-        <p:cNvGrpSpPr/>
-        <p:nvPr/>
-      </p:nvGrpSpPr>
-      <p:grpSpPr>
-        <a:xfrm>
-          <a:off x="0" y="0"/>
-          <a:ext cx="0" cy="0"/>
-          <a:chOff x="0" y="0"/>
-          <a:chExt cx="0" cy="0"/>
-        </a:xfrm>
-      </p:grpSpPr>
-      <p:sp>
-        <p:nvSpPr>
-          <p:cNvPr id="2" name="Заголовок 1"/>
-          <p:cNvSpPr>
-            <a:spLocks noGrp="1"/>
-          </p:cNvSpPr>
-          <p:nvPr>
-            <p:ph type="title"/>
-          </p:nvPr>
-        </p:nvSpPr>
         <p:spPr>
           <a:xfrm>
             <a:off x="457200" y="253536"/>
@@ -6745,334 +4197,11 @@
           </a:bodyPr>
           <a:lstStyle/>
           <a:p>
-            <a:r>
-              <a:rPr lang="ru-RU" sz="4000" b="1" dirty="0">
-                <a:effectLst/>
-              </a:rPr>
-              <a:t>Тестирование / </a:t>
-            </a:r>
-            <a:r>
-              <a:rPr lang="ru-RU" sz="4000" b="1" dirty="0" err="1">
-                <a:effectLst/>
-              </a:rPr>
-              <a:t>Валидация</a:t>
-            </a:r>
-            <a:r>
-              <a:rPr lang="ru-RU" sz="4000" b="1" dirty="0">
-                <a:effectLst/>
-              </a:rPr>
-              <a:t> </a:t>
-            </a:r>
-            <a:endParaRPr lang="ru-RU" sz="4000" dirty="0"/>
-          </a:p>
-        </p:txBody>
-      </p:sp>
-      <p:sp>
-        <p:nvSpPr>
-          <p:cNvPr id="3" name="Объект 2"/>
-          <p:cNvSpPr>
-            <a:spLocks noGrp="1"/>
-          </p:cNvSpPr>
-          <p:nvPr>
-            <p:ph idx="1"/>
-          </p:nvPr>
-        </p:nvSpPr>
-        <p:spPr/>
-        <p:txBody>
-          <a:bodyPr>
-            <a:normAutofit/>
-          </a:bodyPr>
-          <a:lstStyle/>
-          <a:p>
-            <a:r>
-              <a:rPr lang="ru-RU" sz="1050" b="1" dirty="0"/>
-              <a:t>1. Тест поиска (</a:t>
-            </a:r>
-            <a:r>
-              <a:rPr lang="ru-RU" sz="1050" b="1" dirty="0" err="1"/>
-              <a:t>test_search_form</a:t>
-            </a:r>
-            <a:r>
-              <a:rPr lang="ru-RU" sz="1050" b="1" dirty="0"/>
-              <a:t>)</a:t>
-            </a:r>
-          </a:p>
-          <a:p>
-            <a:r>
-              <a:rPr lang="ru-RU" sz="1050" b="1" dirty="0"/>
-              <a:t>Что делает:</a:t>
-            </a:r>
-            <a:r>
-              <a:rPr lang="ru-RU" sz="1050" dirty="0"/>
-              <a:t> Создает во временной базе данных две статьи (одну про АСУТП, другую про </a:t>
-            </a:r>
-            <a:r>
-              <a:rPr lang="ru-RU" sz="1050" dirty="0" err="1"/>
-              <a:t>Python</a:t>
-            </a:r>
-            <a:r>
-              <a:rPr lang="ru-RU" sz="1050" dirty="0"/>
-              <a:t>), имитирует ввод слова «АСУТП» в строку поиска и проверяет, что на странице осталась только нужная статья.</a:t>
-            </a:r>
-          </a:p>
-          <a:p>
-            <a:r>
-              <a:rPr lang="ru-RU" sz="1050" b="1" dirty="0"/>
-              <a:t>Какую пользу приносит:</a:t>
-            </a:r>
-            <a:r>
-              <a:rPr lang="ru-RU" sz="1050" dirty="0"/>
-              <a:t> Защищает от поломки систему фильтрации данных. Если вы случайно измените логику фильтрации в файле views.py (например, опечатаетесь в строке </a:t>
-            </a:r>
-            <a:r>
-              <a:rPr lang="ru-RU" sz="1050" dirty="0" err="1"/>
-              <a:t>Article.objects.filter</a:t>
-            </a:r>
-            <a:r>
-              <a:rPr lang="ru-RU" sz="1050" dirty="0"/>
-              <a:t>(</a:t>
-            </a:r>
-            <a:r>
-              <a:rPr lang="ru-RU" sz="1050" dirty="0" err="1"/>
-              <a:t>title</a:t>
-            </a:r>
-            <a:r>
-              <a:rPr lang="ru-RU" sz="1050" dirty="0"/>
-              <a:t>__</a:t>
-            </a:r>
-            <a:r>
-              <a:rPr lang="ru-RU" sz="1050" dirty="0" err="1"/>
-              <a:t>icontains</a:t>
-            </a:r>
-            <a:r>
-              <a:rPr lang="ru-RU" sz="1050" dirty="0"/>
-              <a:t>=</a:t>
-            </a:r>
-            <a:r>
-              <a:rPr lang="ru-RU" sz="1050" dirty="0" err="1"/>
-              <a:t>query</a:t>
-            </a:r>
-            <a:r>
-              <a:rPr lang="ru-RU" sz="1050" dirty="0"/>
-              <a:t>)), тест тут же упадет. Вы сразу узнаете, что поиск сломан, еще до того, как выложите сайт на сервер.</a:t>
-            </a:r>
-          </a:p>
-          <a:p>
-            <a:r>
-              <a:rPr lang="ru-RU" sz="1050" b="1" dirty="0"/>
-              <a:t>2. Тест сортировки (</a:t>
-            </a:r>
-            <a:r>
-              <a:rPr lang="ru-RU" sz="1050" b="1" dirty="0" err="1"/>
-              <a:t>test_sorting_by_date</a:t>
-            </a:r>
-            <a:r>
-              <a:rPr lang="ru-RU" sz="1050" b="1" dirty="0"/>
-              <a:t>)</a:t>
-            </a:r>
-          </a:p>
-          <a:p>
-            <a:r>
-              <a:rPr lang="ru-RU" sz="1050" b="1" dirty="0"/>
-              <a:t>Что делает:</a:t>
-            </a:r>
-            <a:r>
-              <a:rPr lang="ru-RU" sz="1050" dirty="0"/>
-              <a:t> Создает старую статью (5 дней назад) и свежую статью (сегодня), запрашивает страницу с параметром ?</a:t>
-            </a:r>
-            <a:r>
-              <a:rPr lang="ru-RU" sz="1050" dirty="0" err="1"/>
-              <a:t>sort</a:t>
-            </a:r>
-            <a:r>
-              <a:rPr lang="ru-RU" sz="1050" dirty="0"/>
-              <a:t>=</a:t>
-            </a:r>
-            <a:r>
-              <a:rPr lang="ru-RU" sz="1050" dirty="0" err="1"/>
-              <a:t>date</a:t>
-            </a:r>
-            <a:r>
-              <a:rPr lang="ru-RU" sz="1050" dirty="0"/>
-              <a:t> и проверяет по HTML-коду, что свежая статья отобразилась выше старой.</a:t>
-            </a:r>
-          </a:p>
-          <a:p>
-            <a:r>
-              <a:rPr lang="ru-RU" sz="1050" b="1" dirty="0"/>
-              <a:t>Какую пользу приносит:</a:t>
-            </a:r>
-            <a:r>
-              <a:rPr lang="ru-RU" sz="1050" dirty="0"/>
-              <a:t> Гарантирует правильный порядок подачи информации. Пользователи ожидают видеть актуальные новости первыми. Если из-за изменений в коде или базе данных сортировка перевернется или сломается, тест покажет это, сохранив удобство интерфейса для ваших читателей.</a:t>
-            </a:r>
-          </a:p>
-          <a:p>
-            <a:r>
-              <a:rPr lang="ru-RU" sz="1050" b="1" dirty="0"/>
-              <a:t>3. Тест пустого списка (</a:t>
-            </a:r>
-            <a:r>
-              <a:rPr lang="ru-RU" sz="1050" b="1" dirty="0" err="1"/>
-              <a:t>test_page_empty_list</a:t>
-            </a:r>
-            <a:r>
-              <a:rPr lang="ru-RU" sz="1050" b="1" dirty="0"/>
-              <a:t>)</a:t>
-            </a:r>
-          </a:p>
-          <a:p>
-            <a:r>
-              <a:rPr lang="ru-RU" sz="1050" b="1" dirty="0"/>
-              <a:t>Что делает:</a:t>
-            </a:r>
-            <a:r>
-              <a:rPr lang="ru-RU" sz="1050" dirty="0"/>
-              <a:t> Запрашивает главную страницу, когда в базе данных нет вообще ни одной статьи, и проверяет, что страница успешно открылась (код 200), а блоки карточек статей (</a:t>
-            </a:r>
-            <a:r>
-              <a:rPr lang="ru-RU" sz="1050" dirty="0" err="1"/>
-              <a:t>article-card</a:t>
-            </a:r>
-            <a:r>
-              <a:rPr lang="ru-RU" sz="1050" dirty="0"/>
-              <a:t>) отсутствуют.</a:t>
-            </a:r>
-          </a:p>
-          <a:p>
-            <a:r>
-              <a:rPr lang="ru-RU" sz="1050" b="1" dirty="0"/>
-              <a:t>Какую пользу приносит:</a:t>
-            </a:r>
-            <a:r>
-              <a:rPr lang="ru-RU" sz="1050" dirty="0"/>
-              <a:t> Страхует сайт от «падения» при запуске. Когда проект только разворачивается на новом сервере или когда все статьи удалены, сайт не должен выдавать «Ошибку 500» из-за того, что цикл {% </a:t>
-            </a:r>
-            <a:r>
-              <a:rPr lang="ru-RU" sz="1050" dirty="0" err="1"/>
-              <a:t>for</a:t>
-            </a:r>
-            <a:r>
-              <a:rPr lang="ru-RU" sz="1050" dirty="0"/>
-              <a:t> %} пытается обработать пустоту. Тест гарантирует, что пустая страница останется аккуратной, сохранит боковую панель, шапку и подвал.</a:t>
-            </a:r>
-          </a:p>
-          <a:p>
-            <a:r>
-              <a:rPr lang="ru-RU" sz="1050" b="1" dirty="0"/>
-              <a:t>4. Тест отображения закладок (</a:t>
-            </a:r>
-            <a:r>
-              <a:rPr lang="ru-RU" sz="1050" b="1" dirty="0" err="1"/>
-              <a:t>test_favorites_icons</a:t>
-            </a:r>
-            <a:r>
-              <a:rPr lang="ru-RU" sz="1050" b="1" dirty="0"/>
-              <a:t>...)</a:t>
-            </a:r>
-          </a:p>
-          <a:p>
-            <a:r>
-              <a:rPr lang="ru-RU" sz="1050" b="1" dirty="0"/>
-              <a:t>Что делает:</a:t>
-            </a:r>
-            <a:r>
-              <a:rPr lang="ru-RU" sz="1050" dirty="0"/>
-              <a:t> Проверяет страницу дважды. Сначала как анонимный гость (убеждается, что иконки закладок скрыты). Затем имитирует авторизацию пользователя и проверяет, что в HTML-коде карточки появилась иконка пустой закладки (</a:t>
-            </a:r>
-            <a:r>
-              <a:rPr lang="ru-RU" sz="1050" dirty="0" err="1"/>
-              <a:t>bi-bookmark</a:t>
-            </a:r>
-            <a:r>
-              <a:rPr lang="ru-RU" sz="1050" dirty="0"/>
-              <a:t>).</a:t>
-            </a:r>
-          </a:p>
-          <a:p>
-            <a:r>
-              <a:rPr lang="ru-RU" sz="1050" b="1" dirty="0"/>
-              <a:t>Какую пользу приносит:</a:t>
-            </a:r>
-            <a:r>
-              <a:rPr lang="ru-RU" sz="1050" dirty="0"/>
-              <a:t> Защищает приватность и безопасность интерфейса. Если анонимный пользователь увидит кнопки избранного, нажатие на них вызовет ошибку, так как у анонима нет личного кабинета. Тест строго следит за тем, чтобы интерфейс подстраивался под статус пользователя и не показывал гостям лишние или нерабочие элементы управления.</a:t>
-            </a:r>
-          </a:p>
-          <a:p>
-            <a:r>
-              <a:rPr lang="ru-RU" sz="1050" dirty="0" smtClean="0"/>
-              <a:t>.</a:t>
-            </a:r>
-            <a:endParaRPr lang="ru-RU" sz="1050" dirty="0"/>
-          </a:p>
-        </p:txBody>
-      </p:sp>
-    </p:spTree>
-    <p:extLst>
-      <p:ext uri="{BB962C8B-B14F-4D97-AF65-F5344CB8AC3E}">
-        <p14:creationId xmlns:p14="http://schemas.microsoft.com/office/powerpoint/2010/main" val="3823710361"/>
-      </p:ext>
-    </p:extLst>
-  </p:cSld>
-  <p:clrMapOvr>
-    <a:masterClrMapping/>
-  </p:clrMapOvr>
-  <p:timing>
-    <p:tnLst>
-      <p:par>
-        <p:cTn id="1" dur="indefinite" restart="never" nodeType="tmRoot"/>
-      </p:par>
-    </p:tnLst>
-  </p:timing>
-</p:sld>
-</file>
-
-<file path=ppt/slides/slide9.xml><?xml version="1.0" encoding="utf-8"?>
-<p:sld xmlns:a="http://schemas.openxmlformats.org/drawingml/2006/main" xmlns:r="http://schemas.openxmlformats.org/officeDocument/2006/relationships" xmlns:p="http://schemas.openxmlformats.org/presentationml/2006/main">
-  <p:cSld>
-    <p:spTree>
-      <p:nvGrpSpPr>
-        <p:cNvPr id="1" name=""/>
-        <p:cNvGrpSpPr/>
-        <p:nvPr/>
-      </p:nvGrpSpPr>
-      <p:grpSpPr>
-        <a:xfrm>
-          <a:off x="0" y="0"/>
-          <a:ext cx="0" cy="0"/>
-          <a:chOff x="0" y="0"/>
-          <a:chExt cx="0" cy="0"/>
-        </a:xfrm>
-      </p:grpSpPr>
-      <p:sp>
-        <p:nvSpPr>
-          <p:cNvPr id="2" name="Заголовок 1"/>
-          <p:cNvSpPr>
-            <a:spLocks noGrp="1"/>
-          </p:cNvSpPr>
-          <p:nvPr>
-            <p:ph type="title"/>
-          </p:nvPr>
-        </p:nvSpPr>
-        <p:spPr>
-          <a:xfrm>
-            <a:off x="457200" y="253536"/>
-            <a:ext cx="8229600" cy="871208"/>
-          </a:xfrm>
-        </p:spPr>
-        <p:txBody>
-          <a:bodyPr>
-            <a:normAutofit/>
-          </a:bodyPr>
-          <a:lstStyle/>
-          <a:p>
             <a:pPr algn="ctr"/>
             <a:r>
               <a:rPr lang="ru-RU" sz="2400" b="1" dirty="0"/>
               <a:t>Какая польза от этих тестов в будущем?</a:t>
             </a:r>
-            <a:endParaRPr lang="ru-RU" sz="2400" b="1" dirty="0"/>
           </a:p>
         </p:txBody>
       </p:sp>
@@ -7337,6 +4466,3290 @@
       </p:par>
     </p:tnLst>
   </p:timing>
+</p:sld>
+</file>
+
+<file path=ppt/slides/slide12.xml><?xml version="1.0" encoding="utf-8"?>
+<p:sld xmlns:a="http://schemas.openxmlformats.org/drawingml/2006/main" xmlns:r="http://schemas.openxmlformats.org/officeDocument/2006/relationships" xmlns:p="http://schemas.openxmlformats.org/presentationml/2006/main">
+  <p:cSld>
+    <p:spTree>
+      <p:nvGrpSpPr>
+        <p:cNvPr id="1" name=""/>
+        <p:cNvGrpSpPr/>
+        <p:nvPr/>
+      </p:nvGrpSpPr>
+      <p:grpSpPr>
+        <a:xfrm>
+          <a:off x="0" y="0"/>
+          <a:ext cx="0" cy="0"/>
+          <a:chOff x="0" y="0"/>
+          <a:chExt cx="0" cy="0"/>
+        </a:xfrm>
+      </p:grpSpPr>
+      <p:sp>
+        <p:nvSpPr>
+          <p:cNvPr id="2" name="Заголовок 1"/>
+          <p:cNvSpPr>
+            <a:spLocks noGrp="1"/>
+          </p:cNvSpPr>
+          <p:nvPr>
+            <p:ph type="title"/>
+          </p:nvPr>
+        </p:nvSpPr>
+        <p:spPr>
+          <a:xfrm>
+            <a:off x="539552" y="260648"/>
+            <a:ext cx="8229600" cy="703840"/>
+          </a:xfrm>
+        </p:spPr>
+        <p:txBody>
+          <a:bodyPr>
+            <a:normAutofit fontScale="90000"/>
+          </a:bodyPr>
+          <a:lstStyle/>
+          <a:p>
+            <a:r>
+              <a:rPr lang="ru-RU" b="1" u="sng" dirty="0"/>
+              <a:t>Инструкция по запуску</a:t>
+            </a:r>
+            <a:endParaRPr lang="ru-RU" dirty="0"/>
+          </a:p>
+        </p:txBody>
+      </p:sp>
+      <p:sp>
+        <p:nvSpPr>
+          <p:cNvPr id="3" name="Объект 2"/>
+          <p:cNvSpPr>
+            <a:spLocks noGrp="1"/>
+          </p:cNvSpPr>
+          <p:nvPr>
+            <p:ph idx="1"/>
+          </p:nvPr>
+        </p:nvSpPr>
+        <p:spPr>
+          <a:xfrm>
+            <a:off x="467544" y="1052736"/>
+            <a:ext cx="8229600" cy="5040560"/>
+          </a:xfrm>
+        </p:spPr>
+        <p:txBody>
+          <a:bodyPr>
+            <a:noAutofit/>
+          </a:bodyPr>
+          <a:lstStyle/>
+          <a:p>
+            <a:pPr marL="0" indent="0">
+              <a:buNone/>
+            </a:pPr>
+            <a:endParaRPr lang="ru-RU" sz="900" u="sng" dirty="0"/>
+          </a:p>
+          <a:p>
+            <a:pPr marL="0" indent="0">
+              <a:buNone/>
+            </a:pPr>
+            <a:r>
+              <a:rPr lang="ru-RU" sz="1000" dirty="0"/>
+              <a:t>Устанавливаем библиотеку </a:t>
+            </a:r>
+            <a:r>
+              <a:rPr lang="ru-RU" sz="1000" b="1" dirty="0" err="1"/>
+              <a:t>pip</a:t>
+            </a:r>
+            <a:r>
+              <a:rPr lang="ru-RU" sz="1000" b="1" dirty="0"/>
+              <a:t> </a:t>
+            </a:r>
+            <a:r>
+              <a:rPr lang="ru-RU" sz="1000" b="1" dirty="0" err="1"/>
+              <a:t>install</a:t>
+            </a:r>
+            <a:r>
+              <a:rPr lang="ru-RU" sz="1000" b="1" dirty="0"/>
+              <a:t> </a:t>
+            </a:r>
+            <a:r>
+              <a:rPr lang="ru-RU" sz="1000" b="1" dirty="0" err="1"/>
+              <a:t>Pillow</a:t>
+            </a:r>
+            <a:endParaRPr lang="ru-RU" sz="1000" b="1" dirty="0"/>
+          </a:p>
+          <a:p>
+            <a:endParaRPr lang="ru-RU" sz="1000" dirty="0"/>
+          </a:p>
+          <a:p>
+            <a:pPr marL="0" indent="0">
+              <a:buNone/>
+            </a:pPr>
+            <a:r>
+              <a:rPr lang="ru-RU" sz="1000" u="sng" dirty="0" err="1" smtClean="0"/>
+              <a:t>Pillow</a:t>
+            </a:r>
+            <a:r>
+              <a:rPr lang="ru-RU" sz="1000" u="sng" dirty="0" smtClean="0"/>
+              <a:t> </a:t>
+            </a:r>
+            <a:r>
+              <a:rPr lang="ru-RU" sz="1000" u="sng" dirty="0"/>
+              <a:t>играет  </a:t>
+            </a:r>
+            <a:r>
+              <a:rPr lang="ru-RU" sz="1000" u="sng" dirty="0" smtClean="0"/>
+              <a:t>роль в  </a:t>
+            </a:r>
+            <a:r>
+              <a:rPr lang="ru-RU" sz="1000" u="sng" dirty="0"/>
+              <a:t>коде:</a:t>
+            </a:r>
+          </a:p>
+          <a:p>
+            <a:pPr marL="0" indent="0">
+              <a:buNone/>
+            </a:pPr>
+            <a:r>
+              <a:rPr lang="ru-RU" sz="1000" dirty="0"/>
+              <a:t>1. </a:t>
+            </a:r>
+            <a:r>
+              <a:rPr lang="ru-RU" sz="1000" dirty="0" err="1"/>
+              <a:t>Валидация</a:t>
+            </a:r>
+            <a:r>
+              <a:rPr lang="ru-RU" sz="1000" dirty="0"/>
+              <a:t> данных (Проверка)</a:t>
+            </a:r>
+          </a:p>
+          <a:p>
+            <a:pPr marL="0" indent="0">
+              <a:buNone/>
+            </a:pPr>
+            <a:r>
+              <a:rPr lang="ru-RU" sz="1000" dirty="0" smtClean="0"/>
+              <a:t>Библиотека </a:t>
+            </a:r>
+            <a:r>
+              <a:rPr lang="ru-RU" sz="1000" dirty="0"/>
+              <a:t>проверяет:</a:t>
+            </a:r>
+          </a:p>
+          <a:p>
+            <a:pPr marL="0" indent="0">
+              <a:buNone/>
+            </a:pPr>
+            <a:r>
+              <a:rPr lang="ru-RU" sz="1000" dirty="0"/>
+              <a:t>Является ли загруженный файл настоящим изображением, а не текстовым файлом с расширением .</a:t>
+            </a:r>
+            <a:r>
+              <a:rPr lang="ru-RU" sz="1000" dirty="0" err="1"/>
+              <a:t>jpg</a:t>
+            </a:r>
+            <a:r>
+              <a:rPr lang="ru-RU" sz="1000" dirty="0"/>
+              <a:t>.</a:t>
+            </a:r>
+          </a:p>
+          <a:p>
+            <a:pPr marL="0" indent="0">
+              <a:buNone/>
+            </a:pPr>
+            <a:r>
+              <a:rPr lang="ru-RU" sz="1000" dirty="0"/>
+              <a:t>Не поврежден ли файл.</a:t>
+            </a:r>
+          </a:p>
+          <a:p>
+            <a:pPr marL="0" indent="0">
+              <a:buNone/>
+            </a:pPr>
+            <a:r>
+              <a:rPr lang="ru-RU" sz="1000" dirty="0"/>
+              <a:t>Каковы его размеры (ширина и высота).</a:t>
+            </a:r>
+          </a:p>
+          <a:p>
+            <a:pPr marL="0" indent="0">
+              <a:buNone/>
+            </a:pPr>
+            <a:r>
+              <a:rPr lang="ru-RU" sz="1000" dirty="0"/>
+              <a:t>2. Чтение метаданных</a:t>
+            </a:r>
+          </a:p>
+          <a:p>
+            <a:pPr marL="0" indent="0">
+              <a:buNone/>
+            </a:pPr>
+            <a:r>
+              <a:rPr lang="ru-RU" sz="1000" dirty="0" err="1"/>
+              <a:t>Pillow</a:t>
+            </a:r>
+            <a:r>
+              <a:rPr lang="ru-RU" sz="1000" dirty="0"/>
+              <a:t> позволяет </a:t>
+            </a:r>
+            <a:r>
+              <a:rPr lang="ru-RU" sz="1000" dirty="0" err="1"/>
+              <a:t>Django</a:t>
+            </a:r>
+            <a:r>
+              <a:rPr lang="ru-RU" sz="1000" dirty="0"/>
+              <a:t> извлекать информацию о картинке. Например, если вы захотите выводить на сайте разрешение фото или дату съемки из EXIF-данных, </a:t>
+            </a:r>
+            <a:r>
+              <a:rPr lang="ru-RU" sz="1000" dirty="0" err="1"/>
+              <a:t>Pillow</a:t>
+            </a:r>
+            <a:r>
+              <a:rPr lang="ru-RU" sz="1000" dirty="0"/>
+              <a:t> сделает это за вас</a:t>
+            </a:r>
+            <a:r>
+              <a:rPr lang="ru-RU" sz="1000" dirty="0" smtClean="0"/>
+              <a:t>.</a:t>
+            </a:r>
+          </a:p>
+          <a:p>
+            <a:pPr marL="0" indent="0">
+              <a:buNone/>
+            </a:pPr>
+            <a:r>
+              <a:rPr lang="ru-RU" sz="1000" b="1" dirty="0"/>
+              <a:t>Запуск:</a:t>
+            </a:r>
+            <a:endParaRPr lang="ru-RU" sz="1000" dirty="0"/>
+          </a:p>
+          <a:p>
+            <a:pPr marL="0" indent="0">
+              <a:buNone/>
+            </a:pPr>
+            <a:r>
+              <a:rPr lang="ru-RU" sz="1000" b="1" dirty="0" err="1"/>
+              <a:t>python</a:t>
+            </a:r>
+            <a:r>
+              <a:rPr lang="ru-RU" sz="1000" b="1" dirty="0"/>
+              <a:t> manage.py </a:t>
+            </a:r>
+            <a:r>
+              <a:rPr lang="ru-RU" sz="1000" b="1" dirty="0" err="1"/>
+              <a:t>makemigrations</a:t>
+            </a:r>
+            <a:endParaRPr lang="ru-RU" sz="1000" b="1" dirty="0"/>
+          </a:p>
+          <a:p>
+            <a:pPr marL="0" indent="0">
+              <a:buNone/>
+            </a:pPr>
+            <a:r>
+              <a:rPr lang="ru-RU" sz="1000" b="1" dirty="0" err="1"/>
+              <a:t>python</a:t>
+            </a:r>
+            <a:r>
+              <a:rPr lang="ru-RU" sz="1000" b="1" dirty="0"/>
+              <a:t> manage.py </a:t>
+            </a:r>
+            <a:r>
+              <a:rPr lang="ru-RU" sz="1000" b="1" dirty="0" err="1"/>
+              <a:t>migrate</a:t>
+            </a:r>
+            <a:endParaRPr lang="ru-RU" sz="1000" b="1" dirty="0"/>
+          </a:p>
+          <a:p>
+            <a:pPr marL="0" indent="0">
+              <a:buNone/>
+            </a:pPr>
+            <a:endParaRPr lang="ru-RU" sz="1000" dirty="0"/>
+          </a:p>
+          <a:p>
+            <a:endParaRPr lang="ru-RU" sz="1000" dirty="0"/>
+          </a:p>
+          <a:p>
+            <a:pPr marL="0" indent="0">
+              <a:buNone/>
+            </a:pPr>
+            <a:r>
+              <a:rPr lang="ru-RU" sz="1000" u="sng" dirty="0" smtClean="0"/>
+              <a:t>Роль </a:t>
+            </a:r>
+            <a:r>
+              <a:rPr lang="ru-RU" sz="1000" u="sng" dirty="0" err="1"/>
+              <a:t>makemigrations</a:t>
+            </a:r>
+            <a:r>
+              <a:rPr lang="ru-RU" sz="1000" u="sng" dirty="0"/>
+              <a:t> и  </a:t>
+            </a:r>
+            <a:r>
+              <a:rPr lang="ru-RU" sz="1000" u="sng" dirty="0" err="1"/>
+              <a:t>migrate</a:t>
+            </a:r>
+            <a:r>
+              <a:rPr lang="ru-RU" sz="1000" u="sng" dirty="0"/>
+              <a:t> </a:t>
+            </a:r>
+            <a:r>
+              <a:rPr lang="ru-RU" sz="1000" dirty="0"/>
+              <a:t>— синхронизировать то, что мы написали в коде (models.py), с тем, что реально хранится в файле базы данных (db.sqlite3).</a:t>
+            </a:r>
+          </a:p>
+          <a:p>
+            <a:pPr marL="0" indent="0">
+              <a:buNone/>
+            </a:pPr>
+            <a:r>
+              <a:rPr lang="ru-RU" sz="1000" dirty="0"/>
+              <a:t>1. </a:t>
+            </a:r>
+            <a:r>
+              <a:rPr lang="ru-RU" sz="1000" dirty="0" err="1"/>
+              <a:t>python</a:t>
+            </a:r>
+            <a:r>
+              <a:rPr lang="ru-RU" sz="1000" dirty="0"/>
+              <a:t> manage.py </a:t>
+            </a:r>
+            <a:r>
+              <a:rPr lang="ru-RU" sz="1000" dirty="0" err="1"/>
+              <a:t>makemigrations</a:t>
+            </a:r>
+            <a:endParaRPr lang="ru-RU" sz="1000" dirty="0"/>
+          </a:p>
+          <a:p>
+            <a:pPr marL="0" indent="0">
+              <a:buNone/>
+            </a:pPr>
+            <a:r>
+              <a:rPr lang="ru-RU" sz="1000" dirty="0"/>
+              <a:t>Роль: Создание «инструкции» по обновлению.</a:t>
+            </a:r>
+          </a:p>
+          <a:p>
+            <a:pPr marL="0" indent="0">
+              <a:buNone/>
+            </a:pPr>
+            <a:r>
+              <a:rPr lang="ru-RU" sz="1000" dirty="0"/>
+              <a:t>Что делает: </a:t>
+            </a:r>
+            <a:r>
+              <a:rPr lang="ru-RU" sz="1000" dirty="0" err="1"/>
+              <a:t>Django</a:t>
+            </a:r>
+            <a:r>
+              <a:rPr lang="ru-RU" sz="1000" dirty="0"/>
+              <a:t> сканирует ваши модели и ищет изменения (например, вы добавили поле </a:t>
+            </a:r>
+            <a:r>
+              <a:rPr lang="ru-RU" sz="1000" dirty="0" err="1"/>
+              <a:t>image</a:t>
+            </a:r>
+            <a:r>
+              <a:rPr lang="ru-RU" sz="1000" dirty="0"/>
+              <a:t> или изменили </a:t>
+            </a:r>
+            <a:r>
+              <a:rPr lang="ru-RU" sz="1000" dirty="0" err="1"/>
+              <a:t>max_length</a:t>
+            </a:r>
+            <a:r>
+              <a:rPr lang="ru-RU" sz="1000" dirty="0"/>
+              <a:t>).</a:t>
+            </a:r>
+          </a:p>
+          <a:p>
+            <a:pPr marL="0" indent="0">
+              <a:buNone/>
+            </a:pPr>
+            <a:r>
+              <a:rPr lang="ru-RU" sz="1000" dirty="0"/>
+              <a:t>Результат: В папке </a:t>
+            </a:r>
+            <a:r>
+              <a:rPr lang="ru-RU" sz="1000" dirty="0" err="1"/>
+              <a:t>migrations</a:t>
+            </a:r>
+            <a:r>
+              <a:rPr lang="ru-RU" sz="1000" dirty="0"/>
+              <a:t> внутри вашего приложения появляется новый файл (например, 0002_article_image.py).</a:t>
+            </a:r>
+          </a:p>
+          <a:p>
+            <a:pPr marL="0" indent="0">
+              <a:buNone/>
+            </a:pPr>
+            <a:r>
+              <a:rPr lang="ru-RU" sz="1000" dirty="0"/>
+              <a:t>Простыми словами: Это как чертеж или список покупок, который говорит базе: «Скоро нам нужно будет добавить новый столбец». На этом этапе в самой базе еще ничего не меняется.</a:t>
+            </a:r>
+          </a:p>
+          <a:p>
+            <a:pPr marL="0" indent="0">
+              <a:buNone/>
+            </a:pPr>
+            <a:r>
+              <a:rPr lang="ru-RU" sz="1000" dirty="0"/>
+              <a:t>2. </a:t>
+            </a:r>
+            <a:r>
+              <a:rPr lang="ru-RU" sz="1000" dirty="0" err="1"/>
+              <a:t>python</a:t>
+            </a:r>
+            <a:r>
+              <a:rPr lang="ru-RU" sz="1000" dirty="0"/>
+              <a:t> manage.py </a:t>
+            </a:r>
+            <a:r>
+              <a:rPr lang="ru-RU" sz="1000" dirty="0" err="1"/>
+              <a:t>migrate</a:t>
+            </a:r>
+            <a:endParaRPr lang="ru-RU" sz="1000" dirty="0"/>
+          </a:p>
+          <a:p>
+            <a:pPr marL="0" indent="0">
+              <a:buNone/>
+            </a:pPr>
+            <a:r>
+              <a:rPr lang="ru-RU" sz="1000" dirty="0"/>
+              <a:t>Роль: Выполнение «инструкции».</a:t>
+            </a:r>
+          </a:p>
+          <a:p>
+            <a:pPr marL="0" indent="0">
+              <a:buNone/>
+            </a:pPr>
+            <a:r>
+              <a:rPr lang="ru-RU" sz="1000" dirty="0"/>
+              <a:t>Что делает: </a:t>
+            </a:r>
+            <a:r>
+              <a:rPr lang="ru-RU" sz="1000" dirty="0" err="1"/>
+              <a:t>Django</a:t>
+            </a:r>
+            <a:r>
+              <a:rPr lang="ru-RU" sz="1000" dirty="0"/>
+              <a:t> берет файлы из папки </a:t>
+            </a:r>
+            <a:r>
+              <a:rPr lang="ru-RU" sz="1000" dirty="0" err="1"/>
+              <a:t>migrations</a:t>
+            </a:r>
+            <a:r>
+              <a:rPr lang="ru-RU" sz="1000" dirty="0"/>
+              <a:t>, которые еще не были применены, и превращает их в реальные SQL-запросы к базе данных.</a:t>
+            </a:r>
+          </a:p>
+          <a:p>
+            <a:pPr marL="0" indent="0">
+              <a:buNone/>
+            </a:pPr>
+            <a:r>
+              <a:rPr lang="ru-RU" sz="1000" dirty="0"/>
+              <a:t>Результат: В таблице </a:t>
+            </a:r>
+            <a:r>
+              <a:rPr lang="ru-RU" sz="1000" dirty="0" err="1"/>
+              <a:t>articles_article</a:t>
+            </a:r>
+            <a:r>
+              <a:rPr lang="ru-RU" sz="1000" dirty="0"/>
+              <a:t> физически появляется колонка </a:t>
+            </a:r>
+            <a:r>
+              <a:rPr lang="ru-RU" sz="1000" dirty="0" err="1"/>
+              <a:t>image</a:t>
+            </a:r>
+            <a:r>
+              <a:rPr lang="ru-RU" sz="1000" dirty="0"/>
+              <a:t>. </a:t>
+            </a:r>
+            <a:endParaRPr lang="ru-RU" sz="1000" dirty="0" smtClean="0"/>
+          </a:p>
+          <a:p>
+            <a:pPr marL="0" indent="0">
+              <a:buNone/>
+            </a:pPr>
+            <a:r>
+              <a:rPr lang="ru-RU" sz="1000" dirty="0" smtClean="0"/>
+              <a:t>Простыми </a:t>
+            </a:r>
+            <a:r>
+              <a:rPr lang="ru-RU" sz="1000" dirty="0"/>
+              <a:t>словами: Это строитель, который берет чертеж из первого шага и реально перестраивает стену (базу данных</a:t>
+            </a:r>
+            <a:r>
+              <a:rPr lang="ru-RU" sz="1000" dirty="0" smtClean="0"/>
+              <a:t>).</a:t>
+            </a:r>
+          </a:p>
+          <a:p>
+            <a:pPr marL="0" indent="0">
+              <a:buNone/>
+            </a:pPr>
+            <a:r>
+              <a:rPr lang="ru-RU" sz="1000" b="1" dirty="0" smtClean="0"/>
+              <a:t>Запуск: </a:t>
+            </a:r>
+            <a:r>
+              <a:rPr lang="ru-RU" sz="1000" b="1" dirty="0" err="1" smtClean="0"/>
+              <a:t>python</a:t>
+            </a:r>
+            <a:r>
+              <a:rPr lang="ru-RU" sz="1000" b="1" dirty="0" smtClean="0"/>
+              <a:t> manage.py </a:t>
+            </a:r>
+            <a:r>
+              <a:rPr lang="ru-RU" sz="1000" b="1" dirty="0" err="1" smtClean="0"/>
+              <a:t>runserver</a:t>
+            </a:r>
+            <a:endParaRPr lang="ru-RU" sz="1000" b="1" dirty="0" smtClean="0"/>
+          </a:p>
+          <a:p>
+            <a:pPr marL="0" indent="0">
+              <a:buNone/>
+            </a:pPr>
+            <a:r>
+              <a:rPr lang="en-US" sz="1000" dirty="0"/>
+              <a:t>http://localhost:8000/</a:t>
+            </a:r>
+            <a:endParaRPr lang="ru-RU" sz="1000" b="1" dirty="0" smtClean="0"/>
+          </a:p>
+          <a:p>
+            <a:endParaRPr lang="ru-RU" sz="1000" dirty="0"/>
+          </a:p>
+          <a:p>
+            <a:pPr marL="0" indent="0">
+              <a:buNone/>
+            </a:pPr>
+            <a:r>
+              <a:rPr lang="ru-RU" sz="1000" dirty="0"/>
+              <a:t>Регистрироваться можно прямо с сайта "</a:t>
+            </a:r>
+            <a:r>
+              <a:rPr lang="ru-RU" sz="1000" dirty="0" err="1"/>
+              <a:t>article</a:t>
+            </a:r>
+            <a:r>
+              <a:rPr lang="ru-RU" sz="1000" dirty="0"/>
+              <a:t>", не через  /</a:t>
+            </a:r>
+            <a:r>
+              <a:rPr lang="ru-RU" sz="1000" dirty="0" err="1" smtClean="0"/>
+              <a:t>admin</a:t>
+            </a:r>
+            <a:r>
+              <a:rPr lang="en-US" sz="1000" dirty="0"/>
+              <a:t> </a:t>
+            </a:r>
+            <a:r>
+              <a:rPr lang="ru-RU" sz="1000" dirty="0" smtClean="0"/>
+              <a:t>или </a:t>
+            </a:r>
+            <a:r>
+              <a:rPr lang="en-US" sz="1000" dirty="0"/>
+              <a:t>http://localhost:8000/register/</a:t>
+            </a:r>
+            <a:endParaRPr lang="ru-RU" sz="1000" dirty="0"/>
+          </a:p>
+          <a:p>
+            <a:pPr marL="0" indent="0">
+              <a:buNone/>
+            </a:pPr>
+            <a:r>
+              <a:rPr lang="ru-RU" sz="1000" dirty="0"/>
+              <a:t>Статьи добавляются через /</a:t>
+            </a:r>
+            <a:r>
+              <a:rPr lang="ru-RU" sz="1000" dirty="0" err="1"/>
+              <a:t>admin</a:t>
+            </a:r>
+            <a:r>
+              <a:rPr lang="ru-RU" sz="1000" dirty="0" smtClean="0"/>
+              <a:t>.</a:t>
+            </a:r>
+          </a:p>
+          <a:p>
+            <a:r>
+              <a:rPr lang="ru-RU" sz="1000" dirty="0"/>
+              <a:t>Запуск тестов</a:t>
+            </a:r>
+            <a:r>
+              <a:rPr lang="en-US" sz="1000" dirty="0"/>
+              <a:t>: python -m </a:t>
+            </a:r>
+            <a:r>
+              <a:rPr lang="en-US" sz="1000" dirty="0" err="1"/>
+              <a:t>pytest</a:t>
+            </a:r>
+            <a:r>
+              <a:rPr lang="en-US" sz="1000" dirty="0"/>
+              <a:t> --ds=</a:t>
+            </a:r>
+            <a:r>
+              <a:rPr lang="en-US" sz="1000" dirty="0" err="1"/>
+              <a:t>myproject.settings</a:t>
+            </a:r>
+            <a:r>
+              <a:rPr lang="en-US" sz="1000" dirty="0"/>
+              <a:t> -v</a:t>
+            </a:r>
+            <a:endParaRPr lang="ru-RU" sz="1000" dirty="0"/>
+          </a:p>
+          <a:p>
+            <a:endParaRPr lang="ru-RU" sz="1000" dirty="0"/>
+          </a:p>
+          <a:p>
+            <a:pPr marL="0" indent="0">
+              <a:buNone/>
+            </a:pPr>
+            <a:endParaRPr lang="ru-RU" sz="1000" dirty="0" smtClean="0"/>
+          </a:p>
+          <a:p>
+            <a:pPr marL="0" indent="0">
+              <a:buNone/>
+            </a:pPr>
+            <a:endParaRPr lang="ru-RU" sz="1000" dirty="0"/>
+          </a:p>
+        </p:txBody>
+      </p:sp>
+    </p:spTree>
+    <p:extLst>
+      <p:ext uri="{BB962C8B-B14F-4D97-AF65-F5344CB8AC3E}">
+        <p14:creationId xmlns:p14="http://schemas.microsoft.com/office/powerpoint/2010/main" val="1355040326"/>
+      </p:ext>
+    </p:extLst>
+  </p:cSld>
+  <p:clrMapOvr>
+    <a:masterClrMapping/>
+  </p:clrMapOvr>
+  <p:timing>
+    <p:tnLst>
+      <p:par>
+        <p:cTn id="1" dur="indefinite" restart="never" nodeType="tmRoot"/>
+      </p:par>
+    </p:tnLst>
+  </p:timing>
+</p:sld>
+</file>
+
+<file path=ppt/slides/slide13.xml><?xml version="1.0" encoding="utf-8"?>
+<p:sld xmlns:a="http://schemas.openxmlformats.org/drawingml/2006/main" xmlns:r="http://schemas.openxmlformats.org/officeDocument/2006/relationships" xmlns:p="http://schemas.openxmlformats.org/presentationml/2006/main">
+  <p:cSld>
+    <p:spTree>
+      <p:nvGrpSpPr>
+        <p:cNvPr id="1" name=""/>
+        <p:cNvGrpSpPr/>
+        <p:nvPr/>
+      </p:nvGrpSpPr>
+      <p:grpSpPr>
+        <a:xfrm>
+          <a:off x="0" y="0"/>
+          <a:ext cx="0" cy="0"/>
+          <a:chOff x="0" y="0"/>
+          <a:chExt cx="0" cy="0"/>
+        </a:xfrm>
+      </p:grpSpPr>
+      <p:sp>
+        <p:nvSpPr>
+          <p:cNvPr id="2" name="Заголовок 1"/>
+          <p:cNvSpPr>
+            <a:spLocks noGrp="1"/>
+          </p:cNvSpPr>
+          <p:nvPr>
+            <p:ph type="title"/>
+          </p:nvPr>
+        </p:nvSpPr>
+        <p:spPr/>
+        <p:txBody>
+          <a:bodyPr/>
+          <a:lstStyle/>
+          <a:p>
+            <a:r>
+              <a:rPr lang="ru-RU" dirty="0" smtClean="0"/>
+              <a:t>Бизнес задача</a:t>
+            </a:r>
+            <a:endParaRPr lang="ru-RU" dirty="0"/>
+          </a:p>
+        </p:txBody>
+      </p:sp>
+      <p:sp>
+        <p:nvSpPr>
+          <p:cNvPr id="3" name="Объект 2"/>
+          <p:cNvSpPr>
+            <a:spLocks noGrp="1"/>
+          </p:cNvSpPr>
+          <p:nvPr>
+            <p:ph idx="1"/>
+          </p:nvPr>
+        </p:nvSpPr>
+        <p:spPr/>
+        <p:txBody>
+          <a:bodyPr>
+            <a:normAutofit fontScale="85000" lnSpcReduction="20000"/>
+          </a:bodyPr>
+          <a:lstStyle/>
+          <a:p>
+            <a:pPr marL="0" indent="0">
+              <a:buNone/>
+            </a:pPr>
+            <a:endParaRPr lang="ru-RU" dirty="0"/>
+          </a:p>
+          <a:p>
+            <a:pPr marL="0" indent="0">
+              <a:buNone/>
+            </a:pPr>
+            <a:r>
+              <a:rPr lang="ru-RU" dirty="0" smtClean="0"/>
+              <a:t>    </a:t>
+            </a:r>
+            <a:r>
+              <a:rPr lang="ru-RU" i="1" u="sng" dirty="0" smtClean="0"/>
+              <a:t>Программа </a:t>
+            </a:r>
+            <a:r>
+              <a:rPr lang="ru-RU" i="1" u="sng" dirty="0"/>
+              <a:t>автоматизирует процесс публикации и распространения контента. Она позволяет компании или сообществу:</a:t>
+            </a:r>
+          </a:p>
+          <a:p>
+            <a:r>
+              <a:rPr lang="ru-RU" dirty="0"/>
+              <a:t>Централизованно информировать аудиторию (новости, статьи, анонсы).</a:t>
+            </a:r>
+          </a:p>
+          <a:p>
+            <a:r>
+              <a:rPr lang="ru-RU" dirty="0"/>
+              <a:t>Повышать вовлеченность через систему комментариев и тегов.</a:t>
+            </a:r>
+          </a:p>
+          <a:p>
+            <a:r>
+              <a:rPr lang="ru-RU" dirty="0"/>
+              <a:t>Персонализировать опыт пользователя (возможность сохранять статьи в «Избранное»).</a:t>
+            </a:r>
+          </a:p>
+          <a:p>
+            <a:r>
+              <a:rPr lang="ru-RU" dirty="0"/>
+              <a:t>Разграничивать права: только доверенные лица (админы) создают контент, а пользователи его потребляют и обсуждают.</a:t>
+            </a:r>
+          </a:p>
+        </p:txBody>
+      </p:sp>
+    </p:spTree>
+    <p:extLst>
+      <p:ext uri="{BB962C8B-B14F-4D97-AF65-F5344CB8AC3E}">
+        <p14:creationId xmlns:p14="http://schemas.microsoft.com/office/powerpoint/2010/main" val="2130190252"/>
+      </p:ext>
+    </p:extLst>
+  </p:cSld>
+  <p:clrMapOvr>
+    <a:masterClrMapping/>
+  </p:clrMapOvr>
+  <p:timing>
+    <p:tnLst>
+      <p:par>
+        <p:cTn id="1" dur="indefinite" restart="never" nodeType="tmRoot"/>
+      </p:par>
+    </p:tnLst>
+  </p:timing>
+</p:sld>
+</file>
+
+<file path=ppt/slides/slide14.xml><?xml version="1.0" encoding="utf-8"?>
+<p:sld xmlns:a="http://schemas.openxmlformats.org/drawingml/2006/main" xmlns:r="http://schemas.openxmlformats.org/officeDocument/2006/relationships" xmlns:p="http://schemas.openxmlformats.org/presentationml/2006/main">
+  <p:cSld>
+    <p:spTree>
+      <p:nvGrpSpPr>
+        <p:cNvPr id="1" name=""/>
+        <p:cNvGrpSpPr/>
+        <p:nvPr/>
+      </p:nvGrpSpPr>
+      <p:grpSpPr>
+        <a:xfrm>
+          <a:off x="0" y="0"/>
+          <a:ext cx="0" cy="0"/>
+          <a:chOff x="0" y="0"/>
+          <a:chExt cx="0" cy="0"/>
+        </a:xfrm>
+      </p:grpSpPr>
+      <p:sp>
+        <p:nvSpPr>
+          <p:cNvPr id="2" name="Заголовок 1"/>
+          <p:cNvSpPr>
+            <a:spLocks noGrp="1"/>
+          </p:cNvSpPr>
+          <p:nvPr>
+            <p:ph type="title"/>
+          </p:nvPr>
+        </p:nvSpPr>
+        <p:spPr/>
+        <p:txBody>
+          <a:bodyPr/>
+          <a:lstStyle/>
+          <a:p>
+            <a:endParaRPr lang="ru-RU"/>
+          </a:p>
+        </p:txBody>
+      </p:sp>
+      <p:sp>
+        <p:nvSpPr>
+          <p:cNvPr id="3" name="Объект 2"/>
+          <p:cNvSpPr>
+            <a:spLocks noGrp="1"/>
+          </p:cNvSpPr>
+          <p:nvPr>
+            <p:ph idx="1"/>
+          </p:nvPr>
+        </p:nvSpPr>
+        <p:spPr/>
+        <p:txBody>
+          <a:bodyPr/>
+          <a:lstStyle/>
+          <a:p>
+            <a:endParaRPr lang="ru-RU"/>
+          </a:p>
+        </p:txBody>
+      </p:sp>
+      <p:pic>
+        <p:nvPicPr>
+          <p:cNvPr id="1026" name="Picture 2" descr="E:\TOP\Pandas\mini-проект\Демонстрация\вход.png"/>
+          <p:cNvPicPr>
+            <a:picLocks noChangeAspect="1" noChangeArrowheads="1"/>
+          </p:cNvPicPr>
+          <p:nvPr/>
+        </p:nvPicPr>
+        <p:blipFill>
+          <a:blip r:embed="rId2">
+            <a:extLst>
+              <a:ext uri="{28A0092B-C50C-407E-A947-70E740481C1C}">
+                <a14:useLocalDpi xmlns:a14="http://schemas.microsoft.com/office/drawing/2010/main" val="0"/>
+              </a:ext>
+            </a:extLst>
+          </a:blip>
+          <a:srcRect/>
+          <a:stretch>
+            <a:fillRect/>
+          </a:stretch>
+        </p:blipFill>
+        <p:spPr bwMode="auto">
+          <a:xfrm>
+            <a:off x="782638" y="1811338"/>
+            <a:ext cx="7029722" cy="2584450"/>
+          </a:xfrm>
+          <a:prstGeom prst="rect">
+            <a:avLst/>
+          </a:prstGeom>
+          <a:noFill/>
+          <a:extLst>
+            <a:ext uri="{909E8E84-426E-40DD-AFC4-6F175D3DCCD1}">
+              <a14:hiddenFill xmlns:a14="http://schemas.microsoft.com/office/drawing/2010/main">
+                <a:solidFill>
+                  <a:srgbClr val="FFFFFF"/>
+                </a:solidFill>
+              </a14:hiddenFill>
+            </a:ext>
+          </a:extLst>
+        </p:spPr>
+      </p:pic>
+    </p:spTree>
+    <p:extLst>
+      <p:ext uri="{BB962C8B-B14F-4D97-AF65-F5344CB8AC3E}">
+        <p14:creationId xmlns:p14="http://schemas.microsoft.com/office/powerpoint/2010/main" val="1603485448"/>
+      </p:ext>
+    </p:extLst>
+  </p:cSld>
+  <p:clrMapOvr>
+    <a:masterClrMapping/>
+  </p:clrMapOvr>
+  <p:timing>
+    <p:tnLst>
+      <p:par>
+        <p:cTn id="1" dur="indefinite" restart="never" nodeType="tmRoot"/>
+      </p:par>
+    </p:tnLst>
+  </p:timing>
+</p:sld>
+</file>
+
+<file path=ppt/slides/slide15.xml><?xml version="1.0" encoding="utf-8"?>
+<p:sld xmlns:a="http://schemas.openxmlformats.org/drawingml/2006/main" xmlns:r="http://schemas.openxmlformats.org/officeDocument/2006/relationships" xmlns:p="http://schemas.openxmlformats.org/presentationml/2006/main">
+  <p:cSld>
+    <p:spTree>
+      <p:nvGrpSpPr>
+        <p:cNvPr id="1" name=""/>
+        <p:cNvGrpSpPr/>
+        <p:nvPr/>
+      </p:nvGrpSpPr>
+      <p:grpSpPr>
+        <a:xfrm>
+          <a:off x="0" y="0"/>
+          <a:ext cx="0" cy="0"/>
+          <a:chOff x="0" y="0"/>
+          <a:chExt cx="0" cy="0"/>
+        </a:xfrm>
+      </p:grpSpPr>
+      <p:sp>
+        <p:nvSpPr>
+          <p:cNvPr id="2" name="Заголовок 1"/>
+          <p:cNvSpPr>
+            <a:spLocks noGrp="1"/>
+          </p:cNvSpPr>
+          <p:nvPr>
+            <p:ph type="title"/>
+          </p:nvPr>
+        </p:nvSpPr>
+        <p:spPr/>
+        <p:txBody>
+          <a:bodyPr/>
+          <a:lstStyle/>
+          <a:p>
+            <a:endParaRPr lang="ru-RU"/>
+          </a:p>
+        </p:txBody>
+      </p:sp>
+      <p:sp>
+        <p:nvSpPr>
+          <p:cNvPr id="3" name="Объект 2"/>
+          <p:cNvSpPr>
+            <a:spLocks noGrp="1"/>
+          </p:cNvSpPr>
+          <p:nvPr>
+            <p:ph idx="1"/>
+          </p:nvPr>
+        </p:nvSpPr>
+        <p:spPr/>
+        <p:txBody>
+          <a:bodyPr/>
+          <a:lstStyle/>
+          <a:p>
+            <a:endParaRPr lang="ru-RU"/>
+          </a:p>
+        </p:txBody>
+      </p:sp>
+      <p:pic>
+        <p:nvPicPr>
+          <p:cNvPr id="5" name="Picture 2"/>
+          <p:cNvPicPr>
+            <a:picLocks noChangeAspect="1" noChangeArrowheads="1"/>
+          </p:cNvPicPr>
+          <p:nvPr/>
+        </p:nvPicPr>
+        <p:blipFill>
+          <a:blip r:embed="rId2">
+            <a:extLst>
+              <a:ext uri="{28A0092B-C50C-407E-A947-70E740481C1C}">
+                <a14:useLocalDpi xmlns:a14="http://schemas.microsoft.com/office/drawing/2010/main" val="0"/>
+              </a:ext>
+            </a:extLst>
+          </a:blip>
+          <a:srcRect/>
+          <a:stretch>
+            <a:fillRect/>
+          </a:stretch>
+        </p:blipFill>
+        <p:spPr bwMode="auto">
+          <a:xfrm>
+            <a:off x="328912" y="1799578"/>
+            <a:ext cx="8491559" cy="4482358"/>
+          </a:xfrm>
+          <a:prstGeom prst="rect">
+            <a:avLst/>
+          </a:prstGeom>
+          <a:noFill/>
+          <a:ln>
+            <a:noFill/>
+          </a:ln>
+          <a:effectLst/>
+          <a:extLst>
+            <a:ext uri="{909E8E84-426E-40DD-AFC4-6F175D3DCCD1}">
+              <a14:hiddenFill xmlns:a14="http://schemas.microsoft.com/office/drawing/2010/main">
+                <a:solidFill>
+                  <a:schemeClr val="accent1"/>
+                </a:solidFill>
+              </a14:hiddenFill>
+            </a:ext>
+            <a:ext uri="{91240B29-F687-4F45-9708-019B960494DF}">
+              <a14:hiddenLine xmlns:a14="http://schemas.microsoft.com/office/drawing/2010/main" w="9525">
+                <a:solidFill>
+                  <a:schemeClr val="tx1"/>
+                </a:solidFill>
+                <a:miter lim="800000"/>
+                <a:headEnd/>
+                <a:tailEnd/>
+              </a14:hiddenLine>
+            </a:ext>
+            <a:ext uri="{AF507438-7753-43E0-B8FC-AC1667EBCBE1}">
+              <a14:hiddenEffects xmlns:a14="http://schemas.microsoft.com/office/drawing/2010/main">
+                <a:effectLst>
+                  <a:outerShdw dist="35921" dir="2700000" algn="ctr" rotWithShape="0">
+                    <a:schemeClr val="bg2"/>
+                  </a:outerShdw>
+                </a:effectLst>
+              </a14:hiddenEffects>
+            </a:ext>
+          </a:extLst>
+        </p:spPr>
+      </p:pic>
+    </p:spTree>
+    <p:extLst>
+      <p:ext uri="{BB962C8B-B14F-4D97-AF65-F5344CB8AC3E}">
+        <p14:creationId xmlns:p14="http://schemas.microsoft.com/office/powerpoint/2010/main" val="2856079694"/>
+      </p:ext>
+    </p:extLst>
+  </p:cSld>
+  <p:clrMapOvr>
+    <a:masterClrMapping/>
+  </p:clrMapOvr>
+  <p:timing>
+    <p:tnLst>
+      <p:par>
+        <p:cTn id="1" dur="indefinite" restart="never" nodeType="tmRoot"/>
+      </p:par>
+    </p:tnLst>
+  </p:timing>
+</p:sld>
+</file>
+
+<file path=ppt/slides/slide16.xml><?xml version="1.0" encoding="utf-8"?>
+<p:sld xmlns:a="http://schemas.openxmlformats.org/drawingml/2006/main" xmlns:r="http://schemas.openxmlformats.org/officeDocument/2006/relationships" xmlns:p="http://schemas.openxmlformats.org/presentationml/2006/main">
+  <p:cSld>
+    <p:spTree>
+      <p:nvGrpSpPr>
+        <p:cNvPr id="1" name=""/>
+        <p:cNvGrpSpPr/>
+        <p:nvPr/>
+      </p:nvGrpSpPr>
+      <p:grpSpPr>
+        <a:xfrm>
+          <a:off x="0" y="0"/>
+          <a:ext cx="0" cy="0"/>
+          <a:chOff x="0" y="0"/>
+          <a:chExt cx="0" cy="0"/>
+        </a:xfrm>
+      </p:grpSpPr>
+      <p:sp>
+        <p:nvSpPr>
+          <p:cNvPr id="2" name="Заголовок 1"/>
+          <p:cNvSpPr>
+            <a:spLocks noGrp="1"/>
+          </p:cNvSpPr>
+          <p:nvPr>
+            <p:ph type="title"/>
+          </p:nvPr>
+        </p:nvSpPr>
+        <p:spPr/>
+        <p:txBody>
+          <a:bodyPr/>
+          <a:lstStyle/>
+          <a:p>
+            <a:r>
+              <a:rPr lang="ru-RU" dirty="0" smtClean="0"/>
+              <a:t>Регистрация</a:t>
+            </a:r>
+            <a:endParaRPr lang="ru-RU" dirty="0"/>
+          </a:p>
+        </p:txBody>
+      </p:sp>
+      <p:sp>
+        <p:nvSpPr>
+          <p:cNvPr id="3" name="Объект 2"/>
+          <p:cNvSpPr>
+            <a:spLocks noGrp="1"/>
+          </p:cNvSpPr>
+          <p:nvPr>
+            <p:ph idx="1"/>
+          </p:nvPr>
+        </p:nvSpPr>
+        <p:spPr/>
+        <p:txBody>
+          <a:bodyPr/>
+          <a:lstStyle/>
+          <a:p>
+            <a:endParaRPr lang="ru-RU" dirty="0" smtClean="0"/>
+          </a:p>
+          <a:p>
+            <a:endParaRPr lang="ru-RU" dirty="0"/>
+          </a:p>
+        </p:txBody>
+      </p:sp>
+      <p:pic>
+        <p:nvPicPr>
+          <p:cNvPr id="7171" name="Picture 3"/>
+          <p:cNvPicPr>
+            <a:picLocks noChangeAspect="1" noChangeArrowheads="1"/>
+          </p:cNvPicPr>
+          <p:nvPr/>
+        </p:nvPicPr>
+        <p:blipFill>
+          <a:blip r:embed="rId2">
+            <a:extLst>
+              <a:ext uri="{28A0092B-C50C-407E-A947-70E740481C1C}">
+                <a14:useLocalDpi xmlns:a14="http://schemas.microsoft.com/office/drawing/2010/main" val="0"/>
+              </a:ext>
+            </a:extLst>
+          </a:blip>
+          <a:srcRect/>
+          <a:stretch>
+            <a:fillRect/>
+          </a:stretch>
+        </p:blipFill>
+        <p:spPr bwMode="auto">
+          <a:xfrm>
+            <a:off x="251520" y="2204864"/>
+            <a:ext cx="8341337" cy="3775125"/>
+          </a:xfrm>
+          <a:prstGeom prst="rect">
+            <a:avLst/>
+          </a:prstGeom>
+          <a:noFill/>
+          <a:ln>
+            <a:noFill/>
+          </a:ln>
+          <a:effectLst/>
+          <a:extLst>
+            <a:ext uri="{909E8E84-426E-40DD-AFC4-6F175D3DCCD1}">
+              <a14:hiddenFill xmlns:a14="http://schemas.microsoft.com/office/drawing/2010/main">
+                <a:solidFill>
+                  <a:schemeClr val="accent1"/>
+                </a:solidFill>
+              </a14:hiddenFill>
+            </a:ext>
+            <a:ext uri="{91240B29-F687-4F45-9708-019B960494DF}">
+              <a14:hiddenLine xmlns:a14="http://schemas.microsoft.com/office/drawing/2010/main" w="9525">
+                <a:solidFill>
+                  <a:schemeClr val="tx1"/>
+                </a:solidFill>
+                <a:miter lim="800000"/>
+                <a:headEnd/>
+                <a:tailEnd/>
+              </a14:hiddenLine>
+            </a:ext>
+            <a:ext uri="{AF507438-7753-43E0-B8FC-AC1667EBCBE1}">
+              <a14:hiddenEffects xmlns:a14="http://schemas.microsoft.com/office/drawing/2010/main">
+                <a:effectLst>
+                  <a:outerShdw dist="35921" dir="2700000" algn="ctr" rotWithShape="0">
+                    <a:schemeClr val="bg2"/>
+                  </a:outerShdw>
+                </a:effectLst>
+              </a14:hiddenEffects>
+            </a:ext>
+          </a:extLst>
+        </p:spPr>
+      </p:pic>
+    </p:spTree>
+    <p:extLst>
+      <p:ext uri="{BB962C8B-B14F-4D97-AF65-F5344CB8AC3E}">
+        <p14:creationId xmlns:p14="http://schemas.microsoft.com/office/powerpoint/2010/main" val="3555227253"/>
+      </p:ext>
+    </p:extLst>
+  </p:cSld>
+  <p:clrMapOvr>
+    <a:masterClrMapping/>
+  </p:clrMapOvr>
+  <p:timing>
+    <p:tnLst>
+      <p:par>
+        <p:cTn id="1" dur="indefinite" restart="never" nodeType="tmRoot"/>
+      </p:par>
+    </p:tnLst>
+  </p:timing>
+</p:sld>
+</file>
+
+<file path=ppt/slides/slide2.xml><?xml version="1.0" encoding="utf-8"?>
+<p:sld xmlns:a="http://schemas.openxmlformats.org/drawingml/2006/main" xmlns:r="http://schemas.openxmlformats.org/officeDocument/2006/relationships" xmlns:p="http://schemas.openxmlformats.org/presentationml/2006/main">
+  <p:cSld>
+    <p:spTree>
+      <p:nvGrpSpPr>
+        <p:cNvPr id="1" name=""/>
+        <p:cNvGrpSpPr/>
+        <p:nvPr/>
+      </p:nvGrpSpPr>
+      <p:grpSpPr>
+        <a:xfrm>
+          <a:off x="0" y="0"/>
+          <a:ext cx="0" cy="0"/>
+          <a:chOff x="0" y="0"/>
+          <a:chExt cx="0" cy="0"/>
+        </a:xfrm>
+      </p:grpSpPr>
+      <p:sp>
+        <p:nvSpPr>
+          <p:cNvPr id="2" name="Заголовок 1"/>
+          <p:cNvSpPr>
+            <a:spLocks noGrp="1"/>
+          </p:cNvSpPr>
+          <p:nvPr>
+            <p:ph type="title"/>
+          </p:nvPr>
+        </p:nvSpPr>
+        <p:spPr/>
+        <p:txBody>
+          <a:bodyPr/>
+          <a:lstStyle/>
+          <a:p>
+            <a:endParaRPr lang="ru-RU"/>
+          </a:p>
+        </p:txBody>
+      </p:sp>
+      <p:sp>
+        <p:nvSpPr>
+          <p:cNvPr id="3" name="Объект 2"/>
+          <p:cNvSpPr>
+            <a:spLocks noGrp="1"/>
+          </p:cNvSpPr>
+          <p:nvPr>
+            <p:ph idx="1"/>
+          </p:nvPr>
+        </p:nvSpPr>
+        <p:spPr/>
+        <p:txBody>
+          <a:bodyPr/>
+          <a:lstStyle/>
+          <a:p>
+            <a:endParaRPr lang="ru-RU"/>
+          </a:p>
+        </p:txBody>
+      </p:sp>
+      <p:pic>
+        <p:nvPicPr>
+          <p:cNvPr id="1027" name="Picture 3"/>
+          <p:cNvPicPr>
+            <a:picLocks noChangeAspect="1" noChangeArrowheads="1"/>
+          </p:cNvPicPr>
+          <p:nvPr/>
+        </p:nvPicPr>
+        <p:blipFill>
+          <a:blip r:embed="rId2">
+            <a:extLst>
+              <a:ext uri="{28A0092B-C50C-407E-A947-70E740481C1C}">
+                <a14:useLocalDpi xmlns:a14="http://schemas.microsoft.com/office/drawing/2010/main" val="0"/>
+              </a:ext>
+            </a:extLst>
+          </a:blip>
+          <a:srcRect/>
+          <a:stretch>
+            <a:fillRect/>
+          </a:stretch>
+        </p:blipFill>
+        <p:spPr bwMode="auto">
+          <a:xfrm>
+            <a:off x="467544" y="332656"/>
+            <a:ext cx="8208912" cy="6120680"/>
+          </a:xfrm>
+          <a:prstGeom prst="rect">
+            <a:avLst/>
+          </a:prstGeom>
+          <a:noFill/>
+          <a:ln>
+            <a:noFill/>
+          </a:ln>
+          <a:effectLst/>
+          <a:extLst>
+            <a:ext uri="{909E8E84-426E-40DD-AFC4-6F175D3DCCD1}">
+              <a14:hiddenFill xmlns:a14="http://schemas.microsoft.com/office/drawing/2010/main">
+                <a:solidFill>
+                  <a:schemeClr val="accent1"/>
+                </a:solidFill>
+              </a14:hiddenFill>
+            </a:ext>
+            <a:ext uri="{91240B29-F687-4F45-9708-019B960494DF}">
+              <a14:hiddenLine xmlns:a14="http://schemas.microsoft.com/office/drawing/2010/main" w="9525">
+                <a:solidFill>
+                  <a:schemeClr val="tx1"/>
+                </a:solidFill>
+                <a:miter lim="800000"/>
+                <a:headEnd/>
+                <a:tailEnd/>
+              </a14:hiddenLine>
+            </a:ext>
+            <a:ext uri="{AF507438-7753-43E0-B8FC-AC1667EBCBE1}">
+              <a14:hiddenEffects xmlns:a14="http://schemas.microsoft.com/office/drawing/2010/main">
+                <a:effectLst>
+                  <a:outerShdw dist="35921" dir="2700000" algn="ctr" rotWithShape="0">
+                    <a:schemeClr val="bg2"/>
+                  </a:outerShdw>
+                </a:effectLst>
+              </a14:hiddenEffects>
+            </a:ext>
+          </a:extLst>
+        </p:spPr>
+      </p:pic>
+    </p:spTree>
+    <p:extLst>
+      <p:ext uri="{BB962C8B-B14F-4D97-AF65-F5344CB8AC3E}">
+        <p14:creationId xmlns:p14="http://schemas.microsoft.com/office/powerpoint/2010/main" val="3860294056"/>
+      </p:ext>
+    </p:extLst>
+  </p:cSld>
+  <p:clrMapOvr>
+    <a:masterClrMapping/>
+  </p:clrMapOvr>
+  <p:timing>
+    <p:tnLst>
+      <p:par>
+        <p:cTn id="1" dur="indefinite" restart="never" nodeType="tmRoot"/>
+      </p:par>
+    </p:tnLst>
+  </p:timing>
+</p:sld>
+</file>
+
+<file path=ppt/slides/slide3.xml><?xml version="1.0" encoding="utf-8"?>
+<p:sld xmlns:a="http://schemas.openxmlformats.org/drawingml/2006/main" xmlns:r="http://schemas.openxmlformats.org/officeDocument/2006/relationships" xmlns:p="http://schemas.openxmlformats.org/presentationml/2006/main">
+  <p:cSld>
+    <p:spTree>
+      <p:nvGrpSpPr>
+        <p:cNvPr id="1" name=""/>
+        <p:cNvGrpSpPr/>
+        <p:nvPr/>
+      </p:nvGrpSpPr>
+      <p:grpSpPr>
+        <a:xfrm>
+          <a:off x="0" y="0"/>
+          <a:ext cx="0" cy="0"/>
+          <a:chOff x="0" y="0"/>
+          <a:chExt cx="0" cy="0"/>
+        </a:xfrm>
+      </p:grpSpPr>
+      <p:sp>
+        <p:nvSpPr>
+          <p:cNvPr id="2" name="Заголовок 1"/>
+          <p:cNvSpPr>
+            <a:spLocks noGrp="1"/>
+          </p:cNvSpPr>
+          <p:nvPr>
+            <p:ph type="title"/>
+          </p:nvPr>
+        </p:nvSpPr>
+        <p:spPr/>
+        <p:txBody>
+          <a:bodyPr/>
+          <a:lstStyle/>
+          <a:p>
+            <a:r>
+              <a:rPr lang="ru-RU" dirty="0"/>
+              <a:t>О</a:t>
+            </a:r>
+            <a:r>
+              <a:rPr lang="ru-RU" dirty="0" smtClean="0"/>
+              <a:t>писание </a:t>
+            </a:r>
+            <a:r>
+              <a:rPr lang="ru-RU" dirty="0"/>
+              <a:t>проекта</a:t>
+            </a:r>
+          </a:p>
+        </p:txBody>
+      </p:sp>
+      <p:sp>
+        <p:nvSpPr>
+          <p:cNvPr id="3" name="Объект 2"/>
+          <p:cNvSpPr>
+            <a:spLocks noGrp="1"/>
+          </p:cNvSpPr>
+          <p:nvPr>
+            <p:ph idx="1"/>
+          </p:nvPr>
+        </p:nvSpPr>
+        <p:spPr/>
+        <p:txBody>
+          <a:bodyPr/>
+          <a:lstStyle/>
+          <a:p>
+            <a:pPr marL="0" indent="0">
+              <a:buNone/>
+            </a:pPr>
+            <a:r>
+              <a:rPr lang="ru-RU" dirty="0" smtClean="0"/>
+              <a:t>Этот </a:t>
+            </a:r>
+            <a:r>
+              <a:rPr lang="ru-RU" dirty="0"/>
+              <a:t>проект представляет собой функциональный веб-сервис </a:t>
+            </a:r>
+            <a:r>
+              <a:rPr lang="ru-RU" dirty="0" smtClean="0"/>
+              <a:t>новостей АСУТП для </a:t>
+            </a:r>
+            <a:r>
+              <a:rPr lang="ru-RU" dirty="0"/>
+              <a:t>публикации </a:t>
+            </a:r>
+            <a:r>
+              <a:rPr lang="ru-RU" dirty="0" smtClean="0"/>
+              <a:t>инженерами АСУТП контента </a:t>
+            </a:r>
+            <a:r>
+              <a:rPr lang="ru-RU" dirty="0"/>
+              <a:t>и социального взаимодействия, построенный на базе </a:t>
+            </a:r>
+            <a:r>
+              <a:rPr lang="ru-RU" dirty="0" err="1"/>
+              <a:t>фреймворка</a:t>
+            </a:r>
+            <a:r>
+              <a:rPr lang="ru-RU" dirty="0"/>
+              <a:t> </a:t>
+            </a:r>
+            <a:r>
+              <a:rPr lang="ru-RU" dirty="0" err="1"/>
+              <a:t>Django</a:t>
+            </a:r>
+            <a:endParaRPr lang="ru-RU" dirty="0"/>
+          </a:p>
+          <a:p>
+            <a:endParaRPr lang="ru-RU" dirty="0"/>
+          </a:p>
+        </p:txBody>
+      </p:sp>
+    </p:spTree>
+    <p:extLst>
+      <p:ext uri="{BB962C8B-B14F-4D97-AF65-F5344CB8AC3E}">
+        <p14:creationId xmlns:p14="http://schemas.microsoft.com/office/powerpoint/2010/main" val="1355846140"/>
+      </p:ext>
+    </p:extLst>
+  </p:cSld>
+  <p:clrMapOvr>
+    <a:masterClrMapping/>
+  </p:clrMapOvr>
+  <p:timing>
+    <p:tnLst>
+      <p:par>
+        <p:cTn id="1" dur="indefinite" restart="never" nodeType="tmRoot"/>
+      </p:par>
+    </p:tnLst>
+  </p:timing>
+</p:sld>
+</file>
+
+<file path=ppt/slides/slide4.xml><?xml version="1.0" encoding="utf-8"?>
+<p:sld xmlns:a="http://schemas.openxmlformats.org/drawingml/2006/main" xmlns:r="http://schemas.openxmlformats.org/officeDocument/2006/relationships" xmlns:p="http://schemas.openxmlformats.org/presentationml/2006/main">
+  <p:cSld>
+    <p:spTree>
+      <p:nvGrpSpPr>
+        <p:cNvPr id="1" name=""/>
+        <p:cNvGrpSpPr/>
+        <p:nvPr/>
+      </p:nvGrpSpPr>
+      <p:grpSpPr>
+        <a:xfrm>
+          <a:off x="0" y="0"/>
+          <a:ext cx="0" cy="0"/>
+          <a:chOff x="0" y="0"/>
+          <a:chExt cx="0" cy="0"/>
+        </a:xfrm>
+      </p:grpSpPr>
+      <p:sp>
+        <p:nvSpPr>
+          <p:cNvPr id="2" name="Заголовок 1"/>
+          <p:cNvSpPr>
+            <a:spLocks noGrp="1"/>
+          </p:cNvSpPr>
+          <p:nvPr>
+            <p:ph type="title"/>
+          </p:nvPr>
+        </p:nvSpPr>
+        <p:spPr/>
+        <p:txBody>
+          <a:bodyPr>
+            <a:normAutofit fontScale="90000"/>
+          </a:bodyPr>
+          <a:lstStyle/>
+          <a:p>
+            <a:r>
+              <a:rPr lang="ru-RU" b="1" dirty="0">
+                <a:effectLst/>
+              </a:rPr>
+              <a:t>Постановка задачи / Проблематика </a:t>
+            </a:r>
+            <a:endParaRPr lang="ru-RU" dirty="0"/>
+          </a:p>
+        </p:txBody>
+      </p:sp>
+      <p:sp>
+        <p:nvSpPr>
+          <p:cNvPr id="3" name="Объект 2"/>
+          <p:cNvSpPr>
+            <a:spLocks noGrp="1"/>
+          </p:cNvSpPr>
+          <p:nvPr>
+            <p:ph idx="1"/>
+          </p:nvPr>
+        </p:nvSpPr>
+        <p:spPr/>
+        <p:txBody>
+          <a:bodyPr>
+            <a:normAutofit fontScale="25000" lnSpcReduction="20000"/>
+          </a:bodyPr>
+          <a:lstStyle/>
+          <a:p>
+            <a:r>
+              <a:rPr lang="ru-RU" dirty="0"/>
+              <a:t>Основная задача форума — создать пространство, где инженеры, программисты, технические писатели и другие специалисты по АСУТП (автоматизированным системам управления технологическими процессами) могут:</a:t>
+            </a:r>
+          </a:p>
+          <a:p>
+            <a:r>
+              <a:rPr lang="ru-RU" b="1" dirty="0"/>
+              <a:t>Обсуждать сложные технические вопросы.</a:t>
+            </a:r>
+            <a:r>
+              <a:rPr lang="ru-RU" dirty="0"/>
+              <a:t> Участники делятся опытом, разбирают ошибки и ищут решения проблем, связанных с программируемыми логическими контроллерами (ПЛК), SCADA-системами, сетевым оборудованием (например, </a:t>
+            </a:r>
+            <a:r>
+              <a:rPr lang="ru-RU" dirty="0" err="1"/>
+              <a:t>Profibus</a:t>
+            </a:r>
+            <a:r>
+              <a:rPr lang="ru-RU" dirty="0"/>
+              <a:t>, </a:t>
+            </a:r>
+            <a:r>
+              <a:rPr lang="ru-RU" dirty="0" err="1"/>
+              <a:t>Modbus</a:t>
+            </a:r>
+            <a:r>
+              <a:rPr lang="ru-RU" dirty="0"/>
+              <a:t>), языками программирования для ПЛК и их интеграцией с человеко-машинными интерфейсами (HMI). </a:t>
+            </a:r>
+            <a:r>
+              <a:rPr lang="ru-RU" dirty="0">
+                <a:hlinkClick r:id="rId2"/>
+              </a:rPr>
+              <a:t>asutpforum.ru</a:t>
+            </a:r>
+            <a:r>
+              <a:rPr lang="ru-RU" dirty="0">
+                <a:hlinkClick r:id="rId3"/>
+              </a:rPr>
+              <a:t>yapl.ru</a:t>
+            </a:r>
+            <a:r>
+              <a:rPr lang="ru-RU" dirty="0">
+                <a:hlinkClick r:id="rId4"/>
+              </a:rPr>
+              <a:t>asutpforum.ru</a:t>
+            </a:r>
+            <a:endParaRPr lang="ru-RU" dirty="0"/>
+          </a:p>
+          <a:p>
+            <a:r>
+              <a:rPr lang="ru-RU" b="1" dirty="0"/>
+              <a:t>Сравнивать подходы и решения.</a:t>
+            </a:r>
+            <a:r>
+              <a:rPr lang="ru-RU" dirty="0"/>
+              <a:t> Можно узнать, как коллеги решают схожие задачи с оборудованием разных производителей (</a:t>
+            </a:r>
+            <a:r>
+              <a:rPr lang="ru-RU" dirty="0" err="1"/>
+              <a:t>Siemens</a:t>
+            </a:r>
+            <a:r>
+              <a:rPr lang="ru-RU" dirty="0"/>
+              <a:t>, </a:t>
+            </a:r>
+            <a:r>
+              <a:rPr lang="ru-RU" dirty="0" err="1"/>
+              <a:t>Schneider</a:t>
+            </a:r>
+            <a:r>
+              <a:rPr lang="ru-RU" dirty="0"/>
+              <a:t> </a:t>
+            </a:r>
+            <a:r>
+              <a:rPr lang="ru-RU" dirty="0" err="1"/>
+              <a:t>Electric</a:t>
+            </a:r>
+            <a:r>
+              <a:rPr lang="ru-RU" dirty="0"/>
+              <a:t>, ОВЕН и др.). </a:t>
+            </a:r>
+            <a:r>
+              <a:rPr lang="ru-RU" dirty="0">
+                <a:hlinkClick r:id="rId3"/>
+              </a:rPr>
+              <a:t>yapl.ru</a:t>
+            </a:r>
+            <a:endParaRPr lang="ru-RU" dirty="0"/>
+          </a:p>
+          <a:p>
+            <a:r>
+              <a:rPr lang="ru-RU" b="1" dirty="0"/>
+              <a:t>Находить готовые решения и FAQ.</a:t>
+            </a:r>
+            <a:r>
+              <a:rPr lang="ru-RU" dirty="0"/>
+              <a:t> На форуме есть разделы с часто задаваемыми вопросами (FAQ), которые помогают быстро получить ответ на типовые технические проблемы. </a:t>
+            </a:r>
+            <a:r>
+              <a:rPr lang="ru-RU" dirty="0">
+                <a:hlinkClick r:id="rId2"/>
+              </a:rPr>
+              <a:t>asutpforum.ru</a:t>
+            </a:r>
+            <a:endParaRPr lang="ru-RU" dirty="0"/>
+          </a:p>
+          <a:p>
+            <a:r>
+              <a:rPr lang="ru-RU" b="1" dirty="0"/>
+              <a:t>Поддерживать профессиональное сообщество.</a:t>
+            </a:r>
+            <a:r>
+              <a:rPr lang="ru-RU" dirty="0"/>
+              <a:t> Форум объединяет специалистов, позволяя им оставаться в курсе отраслевых трендов и оперативно обмениваться знаниями. </a:t>
+            </a:r>
+            <a:r>
+              <a:rPr lang="ru-RU" dirty="0">
+                <a:hlinkClick r:id="rId3"/>
+              </a:rPr>
+              <a:t>yapl.ru</a:t>
+            </a:r>
+            <a:endParaRPr lang="ru-RU" dirty="0"/>
+          </a:p>
+          <a:p>
+            <a:r>
+              <a:rPr lang="ru-RU" dirty="0"/>
+              <a:t>Таким образом, площадка помогает преодолеть разобщённость: вместо того чтобы искать разрозненную информацию по разным источникам, участники могут оперативно получить помощь от коллег. Это особенно важно в такой технически сложной и динамичной сфере, как промышленная автоматизация.</a:t>
+            </a:r>
+          </a:p>
+          <a:p>
+            <a:r>
+              <a:rPr lang="ru-RU" dirty="0"/>
+              <a:t/>
+            </a:r>
+            <a:br>
+              <a:rPr lang="ru-RU" dirty="0"/>
+            </a:br>
+            <a:r>
+              <a:rPr lang="ru-RU" dirty="0"/>
+              <a:t> </a:t>
+            </a:r>
+            <a:r>
+              <a:rPr lang="ru-RU" dirty="0" smtClean="0"/>
+              <a:t>    Это</a:t>
+            </a:r>
+            <a:r>
+              <a:rPr lang="ru-RU" dirty="0"/>
+              <a:t> форум для специалистов в области АСУ ТП (автоматизированных систем управления технологическими процессами), электротехники и промышленной автоматизации.</a:t>
+            </a:r>
+          </a:p>
+          <a:p>
+            <a:pPr marL="536575" indent="-536575"/>
+            <a:r>
+              <a:rPr lang="ru-RU" b="1" dirty="0"/>
+              <a:t>Какие проблемы помогает </a:t>
+            </a:r>
+            <a:r>
+              <a:rPr lang="ru-RU" b="1" dirty="0" smtClean="0"/>
+              <a:t>решить</a:t>
+            </a:r>
+            <a:r>
+              <a:rPr lang="en-US" b="1" dirty="0" smtClean="0"/>
+              <a:t>:</a:t>
+            </a:r>
+            <a:endParaRPr lang="ru-RU" b="1" dirty="0"/>
+          </a:p>
+          <a:p>
+            <a:r>
+              <a:rPr lang="ru-RU" dirty="0"/>
+              <a:t>Форум закрывает сразу несколько задач:</a:t>
+            </a:r>
+          </a:p>
+          <a:p>
+            <a:r>
+              <a:rPr lang="en-US" b="1" dirty="0" smtClean="0"/>
+              <a:t>     </a:t>
+            </a:r>
+            <a:r>
+              <a:rPr lang="ru-RU" b="1" dirty="0" smtClean="0"/>
+              <a:t>Поиск</a:t>
+            </a:r>
+            <a:r>
+              <a:rPr lang="ru-RU" b="1" dirty="0"/>
+              <a:t> решений технических проблем.</a:t>
+            </a:r>
+            <a:r>
+              <a:rPr lang="ru-RU" dirty="0"/>
+              <a:t> На форуме разбирают сбои и нюансы работы оборудования и ПО — например, проблемы с SCADA-системами, ПЛК (программируемыми логическими контроллерами), интерфейсами и протоколами связи.</a:t>
+            </a:r>
+          </a:p>
+          <a:p>
+            <a:r>
+              <a:rPr lang="en-US" b="1" dirty="0" smtClean="0"/>
+              <a:t>           </a:t>
+            </a:r>
+            <a:r>
+              <a:rPr lang="ru-RU" b="1" dirty="0" smtClean="0"/>
+              <a:t>Обмен</a:t>
+            </a:r>
+            <a:r>
+              <a:rPr lang="ru-RU" b="1" dirty="0"/>
+              <a:t> опытом по оборудованию и софту.</a:t>
+            </a:r>
+            <a:r>
+              <a:rPr lang="ru-RU" dirty="0"/>
+              <a:t> Обсуждают решения на базе </a:t>
+            </a:r>
+            <a:r>
+              <a:rPr lang="ru-RU" dirty="0" err="1"/>
+              <a:t>Siemens</a:t>
+            </a:r>
+            <a:r>
+              <a:rPr lang="ru-RU" dirty="0"/>
+              <a:t>, </a:t>
+            </a:r>
+            <a:r>
+              <a:rPr lang="ru-RU" dirty="0" err="1"/>
+              <a:t>Beckhoff</a:t>
+            </a:r>
+            <a:r>
+              <a:rPr lang="ru-RU" dirty="0"/>
+              <a:t>, ОВЕН, </a:t>
+            </a:r>
+            <a:r>
+              <a:rPr lang="ru-RU" dirty="0" err="1"/>
+              <a:t>DeltaV</a:t>
+            </a:r>
+            <a:r>
+              <a:rPr lang="ru-RU" dirty="0"/>
+              <a:t>, </a:t>
+            </a:r>
+            <a:r>
+              <a:rPr lang="ru-RU" dirty="0" err="1"/>
+              <a:t>Mitsubishi</a:t>
+            </a:r>
+            <a:r>
+              <a:rPr lang="ru-RU" dirty="0"/>
+              <a:t> и др., а также работу в средах типа TIA </a:t>
+            </a:r>
+            <a:r>
+              <a:rPr lang="ru-RU" dirty="0" err="1"/>
+              <a:t>Portal</a:t>
+            </a:r>
+            <a:r>
+              <a:rPr lang="ru-RU" dirty="0"/>
+              <a:t>, EPLAN и т. п.</a:t>
+            </a:r>
+          </a:p>
+          <a:p>
+            <a:r>
+              <a:rPr lang="ru-RU" b="1" dirty="0"/>
+              <a:t>Консультации по проектированию и наладке.</a:t>
+            </a:r>
+            <a:r>
+              <a:rPr lang="ru-RU" dirty="0"/>
+              <a:t> Участники помогают с выбором компонентов, </a:t>
+            </a:r>
+            <a:r>
+              <a:rPr lang="ru-RU" dirty="0" err="1"/>
+              <a:t>схемотехникой</a:t>
+            </a:r>
+            <a:r>
+              <a:rPr lang="ru-RU" dirty="0"/>
+              <a:t>, настройкой алгоритмов управления, вопросами КИП (контрольно-измерительных приборов).</a:t>
+            </a:r>
+          </a:p>
+          <a:p>
+            <a:r>
+              <a:rPr lang="ru-RU" b="1" dirty="0"/>
+              <a:t>Разбор нормативных и проектных вопросов.</a:t>
+            </a:r>
+            <a:r>
+              <a:rPr lang="ru-RU" dirty="0"/>
+              <a:t> </a:t>
+            </a:r>
+            <a:r>
+              <a:rPr lang="ru-RU" dirty="0" smtClean="0"/>
+              <a:t>  </a:t>
+            </a:r>
+            <a:r>
+              <a:rPr lang="ru-RU" dirty="0"/>
+              <a:t>Цели и задачи проекта: Формулировка целей и конкретных задач, которые были поставлены перед началом работы.</a:t>
+            </a:r>
+          </a:p>
+          <a:p>
+            <a:endParaRPr lang="ru-RU" b="1" dirty="0"/>
+          </a:p>
+          <a:p>
+            <a:r>
+              <a:rPr lang="en-US" dirty="0" smtClean="0"/>
+              <a:t>     </a:t>
+            </a:r>
+            <a:r>
+              <a:rPr lang="ru-RU" dirty="0" smtClean="0"/>
+              <a:t>Создание Новостного портала АСУТП </a:t>
+            </a:r>
+            <a:r>
+              <a:rPr lang="ru-RU" dirty="0"/>
+              <a:t>было направлено на решение ряда задач, связанных с потребностями профессионального сообщества в области АСУ ТП (автоматизированных систем управления технологическими процессами) и промышленной автоматизации</a:t>
+            </a:r>
+            <a:r>
+              <a:rPr lang="ru-RU" dirty="0" smtClean="0"/>
+              <a:t>. Что крайне не обходимо в последнее время в связи с санкциями в области АСУТП, которые были запущенны западными странами против России. Многие ведущие мировые бренды такие как </a:t>
+            </a:r>
+            <a:r>
+              <a:rPr lang="en-US" dirty="0" smtClean="0"/>
+              <a:t>Siemens, Yokogawa, Honeywell </a:t>
+            </a:r>
+            <a:r>
+              <a:rPr lang="ru-RU" dirty="0" smtClean="0"/>
+              <a:t>и другие ушли с Российского рынка, прекратили техническую поддержку хотя оборудование этих брендов продолжает функционировать в Российской промышленности.</a:t>
+            </a:r>
+            <a:endParaRPr lang="ru-RU" dirty="0"/>
+          </a:p>
+          <a:p>
+            <a:r>
+              <a:rPr lang="en-US" b="1" dirty="0" smtClean="0"/>
+              <a:t>    </a:t>
+            </a:r>
+            <a:r>
+              <a:rPr lang="ru-RU" b="1" dirty="0" smtClean="0"/>
+              <a:t>Возможные </a:t>
+            </a:r>
+            <a:r>
+              <a:rPr lang="ru-RU" b="1" dirty="0"/>
+              <a:t>цели проекта:</a:t>
+            </a:r>
+            <a:endParaRPr lang="ru-RU" dirty="0"/>
+          </a:p>
+          <a:p>
+            <a:r>
+              <a:rPr lang="ru-RU" dirty="0"/>
+              <a:t>Создание площадки для общения и обмена опытом между специалистами в сфере АСУ ТП, электротехники и промышленной автоматизации.</a:t>
+            </a:r>
+          </a:p>
+          <a:p>
+            <a:r>
+              <a:rPr lang="ru-RU" dirty="0"/>
+              <a:t>Содействие в решении технических проблем и поиске решений в области автоматизации производства.</a:t>
+            </a:r>
+          </a:p>
+          <a:p>
+            <a:r>
+              <a:rPr lang="ru-RU" dirty="0"/>
+              <a:t>Формирование базы знаний по различным аспектам проектирования, наладки, эксплуатации и модернизации систем управления.</a:t>
+            </a:r>
+          </a:p>
+          <a:p>
+            <a:r>
+              <a:rPr lang="ru-RU" dirty="0"/>
+              <a:t>Поддержка профессионального развития инженеров, студентов и начинающих специалистов через обсуждение практических кейсов и доступ к экспертному мнению.</a:t>
+            </a:r>
+          </a:p>
+          <a:p>
+            <a:r>
+              <a:rPr lang="ru-RU" dirty="0"/>
+              <a:t>Создание сообщества, где участники могут обсуждать актуальные вопросы, включая нормативные требования, стандарты, безопасность систем и новые технологии.</a:t>
+            </a:r>
+          </a:p>
+          <a:p>
+            <a:endParaRPr lang="ru-RU" dirty="0"/>
+          </a:p>
+        </p:txBody>
+      </p:sp>
+    </p:spTree>
+    <p:extLst>
+      <p:ext uri="{BB962C8B-B14F-4D97-AF65-F5344CB8AC3E}">
+        <p14:creationId xmlns:p14="http://schemas.microsoft.com/office/powerpoint/2010/main" val="3252941751"/>
+      </p:ext>
+    </p:extLst>
+  </p:cSld>
+  <p:clrMapOvr>
+    <a:masterClrMapping/>
+  </p:clrMapOvr>
+  <p:timing>
+    <p:tnLst>
+      <p:par>
+        <p:cTn id="1" dur="indefinite" restart="never" nodeType="tmRoot"/>
+      </p:par>
+    </p:tnLst>
+  </p:timing>
+</p:sld>
+</file>
+
+<file path=ppt/slides/slide5.xml><?xml version="1.0" encoding="utf-8"?>
+<p:sld xmlns:a="http://schemas.openxmlformats.org/drawingml/2006/main" xmlns:r="http://schemas.openxmlformats.org/officeDocument/2006/relationships" xmlns:p="http://schemas.openxmlformats.org/presentationml/2006/main">
+  <p:cSld>
+    <p:spTree>
+      <p:nvGrpSpPr>
+        <p:cNvPr id="1" name=""/>
+        <p:cNvGrpSpPr/>
+        <p:nvPr/>
+      </p:nvGrpSpPr>
+      <p:grpSpPr>
+        <a:xfrm>
+          <a:off x="0" y="0"/>
+          <a:ext cx="0" cy="0"/>
+          <a:chOff x="0" y="0"/>
+          <a:chExt cx="0" cy="0"/>
+        </a:xfrm>
+      </p:grpSpPr>
+      <p:sp>
+        <p:nvSpPr>
+          <p:cNvPr id="2" name="Заголовок 1"/>
+          <p:cNvSpPr>
+            <a:spLocks noGrp="1"/>
+          </p:cNvSpPr>
+          <p:nvPr>
+            <p:ph type="title"/>
+          </p:nvPr>
+        </p:nvSpPr>
+        <p:spPr/>
+        <p:txBody>
+          <a:bodyPr>
+            <a:normAutofit fontScale="90000"/>
+          </a:bodyPr>
+          <a:lstStyle/>
+          <a:p>
+            <a:r>
+              <a:rPr lang="ru-RU" b="1" dirty="0">
+                <a:effectLst/>
+              </a:rPr>
+              <a:t>Постановка задачи / Проблематика </a:t>
+            </a:r>
+            <a:endParaRPr lang="ru-RU" dirty="0"/>
+          </a:p>
+        </p:txBody>
+      </p:sp>
+      <p:pic>
+        <p:nvPicPr>
+          <p:cNvPr id="3074" name="Picture 2"/>
+          <p:cNvPicPr>
+            <a:picLocks noGrp="1" noChangeAspect="1" noChangeArrowheads="1"/>
+          </p:cNvPicPr>
+          <p:nvPr>
+            <p:ph idx="1"/>
+          </p:nvPr>
+        </p:nvPicPr>
+        <p:blipFill>
+          <a:blip r:embed="rId2">
+            <a:extLst>
+              <a:ext uri="{28A0092B-C50C-407E-A947-70E740481C1C}">
+                <a14:useLocalDpi xmlns:a14="http://schemas.microsoft.com/office/drawing/2010/main" val="0"/>
+              </a:ext>
+            </a:extLst>
+          </a:blip>
+          <a:srcRect/>
+          <a:stretch>
+            <a:fillRect/>
+          </a:stretch>
+        </p:blipFill>
+        <p:spPr bwMode="auto">
+          <a:xfrm>
+            <a:off x="1331641" y="1484784"/>
+            <a:ext cx="5904656" cy="5112568"/>
+          </a:xfrm>
+          <a:prstGeom prst="rect">
+            <a:avLst/>
+          </a:prstGeom>
+          <a:noFill/>
+          <a:ln>
+            <a:noFill/>
+          </a:ln>
+          <a:effectLst/>
+          <a:extLst>
+            <a:ext uri="{909E8E84-426E-40DD-AFC4-6F175D3DCCD1}">
+              <a14:hiddenFill xmlns:a14="http://schemas.microsoft.com/office/drawing/2010/main">
+                <a:solidFill>
+                  <a:schemeClr val="accent1"/>
+                </a:solidFill>
+              </a14:hiddenFill>
+            </a:ext>
+            <a:ext uri="{91240B29-F687-4F45-9708-019B960494DF}">
+              <a14:hiddenLine xmlns:a14="http://schemas.microsoft.com/office/drawing/2010/main" w="9525">
+                <a:solidFill>
+                  <a:schemeClr val="tx1"/>
+                </a:solidFill>
+                <a:miter lim="800000"/>
+                <a:headEnd/>
+                <a:tailEnd/>
+              </a14:hiddenLine>
+            </a:ext>
+            <a:ext uri="{AF507438-7753-43E0-B8FC-AC1667EBCBE1}">
+              <a14:hiddenEffects xmlns:a14="http://schemas.microsoft.com/office/drawing/2010/main">
+                <a:effectLst>
+                  <a:outerShdw dist="35921" dir="2700000" algn="ctr" rotWithShape="0">
+                    <a:schemeClr val="bg2"/>
+                  </a:outerShdw>
+                </a:effectLst>
+              </a14:hiddenEffects>
+            </a:ext>
+          </a:extLst>
+        </p:spPr>
+      </p:pic>
+    </p:spTree>
+    <p:extLst>
+      <p:ext uri="{BB962C8B-B14F-4D97-AF65-F5344CB8AC3E}">
+        <p14:creationId xmlns:p14="http://schemas.microsoft.com/office/powerpoint/2010/main" val="3597867858"/>
+      </p:ext>
+    </p:extLst>
+  </p:cSld>
+  <p:clrMapOvr>
+    <a:masterClrMapping/>
+  </p:clrMapOvr>
+  <p:timing>
+    <p:tnLst>
+      <p:par>
+        <p:cTn id="1" dur="indefinite" restart="never" nodeType="tmRoot"/>
+      </p:par>
+    </p:tnLst>
+  </p:timing>
+</p:sld>
+</file>
+
+<file path=ppt/slides/slide6.xml><?xml version="1.0" encoding="utf-8"?>
+<p:sld xmlns:a="http://schemas.openxmlformats.org/drawingml/2006/main" xmlns:r="http://schemas.openxmlformats.org/officeDocument/2006/relationships" xmlns:p="http://schemas.openxmlformats.org/presentationml/2006/main">
+  <p:cSld>
+    <p:spTree>
+      <p:nvGrpSpPr>
+        <p:cNvPr id="1" name=""/>
+        <p:cNvGrpSpPr/>
+        <p:nvPr/>
+      </p:nvGrpSpPr>
+      <p:grpSpPr>
+        <a:xfrm>
+          <a:off x="0" y="0"/>
+          <a:ext cx="0" cy="0"/>
+          <a:chOff x="0" y="0"/>
+          <a:chExt cx="0" cy="0"/>
+        </a:xfrm>
+      </p:grpSpPr>
+      <p:sp>
+        <p:nvSpPr>
+          <p:cNvPr id="2" name="Заголовок 1"/>
+          <p:cNvSpPr>
+            <a:spLocks noGrp="1"/>
+          </p:cNvSpPr>
+          <p:nvPr>
+            <p:ph type="title"/>
+          </p:nvPr>
+        </p:nvSpPr>
+        <p:spPr/>
+        <p:txBody>
+          <a:bodyPr>
+            <a:normAutofit fontScale="90000"/>
+          </a:bodyPr>
+          <a:lstStyle/>
+          <a:p>
+            <a:r>
+              <a:rPr lang="ru-RU" b="1" dirty="0">
+                <a:effectLst/>
+              </a:rPr>
+              <a:t>Анализ предметной области / Аналоги </a:t>
+            </a:r>
+            <a:endParaRPr lang="ru-RU" dirty="0"/>
+          </a:p>
+        </p:txBody>
+      </p:sp>
+      <p:pic>
+        <p:nvPicPr>
+          <p:cNvPr id="4099" name="Picture 3"/>
+          <p:cNvPicPr>
+            <a:picLocks noChangeAspect="1" noChangeArrowheads="1"/>
+          </p:cNvPicPr>
+          <p:nvPr/>
+        </p:nvPicPr>
+        <p:blipFill>
+          <a:blip r:embed="rId2">
+            <a:extLst>
+              <a:ext uri="{28A0092B-C50C-407E-A947-70E740481C1C}">
+                <a14:useLocalDpi xmlns:a14="http://schemas.microsoft.com/office/drawing/2010/main" val="0"/>
+              </a:ext>
+            </a:extLst>
+          </a:blip>
+          <a:srcRect/>
+          <a:stretch>
+            <a:fillRect/>
+          </a:stretch>
+        </p:blipFill>
+        <p:spPr bwMode="auto">
+          <a:xfrm>
+            <a:off x="395537" y="2837880"/>
+            <a:ext cx="8280919" cy="3308796"/>
+          </a:xfrm>
+          <a:prstGeom prst="rect">
+            <a:avLst/>
+          </a:prstGeom>
+          <a:noFill/>
+          <a:ln>
+            <a:noFill/>
+          </a:ln>
+          <a:effectLst/>
+          <a:extLst>
+            <a:ext uri="{909E8E84-426E-40DD-AFC4-6F175D3DCCD1}">
+              <a14:hiddenFill xmlns:a14="http://schemas.microsoft.com/office/drawing/2010/main">
+                <a:solidFill>
+                  <a:schemeClr val="accent1"/>
+                </a:solidFill>
+              </a14:hiddenFill>
+            </a:ext>
+            <a:ext uri="{91240B29-F687-4F45-9708-019B960494DF}">
+              <a14:hiddenLine xmlns:a14="http://schemas.microsoft.com/office/drawing/2010/main" w="9525">
+                <a:solidFill>
+                  <a:schemeClr val="tx1"/>
+                </a:solidFill>
+                <a:miter lim="800000"/>
+                <a:headEnd/>
+                <a:tailEnd/>
+              </a14:hiddenLine>
+            </a:ext>
+            <a:ext uri="{AF507438-7753-43E0-B8FC-AC1667EBCBE1}">
+              <a14:hiddenEffects xmlns:a14="http://schemas.microsoft.com/office/drawing/2010/main">
+                <a:effectLst>
+                  <a:outerShdw dist="35921" dir="2700000" algn="ctr" rotWithShape="0">
+                    <a:schemeClr val="bg2"/>
+                  </a:outerShdw>
+                </a:effectLst>
+              </a14:hiddenEffects>
+            </a:ext>
+          </a:extLst>
+        </p:spPr>
+      </p:pic>
+      <p:pic>
+        <p:nvPicPr>
+          <p:cNvPr id="4101" name="Picture 5"/>
+          <p:cNvPicPr>
+            <a:picLocks noGrp="1" noChangeAspect="1" noChangeArrowheads="1"/>
+          </p:cNvPicPr>
+          <p:nvPr>
+            <p:ph idx="1"/>
+          </p:nvPr>
+        </p:nvPicPr>
+        <p:blipFill>
+          <a:blip r:embed="rId3">
+            <a:extLst>
+              <a:ext uri="{28A0092B-C50C-407E-A947-70E740481C1C}">
+                <a14:useLocalDpi xmlns:a14="http://schemas.microsoft.com/office/drawing/2010/main" val="0"/>
+              </a:ext>
+            </a:extLst>
+          </a:blip>
+          <a:srcRect/>
+          <a:stretch>
+            <a:fillRect/>
+          </a:stretch>
+        </p:blipFill>
+        <p:spPr bwMode="auto">
+          <a:xfrm>
+            <a:off x="395537" y="2066066"/>
+            <a:ext cx="8229600" cy="750854"/>
+          </a:xfrm>
+          <a:prstGeom prst="rect">
+            <a:avLst/>
+          </a:prstGeom>
+          <a:noFill/>
+          <a:ln>
+            <a:noFill/>
+          </a:ln>
+          <a:effectLst/>
+          <a:extLst>
+            <a:ext uri="{909E8E84-426E-40DD-AFC4-6F175D3DCCD1}">
+              <a14:hiddenFill xmlns:a14="http://schemas.microsoft.com/office/drawing/2010/main">
+                <a:solidFill>
+                  <a:schemeClr val="accent1"/>
+                </a:solidFill>
+              </a14:hiddenFill>
+            </a:ext>
+            <a:ext uri="{91240B29-F687-4F45-9708-019B960494DF}">
+              <a14:hiddenLine xmlns:a14="http://schemas.microsoft.com/office/drawing/2010/main" w="9525">
+                <a:solidFill>
+                  <a:schemeClr val="tx1"/>
+                </a:solidFill>
+                <a:miter lim="800000"/>
+                <a:headEnd/>
+                <a:tailEnd/>
+              </a14:hiddenLine>
+            </a:ext>
+            <a:ext uri="{AF507438-7753-43E0-B8FC-AC1667EBCBE1}">
+              <a14:hiddenEffects xmlns:a14="http://schemas.microsoft.com/office/drawing/2010/main">
+                <a:effectLst>
+                  <a:outerShdw dist="35921" dir="2700000" algn="ctr" rotWithShape="0">
+                    <a:schemeClr val="bg2"/>
+                  </a:outerShdw>
+                </a:effectLst>
+              </a14:hiddenEffects>
+            </a:ext>
+          </a:extLst>
+        </p:spPr>
+      </p:pic>
+      <p:sp>
+        <p:nvSpPr>
+          <p:cNvPr id="13" name="Заголовок 1"/>
+          <p:cNvSpPr txBox="1">
+            <a:spLocks/>
+          </p:cNvSpPr>
+          <p:nvPr/>
+        </p:nvSpPr>
+        <p:spPr>
+          <a:xfrm>
+            <a:off x="395537" y="1340768"/>
+            <a:ext cx="7632847" cy="779668"/>
+          </a:xfrm>
+          <a:prstGeom prst="rect">
+            <a:avLst/>
+          </a:prstGeom>
+        </p:spPr>
+        <p:txBody>
+          <a:bodyPr rIns="91440" anchor="b">
+            <a:normAutofit fontScale="97500"/>
+            <a:scene3d>
+              <a:camera prst="orthographicFront"/>
+              <a:lightRig rig="soft" dir="t">
+                <a:rot lat="0" lon="0" rev="2400000"/>
+              </a:lightRig>
+            </a:scene3d>
+            <a:sp3d>
+              <a:bevelT w="19050" h="12700"/>
+            </a:sp3d>
+          </a:bodyPr>
+          <a:lstStyle>
+            <a:lvl1pPr marL="54864" algn="r" rtl="0" eaLnBrk="1" latinLnBrk="0" hangingPunct="1">
+              <a:spcBef>
+                <a:spcPct val="0"/>
+              </a:spcBef>
+              <a:buNone/>
+              <a:defRPr kumimoji="0" sz="4600" kern="1200">
+                <a:solidFill>
+                  <a:schemeClr val="tx2">
+                    <a:tint val="100000"/>
+                    <a:shade val="90000"/>
+                    <a:satMod val="250000"/>
+                    <a:alpha val="100000"/>
+                  </a:schemeClr>
+                </a:solidFill>
+                <a:effectLst>
+                  <a:outerShdw blurRad="38100" dist="25500" dir="5400000" algn="tl" rotWithShape="0">
+                    <a:srgbClr val="000000">
+                      <a:satMod val="180000"/>
+                      <a:alpha val="75000"/>
+                    </a:srgbClr>
+                  </a:outerShdw>
+                </a:effectLst>
+                <a:latin typeface="+mj-lt"/>
+                <a:ea typeface="+mj-ea"/>
+                <a:cs typeface="+mj-cs"/>
+              </a:defRPr>
+            </a:lvl1pPr>
+            <a:extLst/>
+          </a:lstStyle>
+          <a:p>
+            <a:pPr algn="ctr"/>
+            <a:r>
+              <a:rPr lang="ru-RU" sz="2000" b="1" dirty="0" smtClean="0">
+                <a:effectLst/>
+              </a:rPr>
+              <a:t>За образец был взят существующий Форум АСУТП </a:t>
+            </a:r>
+            <a:r>
+              <a:rPr lang="en-US" sz="2000" b="1" dirty="0">
+                <a:effectLst/>
+              </a:rPr>
+              <a:t>https://asutpforum.ru/</a:t>
+            </a:r>
+            <a:endParaRPr lang="ru-RU" sz="2000" dirty="0"/>
+          </a:p>
+        </p:txBody>
+      </p:sp>
+    </p:spTree>
+    <p:extLst>
+      <p:ext uri="{BB962C8B-B14F-4D97-AF65-F5344CB8AC3E}">
+        <p14:creationId xmlns:p14="http://schemas.microsoft.com/office/powerpoint/2010/main" val="824541824"/>
+      </p:ext>
+    </p:extLst>
+  </p:cSld>
+  <p:clrMapOvr>
+    <a:masterClrMapping/>
+  </p:clrMapOvr>
+  <p:timing>
+    <p:tnLst>
+      <p:par>
+        <p:cTn id="1" dur="indefinite" restart="never" nodeType="tmRoot"/>
+      </p:par>
+    </p:tnLst>
+  </p:timing>
+</p:sld>
+</file>
+
+<file path=ppt/slides/slide7.xml><?xml version="1.0" encoding="utf-8"?>
+<p:sld xmlns:a="http://schemas.openxmlformats.org/drawingml/2006/main" xmlns:r="http://schemas.openxmlformats.org/officeDocument/2006/relationships" xmlns:p="http://schemas.openxmlformats.org/presentationml/2006/main">
+  <p:cSld>
+    <p:spTree>
+      <p:nvGrpSpPr>
+        <p:cNvPr id="1" name=""/>
+        <p:cNvGrpSpPr/>
+        <p:nvPr/>
+      </p:nvGrpSpPr>
+      <p:grpSpPr>
+        <a:xfrm>
+          <a:off x="0" y="0"/>
+          <a:ext cx="0" cy="0"/>
+          <a:chOff x="0" y="0"/>
+          <a:chExt cx="0" cy="0"/>
+        </a:xfrm>
+      </p:grpSpPr>
+      <p:sp>
+        <p:nvSpPr>
+          <p:cNvPr id="2" name="Заголовок 1"/>
+          <p:cNvSpPr>
+            <a:spLocks noGrp="1"/>
+          </p:cNvSpPr>
+          <p:nvPr>
+            <p:ph type="title"/>
+          </p:nvPr>
+        </p:nvSpPr>
+        <p:spPr/>
+        <p:txBody>
+          <a:bodyPr>
+            <a:normAutofit fontScale="90000"/>
+          </a:bodyPr>
+          <a:lstStyle/>
+          <a:p>
+            <a:r>
+              <a:rPr lang="ru-RU" dirty="0"/>
+              <a:t>Б</a:t>
+            </a:r>
+            <a:r>
+              <a:rPr lang="ru-RU" dirty="0" smtClean="0"/>
+              <a:t>иблиотеки </a:t>
+            </a:r>
+            <a:r>
+              <a:rPr lang="ru-RU" dirty="0"/>
+              <a:t>или компоненты </a:t>
+            </a:r>
+            <a:r>
+              <a:rPr lang="ru-RU" dirty="0" err="1"/>
+              <a:t>Django</a:t>
+            </a:r>
+            <a:r>
+              <a:rPr lang="ru-RU" dirty="0"/>
+              <a:t> использовались и зачем</a:t>
+            </a:r>
+          </a:p>
+        </p:txBody>
+      </p:sp>
+      <p:sp>
+        <p:nvSpPr>
+          <p:cNvPr id="3" name="Объект 2"/>
+          <p:cNvSpPr>
+            <a:spLocks noGrp="1"/>
+          </p:cNvSpPr>
+          <p:nvPr>
+            <p:ph idx="1"/>
+          </p:nvPr>
+        </p:nvSpPr>
+        <p:spPr/>
+        <p:txBody>
+          <a:bodyPr>
+            <a:normAutofit fontScale="25000" lnSpcReduction="20000"/>
+          </a:bodyPr>
+          <a:lstStyle/>
+          <a:p>
+            <a:pPr marL="0" indent="0">
+              <a:buNone/>
+            </a:pPr>
+            <a:r>
+              <a:rPr lang="ru-RU" sz="4400" b="1" u="sng" dirty="0" smtClean="0"/>
+              <a:t>Встроенные компоненты </a:t>
+            </a:r>
+            <a:r>
+              <a:rPr lang="ru-RU" sz="4400" b="1" u="sng" dirty="0" err="1" smtClean="0"/>
+              <a:t>Django</a:t>
+            </a:r>
+            <a:r>
+              <a:rPr lang="ru-RU" sz="4400" b="1" u="sng" dirty="0" smtClean="0"/>
+              <a:t> (</a:t>
+            </a:r>
+            <a:r>
+              <a:rPr lang="ru-RU" sz="4400" b="1" u="sng" dirty="0" err="1" smtClean="0"/>
+              <a:t>Core</a:t>
+            </a:r>
+            <a:r>
+              <a:rPr lang="ru-RU" sz="4400" b="1" u="sng" dirty="0" smtClean="0"/>
+              <a:t>)</a:t>
+            </a:r>
+          </a:p>
+          <a:p>
+            <a:endParaRPr lang="ru-RU" sz="4400" b="1" u="sng" dirty="0" smtClean="0"/>
+          </a:p>
+          <a:p>
+            <a:pPr marL="0" indent="0">
+              <a:buNone/>
+            </a:pPr>
+            <a:r>
+              <a:rPr lang="ru-RU" sz="4400" b="1" dirty="0" err="1" smtClean="0"/>
+              <a:t>Django</a:t>
+            </a:r>
+            <a:r>
+              <a:rPr lang="ru-RU" sz="4400" b="1" dirty="0" smtClean="0"/>
+              <a:t> </a:t>
+            </a:r>
+            <a:r>
+              <a:rPr lang="ru-RU" sz="4400" b="1" dirty="0" err="1" smtClean="0"/>
+              <a:t>Auth</a:t>
+            </a:r>
+            <a:r>
+              <a:rPr lang="ru-RU" sz="4400" b="1" dirty="0" smtClean="0"/>
+              <a:t> (</a:t>
+            </a:r>
+            <a:r>
+              <a:rPr lang="ru-RU" sz="4400" b="1" dirty="0" err="1" smtClean="0"/>
+              <a:t>django.contrib.auth</a:t>
+            </a:r>
+            <a:r>
+              <a:rPr lang="ru-RU" sz="4400" b="1" dirty="0" smtClean="0"/>
+              <a:t>):</a:t>
+            </a:r>
+          </a:p>
+          <a:p>
+            <a:pPr marL="0" indent="0">
+              <a:buNone/>
+            </a:pPr>
+            <a:r>
+              <a:rPr lang="ru-RU" sz="4400" b="1" dirty="0" smtClean="0"/>
+              <a:t>Зачем</a:t>
+            </a:r>
+            <a:r>
+              <a:rPr lang="ru-RU" sz="4400" dirty="0" smtClean="0"/>
+              <a:t>: Управление пользователями, сессиями, хеширование паролей и проверка прав доступа (например, разделение на обычных читателей и авторов).</a:t>
+            </a:r>
+          </a:p>
+          <a:p>
+            <a:pPr marL="0" indent="0">
+              <a:buNone/>
+            </a:pPr>
+            <a:r>
+              <a:rPr lang="ru-RU" sz="4400" b="1" dirty="0" err="1" smtClean="0"/>
+              <a:t>Django</a:t>
+            </a:r>
+            <a:r>
+              <a:rPr lang="ru-RU" sz="4400" b="1" dirty="0" smtClean="0"/>
+              <a:t> </a:t>
+            </a:r>
+            <a:r>
+              <a:rPr lang="ru-RU" sz="4400" b="1" dirty="0" err="1" smtClean="0"/>
+              <a:t>Admin</a:t>
+            </a:r>
+            <a:r>
+              <a:rPr lang="ru-RU" sz="4400" b="1" dirty="0" smtClean="0"/>
+              <a:t> (</a:t>
+            </a:r>
+            <a:r>
+              <a:rPr lang="ru-RU" sz="4400" b="1" dirty="0" err="1" smtClean="0"/>
+              <a:t>django.contrib.admin</a:t>
+            </a:r>
+            <a:r>
+              <a:rPr lang="ru-RU" sz="4400" b="1" dirty="0" smtClean="0"/>
+              <a:t>):</a:t>
+            </a:r>
+          </a:p>
+          <a:p>
+            <a:pPr marL="0" indent="0">
+              <a:buNone/>
+            </a:pPr>
+            <a:r>
+              <a:rPr lang="ru-RU" sz="4400" b="1" dirty="0" smtClean="0"/>
+              <a:t>Зачем</a:t>
+            </a:r>
+            <a:r>
+              <a:rPr lang="ru-RU" sz="4400" dirty="0" smtClean="0"/>
+              <a:t>: Готовая панель управления для авторов и редакторов. Позволяет быстро добавлять, редактировать и удалять статьи без написания дополнительного кода.</a:t>
+            </a:r>
+          </a:p>
+          <a:p>
+            <a:endParaRPr lang="ru-RU" sz="4400" dirty="0"/>
+          </a:p>
+          <a:p>
+            <a:pPr marL="0" indent="0">
+              <a:buNone/>
+            </a:pPr>
+            <a:r>
+              <a:rPr lang="ru-RU" sz="4400" b="1" dirty="0" err="1"/>
+              <a:t>Django</a:t>
+            </a:r>
+            <a:r>
+              <a:rPr lang="ru-RU" sz="4400" b="1" dirty="0"/>
+              <a:t> ORM</a:t>
+            </a:r>
+            <a:r>
+              <a:rPr lang="ru-RU" sz="4400" dirty="0"/>
+              <a:t> — это «переводчик» между миром </a:t>
+            </a:r>
+            <a:r>
+              <a:rPr lang="ru-RU" sz="4400" dirty="0" err="1"/>
+              <a:t>Python</a:t>
+            </a:r>
+            <a:r>
+              <a:rPr lang="ru-RU" sz="4400" dirty="0"/>
+              <a:t> (объектами) и миром баз данных (таблицами SQL). Благодаря ему вам не нужно писать сложные SQL-запросы вручную</a:t>
+            </a:r>
+            <a:r>
+              <a:rPr lang="ru-RU" sz="4400" dirty="0" smtClean="0"/>
+              <a:t>.</a:t>
+            </a:r>
+          </a:p>
+          <a:p>
+            <a:pPr marL="0" indent="0">
+              <a:buNone/>
+            </a:pPr>
+            <a:r>
+              <a:rPr lang="ru-RU" sz="4400" b="1" dirty="0"/>
+              <a:t>Зачем</a:t>
+            </a:r>
+            <a:r>
+              <a:rPr lang="ru-RU" sz="4400" dirty="0"/>
+              <a:t>: Взаимодействие с базой данных (</a:t>
+            </a:r>
+            <a:r>
+              <a:rPr lang="ru-RU" sz="4400" dirty="0" err="1"/>
+              <a:t>SQLite</a:t>
+            </a:r>
+            <a:r>
+              <a:rPr lang="ru-RU" sz="4400" dirty="0"/>
+              <a:t>/</a:t>
+            </a:r>
+            <a:r>
+              <a:rPr lang="ru-RU" sz="4400" dirty="0" err="1"/>
+              <a:t>PostgreSQL</a:t>
+            </a:r>
+            <a:r>
+              <a:rPr lang="ru-RU" sz="4400" dirty="0"/>
+              <a:t>) на языке </a:t>
+            </a:r>
+            <a:r>
+              <a:rPr lang="ru-RU" sz="4400" dirty="0" err="1"/>
+              <a:t>Python</a:t>
+            </a:r>
+            <a:r>
+              <a:rPr lang="ru-RU" sz="4400" dirty="0"/>
+              <a:t>. Используется для сложных запросов фильтрации и сортировки статей.</a:t>
+            </a:r>
+          </a:p>
+          <a:p>
+            <a:pPr marL="338138" indent="0">
+              <a:buNone/>
+            </a:pPr>
+            <a:endParaRPr lang="ru-RU" sz="4400" dirty="0"/>
+          </a:p>
+          <a:p>
+            <a:pPr marL="625475">
+              <a:buNone/>
+            </a:pPr>
+            <a:r>
+              <a:rPr lang="ru-RU" sz="4400" b="1" dirty="0" smtClean="0"/>
+              <a:t>1</a:t>
+            </a:r>
+            <a:r>
+              <a:rPr lang="ru-RU" sz="4400" b="1" dirty="0"/>
+              <a:t>. Модели вместо таблиц</a:t>
+            </a:r>
+          </a:p>
+          <a:p>
+            <a:pPr marL="625475">
+              <a:buNone/>
+            </a:pPr>
+            <a:r>
+              <a:rPr lang="ru-RU" sz="4400" dirty="0" smtClean="0"/>
+              <a:t>     Вместо </a:t>
+            </a:r>
+            <a:r>
+              <a:rPr lang="ru-RU" sz="4400" dirty="0"/>
+              <a:t>того чтобы создавать таблицы в базе через консоль, </a:t>
+            </a:r>
+            <a:r>
+              <a:rPr lang="ru-RU" sz="4400" dirty="0" smtClean="0"/>
+              <a:t>мы описываем </a:t>
+            </a:r>
+            <a:r>
+              <a:rPr lang="ru-RU" sz="4400" dirty="0"/>
+              <a:t>их в models.py.</a:t>
+            </a:r>
+          </a:p>
+          <a:p>
+            <a:pPr marL="625475">
+              <a:buNone/>
+            </a:pPr>
+            <a:r>
+              <a:rPr lang="ru-RU" sz="4400" b="1" dirty="0" smtClean="0"/>
+              <a:t>     Пример</a:t>
+            </a:r>
+            <a:r>
+              <a:rPr lang="ru-RU" sz="4400" b="1" dirty="0"/>
+              <a:t>:</a:t>
+            </a:r>
+            <a:r>
+              <a:rPr lang="ru-RU" sz="4400" dirty="0"/>
+              <a:t> </a:t>
+            </a:r>
+            <a:r>
+              <a:rPr lang="ru-RU" sz="4400" dirty="0" smtClean="0"/>
+              <a:t>класс</a:t>
+            </a:r>
+            <a:r>
+              <a:rPr lang="ru-RU" sz="4400" dirty="0"/>
+              <a:t> </a:t>
+            </a:r>
+            <a:r>
+              <a:rPr lang="ru-RU" sz="4400" dirty="0" err="1"/>
+              <a:t>Article</a:t>
+            </a:r>
+            <a:r>
+              <a:rPr lang="ru-RU" sz="4400" dirty="0"/>
+              <a:t> — это будущая таблица в БД. Каждое поле (</a:t>
+            </a:r>
+            <a:r>
+              <a:rPr lang="ru-RU" sz="4400" dirty="0" err="1"/>
+              <a:t>title</a:t>
+            </a:r>
+            <a:r>
+              <a:rPr lang="ru-RU" sz="4400" dirty="0"/>
+              <a:t>, </a:t>
+            </a:r>
+            <a:r>
+              <a:rPr lang="ru-RU" sz="4400" dirty="0" err="1"/>
+              <a:t>content</a:t>
+            </a:r>
+            <a:r>
+              <a:rPr lang="ru-RU" sz="4400" dirty="0"/>
+              <a:t>) — это колонка в этой таблице</a:t>
+            </a:r>
+            <a:r>
+              <a:rPr lang="ru-RU" sz="4400" dirty="0" smtClean="0"/>
+              <a:t>.</a:t>
+            </a:r>
+          </a:p>
+          <a:p>
+            <a:pPr marL="625475">
+              <a:buNone/>
+            </a:pPr>
+            <a:endParaRPr lang="ru-RU" sz="4400" dirty="0"/>
+          </a:p>
+          <a:p>
+            <a:pPr marL="625475">
+              <a:buNone/>
+            </a:pPr>
+            <a:r>
+              <a:rPr lang="ru-RU" sz="4400" b="1" dirty="0" smtClean="0"/>
+              <a:t>2</a:t>
+            </a:r>
+            <a:r>
+              <a:rPr lang="ru-RU" sz="4400" b="1" dirty="0"/>
+              <a:t>. </a:t>
+            </a:r>
+            <a:r>
+              <a:rPr lang="ru-RU" sz="4400" b="1" dirty="0" err="1"/>
+              <a:t>Python</a:t>
+            </a:r>
+            <a:r>
+              <a:rPr lang="ru-RU" sz="4400" b="1" dirty="0"/>
+              <a:t>-синтаксис вместо SQL</a:t>
+            </a:r>
+          </a:p>
+          <a:p>
+            <a:pPr marL="625475">
+              <a:buNone/>
+            </a:pPr>
+            <a:r>
+              <a:rPr lang="ru-RU" sz="4400" dirty="0" smtClean="0"/>
+              <a:t>    ORM </a:t>
+            </a:r>
+            <a:r>
+              <a:rPr lang="ru-RU" sz="4400" dirty="0"/>
+              <a:t>позволяет манипулировать данными с помощью обычных методов </a:t>
+            </a:r>
+            <a:r>
+              <a:rPr lang="ru-RU" sz="4400" dirty="0" err="1"/>
+              <a:t>Python</a:t>
+            </a:r>
+            <a:r>
+              <a:rPr lang="ru-RU" sz="4400" dirty="0" smtClean="0"/>
+              <a:t>.</a:t>
+            </a:r>
+          </a:p>
+          <a:p>
+            <a:pPr marL="625475">
+              <a:buNone/>
+            </a:pPr>
+            <a:endParaRPr lang="ru-RU" sz="4400" dirty="0"/>
+          </a:p>
+          <a:p>
+            <a:pPr marL="625475">
+              <a:buNone/>
+            </a:pPr>
+            <a:r>
+              <a:rPr lang="ru-RU" sz="4400" b="1" dirty="0" smtClean="0"/>
+              <a:t>3</a:t>
+            </a:r>
+            <a:r>
+              <a:rPr lang="ru-RU" sz="4400" b="1" dirty="0"/>
+              <a:t>. Работа со связями (</a:t>
+            </a:r>
+            <a:r>
+              <a:rPr lang="ru-RU" sz="4400" b="1" dirty="0" err="1"/>
+              <a:t>Relationships</a:t>
+            </a:r>
+            <a:r>
+              <a:rPr lang="ru-RU" sz="4400" b="1" dirty="0"/>
+              <a:t>)</a:t>
+            </a:r>
+          </a:p>
+          <a:p>
+            <a:pPr marL="625475">
+              <a:buNone/>
+            </a:pPr>
+            <a:r>
+              <a:rPr lang="ru-RU" sz="4400" dirty="0" smtClean="0"/>
+              <a:t>    Это </a:t>
+            </a:r>
+            <a:r>
+              <a:rPr lang="ru-RU" sz="4400" dirty="0"/>
+              <a:t>самая мощная часть ORM. Она связывает разные таблицы между собой:</a:t>
+            </a:r>
+          </a:p>
+          <a:p>
+            <a:pPr marL="625475">
+              <a:buNone/>
+            </a:pPr>
+            <a:r>
+              <a:rPr lang="ru-RU" sz="4400" b="1" dirty="0" smtClean="0"/>
+              <a:t>    </a:t>
+            </a:r>
+            <a:r>
+              <a:rPr lang="ru-RU" sz="4400" b="1" dirty="0" err="1" smtClean="0"/>
+              <a:t>ForeignKey</a:t>
+            </a:r>
+            <a:r>
+              <a:rPr lang="ru-RU" sz="4400" dirty="0"/>
+              <a:t>: Связывает статью с автором (</a:t>
+            </a:r>
+            <a:r>
+              <a:rPr lang="ru-RU" sz="4400" dirty="0" err="1"/>
+              <a:t>User</a:t>
+            </a:r>
+            <a:r>
+              <a:rPr lang="ru-RU" sz="4400" dirty="0"/>
+              <a:t>). Вы можете легко получить автора статьи: </a:t>
+            </a:r>
+            <a:r>
+              <a:rPr lang="ru-RU" sz="4400" dirty="0" err="1"/>
+              <a:t>article.author.username</a:t>
+            </a:r>
+            <a:r>
+              <a:rPr lang="ru-RU" sz="4400" dirty="0"/>
+              <a:t>.</a:t>
+            </a:r>
+          </a:p>
+          <a:p>
+            <a:pPr marL="625475">
+              <a:buNone/>
+            </a:pPr>
+            <a:r>
+              <a:rPr lang="ru-RU" sz="4400" b="1" dirty="0" smtClean="0"/>
+              <a:t>    </a:t>
+            </a:r>
+            <a:r>
+              <a:rPr lang="ru-RU" sz="4400" b="1" dirty="0" err="1" smtClean="0"/>
+              <a:t>ManyToManyField</a:t>
+            </a:r>
+            <a:r>
+              <a:rPr lang="ru-RU" sz="4400" dirty="0"/>
+              <a:t>: Связывает статью с тегами. Одна статья может иметь много тегов, и один тег может быть у </a:t>
+            </a:r>
+            <a:r>
+              <a:rPr lang="ru-RU" sz="4400" dirty="0" smtClean="0"/>
+              <a:t>многих статей</a:t>
+            </a:r>
+            <a:r>
+              <a:rPr lang="ru-RU" sz="4400" dirty="0"/>
+              <a:t>.</a:t>
+            </a:r>
+          </a:p>
+          <a:p>
+            <a:pPr marL="625475"/>
+            <a:endParaRPr lang="ru-RU" sz="4400" dirty="0"/>
+          </a:p>
+          <a:p>
+            <a:pPr marL="625475">
+              <a:buNone/>
+            </a:pPr>
+            <a:r>
+              <a:rPr lang="ru-RU" sz="4400" b="1" dirty="0"/>
+              <a:t>4. Миграции: Контроль версий </a:t>
+            </a:r>
+            <a:r>
+              <a:rPr lang="ru-RU" sz="4400" b="1" dirty="0" smtClean="0"/>
+              <a:t>базы</a:t>
+            </a:r>
+          </a:p>
+          <a:p>
+            <a:pPr marL="625475">
+              <a:buNone/>
+            </a:pPr>
+            <a:endParaRPr lang="ru-RU" sz="4400" b="1" dirty="0"/>
+          </a:p>
+          <a:p>
+            <a:pPr marL="625475"/>
+            <a:endParaRPr lang="ru-RU" sz="4400" dirty="0" smtClean="0"/>
+          </a:p>
+          <a:p>
+            <a:pPr marL="0" indent="0">
+              <a:buNone/>
+            </a:pPr>
+            <a:r>
+              <a:rPr lang="ru-RU" sz="4400" b="1" dirty="0" err="1" smtClean="0"/>
+              <a:t>Pagination</a:t>
+            </a:r>
+            <a:r>
+              <a:rPr lang="ru-RU" sz="4400" b="1" dirty="0" smtClean="0"/>
+              <a:t> (</a:t>
+            </a:r>
+            <a:r>
+              <a:rPr lang="ru-RU" sz="4400" b="1" dirty="0" err="1" smtClean="0"/>
+              <a:t>django.core.paginator</a:t>
+            </a:r>
+            <a:r>
+              <a:rPr lang="ru-RU" sz="4400" b="1" dirty="0" smtClean="0"/>
+              <a:t>):</a:t>
+            </a:r>
+          </a:p>
+          <a:p>
+            <a:pPr marL="0" indent="0">
+              <a:buNone/>
+            </a:pPr>
+            <a:r>
+              <a:rPr lang="ru-RU" sz="4400" b="1" dirty="0" smtClean="0"/>
+              <a:t>Зачем</a:t>
+            </a:r>
+            <a:r>
+              <a:rPr lang="ru-RU" sz="4400" dirty="0" smtClean="0"/>
+              <a:t>: Разделение длинного списка новостей на страницы , что бы сайт не «тормозил» при наличии сотен статей.</a:t>
+            </a:r>
+          </a:p>
+          <a:p>
+            <a:endParaRPr lang="ru-RU" dirty="0"/>
+          </a:p>
+        </p:txBody>
+      </p:sp>
+    </p:spTree>
+    <p:extLst>
+      <p:ext uri="{BB962C8B-B14F-4D97-AF65-F5344CB8AC3E}">
+        <p14:creationId xmlns:p14="http://schemas.microsoft.com/office/powerpoint/2010/main" val="2216550114"/>
+      </p:ext>
+    </p:extLst>
+  </p:cSld>
+  <p:clrMapOvr>
+    <a:masterClrMapping/>
+  </p:clrMapOvr>
+  <p:timing>
+    <p:tnLst>
+      <p:par>
+        <p:cTn id="1" dur="indefinite" restart="never" nodeType="tmRoot"/>
+      </p:par>
+    </p:tnLst>
+  </p:timing>
+</p:sld>
+</file>
+
+<file path=ppt/slides/slide8.xml><?xml version="1.0" encoding="utf-8"?>
+<p:sld xmlns:a="http://schemas.openxmlformats.org/drawingml/2006/main" xmlns:r="http://schemas.openxmlformats.org/officeDocument/2006/relationships" xmlns:p="http://schemas.openxmlformats.org/presentationml/2006/main">
+  <p:cSld>
+    <p:spTree>
+      <p:nvGrpSpPr>
+        <p:cNvPr id="1" name=""/>
+        <p:cNvGrpSpPr/>
+        <p:nvPr/>
+      </p:nvGrpSpPr>
+      <p:grpSpPr>
+        <a:xfrm>
+          <a:off x="0" y="0"/>
+          <a:ext cx="0" cy="0"/>
+          <a:chOff x="0" y="0"/>
+          <a:chExt cx="0" cy="0"/>
+        </a:xfrm>
+      </p:grpSpPr>
+      <p:sp>
+        <p:nvSpPr>
+          <p:cNvPr id="2" name="Заголовок 1"/>
+          <p:cNvSpPr>
+            <a:spLocks noGrp="1"/>
+          </p:cNvSpPr>
+          <p:nvPr>
+            <p:ph type="title"/>
+          </p:nvPr>
+        </p:nvSpPr>
+        <p:spPr/>
+        <p:txBody>
+          <a:bodyPr>
+            <a:normAutofit fontScale="90000"/>
+          </a:bodyPr>
+          <a:lstStyle/>
+          <a:p>
+            <a:r>
+              <a:rPr lang="ru-RU" dirty="0"/>
+              <a:t>Безопасность и защита </a:t>
+            </a:r>
+            <a:r>
+              <a:rPr lang="ru-RU" dirty="0" err="1"/>
+              <a:t>бэкенда</a:t>
+            </a:r>
+            <a:endParaRPr lang="ru-RU" dirty="0"/>
+          </a:p>
+        </p:txBody>
+      </p:sp>
+      <p:sp>
+        <p:nvSpPr>
+          <p:cNvPr id="3" name="Объект 2"/>
+          <p:cNvSpPr>
+            <a:spLocks noGrp="1"/>
+          </p:cNvSpPr>
+          <p:nvPr>
+            <p:ph idx="1"/>
+          </p:nvPr>
+        </p:nvSpPr>
+        <p:spPr/>
+        <p:txBody>
+          <a:bodyPr>
+            <a:normAutofit fontScale="85000" lnSpcReduction="20000"/>
+          </a:bodyPr>
+          <a:lstStyle/>
+          <a:p>
+            <a:r>
+              <a:rPr lang="ru-RU" b="1" dirty="0"/>
+              <a:t>Скрытие админ-панели:</a:t>
+            </a:r>
+            <a:r>
+              <a:rPr lang="ru-RU" dirty="0"/>
+              <a:t> Полное отключение стандартного пути /</a:t>
+            </a:r>
+            <a:r>
+              <a:rPr lang="ru-RU" dirty="0" err="1"/>
+              <a:t>admin</a:t>
+            </a:r>
+            <a:r>
+              <a:rPr lang="ru-RU" dirty="0"/>
+              <a:t>/ (404 ошибка для ботов). Доступ перенесен на </a:t>
+            </a:r>
+            <a:r>
+              <a:rPr lang="ru-RU" dirty="0" err="1"/>
+              <a:t>кастомный</a:t>
+            </a:r>
+            <a:r>
+              <a:rPr lang="ru-RU" dirty="0"/>
+              <a:t> защищенный </a:t>
+            </a:r>
+            <a:r>
+              <a:rPr lang="ru-RU" dirty="0" smtClean="0"/>
+              <a:t>URL. Защита входа секретным словом.</a:t>
+            </a:r>
+            <a:endParaRPr lang="ru-RU" dirty="0"/>
+          </a:p>
+          <a:p>
+            <a:r>
+              <a:rPr lang="ru-RU" b="1" dirty="0"/>
+              <a:t>Криптография «из коробки»:</a:t>
+            </a:r>
+            <a:r>
+              <a:rPr lang="ru-RU" dirty="0"/>
+              <a:t> </a:t>
+            </a:r>
+            <a:r>
+              <a:rPr lang="ru-RU" dirty="0" err="1"/>
+              <a:t>Хэширование</a:t>
+            </a:r>
+            <a:r>
+              <a:rPr lang="ru-RU" dirty="0"/>
+              <a:t> паролей по стандарту </a:t>
+            </a:r>
+            <a:r>
+              <a:rPr lang="ru-RU" b="1" dirty="0"/>
+              <a:t>PBKDF2 + SHA256</a:t>
+            </a:r>
+            <a:r>
+              <a:rPr lang="ru-RU" dirty="0"/>
+              <a:t>. В базе данных хранятся только необратимые математические </a:t>
+            </a:r>
+            <a:r>
+              <a:rPr lang="ru-RU" dirty="0" err="1"/>
+              <a:t>хэши</a:t>
+            </a:r>
+            <a:r>
+              <a:rPr lang="ru-RU" dirty="0"/>
+              <a:t>, а не чистые пароли.</a:t>
+            </a:r>
+          </a:p>
+          <a:p>
+            <a:r>
+              <a:rPr lang="ru-RU" b="1" dirty="0"/>
+              <a:t>Контроль сессий:</a:t>
+            </a:r>
+            <a:r>
+              <a:rPr lang="ru-RU" dirty="0"/>
+              <a:t> Защита от CSRF-атак на всех формах и моментальное уничтожение сессии при выходе пользователя из системы.</a:t>
+            </a:r>
+          </a:p>
+          <a:p>
+            <a:endParaRPr lang="ru-RU" dirty="0"/>
+          </a:p>
+        </p:txBody>
+      </p:sp>
+      <p:pic>
+        <p:nvPicPr>
+          <p:cNvPr id="1027" name="Picture 3"/>
+          <p:cNvPicPr>
+            <a:picLocks noChangeAspect="1" noChangeArrowheads="1"/>
+          </p:cNvPicPr>
+          <p:nvPr/>
+        </p:nvPicPr>
+        <p:blipFill>
+          <a:blip r:embed="rId2">
+            <a:extLst>
+              <a:ext uri="{28A0092B-C50C-407E-A947-70E740481C1C}">
+                <a14:useLocalDpi xmlns:a14="http://schemas.microsoft.com/office/drawing/2010/main" val="0"/>
+              </a:ext>
+            </a:extLst>
+          </a:blip>
+          <a:srcRect/>
+          <a:stretch>
+            <a:fillRect/>
+          </a:stretch>
+        </p:blipFill>
+        <p:spPr bwMode="auto">
+          <a:xfrm>
+            <a:off x="2915817" y="2981656"/>
+            <a:ext cx="3312368" cy="400488"/>
+          </a:xfrm>
+          <a:prstGeom prst="rect">
+            <a:avLst/>
+          </a:prstGeom>
+          <a:noFill/>
+          <a:ln>
+            <a:noFill/>
+          </a:ln>
+          <a:effectLst/>
+          <a:extLst>
+            <a:ext uri="{909E8E84-426E-40DD-AFC4-6F175D3DCCD1}">
+              <a14:hiddenFill xmlns:a14="http://schemas.microsoft.com/office/drawing/2010/main">
+                <a:solidFill>
+                  <a:schemeClr val="accent1"/>
+                </a:solidFill>
+              </a14:hiddenFill>
+            </a:ext>
+            <a:ext uri="{91240B29-F687-4F45-9708-019B960494DF}">
+              <a14:hiddenLine xmlns:a14="http://schemas.microsoft.com/office/drawing/2010/main" w="9525">
+                <a:solidFill>
+                  <a:schemeClr val="tx1"/>
+                </a:solidFill>
+                <a:miter lim="800000"/>
+                <a:headEnd/>
+                <a:tailEnd/>
+              </a14:hiddenLine>
+            </a:ext>
+            <a:ext uri="{AF507438-7753-43E0-B8FC-AC1667EBCBE1}">
+              <a14:hiddenEffects xmlns:a14="http://schemas.microsoft.com/office/drawing/2010/main">
+                <a:effectLst>
+                  <a:outerShdw dist="35921" dir="2700000" algn="ctr" rotWithShape="0">
+                    <a:schemeClr val="bg2"/>
+                  </a:outerShdw>
+                </a:effectLst>
+              </a14:hiddenEffects>
+            </a:ext>
+          </a:extLst>
+        </p:spPr>
+      </p:pic>
+    </p:spTree>
+    <p:extLst>
+      <p:ext uri="{BB962C8B-B14F-4D97-AF65-F5344CB8AC3E}">
+        <p14:creationId xmlns:p14="http://schemas.microsoft.com/office/powerpoint/2010/main" val="1264686583"/>
+      </p:ext>
+    </p:extLst>
+  </p:cSld>
+  <p:clrMapOvr>
+    <a:masterClrMapping/>
+  </p:clrMapOvr>
+</p:sld>
+</file>
+
+<file path=ppt/slides/slide9.xml><?xml version="1.0" encoding="utf-8"?>
+<p:sld xmlns:a="http://schemas.openxmlformats.org/drawingml/2006/main" xmlns:r="http://schemas.openxmlformats.org/officeDocument/2006/relationships" xmlns:p="http://schemas.openxmlformats.org/presentationml/2006/main">
+  <p:cSld>
+    <p:spTree>
+      <p:nvGrpSpPr>
+        <p:cNvPr id="1" name=""/>
+        <p:cNvGrpSpPr/>
+        <p:nvPr/>
+      </p:nvGrpSpPr>
+      <p:grpSpPr>
+        <a:xfrm>
+          <a:off x="0" y="0"/>
+          <a:ext cx="0" cy="0"/>
+          <a:chOff x="0" y="0"/>
+          <a:chExt cx="0" cy="0"/>
+        </a:xfrm>
+      </p:grpSpPr>
+      <p:sp>
+        <p:nvSpPr>
+          <p:cNvPr id="2" name="Заголовок 1"/>
+          <p:cNvSpPr>
+            <a:spLocks noGrp="1"/>
+          </p:cNvSpPr>
+          <p:nvPr>
+            <p:ph type="title"/>
+          </p:nvPr>
+        </p:nvSpPr>
+        <p:spPr/>
+        <p:txBody>
+          <a:bodyPr>
+            <a:normAutofit fontScale="90000"/>
+          </a:bodyPr>
+          <a:lstStyle/>
+          <a:p>
+            <a:r>
+              <a:rPr lang="ru-RU" dirty="0" err="1"/>
+              <a:t>Кастомная</a:t>
+            </a:r>
+            <a:r>
+              <a:rPr lang="ru-RU" dirty="0"/>
+              <a:t> система регистрации (UX/UI &amp; </a:t>
+            </a:r>
+            <a:r>
+              <a:rPr lang="ru-RU" dirty="0" err="1"/>
+              <a:t>Валидация</a:t>
+            </a:r>
+            <a:r>
+              <a:rPr lang="ru-RU" dirty="0"/>
+              <a:t>)</a:t>
+            </a:r>
+          </a:p>
+        </p:txBody>
+      </p:sp>
+      <p:sp>
+        <p:nvSpPr>
+          <p:cNvPr id="3" name="Объект 2"/>
+          <p:cNvSpPr>
+            <a:spLocks noGrp="1"/>
+          </p:cNvSpPr>
+          <p:nvPr>
+            <p:ph idx="1"/>
+          </p:nvPr>
+        </p:nvSpPr>
+        <p:spPr/>
+        <p:txBody>
+          <a:bodyPr>
+            <a:normAutofit fontScale="85000" lnSpcReduction="20000"/>
+          </a:bodyPr>
+          <a:lstStyle/>
+          <a:p>
+            <a:r>
+              <a:rPr lang="ru-RU" b="1" dirty="0"/>
+              <a:t>Поддержка кириллицы:</a:t>
+            </a:r>
+            <a:r>
+              <a:rPr lang="ru-RU" dirty="0"/>
+              <a:t> Реализована форма </a:t>
+            </a:r>
+            <a:r>
+              <a:rPr lang="ru-RU" dirty="0" err="1"/>
+              <a:t>CyrillicUserCreationForm</a:t>
+            </a:r>
+            <a:r>
+              <a:rPr lang="ru-RU" dirty="0"/>
+              <a:t>, позволяющая пользователям регистрироваться под русскоязычными именами без конфликтов с </a:t>
+            </a:r>
+            <a:r>
+              <a:rPr lang="ru-RU" dirty="0" err="1"/>
+              <a:t>бэкендом.</a:t>
+            </a:r>
+            <a:r>
+              <a:rPr lang="ru-RU" b="1" dirty="0" err="1"/>
+              <a:t>Многоуровневая</a:t>
+            </a:r>
+            <a:r>
+              <a:rPr lang="ru-RU" b="1" dirty="0"/>
+              <a:t> </a:t>
+            </a:r>
+            <a:r>
+              <a:rPr lang="ru-RU" b="1" dirty="0" err="1"/>
+              <a:t>валидация</a:t>
+            </a:r>
+            <a:r>
+              <a:rPr lang="ru-RU" b="1" dirty="0"/>
+              <a:t>:</a:t>
+            </a:r>
+            <a:r>
+              <a:rPr lang="ru-RU" dirty="0"/>
+              <a:t> Комбинация </a:t>
+            </a:r>
+            <a:r>
+              <a:rPr lang="ru-RU" dirty="0" err="1"/>
+              <a:t>JavaScript</a:t>
+            </a:r>
+            <a:r>
+              <a:rPr lang="ru-RU" dirty="0"/>
+              <a:t> (</a:t>
+            </a:r>
+            <a:r>
+              <a:rPr lang="ru-RU" dirty="0" err="1"/>
+              <a:t>фронтенд</a:t>
+            </a:r>
+            <a:r>
+              <a:rPr lang="ru-RU" dirty="0"/>
+              <a:t>) и </a:t>
+            </a:r>
+            <a:r>
+              <a:rPr lang="ru-RU" dirty="0" err="1"/>
+              <a:t>Django</a:t>
+            </a:r>
+            <a:r>
+              <a:rPr lang="ru-RU" dirty="0"/>
+              <a:t> (</a:t>
+            </a:r>
+            <a:r>
+              <a:rPr lang="ru-RU" dirty="0" err="1"/>
+              <a:t>бэкенд</a:t>
+            </a:r>
+            <a:r>
+              <a:rPr lang="ru-RU" dirty="0"/>
+              <a:t>) для контроля сложности пароля (от 8 символов, заглавные буквы, цифры).</a:t>
+            </a:r>
+            <a:r>
+              <a:rPr lang="ru-RU" b="1" dirty="0"/>
+              <a:t>Интеграция с браузером:</a:t>
+            </a:r>
+            <a:r>
+              <a:rPr lang="ru-RU" dirty="0"/>
+              <a:t> Использование атрибутов </a:t>
+            </a:r>
+            <a:r>
+              <a:rPr lang="ru-RU" dirty="0" err="1"/>
+              <a:t>autocomplete</a:t>
+            </a:r>
+            <a:r>
+              <a:rPr lang="ru-RU" dirty="0"/>
+              <a:t> для корректной работы системных менеджеров паролей (</a:t>
+            </a:r>
+            <a:r>
+              <a:rPr lang="ru-RU" dirty="0" err="1"/>
+              <a:t>Chrome</a:t>
+            </a:r>
+            <a:r>
+              <a:rPr lang="ru-RU" dirty="0"/>
+              <a:t>/Яндекс браузер предлагают сохранение пароля).</a:t>
+            </a:r>
+          </a:p>
+        </p:txBody>
+      </p:sp>
+    </p:spTree>
+    <p:extLst>
+      <p:ext uri="{BB962C8B-B14F-4D97-AF65-F5344CB8AC3E}">
+        <p14:creationId xmlns:p14="http://schemas.microsoft.com/office/powerpoint/2010/main" val="2068893312"/>
+      </p:ext>
+    </p:extLst>
+  </p:cSld>
+  <p:clrMapOvr>
+    <a:masterClrMapping/>
+  </p:clrMapOvr>
 </p:sld>
 </file>
 

--- a/Новостной портал.pptx
+++ b/Новостной портал.pptx
@@ -21,6 +21,8 @@
     <p:sldId id="257" r:id="rId15"/>
     <p:sldId id="258" r:id="rId16"/>
     <p:sldId id="259" r:id="rId17"/>
+    <p:sldId id="275" r:id="rId18"/>
+    <p:sldId id="276" r:id="rId19"/>
   </p:sldIdLst>
   <p:sldSz cx="9144000" cy="6858000" type="screen4x3"/>
   <p:notesSz cx="6858000" cy="9144000"/>
@@ -329,7 +331,7 @@
           <a:p>
             <a:fld id="{0272CB1F-7F4B-480E-AFAD-C1D399D39E5F}" type="datetimeFigureOut">
               <a:rPr lang="ru-RU" smtClean="0"/>
-              <a:t>05.07.2026</a:t>
+              <a:t>11.07.2026</a:t>
             </a:fld>
             <a:endParaRPr lang="ru-RU"/>
           </a:p>
@@ -523,7 +525,7 @@
           <a:p>
             <a:fld id="{0272CB1F-7F4B-480E-AFAD-C1D399D39E5F}" type="datetimeFigureOut">
               <a:rPr lang="ru-RU" smtClean="0"/>
-              <a:t>05.07.2026</a:t>
+              <a:t>11.07.2026</a:t>
             </a:fld>
             <a:endParaRPr lang="ru-RU"/>
           </a:p>
@@ -711,7 +713,7 @@
           <a:p>
             <a:fld id="{0272CB1F-7F4B-480E-AFAD-C1D399D39E5F}" type="datetimeFigureOut">
               <a:rPr lang="ru-RU" smtClean="0"/>
-              <a:t>05.07.2026</a:t>
+              <a:t>11.07.2026</a:t>
             </a:fld>
             <a:endParaRPr lang="ru-RU"/>
           </a:p>
@@ -940,7 +942,7 @@
           <a:p>
             <a:fld id="{0272CB1F-7F4B-480E-AFAD-C1D399D39E5F}" type="datetimeFigureOut">
               <a:rPr lang="ru-RU" smtClean="0"/>
-              <a:t>05.07.2026</a:t>
+              <a:t>11.07.2026</a:t>
             </a:fld>
             <a:endParaRPr lang="ru-RU"/>
           </a:p>
@@ -1221,7 +1223,7 @@
           <a:p>
             <a:fld id="{0272CB1F-7F4B-480E-AFAD-C1D399D39E5F}" type="datetimeFigureOut">
               <a:rPr lang="ru-RU" smtClean="0"/>
-              <a:t>05.07.2026</a:t>
+              <a:t>11.07.2026</a:t>
             </a:fld>
             <a:endParaRPr lang="ru-RU"/>
           </a:p>
@@ -1509,7 +1511,7 @@
           <a:p>
             <a:fld id="{0272CB1F-7F4B-480E-AFAD-C1D399D39E5F}" type="datetimeFigureOut">
               <a:rPr lang="ru-RU" smtClean="0"/>
-              <a:t>05.07.2026</a:t>
+              <a:t>11.07.2026</a:t>
             </a:fld>
             <a:endParaRPr lang="ru-RU"/>
           </a:p>
@@ -2063,7 +2065,7 @@
           <a:p>
             <a:fld id="{0272CB1F-7F4B-480E-AFAD-C1D399D39E5F}" type="datetimeFigureOut">
               <a:rPr lang="ru-RU" smtClean="0"/>
-              <a:t>05.07.2026</a:t>
+              <a:t>11.07.2026</a:t>
             </a:fld>
             <a:endParaRPr lang="ru-RU"/>
           </a:p>
@@ -2194,7 +2196,7 @@
           <a:p>
             <a:fld id="{0272CB1F-7F4B-480E-AFAD-C1D399D39E5F}" type="datetimeFigureOut">
               <a:rPr lang="ru-RU" smtClean="0"/>
-              <a:t>05.07.2026</a:t>
+              <a:t>11.07.2026</a:t>
             </a:fld>
             <a:endParaRPr lang="ru-RU"/>
           </a:p>
@@ -2344,7 +2346,7 @@
           <a:p>
             <a:fld id="{0272CB1F-7F4B-480E-AFAD-C1D399D39E5F}" type="datetimeFigureOut">
               <a:rPr lang="ru-RU" smtClean="0"/>
-              <a:t>05.07.2026</a:t>
+              <a:t>11.07.2026</a:t>
             </a:fld>
             <a:endParaRPr lang="ru-RU"/>
           </a:p>
@@ -2665,7 +2667,7 @@
           <a:p>
             <a:fld id="{0272CB1F-7F4B-480E-AFAD-C1D399D39E5F}" type="datetimeFigureOut">
               <a:rPr lang="ru-RU" smtClean="0"/>
-              <a:t>05.07.2026</a:t>
+              <a:t>11.07.2026</a:t>
             </a:fld>
             <a:endParaRPr lang="ru-RU"/>
           </a:p>
@@ -2962,7 +2964,7 @@
           <a:p>
             <a:fld id="{0272CB1F-7F4B-480E-AFAD-C1D399D39E5F}" type="datetimeFigureOut">
               <a:rPr lang="ru-RU" smtClean="0"/>
-              <a:t>05.07.2026</a:t>
+              <a:t>11.07.2026</a:t>
             </a:fld>
             <a:endParaRPr lang="ru-RU"/>
           </a:p>
@@ -3207,7 +3209,7 @@
           <a:p>
             <a:fld id="{0272CB1F-7F4B-480E-AFAD-C1D399D39E5F}" type="datetimeFigureOut">
               <a:rPr lang="ru-RU" smtClean="0"/>
-              <a:t>05.07.2026</a:t>
+              <a:t>11.07.2026</a:t>
             </a:fld>
             <a:endParaRPr lang="ru-RU"/>
           </a:p>
@@ -3719,7 +3721,7 @@
             </a:r>
             <a:r>
               <a:rPr lang="ru-RU" b="1" dirty="0" smtClean="0"/>
-              <a:t>АСУТП с авторизацией</a:t>
+              <a:t>АСУТП </a:t>
             </a:r>
             <a:endParaRPr lang="ru-RU" dirty="0"/>
           </a:p>
@@ -5575,7 +5577,7 @@
       </p:sp>
       <p:pic>
         <p:nvPicPr>
-          <p:cNvPr id="7171" name="Picture 3"/>
+          <p:cNvPr id="1027" name="Picture 3"/>
           <p:cNvPicPr>
             <a:picLocks noChangeAspect="1" noChangeArrowheads="1"/>
           </p:cNvPicPr>
@@ -5596,8 +5598,8 @@
         </p:blipFill>
         <p:spPr bwMode="auto">
           <a:xfrm>
-            <a:off x="251520" y="2204864"/>
-            <a:ext cx="8341337" cy="3775125"/>
+            <a:off x="600722" y="1556792"/>
+            <a:ext cx="8075734" cy="4608512"/>
           </a:xfrm>
           <a:prstGeom prst="rect">
             <a:avLst/>
@@ -5641,6 +5643,312 @@
     <p:extLst>
       <p:ext uri="{BB962C8B-B14F-4D97-AF65-F5344CB8AC3E}">
         <p14:creationId xmlns:p14="http://schemas.microsoft.com/office/powerpoint/2010/main" val="3555227253"/>
+      </p:ext>
+    </p:extLst>
+  </p:cSld>
+  <p:clrMapOvr>
+    <a:masterClrMapping/>
+  </p:clrMapOvr>
+  <p:timing>
+    <p:tnLst>
+      <p:par>
+        <p:cTn id="1" dur="indefinite" restart="never" nodeType="tmRoot"/>
+      </p:par>
+    </p:tnLst>
+  </p:timing>
+</p:sld>
+</file>
+
+<file path=ppt/slides/slide17.xml><?xml version="1.0" encoding="utf-8"?>
+<p:sld xmlns:a="http://schemas.openxmlformats.org/drawingml/2006/main" xmlns:r="http://schemas.openxmlformats.org/officeDocument/2006/relationships" xmlns:p="http://schemas.openxmlformats.org/presentationml/2006/main">
+  <p:cSld>
+    <p:spTree>
+      <p:nvGrpSpPr>
+        <p:cNvPr id="1" name=""/>
+        <p:cNvGrpSpPr/>
+        <p:nvPr/>
+      </p:nvGrpSpPr>
+      <p:grpSpPr>
+        <a:xfrm>
+          <a:off x="0" y="0"/>
+          <a:ext cx="0" cy="0"/>
+          <a:chOff x="0" y="0"/>
+          <a:chExt cx="0" cy="0"/>
+        </a:xfrm>
+      </p:grpSpPr>
+      <p:sp>
+        <p:nvSpPr>
+          <p:cNvPr id="2" name="Заголовок 1"/>
+          <p:cNvSpPr>
+            <a:spLocks noGrp="1"/>
+          </p:cNvSpPr>
+          <p:nvPr>
+            <p:ph type="title"/>
+          </p:nvPr>
+        </p:nvSpPr>
+        <p:spPr/>
+        <p:txBody>
+          <a:bodyPr/>
+          <a:lstStyle/>
+          <a:p>
+            <a:r>
+              <a:rPr lang="ru-RU" dirty="0" smtClean="0"/>
+              <a:t>Вход в систему для </a:t>
+            </a:r>
+            <a:r>
+              <a:rPr lang="en-US" dirty="0" smtClean="0"/>
+              <a:t>admin</a:t>
+            </a:r>
+            <a:endParaRPr lang="ru-RU" dirty="0"/>
+          </a:p>
+        </p:txBody>
+      </p:sp>
+      <p:sp>
+        <p:nvSpPr>
+          <p:cNvPr id="3" name="Объект 2"/>
+          <p:cNvSpPr>
+            <a:spLocks noGrp="1"/>
+          </p:cNvSpPr>
+          <p:nvPr>
+            <p:ph idx="1"/>
+          </p:nvPr>
+        </p:nvSpPr>
+        <p:spPr/>
+        <p:txBody>
+          <a:bodyPr/>
+          <a:lstStyle/>
+          <a:p>
+            <a:endParaRPr lang="ru-RU" dirty="0" smtClean="0"/>
+          </a:p>
+          <a:p>
+            <a:endParaRPr lang="ru-RU" dirty="0"/>
+          </a:p>
+        </p:txBody>
+      </p:sp>
+      <p:pic>
+        <p:nvPicPr>
+          <p:cNvPr id="6" name="Picture 2"/>
+          <p:cNvPicPr>
+            <a:picLocks noChangeAspect="1" noChangeArrowheads="1"/>
+          </p:cNvPicPr>
+          <p:nvPr/>
+        </p:nvPicPr>
+        <p:blipFill>
+          <a:blip r:embed="rId2">
+            <a:extLst>
+              <a:ext uri="{28A0092B-C50C-407E-A947-70E740481C1C}">
+                <a14:useLocalDpi xmlns:a14="http://schemas.microsoft.com/office/drawing/2010/main" val="0"/>
+              </a:ext>
+            </a:extLst>
+          </a:blip>
+          <a:srcRect/>
+          <a:stretch>
+            <a:fillRect/>
+          </a:stretch>
+        </p:blipFill>
+        <p:spPr bwMode="auto">
+          <a:xfrm>
+            <a:off x="395536" y="1700808"/>
+            <a:ext cx="8064896" cy="4841479"/>
+          </a:xfrm>
+          <a:prstGeom prst="rect">
+            <a:avLst/>
+          </a:prstGeom>
+          <a:noFill/>
+          <a:ln>
+            <a:noFill/>
+          </a:ln>
+          <a:effectLst/>
+          <a:extLst>
+            <a:ext uri="{909E8E84-426E-40DD-AFC4-6F175D3DCCD1}">
+              <a14:hiddenFill xmlns:a14="http://schemas.microsoft.com/office/drawing/2010/main">
+                <a:solidFill>
+                  <a:schemeClr val="accent1"/>
+                </a:solidFill>
+              </a14:hiddenFill>
+            </a:ext>
+            <a:ext uri="{91240B29-F687-4F45-9708-019B960494DF}">
+              <a14:hiddenLine xmlns:a14="http://schemas.microsoft.com/office/drawing/2010/main" w="9525">
+                <a:solidFill>
+                  <a:schemeClr val="tx1"/>
+                </a:solidFill>
+                <a:miter lim="800000"/>
+                <a:headEnd/>
+                <a:tailEnd/>
+              </a14:hiddenLine>
+            </a:ext>
+            <a:ext uri="{AF507438-7753-43E0-B8FC-AC1667EBCBE1}">
+              <a14:hiddenEffects xmlns:a14="http://schemas.microsoft.com/office/drawing/2010/main">
+                <a:effectLst>
+                  <a:outerShdw dist="35921" dir="2700000" algn="ctr" rotWithShape="0">
+                    <a:schemeClr val="bg2"/>
+                  </a:outerShdw>
+                </a:effectLst>
+              </a14:hiddenEffects>
+            </a:ext>
+          </a:extLst>
+        </p:spPr>
+      </p:pic>
+    </p:spTree>
+    <p:extLst>
+      <p:ext uri="{BB962C8B-B14F-4D97-AF65-F5344CB8AC3E}">
+        <p14:creationId xmlns:p14="http://schemas.microsoft.com/office/powerpoint/2010/main" val="613919187"/>
+      </p:ext>
+    </p:extLst>
+  </p:cSld>
+  <p:clrMapOvr>
+    <a:masterClrMapping/>
+  </p:clrMapOvr>
+  <p:timing>
+    <p:tnLst>
+      <p:par>
+        <p:cTn id="1" dur="indefinite" restart="never" nodeType="tmRoot"/>
+      </p:par>
+    </p:tnLst>
+  </p:timing>
+</p:sld>
+</file>
+
+<file path=ppt/slides/slide18.xml><?xml version="1.0" encoding="utf-8"?>
+<p:sld xmlns:a="http://schemas.openxmlformats.org/drawingml/2006/main" xmlns:r="http://schemas.openxmlformats.org/officeDocument/2006/relationships" xmlns:p="http://schemas.openxmlformats.org/presentationml/2006/main">
+  <p:cSld>
+    <p:spTree>
+      <p:nvGrpSpPr>
+        <p:cNvPr id="1" name=""/>
+        <p:cNvGrpSpPr/>
+        <p:nvPr/>
+      </p:nvGrpSpPr>
+      <p:grpSpPr>
+        <a:xfrm>
+          <a:off x="0" y="0"/>
+          <a:ext cx="0" cy="0"/>
+          <a:chOff x="0" y="0"/>
+          <a:chExt cx="0" cy="0"/>
+        </a:xfrm>
+      </p:grpSpPr>
+      <p:sp>
+        <p:nvSpPr>
+          <p:cNvPr id="2" name="Заголовок 1"/>
+          <p:cNvSpPr>
+            <a:spLocks noGrp="1"/>
+          </p:cNvSpPr>
+          <p:nvPr>
+            <p:ph type="title"/>
+          </p:nvPr>
+        </p:nvSpPr>
+        <p:spPr/>
+        <p:txBody>
+          <a:bodyPr>
+            <a:normAutofit fontScale="90000"/>
+          </a:bodyPr>
+          <a:lstStyle/>
+          <a:p>
+            <a:r>
+              <a:rPr lang="ru-RU" dirty="0" smtClean="0"/>
+              <a:t>Вход в систему</a:t>
+            </a:r>
+            <a:r>
+              <a:rPr lang="en-US" dirty="0" smtClean="0"/>
+              <a:t> </a:t>
+            </a:r>
+            <a:r>
+              <a:rPr lang="ru-RU" dirty="0" smtClean="0"/>
+              <a:t>пользователей</a:t>
+            </a:r>
+            <a:endParaRPr lang="ru-RU" dirty="0"/>
+          </a:p>
+        </p:txBody>
+      </p:sp>
+      <p:sp>
+        <p:nvSpPr>
+          <p:cNvPr id="3" name="Объект 2"/>
+          <p:cNvSpPr>
+            <a:spLocks noGrp="1"/>
+          </p:cNvSpPr>
+          <p:nvPr>
+            <p:ph idx="1"/>
+          </p:nvPr>
+        </p:nvSpPr>
+        <p:spPr/>
+        <p:txBody>
+          <a:bodyPr/>
+          <a:lstStyle/>
+          <a:p>
+            <a:endParaRPr lang="ru-RU" dirty="0" smtClean="0"/>
+          </a:p>
+          <a:p>
+            <a:endParaRPr lang="ru-RU" dirty="0"/>
+          </a:p>
+        </p:txBody>
+      </p:sp>
+      <p:pic>
+        <p:nvPicPr>
+          <p:cNvPr id="2050" name="Picture 2"/>
+          <p:cNvPicPr>
+            <a:picLocks noChangeAspect="1" noChangeArrowheads="1"/>
+          </p:cNvPicPr>
+          <p:nvPr/>
+        </p:nvPicPr>
+        <p:blipFill>
+          <a:blip r:embed="rId2">
+            <a:extLst>
+              <a:ext uri="{28A0092B-C50C-407E-A947-70E740481C1C}">
+                <a14:useLocalDpi xmlns:a14="http://schemas.microsoft.com/office/drawing/2010/main" val="0"/>
+              </a:ext>
+            </a:extLst>
+          </a:blip>
+          <a:srcRect/>
+          <a:stretch>
+            <a:fillRect/>
+          </a:stretch>
+        </p:blipFill>
+        <p:spPr bwMode="auto">
+          <a:xfrm>
+            <a:off x="539552" y="2204864"/>
+            <a:ext cx="8136904" cy="4104456"/>
+          </a:xfrm>
+          <a:prstGeom prst="rect">
+            <a:avLst/>
+          </a:prstGeom>
+          <a:noFill/>
+          <a:ln>
+            <a:noFill/>
+          </a:ln>
+          <a:effectLst/>
+          <a:extLst>
+            <a:ext uri="{909E8E84-426E-40DD-AFC4-6F175D3DCCD1}">
+              <a14:hiddenFill xmlns:a14="http://schemas.microsoft.com/office/drawing/2010/main">
+                <a:solidFill>
+                  <a:schemeClr val="accent1"/>
+                </a:solidFill>
+              </a14:hiddenFill>
+            </a:ext>
+            <a:ext uri="{91240B29-F687-4F45-9708-019B960494DF}">
+              <a14:hiddenLine xmlns:a14="http://schemas.microsoft.com/office/drawing/2010/main" w="9525">
+                <a:solidFill>
+                  <a:schemeClr val="tx1"/>
+                </a:solidFill>
+                <a:miter lim="800000"/>
+                <a:headEnd/>
+                <a:tailEnd/>
+              </a14:hiddenLine>
+            </a:ext>
+            <a:ext uri="{AF507438-7753-43E0-B8FC-AC1667EBCBE1}">
+              <a14:hiddenEffects xmlns:a14="http://schemas.microsoft.com/office/drawing/2010/main">
+                <a:effectLst>
+                  <a:outerShdw dist="35921" dir="2700000" algn="ctr" rotWithShape="0">
+                    <a:schemeClr val="bg2"/>
+                  </a:outerShdw>
+                </a:effectLst>
+              </a14:hiddenEffects>
+            </a:ext>
+          </a:extLst>
+        </p:spPr>
+      </p:pic>
+    </p:spTree>
+    <p:extLst>
+      <p:ext uri="{BB962C8B-B14F-4D97-AF65-F5344CB8AC3E}">
+        <p14:creationId xmlns:p14="http://schemas.microsoft.com/office/powerpoint/2010/main" val="1556460092"/>
       </p:ext>
     </p:extLst>
   </p:cSld>
@@ -7568,6 +7876,13 @@
   <p:clrMapOvr>
     <a:masterClrMapping/>
   </p:clrMapOvr>
+  <p:timing>
+    <p:tnLst>
+      <p:par>
+        <p:cTn id="1" dur="indefinite" restart="never" nodeType="tmRoot"/>
+      </p:par>
+    </p:tnLst>
+  </p:timing>
 </p:sld>
 </file>
 
@@ -7750,6 +8065,13 @@
   <p:clrMapOvr>
     <a:masterClrMapping/>
   </p:clrMapOvr>
+  <p:timing>
+    <p:tnLst>
+      <p:par>
+        <p:cTn id="1" dur="indefinite" restart="never" nodeType="tmRoot"/>
+      </p:par>
+    </p:tnLst>
+  </p:timing>
 </p:sld>
 </file>
 

--- a/Новостной портал.pptx
+++ b/Новостной портал.pptx
@@ -12,17 +12,19 @@
     <p:sldId id="269" r:id="rId6"/>
     <p:sldId id="270" r:id="rId7"/>
     <p:sldId id="264" r:id="rId8"/>
-    <p:sldId id="273" r:id="rId9"/>
-    <p:sldId id="274" r:id="rId10"/>
-    <p:sldId id="271" r:id="rId11"/>
-    <p:sldId id="272" r:id="rId12"/>
-    <p:sldId id="265" r:id="rId13"/>
-    <p:sldId id="262" r:id="rId14"/>
-    <p:sldId id="257" r:id="rId15"/>
-    <p:sldId id="258" r:id="rId16"/>
-    <p:sldId id="259" r:id="rId17"/>
-    <p:sldId id="275" r:id="rId18"/>
-    <p:sldId id="276" r:id="rId19"/>
+    <p:sldId id="277" r:id="rId9"/>
+    <p:sldId id="278" r:id="rId10"/>
+    <p:sldId id="273" r:id="rId11"/>
+    <p:sldId id="274" r:id="rId12"/>
+    <p:sldId id="271" r:id="rId13"/>
+    <p:sldId id="272" r:id="rId14"/>
+    <p:sldId id="265" r:id="rId15"/>
+    <p:sldId id="262" r:id="rId16"/>
+    <p:sldId id="257" r:id="rId17"/>
+    <p:sldId id="258" r:id="rId18"/>
+    <p:sldId id="259" r:id="rId19"/>
+    <p:sldId id="275" r:id="rId20"/>
+    <p:sldId id="276" r:id="rId21"/>
   </p:sldIdLst>
   <p:sldSz cx="9144000" cy="6858000" type="screen4x3"/>
   <p:notesSz cx="6858000" cy="9144000"/>
@@ -331,7 +333,7 @@
           <a:p>
             <a:fld id="{0272CB1F-7F4B-480E-AFAD-C1D399D39E5F}" type="datetimeFigureOut">
               <a:rPr lang="ru-RU" smtClean="0"/>
-              <a:t>11.07.2026</a:t>
+              <a:t>25.07.2026</a:t>
             </a:fld>
             <a:endParaRPr lang="ru-RU"/>
           </a:p>
@@ -525,7 +527,7 @@
           <a:p>
             <a:fld id="{0272CB1F-7F4B-480E-AFAD-C1D399D39E5F}" type="datetimeFigureOut">
               <a:rPr lang="ru-RU" smtClean="0"/>
-              <a:t>11.07.2026</a:t>
+              <a:t>25.07.2026</a:t>
             </a:fld>
             <a:endParaRPr lang="ru-RU"/>
           </a:p>
@@ -713,7 +715,7 @@
           <a:p>
             <a:fld id="{0272CB1F-7F4B-480E-AFAD-C1D399D39E5F}" type="datetimeFigureOut">
               <a:rPr lang="ru-RU" smtClean="0"/>
-              <a:t>11.07.2026</a:t>
+              <a:t>25.07.2026</a:t>
             </a:fld>
             <a:endParaRPr lang="ru-RU"/>
           </a:p>
@@ -942,7 +944,7 @@
           <a:p>
             <a:fld id="{0272CB1F-7F4B-480E-AFAD-C1D399D39E5F}" type="datetimeFigureOut">
               <a:rPr lang="ru-RU" smtClean="0"/>
-              <a:t>11.07.2026</a:t>
+              <a:t>25.07.2026</a:t>
             </a:fld>
             <a:endParaRPr lang="ru-RU"/>
           </a:p>
@@ -1223,7 +1225,7 @@
           <a:p>
             <a:fld id="{0272CB1F-7F4B-480E-AFAD-C1D399D39E5F}" type="datetimeFigureOut">
               <a:rPr lang="ru-RU" smtClean="0"/>
-              <a:t>11.07.2026</a:t>
+              <a:t>25.07.2026</a:t>
             </a:fld>
             <a:endParaRPr lang="ru-RU"/>
           </a:p>
@@ -1511,7 +1513,7 @@
           <a:p>
             <a:fld id="{0272CB1F-7F4B-480E-AFAD-C1D399D39E5F}" type="datetimeFigureOut">
               <a:rPr lang="ru-RU" smtClean="0"/>
-              <a:t>11.07.2026</a:t>
+              <a:t>25.07.2026</a:t>
             </a:fld>
             <a:endParaRPr lang="ru-RU"/>
           </a:p>
@@ -2065,7 +2067,7 @@
           <a:p>
             <a:fld id="{0272CB1F-7F4B-480E-AFAD-C1D399D39E5F}" type="datetimeFigureOut">
               <a:rPr lang="ru-RU" smtClean="0"/>
-              <a:t>11.07.2026</a:t>
+              <a:t>25.07.2026</a:t>
             </a:fld>
             <a:endParaRPr lang="ru-RU"/>
           </a:p>
@@ -2196,7 +2198,7 @@
           <a:p>
             <a:fld id="{0272CB1F-7F4B-480E-AFAD-C1D399D39E5F}" type="datetimeFigureOut">
               <a:rPr lang="ru-RU" smtClean="0"/>
-              <a:t>11.07.2026</a:t>
+              <a:t>25.07.2026</a:t>
             </a:fld>
             <a:endParaRPr lang="ru-RU"/>
           </a:p>
@@ -2346,7 +2348,7 @@
           <a:p>
             <a:fld id="{0272CB1F-7F4B-480E-AFAD-C1D399D39E5F}" type="datetimeFigureOut">
               <a:rPr lang="ru-RU" smtClean="0"/>
-              <a:t>11.07.2026</a:t>
+              <a:t>25.07.2026</a:t>
             </a:fld>
             <a:endParaRPr lang="ru-RU"/>
           </a:p>
@@ -2667,7 +2669,7 @@
           <a:p>
             <a:fld id="{0272CB1F-7F4B-480E-AFAD-C1D399D39E5F}" type="datetimeFigureOut">
               <a:rPr lang="ru-RU" smtClean="0"/>
-              <a:t>11.07.2026</a:t>
+              <a:t>25.07.2026</a:t>
             </a:fld>
             <a:endParaRPr lang="ru-RU"/>
           </a:p>
@@ -2964,7 +2966,7 @@
           <a:p>
             <a:fld id="{0272CB1F-7F4B-480E-AFAD-C1D399D39E5F}" type="datetimeFigureOut">
               <a:rPr lang="ru-RU" smtClean="0"/>
-              <a:t>11.07.2026</a:t>
+              <a:t>25.07.2026</a:t>
             </a:fld>
             <a:endParaRPr lang="ru-RU"/>
           </a:p>
@@ -3209,7 +3211,7 @@
           <a:p>
             <a:fld id="{0272CB1F-7F4B-480E-AFAD-C1D399D39E5F}" type="datetimeFigureOut">
               <a:rPr lang="ru-RU" smtClean="0"/>
-              <a:t>11.07.2026</a:t>
+              <a:t>25.07.2026</a:t>
             </a:fld>
             <a:endParaRPr lang="ru-RU"/>
           </a:p>
@@ -3865,6 +3867,421 @@
             <p:ph type="title"/>
           </p:nvPr>
         </p:nvSpPr>
+        <p:spPr/>
+        <p:txBody>
+          <a:bodyPr>
+            <a:normAutofit fontScale="90000"/>
+          </a:bodyPr>
+          <a:lstStyle/>
+          <a:p>
+            <a:r>
+              <a:rPr lang="ru-RU" dirty="0"/>
+              <a:t>Безопасность и защита </a:t>
+            </a:r>
+            <a:r>
+              <a:rPr lang="ru-RU" dirty="0" err="1"/>
+              <a:t>бэкенда</a:t>
+            </a:r>
+            <a:endParaRPr lang="ru-RU" dirty="0"/>
+          </a:p>
+        </p:txBody>
+      </p:sp>
+      <p:sp>
+        <p:nvSpPr>
+          <p:cNvPr id="3" name="Объект 2"/>
+          <p:cNvSpPr>
+            <a:spLocks noGrp="1"/>
+          </p:cNvSpPr>
+          <p:nvPr>
+            <p:ph idx="1"/>
+          </p:nvPr>
+        </p:nvSpPr>
+        <p:spPr/>
+        <p:txBody>
+          <a:bodyPr>
+            <a:normAutofit fontScale="85000" lnSpcReduction="20000"/>
+          </a:bodyPr>
+          <a:lstStyle/>
+          <a:p>
+            <a:r>
+              <a:rPr lang="ru-RU" b="1" dirty="0"/>
+              <a:t>Скрытие админ-панели:</a:t>
+            </a:r>
+            <a:r>
+              <a:rPr lang="ru-RU" dirty="0"/>
+              <a:t> Полное отключение стандартного пути /</a:t>
+            </a:r>
+            <a:r>
+              <a:rPr lang="ru-RU" dirty="0" err="1"/>
+              <a:t>admin</a:t>
+            </a:r>
+            <a:r>
+              <a:rPr lang="ru-RU" dirty="0"/>
+              <a:t>/ (404 ошибка для ботов). Доступ перенесен на </a:t>
+            </a:r>
+            <a:r>
+              <a:rPr lang="ru-RU" dirty="0" err="1"/>
+              <a:t>кастомный</a:t>
+            </a:r>
+            <a:r>
+              <a:rPr lang="ru-RU" dirty="0"/>
+              <a:t> защищенный </a:t>
+            </a:r>
+            <a:r>
+              <a:rPr lang="ru-RU" dirty="0" smtClean="0"/>
+              <a:t>URL. Защита входа секретным словом.</a:t>
+            </a:r>
+            <a:endParaRPr lang="ru-RU" dirty="0"/>
+          </a:p>
+          <a:p>
+            <a:r>
+              <a:rPr lang="ru-RU" b="1" dirty="0"/>
+              <a:t>Криптография «из коробки»:</a:t>
+            </a:r>
+            <a:r>
+              <a:rPr lang="ru-RU" dirty="0"/>
+              <a:t> </a:t>
+            </a:r>
+            <a:r>
+              <a:rPr lang="ru-RU" dirty="0" err="1"/>
+              <a:t>Хэширование</a:t>
+            </a:r>
+            <a:r>
+              <a:rPr lang="ru-RU" dirty="0"/>
+              <a:t> паролей по стандарту </a:t>
+            </a:r>
+            <a:r>
+              <a:rPr lang="ru-RU" b="1" dirty="0"/>
+              <a:t>PBKDF2 + SHA256</a:t>
+            </a:r>
+            <a:r>
+              <a:rPr lang="ru-RU" dirty="0"/>
+              <a:t>. В базе данных хранятся только необратимые математические </a:t>
+            </a:r>
+            <a:r>
+              <a:rPr lang="ru-RU" dirty="0" err="1"/>
+              <a:t>хэши</a:t>
+            </a:r>
+            <a:r>
+              <a:rPr lang="ru-RU" dirty="0"/>
+              <a:t>, а не чистые пароли.</a:t>
+            </a:r>
+          </a:p>
+          <a:p>
+            <a:r>
+              <a:rPr lang="ru-RU" b="1" dirty="0"/>
+              <a:t>Контроль сессий:</a:t>
+            </a:r>
+            <a:r>
+              <a:rPr lang="ru-RU" dirty="0"/>
+              <a:t> Защита от CSRF-атак на всех формах и моментальное уничтожение сессии при выходе пользователя из системы.</a:t>
+            </a:r>
+          </a:p>
+          <a:p>
+            <a:endParaRPr lang="ru-RU" dirty="0"/>
+          </a:p>
+        </p:txBody>
+      </p:sp>
+      <p:pic>
+        <p:nvPicPr>
+          <p:cNvPr id="1027" name="Picture 3"/>
+          <p:cNvPicPr>
+            <a:picLocks noChangeAspect="1" noChangeArrowheads="1"/>
+          </p:cNvPicPr>
+          <p:nvPr/>
+        </p:nvPicPr>
+        <p:blipFill>
+          <a:blip r:embed="rId2">
+            <a:extLst>
+              <a:ext uri="{28A0092B-C50C-407E-A947-70E740481C1C}">
+                <a14:useLocalDpi xmlns:a14="http://schemas.microsoft.com/office/drawing/2010/main" val="0"/>
+              </a:ext>
+            </a:extLst>
+          </a:blip>
+          <a:srcRect/>
+          <a:stretch>
+            <a:fillRect/>
+          </a:stretch>
+        </p:blipFill>
+        <p:spPr bwMode="auto">
+          <a:xfrm>
+            <a:off x="2915817" y="2981656"/>
+            <a:ext cx="3312368" cy="400488"/>
+          </a:xfrm>
+          <a:prstGeom prst="rect">
+            <a:avLst/>
+          </a:prstGeom>
+          <a:noFill/>
+          <a:ln>
+            <a:noFill/>
+          </a:ln>
+          <a:effectLst/>
+          <a:extLst>
+            <a:ext uri="{909E8E84-426E-40DD-AFC4-6F175D3DCCD1}">
+              <a14:hiddenFill xmlns:a14="http://schemas.microsoft.com/office/drawing/2010/main">
+                <a:solidFill>
+                  <a:schemeClr val="accent1"/>
+                </a:solidFill>
+              </a14:hiddenFill>
+            </a:ext>
+            <a:ext uri="{91240B29-F687-4F45-9708-019B960494DF}">
+              <a14:hiddenLine xmlns:a14="http://schemas.microsoft.com/office/drawing/2010/main" w="9525">
+                <a:solidFill>
+                  <a:schemeClr val="tx1"/>
+                </a:solidFill>
+                <a:miter lim="800000"/>
+                <a:headEnd/>
+                <a:tailEnd/>
+              </a14:hiddenLine>
+            </a:ext>
+            <a:ext uri="{AF507438-7753-43E0-B8FC-AC1667EBCBE1}">
+              <a14:hiddenEffects xmlns:a14="http://schemas.microsoft.com/office/drawing/2010/main">
+                <a:effectLst>
+                  <a:outerShdw dist="35921" dir="2700000" algn="ctr" rotWithShape="0">
+                    <a:schemeClr val="bg2"/>
+                  </a:outerShdw>
+                </a:effectLst>
+              </a14:hiddenEffects>
+            </a:ext>
+          </a:extLst>
+        </p:spPr>
+      </p:pic>
+    </p:spTree>
+    <p:extLst>
+      <p:ext uri="{BB962C8B-B14F-4D97-AF65-F5344CB8AC3E}">
+        <p14:creationId xmlns:p14="http://schemas.microsoft.com/office/powerpoint/2010/main" val="1264686583"/>
+      </p:ext>
+    </p:extLst>
+  </p:cSld>
+  <p:clrMapOvr>
+    <a:masterClrMapping/>
+  </p:clrMapOvr>
+  <p:timing>
+    <p:tnLst>
+      <p:par>
+        <p:cTn id="1" dur="indefinite" restart="never" nodeType="tmRoot"/>
+      </p:par>
+    </p:tnLst>
+  </p:timing>
+</p:sld>
+</file>
+
+<file path=ppt/slides/slide11.xml><?xml version="1.0" encoding="utf-8"?>
+<p:sld xmlns:a="http://schemas.openxmlformats.org/drawingml/2006/main" xmlns:r="http://schemas.openxmlformats.org/officeDocument/2006/relationships" xmlns:p="http://schemas.openxmlformats.org/presentationml/2006/main">
+  <p:cSld>
+    <p:spTree>
+      <p:nvGrpSpPr>
+        <p:cNvPr id="1" name=""/>
+        <p:cNvGrpSpPr/>
+        <p:nvPr/>
+      </p:nvGrpSpPr>
+      <p:grpSpPr>
+        <a:xfrm>
+          <a:off x="0" y="0"/>
+          <a:ext cx="0" cy="0"/>
+          <a:chOff x="0" y="0"/>
+          <a:chExt cx="0" cy="0"/>
+        </a:xfrm>
+      </p:grpSpPr>
+      <p:sp>
+        <p:nvSpPr>
+          <p:cNvPr id="2" name="Заголовок 1"/>
+          <p:cNvSpPr>
+            <a:spLocks noGrp="1"/>
+          </p:cNvSpPr>
+          <p:nvPr>
+            <p:ph type="title"/>
+          </p:nvPr>
+        </p:nvSpPr>
+        <p:spPr/>
+        <p:txBody>
+          <a:bodyPr>
+            <a:normAutofit fontScale="90000"/>
+          </a:bodyPr>
+          <a:lstStyle/>
+          <a:p>
+            <a:r>
+              <a:rPr lang="ru-RU" dirty="0" err="1"/>
+              <a:t>Кастомная</a:t>
+            </a:r>
+            <a:r>
+              <a:rPr lang="ru-RU" dirty="0"/>
+              <a:t> система регистрации (UX/UI &amp; </a:t>
+            </a:r>
+            <a:r>
+              <a:rPr lang="ru-RU" dirty="0" err="1"/>
+              <a:t>Валидация</a:t>
+            </a:r>
+            <a:r>
+              <a:rPr lang="ru-RU" dirty="0"/>
+              <a:t>)</a:t>
+            </a:r>
+          </a:p>
+        </p:txBody>
+      </p:sp>
+      <p:sp>
+        <p:nvSpPr>
+          <p:cNvPr id="3" name="Объект 2"/>
+          <p:cNvSpPr>
+            <a:spLocks noGrp="1"/>
+          </p:cNvSpPr>
+          <p:nvPr>
+            <p:ph idx="1"/>
+          </p:nvPr>
+        </p:nvSpPr>
+        <p:spPr/>
+        <p:txBody>
+          <a:bodyPr>
+            <a:normAutofit fontScale="85000" lnSpcReduction="20000"/>
+          </a:bodyPr>
+          <a:lstStyle/>
+          <a:p>
+            <a:r>
+              <a:rPr lang="ru-RU" b="1" dirty="0"/>
+              <a:t>Поддержка кириллицы:</a:t>
+            </a:r>
+            <a:r>
+              <a:rPr lang="ru-RU" dirty="0"/>
+              <a:t> Реализована форма </a:t>
+            </a:r>
+            <a:r>
+              <a:rPr lang="ru-RU" dirty="0" err="1"/>
+              <a:t>CyrillicUserCreationForm</a:t>
+            </a:r>
+            <a:r>
+              <a:rPr lang="ru-RU" dirty="0"/>
+              <a:t>, позволяющая пользователям регистрироваться под русскоязычными именами без конфликтов с </a:t>
+            </a:r>
+            <a:r>
+              <a:rPr lang="ru-RU" dirty="0" err="1"/>
+              <a:t>бэкендом.</a:t>
+            </a:r>
+            <a:r>
+              <a:rPr lang="ru-RU" b="1" dirty="0" err="1"/>
+              <a:t>Многоуровневая</a:t>
+            </a:r>
+            <a:r>
+              <a:rPr lang="ru-RU" b="1" dirty="0"/>
+              <a:t> </a:t>
+            </a:r>
+            <a:r>
+              <a:rPr lang="ru-RU" b="1" dirty="0" err="1"/>
+              <a:t>валидация</a:t>
+            </a:r>
+            <a:r>
+              <a:rPr lang="ru-RU" b="1" dirty="0"/>
+              <a:t>:</a:t>
+            </a:r>
+            <a:r>
+              <a:rPr lang="ru-RU" dirty="0"/>
+              <a:t> Комбинация </a:t>
+            </a:r>
+            <a:r>
+              <a:rPr lang="ru-RU" dirty="0" err="1"/>
+              <a:t>JavaScript</a:t>
+            </a:r>
+            <a:r>
+              <a:rPr lang="ru-RU" dirty="0"/>
+              <a:t> (</a:t>
+            </a:r>
+            <a:r>
+              <a:rPr lang="ru-RU" dirty="0" err="1"/>
+              <a:t>фронтенд</a:t>
+            </a:r>
+            <a:r>
+              <a:rPr lang="ru-RU" dirty="0"/>
+              <a:t>) и </a:t>
+            </a:r>
+            <a:r>
+              <a:rPr lang="ru-RU" dirty="0" err="1"/>
+              <a:t>Django</a:t>
+            </a:r>
+            <a:r>
+              <a:rPr lang="ru-RU" dirty="0"/>
+              <a:t> (</a:t>
+            </a:r>
+            <a:r>
+              <a:rPr lang="ru-RU" dirty="0" err="1"/>
+              <a:t>бэкенд</a:t>
+            </a:r>
+            <a:r>
+              <a:rPr lang="ru-RU" dirty="0"/>
+              <a:t>) для контроля сложности пароля (от 8 символов, заглавные буквы, цифры).</a:t>
+            </a:r>
+            <a:r>
+              <a:rPr lang="ru-RU" b="1" dirty="0"/>
+              <a:t>Интеграция с браузером:</a:t>
+            </a:r>
+            <a:r>
+              <a:rPr lang="ru-RU" dirty="0"/>
+              <a:t> Использование атрибутов </a:t>
+            </a:r>
+            <a:r>
+              <a:rPr lang="ru-RU" dirty="0" err="1"/>
+              <a:t>autocomplete</a:t>
+            </a:r>
+            <a:r>
+              <a:rPr lang="ru-RU" dirty="0"/>
+              <a:t> для корректной работы системных менеджеров паролей (</a:t>
+            </a:r>
+            <a:r>
+              <a:rPr lang="ru-RU" dirty="0" err="1"/>
+              <a:t>Chrome</a:t>
+            </a:r>
+            <a:r>
+              <a:rPr lang="ru-RU" dirty="0"/>
+              <a:t>/Яндекс браузер предлагают сохранение пароля).</a:t>
+            </a:r>
+          </a:p>
+        </p:txBody>
+      </p:sp>
+    </p:spTree>
+    <p:extLst>
+      <p:ext uri="{BB962C8B-B14F-4D97-AF65-F5344CB8AC3E}">
+        <p14:creationId xmlns:p14="http://schemas.microsoft.com/office/powerpoint/2010/main" val="2068893312"/>
+      </p:ext>
+    </p:extLst>
+  </p:cSld>
+  <p:clrMapOvr>
+    <a:masterClrMapping/>
+  </p:clrMapOvr>
+  <p:timing>
+    <p:tnLst>
+      <p:par>
+        <p:cTn id="1" dur="indefinite" restart="never" nodeType="tmRoot"/>
+      </p:par>
+    </p:tnLst>
+  </p:timing>
+</p:sld>
+</file>
+
+<file path=ppt/slides/slide12.xml><?xml version="1.0" encoding="utf-8"?>
+<p:sld xmlns:a="http://schemas.openxmlformats.org/drawingml/2006/main" xmlns:r="http://schemas.openxmlformats.org/officeDocument/2006/relationships" xmlns:p="http://schemas.openxmlformats.org/presentationml/2006/main">
+  <p:cSld>
+    <p:spTree>
+      <p:nvGrpSpPr>
+        <p:cNvPr id="1" name=""/>
+        <p:cNvGrpSpPr/>
+        <p:nvPr/>
+      </p:nvGrpSpPr>
+      <p:grpSpPr>
+        <a:xfrm>
+          <a:off x="0" y="0"/>
+          <a:ext cx="0" cy="0"/>
+          <a:chOff x="0" y="0"/>
+          <a:chExt cx="0" cy="0"/>
+        </a:xfrm>
+      </p:grpSpPr>
+      <p:sp>
+        <p:nvSpPr>
+          <p:cNvPr id="2" name="Заголовок 1"/>
+          <p:cNvSpPr>
+            <a:spLocks noGrp="1"/>
+          </p:cNvSpPr>
+          <p:nvPr>
+            <p:ph type="title"/>
+          </p:nvPr>
+        </p:nvSpPr>
         <p:spPr>
           <a:xfrm>
             <a:off x="457200" y="253536"/>
@@ -4160,7 +4577,7 @@
 </p:sld>
 </file>
 
-<file path=ppt/slides/slide11.xml><?xml version="1.0" encoding="utf-8"?>
+<file path=ppt/slides/slide13.xml><?xml version="1.0" encoding="utf-8"?>
 <p:sld xmlns:a="http://schemas.openxmlformats.org/drawingml/2006/main" xmlns:r="http://schemas.openxmlformats.org/officeDocument/2006/relationships" xmlns:p="http://schemas.openxmlformats.org/presentationml/2006/main">
   <p:cSld>
     <p:spTree>
@@ -4471,7 +4888,7 @@
 </p:sld>
 </file>
 
-<file path=ppt/slides/slide12.xml><?xml version="1.0" encoding="utf-8"?>
+<file path=ppt/slides/slide14.xml><?xml version="1.0" encoding="utf-8"?>
 <p:sld xmlns:a="http://schemas.openxmlformats.org/drawingml/2006/main" xmlns:r="http://schemas.openxmlformats.org/officeDocument/2006/relationships" xmlns:p="http://schemas.openxmlformats.org/presentationml/2006/main">
   <p:cSld>
     <p:spTree>
@@ -5133,7 +5550,7 @@
 </p:sld>
 </file>
 
-<file path=ppt/slides/slide13.xml><?xml version="1.0" encoding="utf-8"?>
+<file path=ppt/slides/slide15.xml><?xml version="1.0" encoding="utf-8"?>
 <p:sld xmlns:a="http://schemas.openxmlformats.org/drawingml/2006/main" xmlns:r="http://schemas.openxmlformats.org/officeDocument/2006/relationships" xmlns:p="http://schemas.openxmlformats.org/presentationml/2006/main">
   <p:cSld>
     <p:spTree>
@@ -5258,7 +5675,7 @@
 </p:sld>
 </file>
 
-<file path=ppt/slides/slide14.xml><?xml version="1.0" encoding="utf-8"?>
+<file path=ppt/slides/slide16.xml><?xml version="1.0" encoding="utf-8"?>
 <p:sld xmlns:a="http://schemas.openxmlformats.org/drawingml/2006/main" xmlns:r="http://schemas.openxmlformats.org/officeDocument/2006/relationships" xmlns:p="http://schemas.openxmlformats.org/presentationml/2006/main">
   <p:cSld>
     <p:spTree>
@@ -5374,7 +5791,7 @@
 </p:sld>
 </file>
 
-<file path=ppt/slides/slide15.xml><?xml version="1.0" encoding="utf-8"?>
+<file path=ppt/slides/slide17.xml><?xml version="1.0" encoding="utf-8"?>
 <p:sld xmlns:a="http://schemas.openxmlformats.org/drawingml/2006/main" xmlns:r="http://schemas.openxmlformats.org/officeDocument/2006/relationships" xmlns:p="http://schemas.openxmlformats.org/presentationml/2006/main">
   <p:cSld>
     <p:spTree>
@@ -5513,7 +5930,7 @@
 </p:sld>
 </file>
 
-<file path=ppt/slides/slide16.xml><?xml version="1.0" encoding="utf-8"?>
+<file path=ppt/slides/slide18.xml><?xml version="1.0" encoding="utf-8"?>
 <p:sld xmlns:a="http://schemas.openxmlformats.org/drawingml/2006/main" xmlns:r="http://schemas.openxmlformats.org/officeDocument/2006/relationships" xmlns:p="http://schemas.openxmlformats.org/presentationml/2006/main">
   <p:cSld>
     <p:spTree>
@@ -5659,7 +6076,7 @@
 </p:sld>
 </file>
 
-<file path=ppt/slides/slide17.xml><?xml version="1.0" encoding="utf-8"?>
+<file path=ppt/slides/slide19.xml><?xml version="1.0" encoding="utf-8"?>
 <p:sld xmlns:a="http://schemas.openxmlformats.org/drawingml/2006/main" xmlns:r="http://schemas.openxmlformats.org/officeDocument/2006/relationships" xmlns:p="http://schemas.openxmlformats.org/presentationml/2006/main">
   <p:cSld>
     <p:spTree>
@@ -5809,7 +6226,146 @@
 </p:sld>
 </file>
 
-<file path=ppt/slides/slide18.xml><?xml version="1.0" encoding="utf-8"?>
+<file path=ppt/slides/slide2.xml><?xml version="1.0" encoding="utf-8"?>
+<p:sld xmlns:a="http://schemas.openxmlformats.org/drawingml/2006/main" xmlns:r="http://schemas.openxmlformats.org/officeDocument/2006/relationships" xmlns:p="http://schemas.openxmlformats.org/presentationml/2006/main">
+  <p:cSld>
+    <p:spTree>
+      <p:nvGrpSpPr>
+        <p:cNvPr id="1" name=""/>
+        <p:cNvGrpSpPr/>
+        <p:nvPr/>
+      </p:nvGrpSpPr>
+      <p:grpSpPr>
+        <a:xfrm>
+          <a:off x="0" y="0"/>
+          <a:ext cx="0" cy="0"/>
+          <a:chOff x="0" y="0"/>
+          <a:chExt cx="0" cy="0"/>
+        </a:xfrm>
+      </p:grpSpPr>
+      <p:sp>
+        <p:nvSpPr>
+          <p:cNvPr id="2" name="Заголовок 1"/>
+          <p:cNvSpPr>
+            <a:spLocks noGrp="1"/>
+          </p:cNvSpPr>
+          <p:nvPr>
+            <p:ph type="title"/>
+          </p:nvPr>
+        </p:nvSpPr>
+        <p:spPr/>
+        <p:txBody>
+          <a:bodyPr/>
+          <a:lstStyle/>
+          <a:p>
+            <a:endParaRPr lang="ru-RU"/>
+          </a:p>
+        </p:txBody>
+      </p:sp>
+      <p:sp>
+        <p:nvSpPr>
+          <p:cNvPr id="3" name="Объект 2"/>
+          <p:cNvSpPr>
+            <a:spLocks noGrp="1"/>
+          </p:cNvSpPr>
+          <p:nvPr>
+            <p:ph idx="1"/>
+          </p:nvPr>
+        </p:nvSpPr>
+        <p:spPr/>
+        <p:txBody>
+          <a:bodyPr/>
+          <a:lstStyle/>
+          <a:p>
+            <a:endParaRPr lang="ru-RU"/>
+          </a:p>
+        </p:txBody>
+      </p:sp>
+      <p:pic>
+        <p:nvPicPr>
+          <p:cNvPr id="1027" name="Picture 3"/>
+          <p:cNvPicPr>
+            <a:picLocks noChangeAspect="1" noChangeArrowheads="1"/>
+          </p:cNvPicPr>
+          <p:nvPr/>
+        </p:nvPicPr>
+        <p:blipFill>
+          <a:blip r:embed="rId2">
+            <a:extLst>
+              <a:ext uri="{28A0092B-C50C-407E-A947-70E740481C1C}">
+                <a14:useLocalDpi xmlns:a14="http://schemas.microsoft.com/office/drawing/2010/main" val="0"/>
+              </a:ext>
+            </a:extLst>
+          </a:blip>
+          <a:srcRect/>
+          <a:stretch>
+            <a:fillRect/>
+          </a:stretch>
+        </p:blipFill>
+        <p:spPr bwMode="auto">
+          <a:xfrm>
+            <a:off x="467544" y="332656"/>
+            <a:ext cx="8208912" cy="6120680"/>
+          </a:xfrm>
+          <a:prstGeom prst="rect">
+            <a:avLst/>
+          </a:prstGeom>
+          <a:noFill/>
+          <a:ln>
+            <a:noFill/>
+          </a:ln>
+          <a:effectLst/>
+          <a:extLst>
+            <a:ext uri="{909E8E84-426E-40DD-AFC4-6F175D3DCCD1}">
+              <a14:hiddenFill xmlns:a14="http://schemas.microsoft.com/office/drawing/2010/main">
+                <a:solidFill>
+                  <a:schemeClr val="accent1"/>
+                </a:solidFill>
+              </a14:hiddenFill>
+            </a:ext>
+            <a:ext uri="{91240B29-F687-4F45-9708-019B960494DF}">
+              <a14:hiddenLine xmlns:a14="http://schemas.microsoft.com/office/drawing/2010/main" w="9525">
+                <a:solidFill>
+                  <a:schemeClr val="tx1"/>
+                </a:solidFill>
+                <a:miter lim="800000"/>
+                <a:headEnd/>
+                <a:tailEnd/>
+              </a14:hiddenLine>
+            </a:ext>
+            <a:ext uri="{AF507438-7753-43E0-B8FC-AC1667EBCBE1}">
+              <a14:hiddenEffects xmlns:a14="http://schemas.microsoft.com/office/drawing/2010/main">
+                <a:effectLst>
+                  <a:outerShdw dist="35921" dir="2700000" algn="ctr" rotWithShape="0">
+                    <a:schemeClr val="bg2"/>
+                  </a:outerShdw>
+                </a:effectLst>
+              </a14:hiddenEffects>
+            </a:ext>
+          </a:extLst>
+        </p:spPr>
+      </p:pic>
+    </p:spTree>
+    <p:extLst>
+      <p:ext uri="{BB962C8B-B14F-4D97-AF65-F5344CB8AC3E}">
+        <p14:creationId xmlns:p14="http://schemas.microsoft.com/office/powerpoint/2010/main" val="3860294056"/>
+      </p:ext>
+    </p:extLst>
+  </p:cSld>
+  <p:clrMapOvr>
+    <a:masterClrMapping/>
+  </p:clrMapOvr>
+  <p:timing>
+    <p:tnLst>
+      <p:par>
+        <p:cTn id="1" dur="indefinite" restart="never" nodeType="tmRoot"/>
+      </p:par>
+    </p:tnLst>
+  </p:timing>
+</p:sld>
+</file>
+
+<file path=ppt/slides/slide20.xml><?xml version="1.0" encoding="utf-8"?>
 <p:sld xmlns:a="http://schemas.openxmlformats.org/drawingml/2006/main" xmlns:r="http://schemas.openxmlformats.org/officeDocument/2006/relationships" xmlns:p="http://schemas.openxmlformats.org/presentationml/2006/main">
   <p:cSld>
     <p:spTree>
@@ -5949,145 +6505,6 @@
     <p:extLst>
       <p:ext uri="{BB962C8B-B14F-4D97-AF65-F5344CB8AC3E}">
         <p14:creationId xmlns:p14="http://schemas.microsoft.com/office/powerpoint/2010/main" val="1556460092"/>
-      </p:ext>
-    </p:extLst>
-  </p:cSld>
-  <p:clrMapOvr>
-    <a:masterClrMapping/>
-  </p:clrMapOvr>
-  <p:timing>
-    <p:tnLst>
-      <p:par>
-        <p:cTn id="1" dur="indefinite" restart="never" nodeType="tmRoot"/>
-      </p:par>
-    </p:tnLst>
-  </p:timing>
-</p:sld>
-</file>
-
-<file path=ppt/slides/slide2.xml><?xml version="1.0" encoding="utf-8"?>
-<p:sld xmlns:a="http://schemas.openxmlformats.org/drawingml/2006/main" xmlns:r="http://schemas.openxmlformats.org/officeDocument/2006/relationships" xmlns:p="http://schemas.openxmlformats.org/presentationml/2006/main">
-  <p:cSld>
-    <p:spTree>
-      <p:nvGrpSpPr>
-        <p:cNvPr id="1" name=""/>
-        <p:cNvGrpSpPr/>
-        <p:nvPr/>
-      </p:nvGrpSpPr>
-      <p:grpSpPr>
-        <a:xfrm>
-          <a:off x="0" y="0"/>
-          <a:ext cx="0" cy="0"/>
-          <a:chOff x="0" y="0"/>
-          <a:chExt cx="0" cy="0"/>
-        </a:xfrm>
-      </p:grpSpPr>
-      <p:sp>
-        <p:nvSpPr>
-          <p:cNvPr id="2" name="Заголовок 1"/>
-          <p:cNvSpPr>
-            <a:spLocks noGrp="1"/>
-          </p:cNvSpPr>
-          <p:nvPr>
-            <p:ph type="title"/>
-          </p:nvPr>
-        </p:nvSpPr>
-        <p:spPr/>
-        <p:txBody>
-          <a:bodyPr/>
-          <a:lstStyle/>
-          <a:p>
-            <a:endParaRPr lang="ru-RU"/>
-          </a:p>
-        </p:txBody>
-      </p:sp>
-      <p:sp>
-        <p:nvSpPr>
-          <p:cNvPr id="3" name="Объект 2"/>
-          <p:cNvSpPr>
-            <a:spLocks noGrp="1"/>
-          </p:cNvSpPr>
-          <p:nvPr>
-            <p:ph idx="1"/>
-          </p:nvPr>
-        </p:nvSpPr>
-        <p:spPr/>
-        <p:txBody>
-          <a:bodyPr/>
-          <a:lstStyle/>
-          <a:p>
-            <a:endParaRPr lang="ru-RU"/>
-          </a:p>
-        </p:txBody>
-      </p:sp>
-      <p:pic>
-        <p:nvPicPr>
-          <p:cNvPr id="1027" name="Picture 3"/>
-          <p:cNvPicPr>
-            <a:picLocks noChangeAspect="1" noChangeArrowheads="1"/>
-          </p:cNvPicPr>
-          <p:nvPr/>
-        </p:nvPicPr>
-        <p:blipFill>
-          <a:blip r:embed="rId2">
-            <a:extLst>
-              <a:ext uri="{28A0092B-C50C-407E-A947-70E740481C1C}">
-                <a14:useLocalDpi xmlns:a14="http://schemas.microsoft.com/office/drawing/2010/main" val="0"/>
-              </a:ext>
-            </a:extLst>
-          </a:blip>
-          <a:srcRect/>
-          <a:stretch>
-            <a:fillRect/>
-          </a:stretch>
-        </p:blipFill>
-        <p:spPr bwMode="auto">
-          <a:xfrm>
-            <a:off x="467544" y="332656"/>
-            <a:ext cx="8208912" cy="6120680"/>
-          </a:xfrm>
-          <a:prstGeom prst="rect">
-            <a:avLst/>
-          </a:prstGeom>
-          <a:noFill/>
-          <a:ln>
-            <a:noFill/>
-          </a:ln>
-          <a:effectLst/>
-          <a:extLst>
-            <a:ext uri="{909E8E84-426E-40DD-AFC4-6F175D3DCCD1}">
-              <a14:hiddenFill xmlns:a14="http://schemas.microsoft.com/office/drawing/2010/main">
-                <a:solidFill>
-                  <a:schemeClr val="accent1"/>
-                </a:solidFill>
-              </a14:hiddenFill>
-            </a:ext>
-            <a:ext uri="{91240B29-F687-4F45-9708-019B960494DF}">
-              <a14:hiddenLine xmlns:a14="http://schemas.microsoft.com/office/drawing/2010/main" w="9525">
-                <a:solidFill>
-                  <a:schemeClr val="tx1"/>
-                </a:solidFill>
-                <a:miter lim="800000"/>
-                <a:headEnd/>
-                <a:tailEnd/>
-              </a14:hiddenLine>
-            </a:ext>
-            <a:ext uri="{AF507438-7753-43E0-B8FC-AC1667EBCBE1}">
-              <a14:hiddenEffects xmlns:a14="http://schemas.microsoft.com/office/drawing/2010/main">
-                <a:effectLst>
-                  <a:outerShdw dist="35921" dir="2700000" algn="ctr" rotWithShape="0">
-                    <a:schemeClr val="bg2"/>
-                  </a:outerShdw>
-                </a:effectLst>
-              </a14:hiddenEffects>
-            </a:ext>
-          </a:extLst>
-        </p:spPr>
-      </p:pic>
-    </p:spTree>
-    <p:extLst>
-      <p:ext uri="{BB962C8B-B14F-4D97-AF65-F5344CB8AC3E}">
-        <p14:creationId xmlns:p14="http://schemas.microsoft.com/office/powerpoint/2010/main" val="3860294056"/>
       </p:ext>
     </p:extLst>
   </p:cSld>
@@ -7694,121 +8111,36 @@
           </a:bodyPr>
           <a:lstStyle/>
           <a:p>
+            <a:pPr algn="ctr"/>
             <a:r>
               <a:rPr lang="ru-RU" dirty="0"/>
-              <a:t>Безопасность и защита </a:t>
-            </a:r>
-            <a:r>
-              <a:rPr lang="ru-RU" dirty="0" err="1"/>
-              <a:t>бэкенда</a:t>
-            </a:r>
-            <a:endParaRPr lang="ru-RU" dirty="0"/>
-          </a:p>
-        </p:txBody>
-      </p:sp>
-      <p:sp>
-        <p:nvSpPr>
-          <p:cNvPr id="3" name="Объект 2"/>
-          <p:cNvSpPr>
-            <a:spLocks noGrp="1"/>
-          </p:cNvSpPr>
-          <p:nvPr>
-            <p:ph idx="1"/>
-          </p:nvPr>
-        </p:nvSpPr>
-        <p:spPr/>
-        <p:txBody>
-          <a:bodyPr>
-            <a:normAutofit fontScale="85000" lnSpcReduction="20000"/>
-          </a:bodyPr>
-          <a:lstStyle/>
-          <a:p>
-            <a:r>
-              <a:rPr lang="ru-RU" b="1" dirty="0"/>
-              <a:t>Скрытие админ-панели:</a:t>
+              <a:t>Взаимодействие </a:t>
+            </a:r>
+            <a:r>
+              <a:rPr lang="en-US" dirty="0"/>
+              <a:t>Frontend </a:t>
             </a:r>
             <a:r>
               <a:rPr lang="ru-RU" dirty="0"/>
-              <a:t> Полное отключение стандартного пути /</a:t>
-            </a:r>
-            <a:r>
-              <a:rPr lang="ru-RU" dirty="0" err="1"/>
-              <a:t>admin</a:t>
-            </a:r>
-            <a:r>
-              <a:rPr lang="ru-RU" dirty="0"/>
-              <a:t>/ (404 ошибка для ботов). Доступ перенесен на </a:t>
-            </a:r>
-            <a:r>
-              <a:rPr lang="ru-RU" dirty="0" err="1"/>
-              <a:t>кастомный</a:t>
-            </a:r>
-            <a:r>
-              <a:rPr lang="ru-RU" dirty="0"/>
-              <a:t> защищенный </a:t>
-            </a:r>
-            <a:r>
-              <a:rPr lang="ru-RU" dirty="0" smtClean="0"/>
-              <a:t>URL. Защита входа секретным словом.</a:t>
-            </a:r>
-            <a:endParaRPr lang="ru-RU" dirty="0"/>
-          </a:p>
-          <a:p>
-            <a:r>
-              <a:rPr lang="ru-RU" b="1" dirty="0"/>
-              <a:t>Криптография «из коробки»:</a:t>
-            </a:r>
-            <a:r>
-              <a:rPr lang="ru-RU" dirty="0"/>
-              <a:t> </a:t>
-            </a:r>
-            <a:r>
-              <a:rPr lang="ru-RU" dirty="0" err="1"/>
-              <a:t>Хэширование</a:t>
-            </a:r>
-            <a:r>
-              <a:rPr lang="ru-RU" dirty="0"/>
-              <a:t> паролей по стандарту </a:t>
-            </a:r>
-            <a:r>
-              <a:rPr lang="ru-RU" b="1" dirty="0"/>
-              <a:t>PBKDF2 + SHA256</a:t>
-            </a:r>
-            <a:r>
-              <a:rPr lang="ru-RU" dirty="0"/>
-              <a:t>. В базе данных хранятся только необратимые математические </a:t>
-            </a:r>
-            <a:r>
-              <a:rPr lang="ru-RU" dirty="0" err="1"/>
-              <a:t>хэши</a:t>
-            </a:r>
-            <a:r>
-              <a:rPr lang="ru-RU" dirty="0"/>
-              <a:t>, а не чистые пароли.</a:t>
-            </a:r>
-          </a:p>
-          <a:p>
-            <a:r>
-              <a:rPr lang="ru-RU" b="1" dirty="0"/>
-              <a:t>Контроль сессий:</a:t>
-            </a:r>
-            <a:r>
-              <a:rPr lang="ru-RU" dirty="0"/>
-              <a:t> Защита от CSRF-атак на всех формах и моментальное уничтожение сессии при выходе пользователя из системы.</a:t>
-            </a:r>
-          </a:p>
-          <a:p>
+              <a:t>и </a:t>
+            </a:r>
+            <a:r>
+              <a:rPr lang="en-US" dirty="0"/>
+              <a:t>Backend</a:t>
+            </a:r>
             <a:endParaRPr lang="ru-RU" dirty="0"/>
           </a:p>
         </p:txBody>
       </p:sp>
       <p:pic>
         <p:nvPicPr>
-          <p:cNvPr id="1027" name="Picture 3"/>
+          <p:cNvPr id="1026" name="Picture 2"/>
           <p:cNvPicPr>
-            <a:picLocks noChangeAspect="1" noChangeArrowheads="1"/>
+            <a:picLocks noGrp="1" noChangeAspect="1" noChangeArrowheads="1"/>
           </p:cNvPicPr>
-          <p:nvPr/>
+          <p:nvPr>
+            <p:ph idx="1"/>
+          </p:nvPr>
         </p:nvPicPr>
         <p:blipFill>
           <a:blip r:embed="rId2">
@@ -7825,8 +8157,8 @@
         </p:blipFill>
         <p:spPr bwMode="auto">
           <a:xfrm>
-            <a:off x="2915817" y="2981656"/>
-            <a:ext cx="3312368" cy="400488"/>
+            <a:off x="1331640" y="1607106"/>
+            <a:ext cx="7128792" cy="4277275"/>
           </a:xfrm>
           <a:prstGeom prst="rect">
             <a:avLst/>
@@ -7869,7 +8201,7 @@
     </p:spTree>
     <p:extLst>
       <p:ext uri="{BB962C8B-B14F-4D97-AF65-F5344CB8AC3E}">
-        <p14:creationId xmlns:p14="http://schemas.microsoft.com/office/powerpoint/2010/main" val="1264686583"/>
+        <p14:creationId xmlns:p14="http://schemas.microsoft.com/office/powerpoint/2010/main" val="1657033023"/>
       </p:ext>
     </p:extLst>
   </p:cSld>
@@ -7920,28 +8252,30 @@
           </a:bodyPr>
           <a:lstStyle/>
           <a:p>
-            <a:r>
-              <a:rPr lang="ru-RU" dirty="0" err="1"/>
-              <a:t>Кастомная</a:t>
-            </a:r>
+            <a:pPr algn="ctr"/>
             <a:r>
               <a:rPr lang="ru-RU" dirty="0"/>
-              <a:t> система регистрации (UX/UI &amp; </a:t>
-            </a:r>
-            <a:r>
-              <a:rPr lang="ru-RU" dirty="0" err="1"/>
-              <a:t>Валидация</a:t>
+              <a:t>Взаимодействие </a:t>
+            </a:r>
+            <a:r>
+              <a:rPr lang="en-US" dirty="0"/>
+              <a:t>Frontend </a:t>
             </a:r>
             <a:r>
               <a:rPr lang="ru-RU" dirty="0"/>
-              <a:t>)</a:t>
-            </a:r>
-          </a:p>
-        </p:txBody>
-      </p:sp>
-      <p:sp>
-        <p:nvSpPr>
-          <p:cNvPr id="3" name="Объект 2"/>
+              <a:t>и </a:t>
+            </a:r>
+            <a:r>
+              <a:rPr lang="en-US" dirty="0"/>
+              <a:t>Backend</a:t>
+            </a:r>
+            <a:endParaRPr lang="ru-RU" dirty="0"/>
+          </a:p>
+        </p:txBody>
+      </p:sp>
+      <p:sp>
+        <p:nvSpPr>
+          <p:cNvPr id="4" name="Объект 2"/>
           <p:cNvSpPr>
             <a:spLocks noGrp="1"/>
           </p:cNvSpPr>
@@ -7949,116 +8283,447 @@
             <p:ph idx="1"/>
           </p:nvPr>
         </p:nvSpPr>
-        <p:spPr/>
+        <p:spPr>
+          <a:xfrm>
+            <a:off x="457200" y="1844823"/>
+            <a:ext cx="3682752" cy="4327693"/>
+          </a:xfrm>
+        </p:spPr>
         <p:txBody>
           <a:bodyPr>
-            <a:normAutofit fontScale="85000" lnSpcReduction="20000"/>
+            <a:normAutofit fontScale="77500" lnSpcReduction="20000"/>
           </a:bodyPr>
           <a:lstStyle/>
           <a:p>
             <a:r>
-              <a:rPr lang="ru-RU" b="1" dirty="0"/>
-              <a:t>Поддержка кириллицы:</a:t>
-            </a:r>
-            <a:r>
-              <a:rPr lang="ru-RU" dirty="0"/>
-              <a:t> Реализована форма </a:t>
-            </a:r>
-            <a:r>
-              <a:rPr lang="ru-RU" dirty="0" err="1"/>
-              <a:t>CyrillicUserCreationForm</a:t>
-            </a:r>
-            <a:r>
-              <a:rPr lang="ru-RU" dirty="0"/>
-              <a:t>, позволяющая пользователям регистрироваться под русскоязычными именами без конфликтов с </a:t>
-            </a:r>
-            <a:r>
-              <a:rPr lang="ru-RU" dirty="0" err="1"/>
-              <a:t>бэкендом.</a:t>
-            </a:r>
-            <a:r>
-              <a:rPr lang="ru-RU" b="1" dirty="0" err="1"/>
-              <a:t>Многоуровневая</a:t>
-            </a:r>
-            <a:r>
-              <a:rPr lang="ru-RU" b="1" dirty="0"/>
+              <a:rPr lang="en-US" dirty="0"/>
+              <a:t>FRONTEND </a:t>
+            </a:r>
+            <a:r>
+              <a:rPr lang="en-US" sz="2600" dirty="0"/>
+              <a:t>(</a:t>
+            </a:r>
+            <a:r>
+              <a:rPr lang="ru-RU" sz="2600" dirty="0"/>
+              <a:t>Клиентская часть</a:t>
+            </a:r>
+            <a:r>
+              <a:rPr lang="ru-RU" sz="2600" dirty="0" smtClean="0"/>
+              <a:t>)</a:t>
+            </a:r>
+          </a:p>
+          <a:p>
+            <a:r>
+              <a:rPr lang="ru-RU" sz="1800" b="1" dirty="0" smtClean="0"/>
+              <a:t>Интерфейс </a:t>
+            </a:r>
+            <a:r>
+              <a:rPr lang="ru-RU" sz="1800" b="1" dirty="0"/>
+              <a:t>базы знаний:</a:t>
+            </a:r>
+            <a:r>
+              <a:rPr lang="ru-RU" sz="1800" dirty="0"/>
+              <a:t> Динамическое отображение категорий техники (промышленное оборудование, </a:t>
+            </a:r>
+            <a:r>
+              <a:rPr lang="ru-RU" sz="1800" dirty="0" err="1"/>
+              <a:t>автоэлектроника</a:t>
+            </a:r>
+            <a:r>
+              <a:rPr lang="ru-RU" sz="1800" dirty="0"/>
+              <a:t>, бытовая техника, ПО) и фильтрация по ушедшим брендам.</a:t>
+            </a:r>
+          </a:p>
+          <a:p>
+            <a:r>
+              <a:rPr lang="ru-RU" sz="1800" b="1" dirty="0"/>
+              <a:t>Модули коммуникации:</a:t>
+            </a:r>
+            <a:r>
+              <a:rPr lang="ru-RU" sz="1800" dirty="0"/>
+              <a:t> Интерактивное окно чата, формы для отправки вопросов экспертам и вывода ответов в реальном времени.</a:t>
+            </a:r>
+          </a:p>
+          <a:p>
+            <a:r>
+              <a:rPr lang="ru-RU" sz="1800" b="1" dirty="0"/>
+              <a:t>Поисковый UI:</a:t>
+            </a:r>
+            <a:r>
+              <a:rPr lang="ru-RU" sz="1800" dirty="0"/>
+              <a:t> Строка умного поиска с подсказками (</a:t>
+            </a:r>
+            <a:r>
+              <a:rPr lang="ru-RU" sz="1800" dirty="0" err="1"/>
+              <a:t>автодополнение</a:t>
+            </a:r>
+            <a:r>
+              <a:rPr lang="ru-RU" sz="1800" dirty="0"/>
+              <a:t> при вводе названия бренда или модели дефицитных запчастей).</a:t>
+            </a:r>
+          </a:p>
+          <a:p>
+            <a:r>
+              <a:rPr lang="ru-RU" sz="1800" b="1" dirty="0"/>
+              <a:t>Клиентская безопасность:</a:t>
+            </a:r>
+            <a:r>
+              <a:rPr lang="ru-RU" sz="1800" dirty="0"/>
+              <a:t> Первичная </a:t>
+            </a:r>
+            <a:r>
+              <a:rPr lang="ru-RU" sz="1800" dirty="0" err="1"/>
+              <a:t>валидация</a:t>
+            </a:r>
+            <a:r>
+              <a:rPr lang="ru-RU" sz="1800" dirty="0"/>
+              <a:t> форм авторизации и хранение сессионных </a:t>
+            </a:r>
+            <a:r>
+              <a:rPr lang="ru-RU" sz="1800" dirty="0" err="1"/>
+              <a:t>токенов</a:t>
+            </a:r>
+            <a:r>
+              <a:rPr lang="ru-RU" sz="1800" dirty="0"/>
+              <a:t> (JWT) для защиты профиля пользователя.</a:t>
+            </a:r>
+          </a:p>
+        </p:txBody>
+      </p:sp>
+      <p:sp>
+        <p:nvSpPr>
+          <p:cNvPr id="5" name="Объект 2"/>
+          <p:cNvSpPr txBox="1">
+            <a:spLocks/>
+          </p:cNvSpPr>
+          <p:nvPr/>
+        </p:nvSpPr>
+        <p:spPr>
+          <a:xfrm>
+            <a:off x="4788024" y="1916832"/>
+            <a:ext cx="4032448" cy="4327693"/>
+          </a:xfrm>
+          <a:prstGeom prst="rect">
+            <a:avLst/>
+          </a:prstGeom>
+        </p:spPr>
+        <p:txBody>
+          <a:bodyPr>
+            <a:normAutofit fontScale="77500" lnSpcReduction="20000"/>
+          </a:bodyPr>
+          <a:lstStyle>
+            <a:lvl1pPr marL="292100" indent="-292100" algn="l" rtl="0" eaLnBrk="1" latinLnBrk="0" hangingPunct="1">
+              <a:spcBef>
+                <a:spcPts val="0"/>
+              </a:spcBef>
+              <a:buClr>
+                <a:schemeClr val="accent1"/>
+              </a:buClr>
+              <a:buSzPct val="70000"/>
+              <a:buFont typeface="Wingdings 2"/>
+              <a:buChar char=""/>
+              <a:defRPr kumimoji="0" sz="3200" kern="1200">
+                <a:solidFill>
+                  <a:schemeClr val="tx1"/>
+                </a:solidFill>
+                <a:latin typeface="+mn-lt"/>
+                <a:ea typeface="+mn-ea"/>
+                <a:cs typeface="+mn-cs"/>
+              </a:defRPr>
+            </a:lvl1pPr>
+            <a:lvl2pPr marL="640080" indent="-228600" algn="l" rtl="0" eaLnBrk="1" latinLnBrk="0" hangingPunct="1">
+              <a:spcBef>
+                <a:spcPts val="400"/>
+              </a:spcBef>
+              <a:buClr>
+                <a:schemeClr val="accent2"/>
+              </a:buClr>
+              <a:buSzPct val="90000"/>
+              <a:buFontTx/>
+              <a:buChar char="•"/>
+              <a:defRPr kumimoji="0" sz="2600" kern="1200">
+                <a:solidFill>
+                  <a:schemeClr val="tx1"/>
+                </a:solidFill>
+                <a:latin typeface="+mn-lt"/>
+                <a:ea typeface="+mn-ea"/>
+                <a:cs typeface="+mn-cs"/>
+              </a:defRPr>
+            </a:lvl2pPr>
+            <a:lvl3pPr marL="822960" indent="-192024" algn="l" rtl="0" eaLnBrk="1" latinLnBrk="0" hangingPunct="1">
+              <a:spcBef>
+                <a:spcPts val="400"/>
+              </a:spcBef>
+              <a:buClr>
+                <a:schemeClr val="accent3"/>
+              </a:buClr>
+              <a:buSzPct val="100000"/>
+              <a:buFont typeface="Wingdings 2"/>
+              <a:buChar char=""/>
+              <a:defRPr kumimoji="0" sz="2300" kern="1200">
+                <a:solidFill>
+                  <a:schemeClr val="tx1"/>
+                </a:solidFill>
+                <a:latin typeface="+mn-lt"/>
+                <a:ea typeface="+mn-ea"/>
+                <a:cs typeface="+mn-cs"/>
+              </a:defRPr>
+            </a:lvl3pPr>
+            <a:lvl4pPr marL="1005840" indent="-182880" algn="l" rtl="0" eaLnBrk="1" latinLnBrk="0" hangingPunct="1">
+              <a:spcBef>
+                <a:spcPts val="400"/>
+              </a:spcBef>
+              <a:buClr>
+                <a:schemeClr val="accent3"/>
+              </a:buClr>
+              <a:buSzPct val="100000"/>
+              <a:buFont typeface="Wingdings 2"/>
+              <a:buChar char=""/>
+              <a:defRPr kumimoji="0" sz="2000" kern="1200">
+                <a:solidFill>
+                  <a:schemeClr val="tx1"/>
+                </a:solidFill>
+                <a:latin typeface="+mn-lt"/>
+                <a:ea typeface="+mn-ea"/>
+                <a:cs typeface="+mn-cs"/>
+              </a:defRPr>
+            </a:lvl4pPr>
+            <a:lvl5pPr marL="1188720" indent="-182880" algn="l" rtl="0" eaLnBrk="1" latinLnBrk="0" hangingPunct="1">
+              <a:spcBef>
+                <a:spcPts val="400"/>
+              </a:spcBef>
+              <a:buClr>
+                <a:schemeClr val="accent3"/>
+              </a:buClr>
+              <a:buSzPct val="100000"/>
+              <a:buFont typeface="Wingdings 2"/>
+              <a:buChar char=""/>
+              <a:defRPr kumimoji="0" sz="1900" kern="1200">
+                <a:solidFill>
+                  <a:schemeClr val="tx1"/>
+                </a:solidFill>
+                <a:latin typeface="+mn-lt"/>
+                <a:ea typeface="+mn-ea"/>
+                <a:cs typeface="+mn-cs"/>
+              </a:defRPr>
+            </a:lvl5pPr>
+            <a:lvl6pPr marL="1371600" indent="-173736" algn="l" rtl="0" eaLnBrk="1" latinLnBrk="0" hangingPunct="1">
+              <a:spcBef>
+                <a:spcPts val="400"/>
+              </a:spcBef>
+              <a:buClr>
+                <a:schemeClr val="accent4"/>
+              </a:buClr>
+              <a:buFont typeface="Wingdings 2"/>
+              <a:buChar char=""/>
+              <a:defRPr kumimoji="0" sz="1800" kern="1200" baseline="0">
+                <a:solidFill>
+                  <a:schemeClr val="tx1"/>
+                </a:solidFill>
+                <a:latin typeface="+mn-lt"/>
+                <a:ea typeface="+mn-ea"/>
+                <a:cs typeface="+mn-cs"/>
+              </a:defRPr>
+            </a:lvl6pPr>
+            <a:lvl7pPr marL="1554480" indent="-173736" algn="l" rtl="0" eaLnBrk="1" latinLnBrk="0" hangingPunct="1">
+              <a:spcBef>
+                <a:spcPts val="400"/>
+              </a:spcBef>
+              <a:buClr>
+                <a:schemeClr val="accent4"/>
+              </a:buClr>
+              <a:buFont typeface="Wingdings 2"/>
+              <a:buChar char=""/>
+              <a:defRPr kumimoji="0" sz="1600" kern="1200" baseline="0">
+                <a:solidFill>
+                  <a:schemeClr val="tx1"/>
+                </a:solidFill>
+                <a:latin typeface="+mn-lt"/>
+                <a:ea typeface="+mn-ea"/>
+                <a:cs typeface="+mn-cs"/>
+              </a:defRPr>
+            </a:lvl7pPr>
+            <a:lvl8pPr marL="1737360" indent="-173736" algn="l" rtl="0" eaLnBrk="1" latinLnBrk="0" hangingPunct="1">
+              <a:spcBef>
+                <a:spcPts val="400"/>
+              </a:spcBef>
+              <a:buClr>
+                <a:schemeClr val="accent4"/>
+              </a:buClr>
+              <a:buFont typeface="Wingdings 2"/>
+              <a:buChar char=""/>
+              <a:defRPr kumimoji="0" sz="1600" kern="1200" baseline="0">
+                <a:solidFill>
+                  <a:schemeClr val="tx1"/>
+                </a:solidFill>
+                <a:latin typeface="+mn-lt"/>
+                <a:ea typeface="+mn-ea"/>
+                <a:cs typeface="+mn-cs"/>
+              </a:defRPr>
+            </a:lvl8pPr>
+            <a:lvl9pPr marL="1920240" indent="-173736" algn="l" rtl="0" eaLnBrk="1" latinLnBrk="0" hangingPunct="1">
+              <a:spcBef>
+                <a:spcPts val="400"/>
+              </a:spcBef>
+              <a:buClr>
+                <a:schemeClr val="accent4"/>
+              </a:buClr>
+              <a:buFont typeface="Wingdings 2"/>
+              <a:buChar char=""/>
+              <a:defRPr kumimoji="0" sz="1600" kern="1200" baseline="0">
+                <a:solidFill>
+                  <a:schemeClr val="tx1"/>
+                </a:solidFill>
+                <a:latin typeface="+mn-lt"/>
+                <a:ea typeface="+mn-ea"/>
+                <a:cs typeface="+mn-cs"/>
+              </a:defRPr>
+            </a:lvl9pPr>
+            <a:extLst/>
+          </a:lstStyle>
+          <a:p>
+            <a:pPr>
+              <a:lnSpc>
+                <a:spcPct val="110000"/>
+              </a:lnSpc>
+            </a:pPr>
+            <a:r>
+              <a:rPr lang="en-US" sz="3600" dirty="0" smtClean="0"/>
+              <a:t>BACKEND</a:t>
+            </a:r>
+            <a:r>
+              <a:rPr lang="ru-RU" sz="3600" smtClean="0"/>
+              <a:t>        </a:t>
+            </a:r>
+            <a:r>
+              <a:rPr lang="en-US" sz="3600" dirty="0" smtClean="0"/>
               <a:t> </a:t>
             </a:r>
             <a:r>
-              <a:rPr lang="ru-RU" b="1" dirty="0" err="1"/>
-              <a:t>валидация</a:t>
-            </a:r>
-            <a:r>
-              <a:rPr lang="ru-RU" b="1" dirty="0"/>
-              <a:t>:</a:t>
-            </a:r>
-            <a:r>
-              <a:rPr lang="ru-RU" dirty="0"/>
-              <a:t> Комбинация </a:t>
-            </a:r>
-            <a:r>
-              <a:rPr lang="ru-RU" dirty="0" err="1"/>
-              <a:t>JavaScript</a:t>
-            </a:r>
-            <a:r>
-              <a:rPr lang="ru-RU" dirty="0"/>
-              <a:t> (</a:t>
-            </a:r>
-            <a:r>
-              <a:rPr lang="ru-RU" dirty="0" err="1"/>
-              <a:t>фронтенд</a:t>
-            </a:r>
-            <a:r>
-              <a:rPr lang="ru-RU" dirty="0"/>
-              <a:t>) и </a:t>
-            </a:r>
-            <a:r>
-              <a:rPr lang="ru-RU" dirty="0" err="1"/>
-              <a:t>Django</a:t>
-            </a:r>
-            <a:r>
-              <a:rPr lang="ru-RU" dirty="0"/>
-              <a:t> (</a:t>
-            </a:r>
-            <a:r>
-              <a:rPr lang="ru-RU" dirty="0" err="1"/>
-              <a:t>бэкенд</a:t>
-            </a:r>
-            <a:r>
-              <a:rPr lang="ru-RU" dirty="0"/>
-              <a:t>) для контроля сложности пароля (от 8 символов, заглавные буквы, цифры).</a:t>
-            </a:r>
-            <a:r>
-              <a:rPr lang="ru-RU" b="1" dirty="0"/>
-              <a:t>Интеграция с браузером:</a:t>
-            </a:r>
-            <a:r>
-              <a:rPr lang="ru-RU" dirty="0"/>
-              <a:t> Использование атрибутов </a:t>
-            </a:r>
-            <a:r>
-              <a:rPr lang="ru-RU" dirty="0" err="1"/>
-              <a:t>autocomplete</a:t>
-            </a:r>
-            <a:r>
-              <a:rPr lang="ru-RU" dirty="0"/>
-              <a:t> для корректной работы системных менеджеров паролей (</a:t>
-            </a:r>
-            <a:r>
-              <a:rPr lang="ru-RU" dirty="0" err="1"/>
-              <a:t>Chrome</a:t>
-            </a:r>
-            <a:r>
-              <a:rPr lang="ru-RU" dirty="0"/>
-              <a:t>/Яндекс браузер предлагают сохранение пароля).</a:t>
-            </a:r>
+              <a:rPr lang="en-US" sz="2400" dirty="0"/>
+              <a:t>(</a:t>
+            </a:r>
+            <a:r>
+              <a:rPr lang="ru-RU" sz="2400" dirty="0"/>
+              <a:t>Серверная часть</a:t>
+            </a:r>
+            <a:r>
+              <a:rPr lang="ru-RU" sz="2400" dirty="0" smtClean="0"/>
+              <a:t>)</a:t>
+            </a:r>
+          </a:p>
+          <a:p>
+            <a:pPr>
+              <a:lnSpc>
+                <a:spcPct val="110000"/>
+              </a:lnSpc>
+            </a:pPr>
+            <a:r>
+              <a:rPr lang="ru-RU" sz="1800" b="1" dirty="0" smtClean="0"/>
+              <a:t>Бизнес-логика </a:t>
+            </a:r>
+            <a:r>
+              <a:rPr lang="ru-RU" sz="1800" b="1" dirty="0"/>
+              <a:t>и FAQ:</a:t>
+            </a:r>
+            <a:r>
+              <a:rPr lang="ru-RU" sz="1800" dirty="0"/>
+              <a:t> Хранение, обработка и выдача структурированных инструкций по обходу блокировок, обновлению прошивок и подбору аналогов техники</a:t>
+            </a:r>
+            <a:r>
+              <a:rPr lang="ru-RU" sz="1800" dirty="0" smtClean="0"/>
+              <a:t>.</a:t>
+            </a:r>
+          </a:p>
+          <a:p>
+            <a:pPr>
+              <a:lnSpc>
+                <a:spcPct val="110000"/>
+              </a:lnSpc>
+            </a:pPr>
+            <a:r>
+              <a:rPr lang="ru-RU" sz="1800" b="1" dirty="0" smtClean="0"/>
+              <a:t>Система </a:t>
+            </a:r>
+            <a:r>
+              <a:rPr lang="ru-RU" sz="1800" b="1" dirty="0"/>
+              <a:t>ролей и доступов:</a:t>
+            </a:r>
+            <a:r>
+              <a:rPr lang="ru-RU" sz="1800" dirty="0"/>
+              <a:t> Разграничение прав пользователей (Обычный пользователь / Проверенный инженер-эксперт / Модератор базы знаний</a:t>
+            </a:r>
+            <a:r>
+              <a:rPr lang="ru-RU" sz="1800" dirty="0" smtClean="0"/>
+              <a:t>).</a:t>
+            </a:r>
+          </a:p>
+          <a:p>
+            <a:pPr>
+              <a:lnSpc>
+                <a:spcPct val="110000"/>
+              </a:lnSpc>
+            </a:pPr>
+            <a:r>
+              <a:rPr lang="ru-RU" sz="1800" b="1" dirty="0" smtClean="0"/>
+              <a:t>Поисковый </a:t>
+            </a:r>
+            <a:r>
+              <a:rPr lang="ru-RU" sz="1800" b="1" dirty="0"/>
+              <a:t>движок:</a:t>
+            </a:r>
+            <a:r>
+              <a:rPr lang="ru-RU" sz="1800" dirty="0"/>
+              <a:t> Обработка сложных поисковых запросов и полнотекстовый поиск по архивам решений и </a:t>
+            </a:r>
+            <a:r>
+              <a:rPr lang="ru-RU" sz="1800" dirty="0" err="1"/>
+              <a:t>санкционных</a:t>
+            </a:r>
+            <a:r>
+              <a:rPr lang="ru-RU" sz="1800" dirty="0"/>
+              <a:t> </a:t>
+            </a:r>
+            <a:r>
+              <a:rPr lang="ru-RU" sz="1800" dirty="0" err="1"/>
+              <a:t>ограничений.</a:t>
+            </a:r>
+            <a:r>
+              <a:rPr lang="ru-RU" sz="1800" b="1" dirty="0" err="1"/>
+              <a:t>Серверная</a:t>
+            </a:r>
+            <a:r>
+              <a:rPr lang="ru-RU" sz="1800" b="1" dirty="0"/>
+              <a:t> безопасность:</a:t>
+            </a:r>
+            <a:r>
+              <a:rPr lang="ru-RU" sz="1800" dirty="0"/>
+              <a:t> Защита базы данных, </a:t>
+            </a:r>
+            <a:r>
+              <a:rPr lang="ru-RU" sz="1800" dirty="0" err="1"/>
+              <a:t>хэширование</a:t>
+            </a:r>
+            <a:r>
+              <a:rPr lang="ru-RU" sz="1800" dirty="0"/>
+              <a:t> паролей, проверка </a:t>
+            </a:r>
+            <a:r>
+              <a:rPr lang="ru-RU" sz="1800" dirty="0" err="1"/>
+              <a:t>токенов</a:t>
+            </a:r>
+            <a:r>
+              <a:rPr lang="ru-RU" sz="1800" dirty="0"/>
+              <a:t> авторизации и фильтрация спама.</a:t>
+            </a:r>
+            <a:endParaRPr lang="ru-RU" sz="2600" b="1" dirty="0"/>
           </a:p>
         </p:txBody>
       </p:sp>
     </p:spTree>
     <p:extLst>
       <p:ext uri="{BB962C8B-B14F-4D97-AF65-F5344CB8AC3E}">
-        <p14:creationId xmlns:p14="http://schemas.microsoft.com/office/powerpoint/2010/main" val="2068893312"/>
+        <p14:creationId xmlns:p14="http://schemas.microsoft.com/office/powerpoint/2010/main" val="2380565712"/>
       </p:ext>
     </p:extLst>
   </p:cSld>
